--- a/public/documents/countries/maroc.pptx
+++ b/public/documents/countries/maroc.pptx
@@ -117,7 +117,7 @@
 </p:presentation>
 </file>
 
-<file path=ppt/charts/chart25.xml><?xml version="1.0" encoding="utf-8"?>
+<file path=ppt/charts/chart1.xml><?xml version="1.0" encoding="utf-8"?>
 <c:chartSpace xmlns:c="http://schemas.openxmlformats.org/drawingml/2006/chart" xmlns:a="http://schemas.openxmlformats.org/drawingml/2006/main" xmlns:r="http://schemas.openxmlformats.org/officeDocument/2006/relationships">
   <c:date1904 val="0"/>
   <c:roundedCorners val="1"/>
@@ -362,7 +362,7 @@
 </c:chartSpace>
 </file>
 
-<file path=ppt/charts/chart26.xml><?xml version="1.0" encoding="utf-8"?>
+<file path=ppt/charts/chart2.xml><?xml version="1.0" encoding="utf-8"?>
 <c:chartSpace xmlns:c="http://schemas.openxmlformats.org/drawingml/2006/chart" xmlns:a="http://schemas.openxmlformats.org/drawingml/2006/main" xmlns:r="http://schemas.openxmlformats.org/officeDocument/2006/relationships">
   <c:date1904 val="0"/>
   <c:roundedCorners val="1"/>
@@ -653,7 +653,7 @@
 </c:chartSpace>
 </file>
 
-<file path=ppt/charts/chart27.xml><?xml version="1.0" encoding="utf-8"?>
+<file path=ppt/charts/chart3.xml><?xml version="1.0" encoding="utf-8"?>
 <c:chartSpace xmlns:c="http://schemas.openxmlformats.org/drawingml/2006/chart" xmlns:a="http://schemas.openxmlformats.org/drawingml/2006/main" xmlns:r="http://schemas.openxmlformats.org/officeDocument/2006/relationships">
   <c:date1904 val="0"/>
   <c:roundedCorners val="1"/>
@@ -3343,7 +3343,7 @@
                 <a:ea typeface="Calibri" pitchFamily="34" charset="-122"/>
                 <a:cs typeface="Calibri" pitchFamily="34" charset="-120"/>
               </a:rPr>
-              <a:t>Analyse acrylamide (laboratoire Polymex, ISO 9001) et screening REACH / SVHC (SGS) disponibles sur demande, ainsi que le certificat SOHISCERT en cours de validité.</a:t>
+              <a:t>Analyse acrylamide (laboratoire Polymex, ISO 9001, teneur inférieure à 3,0 µg/g), screening REACH / SVHC (SGS) et certificat SOHISCERT valable jusqu'au 4 septembre 2027 : disponibles sur demande.</a:t>
             </a:r>
             <a:endParaRPr lang="en-US" sz="1100" dirty="0"/>
           </a:p>

--- a/public/documents/countries/maroc.pptx
+++ b/public/documents/countries/maroc.pptx
@@ -117,7 +117,7 @@
 </p:presentation>
 </file>
 
-<file path=ppt/charts/chart1.xml><?xml version="1.0" encoding="utf-8"?>
+<file path=ppt/charts/chart28.xml><?xml version="1.0" encoding="utf-8"?>
 <c:chartSpace xmlns:c="http://schemas.openxmlformats.org/drawingml/2006/chart" xmlns:a="http://schemas.openxmlformats.org/drawingml/2006/main" xmlns:r="http://schemas.openxmlformats.org/officeDocument/2006/relationships">
   <c:date1904 val="0"/>
   <c:roundedCorners val="1"/>
@@ -362,7 +362,7 @@
 </c:chartSpace>
 </file>
 
-<file path=ppt/charts/chart2.xml><?xml version="1.0" encoding="utf-8"?>
+<file path=ppt/charts/chart29.xml><?xml version="1.0" encoding="utf-8"?>
 <c:chartSpace xmlns:c="http://schemas.openxmlformats.org/drawingml/2006/chart" xmlns:a="http://schemas.openxmlformats.org/drawingml/2006/main" xmlns:r="http://schemas.openxmlformats.org/officeDocument/2006/relationships">
   <c:date1904 val="0"/>
   <c:roundedCorners val="1"/>
@@ -653,7 +653,7 @@
 </c:chartSpace>
 </file>
 
-<file path=ppt/charts/chart3.xml><?xml version="1.0" encoding="utf-8"?>
+<file path=ppt/charts/chart30.xml><?xml version="1.0" encoding="utf-8"?>
 <c:chartSpace xmlns:c="http://schemas.openxmlformats.org/drawingml/2006/chart" xmlns:a="http://schemas.openxmlformats.org/drawingml/2006/main" xmlns:r="http://schemas.openxmlformats.org/officeDocument/2006/relationships">
   <c:date1904 val="0"/>
   <c:roundedCorners val="1"/>
@@ -2633,6 +2633,13 @@
 <file path=ppt/slides/slide1.xml><?xml version="1.0" encoding="utf-8"?>
 <p:sld xmlns:a="http://schemas.openxmlformats.org/drawingml/2006/main" xmlns:r="http://schemas.openxmlformats.org/officeDocument/2006/relationships" xmlns:p="http://schemas.openxmlformats.org/presentationml/2006/main">
   <p:cSld name="Slide 1">
+    <p:bg>
+      <p:bgPr>
+        <a:solidFill>
+          <a:srgbClr val="0D0D0D"/>
+        </a:solidFill>
+      </p:bgPr>
+    </p:bg>
     <p:spTree>
       <p:nvGrpSpPr>
         <p:cNvPr id="1" name=""/>
@@ -2663,79 +2670,172 @@
         </p:blipFill>
         <p:spPr>
           <a:xfrm>
+            <a:off x="6272784" y="0"/>
+            <a:ext cx="5918911" cy="6858000"/>
+          </a:xfrm>
+          <a:prstGeom prst="rect">
+            <a:avLst/>
+          </a:prstGeom>
+        </p:spPr>
+      </p:pic>
+      <p:sp>
+        <p:nvSpPr>
+          <p:cNvPr id="3" name="Shape 0"/>
+          <p:cNvSpPr/>
+          <p:nvPr/>
+        </p:nvSpPr>
+        <p:spPr>
+          <a:xfrm>
             <a:off x="0" y="0"/>
-            <a:ext cx="12191695" cy="6858000"/>
+            <a:ext cx="6272784" cy="6858000"/>
+          </a:xfrm>
+          <a:prstGeom prst="rect">
+            <a:avLst/>
+          </a:prstGeom>
+          <a:solidFill>
+            <a:srgbClr val="0D0D0D"/>
+          </a:solidFill>
+          <a:ln/>
+        </p:spPr>
+      </p:sp>
+      <p:sp>
+        <p:nvSpPr>
+          <p:cNvPr id="4" name="Text 1"/>
+          <p:cNvSpPr txBox="1"/>
+          <p:nvPr/>
+        </p:nvSpPr>
+        <p:spPr>
+          <a:xfrm>
+            <a:off x="658368" y="566928"/>
+            <a:ext cx="4041648" cy="292608"/>
+          </a:xfrm>
+          <a:prstGeom prst="rect">
+            <a:avLst/>
+          </a:prstGeom>
+          <a:noFill/>
+          <a:ln/>
+        </p:spPr>
+        <p:txBody>
+          <a:bodyPr wrap="square" lIns="0" tIns="0" rIns="0" bIns="0" rtlCol="0" anchor="ctr"/>
+          <a:lstStyle/>
+          <a:p>
+            <a:pPr algn="l" indent="0" marL="0">
+              <a:buNone/>
+            </a:pPr>
+            <a:r>
+              <a:rPr lang="en-US" sz="1100" b="1" spc="80" kern="0" dirty="0">
+                <a:solidFill>
+                  <a:srgbClr val="8BC34A"/>
+                </a:solidFill>
+                <a:latin typeface="Calibri" pitchFamily="34" charset="0"/>
+                <a:ea typeface="Calibri" pitchFamily="34" charset="-122"/>
+                <a:cs typeface="Calibri" pitchFamily="34" charset="-120"/>
+              </a:rPr>
+              <a:t>GREEN SOLUTIONS GROUP</a:t>
+            </a:r>
+            <a:endParaRPr lang="en-US" sz="1100" dirty="0"/>
+          </a:p>
+        </p:txBody>
+      </p:sp>
+      <p:pic>
+        <p:nvPicPr>
+          <p:cNvPr id="5" name="Image 1" descr="C:\Users\Utilisateur\dev\green-solutions-web\public\images\logo-icon.png">    </p:cNvPr>
+          <p:cNvPicPr>
+            <a:picLocks noChangeAspect="1"/>
+          </p:cNvPicPr>
+          <p:nvPr/>
+        </p:nvPicPr>
+        <p:blipFill>
+          <a:blip r:embed="rId2"/>
+          <a:stretch>
+            <a:fillRect/>
+          </a:stretch>
+        </p:blipFill>
+        <p:spPr>
+          <a:xfrm>
+            <a:off x="5010912" y="457200"/>
+            <a:ext cx="603504" cy="603504"/>
           </a:xfrm>
           <a:prstGeom prst="rect">
             <a:avLst/>
           </a:prstGeom>
         </p:spPr>
       </p:pic>
-      <p:sp>
-        <p:nvSpPr>
-          <p:cNvPr id="3" name="Text 0"/>
-          <p:cNvSpPr txBox="1"/>
-          <p:nvPr/>
-        </p:nvSpPr>
-        <p:spPr>
-          <a:xfrm>
-            <a:off x="777240" y="1965960"/>
-            <a:ext cx="10058400" cy="320040"/>
-          </a:xfrm>
-          <a:prstGeom prst="rect">
-            <a:avLst/>
-          </a:prstGeom>
-          <a:noFill/>
-          <a:ln/>
-        </p:spPr>
-        <p:txBody>
-          <a:bodyPr wrap="square" lIns="0" tIns="0" rIns="0" bIns="0" rtlCol="0" anchor="ctr"/>
+      <p:pic>
+        <p:nvPicPr>
+          <p:cNvPr id="6" name="Image 2" descr="C:\Users\Utilisateur\dev\green-solutions-web\scripts\dossiers\drapeaux\maroc.png">    </p:cNvPr>
+          <p:cNvPicPr>
+            <a:picLocks noChangeAspect="1"/>
+          </p:cNvPicPr>
+          <p:nvPr/>
+        </p:nvPicPr>
+        <p:blipFill>
+          <a:blip r:embed="rId3"/>
+          <a:stretch>
+            <a:fillRect/>
+          </a:stretch>
+        </p:blipFill>
+        <p:spPr>
+          <a:xfrm>
+            <a:off x="3648456" y="1389888"/>
+            <a:ext cx="1965960" cy="1310640"/>
+          </a:xfrm>
+          <a:prstGeom prst="rect">
+            <a:avLst/>
+          </a:prstGeom>
+        </p:spPr>
+      </p:pic>
+      <p:sp>
+        <p:nvSpPr>
+          <p:cNvPr id="7" name="Shape 2"/>
+          <p:cNvSpPr/>
+          <p:nvPr/>
+        </p:nvSpPr>
+        <p:spPr>
+          <a:xfrm>
+            <a:off x="3648456" y="1389888"/>
+            <a:ext cx="1965960" cy="1310640"/>
+          </a:xfrm>
+          <a:prstGeom prst="rect">
+            <a:avLst/>
+          </a:prstGeom>
+          <a:ln w="9525">
+            <a:solidFill>
+              <a:srgbClr val="3A3A3A"/>
+            </a:solidFill>
+            <a:prstDash val="solid"/>
+          </a:ln>
+        </p:spPr>
+      </p:sp>
+      <p:sp>
+        <p:nvSpPr>
+          <p:cNvPr id="8" name="Text 3"/>
+          <p:cNvSpPr txBox="1"/>
+          <p:nvPr/>
+        </p:nvSpPr>
+        <p:spPr>
+          <a:xfrm>
+            <a:off x="658368" y="1298448"/>
+            <a:ext cx="2761488" cy="1234440"/>
+          </a:xfrm>
+          <a:prstGeom prst="rect">
+            <a:avLst/>
+          </a:prstGeom>
+          <a:noFill/>
+          <a:ln/>
+        </p:spPr>
+        <p:txBody>
+          <a:bodyPr wrap="square" lIns="0" tIns="0" rIns="0" bIns="0" rtlCol="0" anchor="t"/>
           <a:lstStyle/>
           <a:p>
             <a:pPr algn="l" indent="0" marL="0">
-              <a:buNone/>
-            </a:pPr>
-            <a:r>
-              <a:rPr lang="en-US" sz="1300" b="1" spc="250" kern="0" dirty="0">
-                <a:solidFill>
-                  <a:srgbClr val="E3B23C"/>
-                </a:solidFill>
-                <a:latin typeface="Calibri" pitchFamily="34" charset="0"/>
-                <a:ea typeface="Calibri" pitchFamily="34" charset="-122"/>
-                <a:cs typeface="Calibri" pitchFamily="34" charset="-120"/>
-              </a:rPr>
-              <a:t>DOSSIER DE MARCHÉ</a:t>
-            </a:r>
-            <a:endParaRPr lang="en-US" sz="1300" dirty="0"/>
-          </a:p>
-        </p:txBody>
-      </p:sp>
-      <p:sp>
-        <p:nvSpPr>
-          <p:cNvPr id="4" name="Text 1"/>
-          <p:cNvSpPr txBox="1"/>
-          <p:nvPr/>
-        </p:nvSpPr>
-        <p:spPr>
-          <a:xfrm>
-            <a:off x="777240" y="2377440"/>
-            <a:ext cx="10241280" cy="1371600"/>
-          </a:xfrm>
-          <a:prstGeom prst="rect">
-            <a:avLst/>
-          </a:prstGeom>
-          <a:noFill/>
-          <a:ln/>
-        </p:spPr>
-        <p:txBody>
-          <a:bodyPr wrap="square" lIns="0" tIns="0" rIns="0" bIns="0" rtlCol="0" anchor="ctr"/>
-          <a:lstStyle/>
-          <a:p>
-            <a:pPr algn="l" indent="0" marL="0">
-              <a:buNone/>
-            </a:pPr>
-            <a:r>
-              <a:rPr lang="en-US" sz="4200" b="1" dirty="0">
+              <a:lnSpc>
+                <a:spcPct val="110000"/>
+              </a:lnSpc>
+              <a:buNone/>
+            </a:pPr>
+            <a:r>
+              <a:rPr lang="en-US" sz="2800" b="1" dirty="0">
                 <a:solidFill>
                   <a:srgbClr val="FFFFFF"/>
                 </a:solidFill>
@@ -2743,22 +2843,42 @@
                 <a:ea typeface="Cambria" pitchFamily="34" charset="-122"/>
                 <a:cs typeface="Cambria" pitchFamily="34" charset="-120"/>
               </a:rPr>
-              <a:t>Maroc</a:t>
-            </a:r>
-            <a:endParaRPr lang="en-US" sz="4200" dirty="0"/>
-          </a:p>
-        </p:txBody>
-      </p:sp>
-      <p:sp>
-        <p:nvSpPr>
-          <p:cNvPr id="5" name="Text 2"/>
-          <p:cNvSpPr txBox="1"/>
-          <p:nvPr/>
-        </p:nvSpPr>
-        <p:spPr>
-          <a:xfrm>
-            <a:off x="777240" y="3840480"/>
-            <a:ext cx="8686800" cy="822960"/>
+              <a:t>ROYAUME DU MAROC</a:t>
+            </a:r>
+            <a:endParaRPr lang="en-US" sz="2800" dirty="0"/>
+          </a:p>
+        </p:txBody>
+      </p:sp>
+      <p:sp>
+        <p:nvSpPr>
+          <p:cNvPr id="9" name="Shape 4"/>
+          <p:cNvSpPr/>
+          <p:nvPr/>
+        </p:nvSpPr>
+        <p:spPr>
+          <a:xfrm>
+            <a:off x="658368" y="2889504"/>
+            <a:ext cx="2788920" cy="45720"/>
+          </a:xfrm>
+          <a:prstGeom prst="rect">
+            <a:avLst/>
+          </a:prstGeom>
+          <a:solidFill>
+            <a:srgbClr val="E3B23C"/>
+          </a:solidFill>
+          <a:ln/>
+        </p:spPr>
+      </p:sp>
+      <p:sp>
+        <p:nvSpPr>
+          <p:cNvPr id="10" name="Text 5"/>
+          <p:cNvSpPr txBox="1"/>
+          <p:nvPr/>
+        </p:nvSpPr>
+        <p:spPr>
+          <a:xfrm>
+            <a:off x="658368" y="3163824"/>
+            <a:ext cx="4956048" cy="384048"/>
           </a:xfrm>
           <a:prstGeom prst="rect">
             <a:avLst/>
@@ -2768,20 +2888,57 @@
         </p:spPr>
         <p:txBody>
           <a:bodyPr wrap="square" lIns="0" tIns="0" rIns="0" bIns="0" rtlCol="0" anchor="ctr"/>
+          <a:lstStyle/>
+          <a:p>
+            <a:pPr algn="l" indent="0" marL="0">
+              <a:buNone/>
+            </a:pPr>
+            <a:r>
+              <a:rPr lang="en-US" sz="1600" b="1" dirty="0">
+                <a:solidFill>
+                  <a:srgbClr val="E3B23C"/>
+                </a:solidFill>
+                <a:latin typeface="Cambria" pitchFamily="34" charset="0"/>
+                <a:ea typeface="Cambria" pitchFamily="34" charset="-122"/>
+                <a:cs typeface="Cambria" pitchFamily="34" charset="-120"/>
+              </a:rPr>
+              <a:t>Rabat · 2026</a:t>
+            </a:r>
+            <a:endParaRPr lang="en-US" sz="1600" dirty="0"/>
+          </a:p>
+        </p:txBody>
+      </p:sp>
+      <p:sp>
+        <p:nvSpPr>
+          <p:cNvPr id="11" name="Text 6"/>
+          <p:cNvSpPr txBox="1"/>
+          <p:nvPr/>
+        </p:nvSpPr>
+        <p:spPr>
+          <a:xfrm>
+            <a:off x="658368" y="3767328"/>
+            <a:ext cx="4956048" cy="914400"/>
+          </a:xfrm>
+          <a:prstGeom prst="rect">
+            <a:avLst/>
+          </a:prstGeom>
+          <a:noFill/>
+          <a:ln/>
+        </p:spPr>
+        <p:txBody>
+          <a:bodyPr wrap="square" lIns="0" tIns="0" rIns="0" bIns="0" rtlCol="0" anchor="t"/>
           <a:lstStyle/>
           <a:p>
             <a:pPr algn="l" indent="0" marL="0">
               <a:lnSpc>
-                <a:spcPct val="125000"/>
+                <a:spcPct val="128000"/>
               </a:lnSpc>
               <a:buNone/>
             </a:pPr>
             <a:r>
-              <a:rPr lang="en-US" sz="1600" dirty="0">
-                <a:solidFill>
-                  <a:srgbClr val="FFFFFF">
-                    <a:alpha val="88000"/>
-                  </a:srgbClr>
+              <a:rPr lang="en-US" sz="1450" dirty="0">
+                <a:solidFill>
+                  <a:srgbClr val="FFFFFF"/>
                 </a:solidFill>
                 <a:latin typeface="Calibri" pitchFamily="34" charset="0"/>
                 <a:ea typeface="Calibri" pitchFamily="34" charset="-122"/>
@@ -2789,21 +2946,19 @@
               </a:rPr>
               <a:t>Agrumes, maraîchage et oléiculture sous contrainte hydrique durable.</a:t>
             </a:r>
-            <a:endParaRPr lang="en-US" sz="1600" dirty="0"/>
+            <a:endParaRPr lang="en-US" sz="1450" dirty="0"/>
           </a:p>
           <a:p>
             <a:pPr algn="l" indent="0" marL="0">
               <a:lnSpc>
-                <a:spcPct val="125000"/>
+                <a:spcPct val="128000"/>
               </a:lnSpc>
               <a:buNone/>
             </a:pPr>
             <a:r>
-              <a:rPr lang="en-US" sz="1600" dirty="0">
-                <a:solidFill>
-                  <a:srgbClr val="FFFFFF">
-                    <a:alpha val="88000"/>
-                  </a:srgbClr>
+              <a:rPr lang="en-US" sz="1450" dirty="0">
+                <a:solidFill>
+                  <a:srgbClr val="FFFFFF"/>
                 </a:solidFill>
                 <a:latin typeface="Calibri" pitchFamily="34" charset="0"/>
                 <a:ea typeface="Calibri" pitchFamily="34" charset="-122"/>
@@ -2811,20 +2966,20 @@
               </a:rPr>
               <a:t>Ce que l'hydro-rétention change pour une filière exportatrice.</a:t>
             </a:r>
-            <a:endParaRPr lang="en-US" sz="1600" dirty="0"/>
-          </a:p>
-        </p:txBody>
-      </p:sp>
-      <p:sp>
-        <p:nvSpPr>
-          <p:cNvPr id="6" name="Text 3"/>
-          <p:cNvSpPr txBox="1"/>
-          <p:nvPr/>
-        </p:nvSpPr>
-        <p:spPr>
-          <a:xfrm>
-            <a:off x="777240" y="5989320"/>
-            <a:ext cx="10058400" cy="320040"/>
+            <a:endParaRPr lang="en-US" sz="1450" dirty="0"/>
+          </a:p>
+        </p:txBody>
+      </p:sp>
+      <p:sp>
+        <p:nvSpPr>
+          <p:cNvPr id="12" name="Text 7"/>
+          <p:cNvSpPr txBox="1"/>
+          <p:nvPr/>
+        </p:nvSpPr>
+        <p:spPr>
+          <a:xfrm>
+            <a:off x="658368" y="4892040"/>
+            <a:ext cx="4956048" cy="347472"/>
           </a:xfrm>
           <a:prstGeom prst="rect">
             <a:avLst/>
@@ -2840,19 +2995,56 @@
               <a:buNone/>
             </a:pPr>
             <a:r>
-              <a:rPr lang="en-US" sz="1100" dirty="0">
-                <a:solidFill>
-                  <a:srgbClr val="FFFFFF">
-                    <a:alpha val="65000"/>
-                  </a:srgbClr>
-                </a:solidFill>
-                <a:latin typeface="Calibri" pitchFamily="34" charset="0"/>
-                <a:ea typeface="Calibri" pitchFamily="34" charset="-122"/>
-                <a:cs typeface="Calibri" pitchFamily="34" charset="-120"/>
-              </a:rPr>
-              <a:t>Green Solutions · contact@evergreen-ecosorb.com</a:t>
+              <a:rPr lang="en-US" sz="1100" b="1" dirty="0">
+                <a:solidFill>
+                  <a:srgbClr val="8BC34A"/>
+                </a:solidFill>
+                <a:latin typeface="Calibri" pitchFamily="34" charset="0"/>
+                <a:ea typeface="Calibri" pitchFamily="34" charset="-122"/>
+                <a:cs typeface="Calibri" pitchFamily="34" charset="-120"/>
+              </a:rPr>
+              <a:t>ECOSORB® · ECOFERT® · NAPEMA® · PAULOWNIA</a:t>
             </a:r>
             <a:endParaRPr lang="en-US" sz="1100" dirty="0"/>
+          </a:p>
+        </p:txBody>
+      </p:sp>
+      <p:sp>
+        <p:nvSpPr>
+          <p:cNvPr id="13" name="Text 8"/>
+          <p:cNvSpPr txBox="1"/>
+          <p:nvPr/>
+        </p:nvSpPr>
+        <p:spPr>
+          <a:xfrm>
+            <a:off x="658368" y="6053328"/>
+            <a:ext cx="4956048" cy="310896"/>
+          </a:xfrm>
+          <a:prstGeom prst="rect">
+            <a:avLst/>
+          </a:prstGeom>
+          <a:noFill/>
+          <a:ln/>
+        </p:spPr>
+        <p:txBody>
+          <a:bodyPr wrap="square" lIns="0" tIns="0" rIns="0" bIns="0" rtlCol="0" anchor="ctr"/>
+          <a:lstStyle/>
+          <a:p>
+            <a:pPr algn="l" indent="0" marL="0">
+              <a:buNone/>
+            </a:pPr>
+            <a:r>
+              <a:rPr lang="en-US" sz="850" dirty="0">
+                <a:solidFill>
+                  <a:srgbClr val="9A9A9A"/>
+                </a:solidFill>
+                <a:latin typeface="Calibri" pitchFamily="34" charset="0"/>
+                <a:ea typeface="Calibri" pitchFamily="34" charset="-122"/>
+                <a:cs typeface="Calibri" pitchFamily="34" charset="-120"/>
+              </a:rPr>
+              <a:t>Septembre 2026 · Document confidentiel · À l'usage exclusif du destinataire</a:t>
+            </a:r>
+            <a:endParaRPr lang="en-US" sz="850" dirty="0"/>
           </a:p>
         </p:txBody>
       </p:sp>

--- a/public/documents/countries/maroc.pptx
+++ b/public/documents/countries/maroc.pptx
@@ -117,7 +117,7 @@
 </p:presentation>
 </file>
 
-<file path=ppt/charts/chart28.xml><?xml version="1.0" encoding="utf-8"?>
+<file path=ppt/charts/chart34.xml><?xml version="1.0" encoding="utf-8"?>
 <c:chartSpace xmlns:c="http://schemas.openxmlformats.org/drawingml/2006/chart" xmlns:a="http://schemas.openxmlformats.org/drawingml/2006/main" xmlns:r="http://schemas.openxmlformats.org/officeDocument/2006/relationships">
   <c:date1904 val="0"/>
   <c:roundedCorners val="1"/>
@@ -362,7 +362,7 @@
 </c:chartSpace>
 </file>
 
-<file path=ppt/charts/chart29.xml><?xml version="1.0" encoding="utf-8"?>
+<file path=ppt/charts/chart35.xml><?xml version="1.0" encoding="utf-8"?>
 <c:chartSpace xmlns:c="http://schemas.openxmlformats.org/drawingml/2006/chart" xmlns:a="http://schemas.openxmlformats.org/drawingml/2006/main" xmlns:r="http://schemas.openxmlformats.org/officeDocument/2006/relationships">
   <c:date1904 val="0"/>
   <c:roundedCorners val="1"/>
@@ -653,7 +653,7 @@
 </c:chartSpace>
 </file>
 
-<file path=ppt/charts/chart30.xml><?xml version="1.0" encoding="utf-8"?>
+<file path=ppt/charts/chart36.xml><?xml version="1.0" encoding="utf-8"?>
 <c:chartSpace xmlns:c="http://schemas.openxmlformats.org/drawingml/2006/chart" xmlns:a="http://schemas.openxmlformats.org/drawingml/2006/main" xmlns:r="http://schemas.openxmlformats.org/officeDocument/2006/relationships">
   <c:date1904 val="0"/>
   <c:roundedCorners val="1"/>
@@ -3825,9 +3825,35 @@
           </a:p>
         </p:txBody>
       </p:sp>
-      <p:sp>
-        <p:nvSpPr>
-          <p:cNvPr id="6" name="Text 3"/>
+      <p:pic>
+        <p:nvPicPr>
+          <p:cNvPr id="6" name="Image 1" descr="C:\Users\Utilisateur\dev\green-solutions-web\scripts\dossiers\sceau-aim-clair.png">    </p:cNvPr>
+          <p:cNvPicPr>
+            <a:picLocks noChangeAspect="1"/>
+          </p:cNvPicPr>
+          <p:nvPr/>
+        </p:nvPicPr>
+        <p:blipFill>
+          <a:blip r:embed="rId2">
+            <a:alphaModFix amt="85000"/>
+          </a:blip>
+          <a:stretch>
+            <a:fillRect/>
+          </a:stretch>
+        </p:blipFill>
+        <p:spPr>
+          <a:xfrm>
+            <a:off x="10637215" y="5193792"/>
+            <a:ext cx="1051560" cy="1051560"/>
+          </a:xfrm>
+          <a:prstGeom prst="rect">
+            <a:avLst/>
+          </a:prstGeom>
+        </p:spPr>
+      </p:pic>
+      <p:sp>
+        <p:nvSpPr>
+          <p:cNvPr id="7" name="Text 3"/>
           <p:cNvSpPr txBox="1"/>
           <p:nvPr/>
         </p:nvSpPr>
@@ -3868,7 +3894,7 @@
       </p:sp>
       <p:sp>
         <p:nvSpPr>
-          <p:cNvPr id="7" name="Text 4"/>
+          <p:cNvPr id="8" name="Text 4"/>
           <p:cNvSpPr txBox="1"/>
           <p:nvPr/>
         </p:nvSpPr>

--- a/public/documents/countries/maroc.pptx
+++ b/public/documents/countries/maroc.pptx
@@ -16,9 +16,16 @@
     <p:sldId id="264" r:id="rId10"/>
     <p:sldId id="265" r:id="rId11"/>
     <p:sldId id="266" r:id="rId12"/>
+    <p:sldId id="267" r:id="rId13"/>
+    <p:sldId id="268" r:id="rId14"/>
+    <p:sldId id="269" r:id="rId15"/>
+    <p:sldId id="270" r:id="rId16"/>
+    <p:sldId id="271" r:id="rId17"/>
+    <p:sldId id="272" r:id="rId18"/>
+    <p:sldId id="273" r:id="rId19"/>
   </p:sldIdLst>
   <p:notesMasterIdLst>
-    <p:notesMasterId r:id="rId13"/>
+    <p:notesMasterId r:id="rId20"/>
   </p:notesMasterIdLst>
   <p:sldSz cx="12192000" cy="6858000"/>
   <p:notesSz cx="6858000" cy="12192000"/>
@@ -117,7 +124,7 @@
 </p:presentation>
 </file>
 
-<file path=ppt/charts/chart34.xml><?xml version="1.0" encoding="utf-8"?>
+<file path=ppt/charts/chart45.xml><?xml version="1.0" encoding="utf-8"?>
 <c:chartSpace xmlns:c="http://schemas.openxmlformats.org/drawingml/2006/chart" xmlns:a="http://schemas.openxmlformats.org/drawingml/2006/main" xmlns:r="http://schemas.openxmlformats.org/officeDocument/2006/relationships">
   <c:date1904 val="0"/>
   <c:roundedCorners val="1"/>
@@ -362,7 +369,7 @@
 </c:chartSpace>
 </file>
 
-<file path=ppt/charts/chart35.xml><?xml version="1.0" encoding="utf-8"?>
+<file path=ppt/charts/chart46.xml><?xml version="1.0" encoding="utf-8"?>
 <c:chartSpace xmlns:c="http://schemas.openxmlformats.org/drawingml/2006/chart" xmlns:a="http://schemas.openxmlformats.org/drawingml/2006/main" xmlns:r="http://schemas.openxmlformats.org/officeDocument/2006/relationships">
   <c:date1904 val="0"/>
   <c:roundedCorners val="1"/>
@@ -653,7 +660,372 @@
 </c:chartSpace>
 </file>
 
-<file path=ppt/charts/chart36.xml><?xml version="1.0" encoding="utf-8"?>
+<file path=ppt/charts/chart47.xml><?xml version="1.0" encoding="utf-8"?>
+<c:chartSpace xmlns:c="http://schemas.openxmlformats.org/drawingml/2006/chart" xmlns:a="http://schemas.openxmlformats.org/drawingml/2006/main" xmlns:r="http://schemas.openxmlformats.org/officeDocument/2006/relationships">
+  <c:date1904 val="0"/>
+  <c:roundedCorners val="1"/>
+  <c:chart>
+    <c:autoTitleDeleted val="1"/>
+    <c:plotArea>
+      <c:layout/>
+      <c:barChart>
+        <c:barDir val="col"/>
+        <c:grouping val="clustered"/>
+        <c:varyColors val="0"/>
+        <c:ser>
+          <c:idx val="0"/>
+          <c:order val="0"/>
+          <c:tx>
+            <c:strRef>
+              <c:f>Sheet1!$B$1</c:f>
+              <c:strCache>
+                <c:ptCount val="1"/>
+                <c:pt idx="0">
+                  <c:v>Bas de fourchette (%)</c:v>
+                </c:pt>
+              </c:strCache>
+            </c:strRef>
+          </c:tx>
+          <c:spPr>
+            <a:solidFill>
+              <a:srgbClr val="1F5C3A"/>
+            </a:solidFill>
+            <a:effectLst/>
+          </c:spPr>
+          <c:invertIfNegative val="0"/>
+          <c:dLbls>
+            <c:numFmt formatCode="[$-40C]0&quot;%&quot;" sourceLinked="0"/>
+            <c:txPr>
+              <a:bodyPr/>
+              <a:lstStyle/>
+              <a:p>
+                <a:pPr>
+                  <a:defRPr b="0" i="0" strike="noStrike" sz="1100" u="none">
+                    <a:solidFill>
+                      <a:srgbClr val="123324"/>
+                    </a:solidFill>
+                    <a:latin typeface="Calibri"/>
+                  </a:defRPr>
+                </a:pPr>
+              </a:p>
+            </c:txPr>
+            <c:showLegendKey val="0"/>
+            <c:showVal val="1"/>
+            <c:showCatName val="0"/>
+            <c:showSerName val="0"/>
+            <c:showPercent val="0"/>
+            <c:showBubbleSize val="0"/>
+            <c:showLeaderLines val="0"/>
+          </c:dLbls>
+          <c:cat>
+            <c:multiLvlStrRef>
+              <c:f>Sheet1!$A$2:$A$6</c:f>
+              <c:multiLvlStrCache>
+                <c:ptCount val="5"/>
+                <c:lvl>
+                  <c:pt idx="0">
+                    <c:v>Tomates</c:v>
+                  </c:pt>
+                  <c:pt idx="1">
+                    <c:v>Agrumes</c:v>
+                  </c:pt>
+                  <c:pt idx="2">
+                    <c:v>Olives</c:v>
+                  </c:pt>
+                  <c:pt idx="3">
+                    <c:v>Fraises</c:v>
+                  </c:pt>
+                  <c:pt idx="4">
+                    <c:v>Avocats</c:v>
+                  </c:pt>
+                </c:lvl>
+              </c:multiLvlStrCache>
+            </c:multiLvlStrRef>
+          </c:cat>
+          <c:val>
+            <c:numRef>
+              <c:f>Sheet1!$B$2:$B$6</c:f>
+              <c:numCache>
+                <c:formatCode>General</c:formatCode>
+                <c:ptCount val="5"/>
+                <c:pt idx="0">
+                  <c:v>30</c:v>
+                </c:pt>
+                <c:pt idx="1">
+                  <c:v>20</c:v>
+                </c:pt>
+                <c:pt idx="2">
+                  <c:v>20</c:v>
+                </c:pt>
+                <c:pt idx="3">
+                  <c:v>20</c:v>
+                </c:pt>
+                <c:pt idx="4">
+                  <c:v>15</c:v>
+                </c:pt>
+              </c:numCache>
+            </c:numRef>
+          </c:val>
+        </c:ser>
+        <c:ser>
+          <c:idx val="1"/>
+          <c:order val="1"/>
+          <c:tx>
+            <c:strRef>
+              <c:f>Sheet1!$C$1</c:f>
+              <c:strCache>
+                <c:ptCount val="1"/>
+                <c:pt idx="0">
+                  <c:v>Haut de fourchette (%)</c:v>
+                </c:pt>
+              </c:strCache>
+            </c:strRef>
+          </c:tx>
+          <c:spPr>
+            <a:solidFill>
+              <a:srgbClr val="E3B23C"/>
+            </a:solidFill>
+            <a:effectLst/>
+          </c:spPr>
+          <c:invertIfNegative val="0"/>
+          <c:dLbls>
+            <c:numFmt formatCode="[$-40C]0&quot;%&quot;" sourceLinked="0"/>
+            <c:txPr>
+              <a:bodyPr/>
+              <a:lstStyle/>
+              <a:p>
+                <a:pPr>
+                  <a:defRPr b="0" i="0" strike="noStrike" sz="1100" u="none">
+                    <a:solidFill>
+                      <a:srgbClr val="123324"/>
+                    </a:solidFill>
+                    <a:latin typeface="Calibri"/>
+                  </a:defRPr>
+                </a:pPr>
+              </a:p>
+            </c:txPr>
+            <c:showLegendKey val="0"/>
+            <c:showVal val="1"/>
+            <c:showCatName val="0"/>
+            <c:showSerName val="0"/>
+            <c:showPercent val="0"/>
+            <c:showBubbleSize val="0"/>
+            <c:showLeaderLines val="0"/>
+          </c:dLbls>
+          <c:cat>
+            <c:multiLvlStrRef>
+              <c:f>Sheet1!$A$2:$A$6</c:f>
+              <c:multiLvlStrCache>
+                <c:ptCount val="5"/>
+                <c:lvl>
+                  <c:pt idx="0">
+                    <c:v>Tomates</c:v>
+                  </c:pt>
+                  <c:pt idx="1">
+                    <c:v>Agrumes</c:v>
+                  </c:pt>
+                  <c:pt idx="2">
+                    <c:v>Olives</c:v>
+                  </c:pt>
+                  <c:pt idx="3">
+                    <c:v>Fraises</c:v>
+                  </c:pt>
+                  <c:pt idx="4">
+                    <c:v>Avocats</c:v>
+                  </c:pt>
+                </c:lvl>
+              </c:multiLvlStrCache>
+            </c:multiLvlStrRef>
+          </c:cat>
+          <c:val>
+            <c:numRef>
+              <c:f>Sheet1!$C$2:$C$6</c:f>
+              <c:numCache>
+                <c:formatCode>General</c:formatCode>
+                <c:ptCount val="5"/>
+                <c:pt idx="0">
+                  <c:v>50</c:v>
+                </c:pt>
+                <c:pt idx="1">
+                  <c:v>40</c:v>
+                </c:pt>
+                <c:pt idx="2">
+                  <c:v>40</c:v>
+                </c:pt>
+                <c:pt idx="3">
+                  <c:v>40</c:v>
+                </c:pt>
+                <c:pt idx="4">
+                  <c:v>25</c:v>
+                </c:pt>
+              </c:numCache>
+            </c:numRef>
+          </c:val>
+        </c:ser>
+        <c:dLbls>
+          <c:numFmt formatCode="[$-40C]0&quot;%&quot;" sourceLinked="0"/>
+          <c:txPr>
+            <a:bodyPr/>
+            <a:lstStyle/>
+            <a:p>
+              <a:pPr>
+                <a:defRPr b="0" i="0" strike="noStrike" sz="1100" u="none">
+                  <a:solidFill>
+                    <a:srgbClr val="123324"/>
+                  </a:solidFill>
+                  <a:latin typeface="Calibri"/>
+                </a:defRPr>
+              </a:pPr>
+            </a:p>
+          </c:txPr>
+          <c:showLegendKey val="0"/>
+          <c:showVal val="1"/>
+          <c:showCatName val="0"/>
+          <c:showSerName val="0"/>
+          <c:showPercent val="0"/>
+          <c:showBubbleSize val="0"/>
+          <c:showLeaderLines val="0"/>
+        </c:dLbls>
+        <c:gapWidth val="150"/>
+        <c:overlap val="0"/>
+        <c:axId val="2094734554"/>
+        <c:axId val="2094734552"/>
+        <c:axId val="2094734556"/>
+      </c:barChart>
+      <c:catAx>
+        <c:axId val="2094734554"/>
+        <c:scaling>
+          <c:orientation val="minMax"/>
+        </c:scaling>
+        <c:delete val="0"/>
+        <c:axPos val="b"/>
+        <c:numFmt formatCode="General" sourceLinked="1"/>
+        <c:majorTickMark val="out"/>
+        <c:minorTickMark val="none"/>
+        <c:tickLblPos val="low"/>
+        <c:spPr>
+          <a:ln w="12700" cap="flat">
+            <a:solidFill>
+              <a:srgbClr val="888888"/>
+            </a:solidFill>
+            <a:prstDash val="solid"/>
+            <a:round/>
+          </a:ln>
+        </c:spPr>
+        <c:txPr>
+          <a:bodyPr/>
+          <a:lstStyle/>
+          <a:p>
+            <a:pPr>
+              <a:defRPr sz="1100" b="0" i="0" u="none" strike="noStrike">
+                <a:solidFill>
+                  <a:srgbClr val="6B7C72"/>
+                </a:solidFill>
+                <a:latin typeface="Calibri"/>
+              </a:defRPr>
+            </a:pPr>
+            <a:endParaRPr lang="en-US"/>
+          </a:p>
+        </c:txPr>
+        <c:crossAx val="2094734552"/>
+        <c:crosses val="autoZero"/>
+        <c:auto val="1"/>
+        <c:lblAlgn val="ctr"/>
+        <c:noMultiLvlLbl val="1"/>
+      </c:catAx>
+      <c:valAx>
+        <c:axId val="2094734552"/>
+        <c:scaling>
+          <c:orientation val="minMax"/>
+          <c:min val="0"/>
+        </c:scaling>
+        <c:delete val="0"/>
+        <c:axPos val="l"/>
+        <c:majorGridlines>
+          <c:spPr>
+            <a:ln w="9525" cap="flat">
+              <a:solidFill>
+                <a:srgbClr val="DCE4DA"/>
+              </a:solidFill>
+              <a:prstDash val="solid"/>
+              <a:round/>
+            </a:ln>
+          </c:spPr>
+        </c:majorGridlines>
+        <c:numFmt formatCode="General" sourceLinked="0"/>
+        <c:majorTickMark val="out"/>
+        <c:minorTickMark val="none"/>
+        <c:tickLblPos val="nextTo"/>
+        <c:spPr>
+          <a:ln w="12700" cap="flat">
+            <a:solidFill>
+              <a:srgbClr val="888888"/>
+            </a:solidFill>
+            <a:prstDash val="solid"/>
+            <a:round/>
+          </a:ln>
+        </c:spPr>
+        <c:txPr>
+          <a:bodyPr/>
+          <a:lstStyle/>
+          <a:p>
+            <a:pPr>
+              <a:defRPr sz="1100" b="0" i="0" u="none" strike="noStrike">
+                <a:solidFill>
+                  <a:srgbClr val="6B7C72"/>
+                </a:solidFill>
+                <a:latin typeface="Calibri"/>
+              </a:defRPr>
+            </a:pPr>
+            <a:endParaRPr lang="en-US"/>
+          </a:p>
+        </c:txPr>
+        <c:crossAx val="2094734554"/>
+        <c:crosses val="autoZero"/>
+        <c:crossBetween val="between"/>
+      </c:valAx>
+      <c:spPr>
+        <a:noFill/>
+        <a:ln>
+          <a:noFill/>
+        </a:ln>
+        <a:effectLst/>
+      </c:spPr>
+    </c:plotArea>
+    <c:legend>
+      <c:legendPos val="b"/>
+      <c:overlay val="0"/>
+      <c:txPr>
+        <a:bodyPr/>
+        <a:lstStyle/>
+        <a:p>
+          <a:pPr>
+            <a:defRPr sz="1100">
+              <a:latin typeface="Calibri"/>
+              <a:cs typeface="Calibri"/>
+            </a:defRPr>
+          </a:pPr>
+          <a:endParaRPr lang="en-US"/>
+        </a:p>
+      </c:txPr>
+    </c:legend>
+    <c:plotVisOnly val="1"/>
+    <c:dispBlanksAs val="span"/>
+  </c:chart>
+  <c:spPr>
+    <a:noFill/>
+    <a:ln>
+      <a:noFill/>
+    </a:ln>
+    <a:effectLst/>
+  </c:spPr>
+  <c:externalData r:id="rId1">
+    <c:autoUpdate val="0"/>
+  </c:externalData>
+</c:chartSpace>
+</file>
+
+<file path=ppt/charts/chart48.xml><?xml version="1.0" encoding="utf-8"?>
 <c:chartSpace xmlns:c="http://schemas.openxmlformats.org/drawingml/2006/chart" xmlns:a="http://schemas.openxmlformats.org/drawingml/2006/main" xmlns:r="http://schemas.openxmlformats.org/officeDocument/2006/relationships">
   <c:date1904 val="0"/>
   <c:roundedCorners val="1"/>
@@ -1601,6 +1973,622 @@
             <a:fld id="{F7021451-1387-4CA6-816F-3879F97B5CBC}" type="slidenum">
               <a:rPr lang="en-US"/>
               <a:t>11</a:t>
+            </a:fld>
+            <a:endParaRPr lang="en-US"/>
+          </a:p>
+        </p:txBody>
+      </p:sp>
+    </p:spTree>
+    <p:extLst>
+      <p:ext uri="{BB962C8B-B14F-4D97-AF65-F5344CB8AC3E}">
+        <p14:creationId xmlns:p14="http://schemas.microsoft.com/office/powerpoint/2010/main" val="1024086991"/>
+      </p:ext>
+    </p:extLst>
+  </p:cSld>
+  <p:clrMapOvr>
+    <a:masterClrMapping/>
+  </p:clrMapOvr>
+</p:notes>
+</file>
+
+<file path=ppt/notesSlides/notesSlide12.xml><?xml version="1.0" encoding="utf-8"?>
+<p:notes xmlns:a="http://schemas.openxmlformats.org/drawingml/2006/main" xmlns:r="http://schemas.openxmlformats.org/officeDocument/2006/relationships" xmlns:p="http://schemas.openxmlformats.org/presentationml/2006/main">
+  <p:cSld>
+    <p:spTree>
+      <p:nvGrpSpPr>
+        <p:cNvPr id="1" name=""/>
+        <p:cNvGrpSpPr/>
+        <p:nvPr/>
+      </p:nvGrpSpPr>
+      <p:grpSpPr>
+        <a:xfrm>
+          <a:off x="0" y="0"/>
+          <a:ext cx="0" cy="0"/>
+          <a:chOff x="0" y="0"/>
+          <a:chExt cx="0" cy="0"/>
+        </a:xfrm>
+      </p:grpSpPr>
+      <p:sp>
+        <p:nvSpPr>
+          <p:cNvPr id="2" name="Slide Image Placeholder 1"/>
+          <p:cNvSpPr>
+            <a:spLocks noGrp="1" noRot="1" noChangeAspect="1"/>
+          </p:cNvSpPr>
+          <p:nvPr>
+            <p:ph type="sldImg"/>
+          </p:nvPr>
+        </p:nvSpPr>
+        <p:spPr/>
+      </p:sp>
+      <p:sp>
+        <p:nvSpPr>
+          <p:cNvPr id="3" name="Notes Placeholder 2"/>
+          <p:cNvSpPr>
+            <a:spLocks noGrp="1"/>
+          </p:cNvSpPr>
+          <p:nvPr>
+            <p:ph type="body" idx="1"/>
+          </p:nvPr>
+        </p:nvSpPr>
+        <p:spPr/>
+        <p:txBody>
+          <a:bodyPr/>
+          <a:lstStyle/>
+          <a:p>
+            <a:r>
+              <a:rPr lang="en-US" dirty="0"/>
+              <a:t/>
+            </a:r>
+            <a:endParaRPr lang="en-US" dirty="0"/>
+          </a:p>
+        </p:txBody>
+      </p:sp>
+      <p:sp>
+        <p:nvSpPr>
+          <p:cNvPr id="4" name="Slide Number Placeholder 3"/>
+          <p:cNvSpPr>
+            <a:spLocks noGrp="1"/>
+          </p:cNvSpPr>
+          <p:nvPr>
+            <p:ph type="sldNum" sz="quarter" idx="10"/>
+          </p:nvPr>
+        </p:nvSpPr>
+        <p:spPr/>
+        <p:txBody>
+          <a:bodyPr/>
+          <a:lstStyle/>
+          <a:p>
+            <a:fld id="{F7021451-1387-4CA6-816F-3879F97B5CBC}" type="slidenum">
+              <a:rPr lang="en-US"/>
+              <a:t>12</a:t>
+            </a:fld>
+            <a:endParaRPr lang="en-US"/>
+          </a:p>
+        </p:txBody>
+      </p:sp>
+    </p:spTree>
+    <p:extLst>
+      <p:ext uri="{BB962C8B-B14F-4D97-AF65-F5344CB8AC3E}">
+        <p14:creationId xmlns:p14="http://schemas.microsoft.com/office/powerpoint/2010/main" val="1024086991"/>
+      </p:ext>
+    </p:extLst>
+  </p:cSld>
+  <p:clrMapOvr>
+    <a:masterClrMapping/>
+  </p:clrMapOvr>
+</p:notes>
+</file>
+
+<file path=ppt/notesSlides/notesSlide13.xml><?xml version="1.0" encoding="utf-8"?>
+<p:notes xmlns:a="http://schemas.openxmlformats.org/drawingml/2006/main" xmlns:r="http://schemas.openxmlformats.org/officeDocument/2006/relationships" xmlns:p="http://schemas.openxmlformats.org/presentationml/2006/main">
+  <p:cSld>
+    <p:spTree>
+      <p:nvGrpSpPr>
+        <p:cNvPr id="1" name=""/>
+        <p:cNvGrpSpPr/>
+        <p:nvPr/>
+      </p:nvGrpSpPr>
+      <p:grpSpPr>
+        <a:xfrm>
+          <a:off x="0" y="0"/>
+          <a:ext cx="0" cy="0"/>
+          <a:chOff x="0" y="0"/>
+          <a:chExt cx="0" cy="0"/>
+        </a:xfrm>
+      </p:grpSpPr>
+      <p:sp>
+        <p:nvSpPr>
+          <p:cNvPr id="2" name="Slide Image Placeholder 1"/>
+          <p:cNvSpPr>
+            <a:spLocks noGrp="1" noRot="1" noChangeAspect="1"/>
+          </p:cNvSpPr>
+          <p:nvPr>
+            <p:ph type="sldImg"/>
+          </p:nvPr>
+        </p:nvSpPr>
+        <p:spPr/>
+      </p:sp>
+      <p:sp>
+        <p:nvSpPr>
+          <p:cNvPr id="3" name="Notes Placeholder 2"/>
+          <p:cNvSpPr>
+            <a:spLocks noGrp="1"/>
+          </p:cNvSpPr>
+          <p:nvPr>
+            <p:ph type="body" idx="1"/>
+          </p:nvPr>
+        </p:nvSpPr>
+        <p:spPr/>
+        <p:txBody>
+          <a:bodyPr/>
+          <a:lstStyle/>
+          <a:p>
+            <a:r>
+              <a:rPr lang="en-US" dirty="0"/>
+              <a:t/>
+            </a:r>
+            <a:endParaRPr lang="en-US" dirty="0"/>
+          </a:p>
+        </p:txBody>
+      </p:sp>
+      <p:sp>
+        <p:nvSpPr>
+          <p:cNvPr id="4" name="Slide Number Placeholder 3"/>
+          <p:cNvSpPr>
+            <a:spLocks noGrp="1"/>
+          </p:cNvSpPr>
+          <p:nvPr>
+            <p:ph type="sldNum" sz="quarter" idx="10"/>
+          </p:nvPr>
+        </p:nvSpPr>
+        <p:spPr/>
+        <p:txBody>
+          <a:bodyPr/>
+          <a:lstStyle/>
+          <a:p>
+            <a:fld id="{F7021451-1387-4CA6-816F-3879F97B5CBC}" type="slidenum">
+              <a:rPr lang="en-US"/>
+              <a:t>13</a:t>
+            </a:fld>
+            <a:endParaRPr lang="en-US"/>
+          </a:p>
+        </p:txBody>
+      </p:sp>
+    </p:spTree>
+    <p:extLst>
+      <p:ext uri="{BB962C8B-B14F-4D97-AF65-F5344CB8AC3E}">
+        <p14:creationId xmlns:p14="http://schemas.microsoft.com/office/powerpoint/2010/main" val="1024086991"/>
+      </p:ext>
+    </p:extLst>
+  </p:cSld>
+  <p:clrMapOvr>
+    <a:masterClrMapping/>
+  </p:clrMapOvr>
+</p:notes>
+</file>
+
+<file path=ppt/notesSlides/notesSlide14.xml><?xml version="1.0" encoding="utf-8"?>
+<p:notes xmlns:a="http://schemas.openxmlformats.org/drawingml/2006/main" xmlns:r="http://schemas.openxmlformats.org/officeDocument/2006/relationships" xmlns:p="http://schemas.openxmlformats.org/presentationml/2006/main">
+  <p:cSld>
+    <p:spTree>
+      <p:nvGrpSpPr>
+        <p:cNvPr id="1" name=""/>
+        <p:cNvGrpSpPr/>
+        <p:nvPr/>
+      </p:nvGrpSpPr>
+      <p:grpSpPr>
+        <a:xfrm>
+          <a:off x="0" y="0"/>
+          <a:ext cx="0" cy="0"/>
+          <a:chOff x="0" y="0"/>
+          <a:chExt cx="0" cy="0"/>
+        </a:xfrm>
+      </p:grpSpPr>
+      <p:sp>
+        <p:nvSpPr>
+          <p:cNvPr id="2" name="Slide Image Placeholder 1"/>
+          <p:cNvSpPr>
+            <a:spLocks noGrp="1" noRot="1" noChangeAspect="1"/>
+          </p:cNvSpPr>
+          <p:nvPr>
+            <p:ph type="sldImg"/>
+          </p:nvPr>
+        </p:nvSpPr>
+        <p:spPr/>
+      </p:sp>
+      <p:sp>
+        <p:nvSpPr>
+          <p:cNvPr id="3" name="Notes Placeholder 2"/>
+          <p:cNvSpPr>
+            <a:spLocks noGrp="1"/>
+          </p:cNvSpPr>
+          <p:nvPr>
+            <p:ph type="body" idx="1"/>
+          </p:nvPr>
+        </p:nvSpPr>
+        <p:spPr/>
+        <p:txBody>
+          <a:bodyPr/>
+          <a:lstStyle/>
+          <a:p>
+            <a:r>
+              <a:rPr lang="en-US" dirty="0"/>
+              <a:t/>
+            </a:r>
+            <a:endParaRPr lang="en-US" dirty="0"/>
+          </a:p>
+        </p:txBody>
+      </p:sp>
+      <p:sp>
+        <p:nvSpPr>
+          <p:cNvPr id="4" name="Slide Number Placeholder 3"/>
+          <p:cNvSpPr>
+            <a:spLocks noGrp="1"/>
+          </p:cNvSpPr>
+          <p:nvPr>
+            <p:ph type="sldNum" sz="quarter" idx="10"/>
+          </p:nvPr>
+        </p:nvSpPr>
+        <p:spPr/>
+        <p:txBody>
+          <a:bodyPr/>
+          <a:lstStyle/>
+          <a:p>
+            <a:fld id="{F7021451-1387-4CA6-816F-3879F97B5CBC}" type="slidenum">
+              <a:rPr lang="en-US"/>
+              <a:t>14</a:t>
+            </a:fld>
+            <a:endParaRPr lang="en-US"/>
+          </a:p>
+        </p:txBody>
+      </p:sp>
+    </p:spTree>
+    <p:extLst>
+      <p:ext uri="{BB962C8B-B14F-4D97-AF65-F5344CB8AC3E}">
+        <p14:creationId xmlns:p14="http://schemas.microsoft.com/office/powerpoint/2010/main" val="1024086991"/>
+      </p:ext>
+    </p:extLst>
+  </p:cSld>
+  <p:clrMapOvr>
+    <a:masterClrMapping/>
+  </p:clrMapOvr>
+</p:notes>
+</file>
+
+<file path=ppt/notesSlides/notesSlide15.xml><?xml version="1.0" encoding="utf-8"?>
+<p:notes xmlns:a="http://schemas.openxmlformats.org/drawingml/2006/main" xmlns:r="http://schemas.openxmlformats.org/officeDocument/2006/relationships" xmlns:p="http://schemas.openxmlformats.org/presentationml/2006/main">
+  <p:cSld>
+    <p:spTree>
+      <p:nvGrpSpPr>
+        <p:cNvPr id="1" name=""/>
+        <p:cNvGrpSpPr/>
+        <p:nvPr/>
+      </p:nvGrpSpPr>
+      <p:grpSpPr>
+        <a:xfrm>
+          <a:off x="0" y="0"/>
+          <a:ext cx="0" cy="0"/>
+          <a:chOff x="0" y="0"/>
+          <a:chExt cx="0" cy="0"/>
+        </a:xfrm>
+      </p:grpSpPr>
+      <p:sp>
+        <p:nvSpPr>
+          <p:cNvPr id="2" name="Slide Image Placeholder 1"/>
+          <p:cNvSpPr>
+            <a:spLocks noGrp="1" noRot="1" noChangeAspect="1"/>
+          </p:cNvSpPr>
+          <p:nvPr>
+            <p:ph type="sldImg"/>
+          </p:nvPr>
+        </p:nvSpPr>
+        <p:spPr/>
+      </p:sp>
+      <p:sp>
+        <p:nvSpPr>
+          <p:cNvPr id="3" name="Notes Placeholder 2"/>
+          <p:cNvSpPr>
+            <a:spLocks noGrp="1"/>
+          </p:cNvSpPr>
+          <p:nvPr>
+            <p:ph type="body" idx="1"/>
+          </p:nvPr>
+        </p:nvSpPr>
+        <p:spPr/>
+        <p:txBody>
+          <a:bodyPr/>
+          <a:lstStyle/>
+          <a:p>
+            <a:r>
+              <a:rPr lang="en-US" dirty="0"/>
+              <a:t/>
+            </a:r>
+            <a:endParaRPr lang="en-US" dirty="0"/>
+          </a:p>
+        </p:txBody>
+      </p:sp>
+      <p:sp>
+        <p:nvSpPr>
+          <p:cNvPr id="4" name="Slide Number Placeholder 3"/>
+          <p:cNvSpPr>
+            <a:spLocks noGrp="1"/>
+          </p:cNvSpPr>
+          <p:nvPr>
+            <p:ph type="sldNum" sz="quarter" idx="10"/>
+          </p:nvPr>
+        </p:nvSpPr>
+        <p:spPr/>
+        <p:txBody>
+          <a:bodyPr/>
+          <a:lstStyle/>
+          <a:p>
+            <a:fld id="{F7021451-1387-4CA6-816F-3879F97B5CBC}" type="slidenum">
+              <a:rPr lang="en-US"/>
+              <a:t>15</a:t>
+            </a:fld>
+            <a:endParaRPr lang="en-US"/>
+          </a:p>
+        </p:txBody>
+      </p:sp>
+    </p:spTree>
+    <p:extLst>
+      <p:ext uri="{BB962C8B-B14F-4D97-AF65-F5344CB8AC3E}">
+        <p14:creationId xmlns:p14="http://schemas.microsoft.com/office/powerpoint/2010/main" val="1024086991"/>
+      </p:ext>
+    </p:extLst>
+  </p:cSld>
+  <p:clrMapOvr>
+    <a:masterClrMapping/>
+  </p:clrMapOvr>
+</p:notes>
+</file>
+
+<file path=ppt/notesSlides/notesSlide16.xml><?xml version="1.0" encoding="utf-8"?>
+<p:notes xmlns:a="http://schemas.openxmlformats.org/drawingml/2006/main" xmlns:r="http://schemas.openxmlformats.org/officeDocument/2006/relationships" xmlns:p="http://schemas.openxmlformats.org/presentationml/2006/main">
+  <p:cSld>
+    <p:spTree>
+      <p:nvGrpSpPr>
+        <p:cNvPr id="1" name=""/>
+        <p:cNvGrpSpPr/>
+        <p:nvPr/>
+      </p:nvGrpSpPr>
+      <p:grpSpPr>
+        <a:xfrm>
+          <a:off x="0" y="0"/>
+          <a:ext cx="0" cy="0"/>
+          <a:chOff x="0" y="0"/>
+          <a:chExt cx="0" cy="0"/>
+        </a:xfrm>
+      </p:grpSpPr>
+      <p:sp>
+        <p:nvSpPr>
+          <p:cNvPr id="2" name="Slide Image Placeholder 1"/>
+          <p:cNvSpPr>
+            <a:spLocks noGrp="1" noRot="1" noChangeAspect="1"/>
+          </p:cNvSpPr>
+          <p:nvPr>
+            <p:ph type="sldImg"/>
+          </p:nvPr>
+        </p:nvSpPr>
+        <p:spPr/>
+      </p:sp>
+      <p:sp>
+        <p:nvSpPr>
+          <p:cNvPr id="3" name="Notes Placeholder 2"/>
+          <p:cNvSpPr>
+            <a:spLocks noGrp="1"/>
+          </p:cNvSpPr>
+          <p:nvPr>
+            <p:ph type="body" idx="1"/>
+          </p:nvPr>
+        </p:nvSpPr>
+        <p:spPr/>
+        <p:txBody>
+          <a:bodyPr/>
+          <a:lstStyle/>
+          <a:p>
+            <a:r>
+              <a:rPr lang="en-US" dirty="0"/>
+              <a:t/>
+            </a:r>
+            <a:endParaRPr lang="en-US" dirty="0"/>
+          </a:p>
+        </p:txBody>
+      </p:sp>
+      <p:sp>
+        <p:nvSpPr>
+          <p:cNvPr id="4" name="Slide Number Placeholder 3"/>
+          <p:cNvSpPr>
+            <a:spLocks noGrp="1"/>
+          </p:cNvSpPr>
+          <p:nvPr>
+            <p:ph type="sldNum" sz="quarter" idx="10"/>
+          </p:nvPr>
+        </p:nvSpPr>
+        <p:spPr/>
+        <p:txBody>
+          <a:bodyPr/>
+          <a:lstStyle/>
+          <a:p>
+            <a:fld id="{F7021451-1387-4CA6-816F-3879F97B5CBC}" type="slidenum">
+              <a:rPr lang="en-US"/>
+              <a:t>16</a:t>
+            </a:fld>
+            <a:endParaRPr lang="en-US"/>
+          </a:p>
+        </p:txBody>
+      </p:sp>
+    </p:spTree>
+    <p:extLst>
+      <p:ext uri="{BB962C8B-B14F-4D97-AF65-F5344CB8AC3E}">
+        <p14:creationId xmlns:p14="http://schemas.microsoft.com/office/powerpoint/2010/main" val="1024086991"/>
+      </p:ext>
+    </p:extLst>
+  </p:cSld>
+  <p:clrMapOvr>
+    <a:masterClrMapping/>
+  </p:clrMapOvr>
+</p:notes>
+</file>
+
+<file path=ppt/notesSlides/notesSlide17.xml><?xml version="1.0" encoding="utf-8"?>
+<p:notes xmlns:a="http://schemas.openxmlformats.org/drawingml/2006/main" xmlns:r="http://schemas.openxmlformats.org/officeDocument/2006/relationships" xmlns:p="http://schemas.openxmlformats.org/presentationml/2006/main">
+  <p:cSld>
+    <p:spTree>
+      <p:nvGrpSpPr>
+        <p:cNvPr id="1" name=""/>
+        <p:cNvGrpSpPr/>
+        <p:nvPr/>
+      </p:nvGrpSpPr>
+      <p:grpSpPr>
+        <a:xfrm>
+          <a:off x="0" y="0"/>
+          <a:ext cx="0" cy="0"/>
+          <a:chOff x="0" y="0"/>
+          <a:chExt cx="0" cy="0"/>
+        </a:xfrm>
+      </p:grpSpPr>
+      <p:sp>
+        <p:nvSpPr>
+          <p:cNvPr id="2" name="Slide Image Placeholder 1"/>
+          <p:cNvSpPr>
+            <a:spLocks noGrp="1" noRot="1" noChangeAspect="1"/>
+          </p:cNvSpPr>
+          <p:nvPr>
+            <p:ph type="sldImg"/>
+          </p:nvPr>
+        </p:nvSpPr>
+        <p:spPr/>
+      </p:sp>
+      <p:sp>
+        <p:nvSpPr>
+          <p:cNvPr id="3" name="Notes Placeholder 2"/>
+          <p:cNvSpPr>
+            <a:spLocks noGrp="1"/>
+          </p:cNvSpPr>
+          <p:nvPr>
+            <p:ph type="body" idx="1"/>
+          </p:nvPr>
+        </p:nvSpPr>
+        <p:spPr/>
+        <p:txBody>
+          <a:bodyPr/>
+          <a:lstStyle/>
+          <a:p>
+            <a:r>
+              <a:rPr lang="en-US" dirty="0"/>
+              <a:t/>
+            </a:r>
+            <a:endParaRPr lang="en-US" dirty="0"/>
+          </a:p>
+        </p:txBody>
+      </p:sp>
+      <p:sp>
+        <p:nvSpPr>
+          <p:cNvPr id="4" name="Slide Number Placeholder 3"/>
+          <p:cNvSpPr>
+            <a:spLocks noGrp="1"/>
+          </p:cNvSpPr>
+          <p:nvPr>
+            <p:ph type="sldNum" sz="quarter" idx="10"/>
+          </p:nvPr>
+        </p:nvSpPr>
+        <p:spPr/>
+        <p:txBody>
+          <a:bodyPr/>
+          <a:lstStyle/>
+          <a:p>
+            <a:fld id="{F7021451-1387-4CA6-816F-3879F97B5CBC}" type="slidenum">
+              <a:rPr lang="en-US"/>
+              <a:t>17</a:t>
+            </a:fld>
+            <a:endParaRPr lang="en-US"/>
+          </a:p>
+        </p:txBody>
+      </p:sp>
+    </p:spTree>
+    <p:extLst>
+      <p:ext uri="{BB962C8B-B14F-4D97-AF65-F5344CB8AC3E}">
+        <p14:creationId xmlns:p14="http://schemas.microsoft.com/office/powerpoint/2010/main" val="1024086991"/>
+      </p:ext>
+    </p:extLst>
+  </p:cSld>
+  <p:clrMapOvr>
+    <a:masterClrMapping/>
+  </p:clrMapOvr>
+</p:notes>
+</file>
+
+<file path=ppt/notesSlides/notesSlide18.xml><?xml version="1.0" encoding="utf-8"?>
+<p:notes xmlns:a="http://schemas.openxmlformats.org/drawingml/2006/main" xmlns:r="http://schemas.openxmlformats.org/officeDocument/2006/relationships" xmlns:p="http://schemas.openxmlformats.org/presentationml/2006/main">
+  <p:cSld>
+    <p:spTree>
+      <p:nvGrpSpPr>
+        <p:cNvPr id="1" name=""/>
+        <p:cNvGrpSpPr/>
+        <p:nvPr/>
+      </p:nvGrpSpPr>
+      <p:grpSpPr>
+        <a:xfrm>
+          <a:off x="0" y="0"/>
+          <a:ext cx="0" cy="0"/>
+          <a:chOff x="0" y="0"/>
+          <a:chExt cx="0" cy="0"/>
+        </a:xfrm>
+      </p:grpSpPr>
+      <p:sp>
+        <p:nvSpPr>
+          <p:cNvPr id="2" name="Slide Image Placeholder 1"/>
+          <p:cNvSpPr>
+            <a:spLocks noGrp="1" noRot="1" noChangeAspect="1"/>
+          </p:cNvSpPr>
+          <p:nvPr>
+            <p:ph type="sldImg"/>
+          </p:nvPr>
+        </p:nvSpPr>
+        <p:spPr/>
+      </p:sp>
+      <p:sp>
+        <p:nvSpPr>
+          <p:cNvPr id="3" name="Notes Placeholder 2"/>
+          <p:cNvSpPr>
+            <a:spLocks noGrp="1"/>
+          </p:cNvSpPr>
+          <p:nvPr>
+            <p:ph type="body" idx="1"/>
+          </p:nvPr>
+        </p:nvSpPr>
+        <p:spPr/>
+        <p:txBody>
+          <a:bodyPr/>
+          <a:lstStyle/>
+          <a:p>
+            <a:r>
+              <a:rPr lang="en-US" dirty="0"/>
+              <a:t/>
+            </a:r>
+            <a:endParaRPr lang="en-US" dirty="0"/>
+          </a:p>
+        </p:txBody>
+      </p:sp>
+      <p:sp>
+        <p:nvSpPr>
+          <p:cNvPr id="4" name="Slide Number Placeholder 3"/>
+          <p:cNvSpPr>
+            <a:spLocks noGrp="1"/>
+          </p:cNvSpPr>
+          <p:nvPr>
+            <p:ph type="sldNum" sz="quarter" idx="10"/>
+          </p:nvPr>
+        </p:nvSpPr>
+        <p:spPr/>
+        <p:txBody>
+          <a:bodyPr/>
+          <a:lstStyle/>
+          <a:p>
+            <a:fld id="{F7021451-1387-4CA6-816F-3879F97B5CBC}" type="slidenum">
+              <a:rPr lang="en-US"/>
+              <a:t>18</a:t>
             </a:fld>
             <a:endParaRPr lang="en-US"/>
           </a:p>
@@ -3113,7 +4101,7 @@
                 <a:ea typeface="Calibri" pitchFamily="34" charset="-122"/>
                 <a:cs typeface="Calibri" pitchFamily="34" charset="-120"/>
               </a:rPr>
-              <a:t>CE QU'IL FAUT ANTICIPER</a:t>
+              <a:t>NOTRE RÉPONSE</a:t>
             </a:r>
             <a:endParaRPr lang="en-US" sz="1150" dirty="0"/>
           </a:p>
@@ -3152,7 +4140,7 @@
                 <a:ea typeface="Cambria" pitchFamily="34" charset="-122"/>
                 <a:cs typeface="Cambria" pitchFamily="34" charset="-120"/>
               </a:rPr>
-              <a:t>Risques identifiés et réponses</a:t>
+              <a:t>Deux technologies, deux contraintes différentes</a:t>
             </a:r>
             <a:endParaRPr lang="en-US" sz="3000" dirty="0"/>
           </a:p>
@@ -3191,7 +4179,7 @@
                 <a:ea typeface="Cambria" pitchFamily="34" charset="-122"/>
                 <a:cs typeface="Cambria" pitchFamily="34" charset="-120"/>
               </a:rPr>
-              <a:t>Risques</a:t>
+              <a:t>EVERGREEN® — retenir l'eau</a:t>
             </a:r>
             <a:endParaRPr lang="en-US" sz="1600" dirty="0"/>
           </a:p>
@@ -3237,7 +4225,7 @@
                 <a:ea typeface="Calibri" pitchFamily="34" charset="-122"/>
                 <a:cs typeface="Calibri" pitchFamily="34" charset="-120"/>
               </a:rPr>
-              <a:t>Variabilité interannuelle de la pluviométrie : une campagne humide masque l'intérêt du produit.</a:t>
+              <a:t>Hydro-rétenteur à base de potassium, placé dans la zone racinaire à la plantation ou à la reprise.</a:t>
             </a:r>
             <a:endParaRPr lang="en-US" sz="1350" dirty="0"/>
           </a:p>
@@ -3261,7 +4249,7 @@
                 <a:ea typeface="Calibri" pitchFamily="34" charset="-122"/>
                 <a:cs typeface="Calibri" pitchFamily="34" charset="-120"/>
               </a:rPr>
-              <a:t>Fragmentation du foncier : beaucoup de petites exploitations, décision d'achat dispersée.</a:t>
+              <a:t>Capte l'eau de pluie ou d'irrigation et la restitue à la plante au fur et à mesure, en supprimant le stress hydrique des phases critiques.</a:t>
             </a:r>
             <a:endParaRPr lang="en-US" sz="1350" dirty="0"/>
           </a:p>
@@ -3285,7 +4273,7 @@
                 <a:ea typeface="Calibri" pitchFamily="34" charset="-122"/>
                 <a:cs typeface="Calibri" pitchFamily="34" charset="-120"/>
               </a:rPr>
-              <a:t>Concurrence de solutions bas de gamme à base de sodium, qui ont laissé de mauvais souvenirs.</a:t>
+              <a:t>Capacité d'absorption de l'ordre de 300 fois son poids ; durée d'effet utile de 3 à 4 ans dans le sol.</a:t>
             </a:r>
             <a:endParaRPr lang="en-US" sz="1350" dirty="0"/>
           </a:p>
@@ -3309,7 +4297,7 @@
                 <a:ea typeface="Calibri" pitchFamily="34" charset="-122"/>
                 <a:cs typeface="Calibri" pitchFamily="34" charset="-120"/>
               </a:rPr>
-              <a:t>Trésorerie des exploitations après plusieurs campagnes déficitaires.</a:t>
+              <a:t>Se dégrade de 20 à 25 % par an, sans accumulation ni risque de surdosage.</a:t>
             </a:r>
             <a:endParaRPr lang="en-US" sz="1350" dirty="0"/>
           </a:p>
@@ -3348,7 +4336,7 @@
                 <a:ea typeface="Cambria" pitchFamily="34" charset="-122"/>
                 <a:cs typeface="Cambria" pitchFamily="34" charset="-120"/>
               </a:rPr>
-              <a:t>Réponses</a:t>
+              <a:t>ECOFERT® — nourrir sans épuiser</a:t>
             </a:r>
             <a:endParaRPr lang="en-US" sz="1600" dirty="0"/>
           </a:p>
@@ -3394,7 +4382,7 @@
                 <a:ea typeface="Calibri" pitchFamily="34" charset="-122"/>
                 <a:cs typeface="Calibri" pitchFamily="34" charset="-120"/>
               </a:rPr>
-              <a:t>Conduire l'essai sur un cycle complet avec parcelle témoin, pour objectiver le gain même en année favorable.</a:t>
+              <a:t>Fertilisant en microdoses d'acides aminés, azote, phosphore et potassium, issu de ressources renouvelables.</a:t>
             </a:r>
             <a:endParaRPr lang="en-US" sz="1350" dirty="0"/>
           </a:p>
@@ -3418,7 +4406,7 @@
                 <a:ea typeface="Calibri" pitchFamily="34" charset="-122"/>
                 <a:cs typeface="Calibri" pitchFamily="34" charset="-120"/>
               </a:rPr>
-              <a:t>Passer par les coopératives et les groupements, plutôt que par l'exploitation individuelle.</a:t>
+              <a:t>Non chélatant : il n'appauvrit pas le complexe argilo-humique et n'augmente ni la salinité ni la teneur en nitrates.</a:t>
             </a:r>
             <a:endParaRPr lang="en-US" sz="1350" dirty="0"/>
           </a:p>
@@ -3442,7 +4430,7 @@
                 <a:ea typeface="Calibri" pitchFamily="34" charset="-122"/>
                 <a:cs typeface="Calibri" pitchFamily="34" charset="-120"/>
               </a:rPr>
-              <a:t>Documenter la différence de formulation : potassium et non sodium, compatible cultures alimentaires.</a:t>
+              <a:t>Certifié SOHISCERT et EU Bio — condition d'accès aux cahiers des charges des acheteurs européens.</a:t>
             </a:r>
             <a:endParaRPr lang="en-US" sz="1350" dirty="0"/>
           </a:p>
@@ -3466,7 +4454,7 @@
                 <a:ea typeface="Calibri" pitchFamily="34" charset="-122"/>
                 <a:cs typeface="Calibri" pitchFamily="34" charset="-120"/>
               </a:rPr>
-              <a:t>Étaler l'engagement : la durée d'effet de 3 à 4 ans amortit le coût sur plusieurs campagnes.</a:t>
+              <a:t>1 à 4 flacons de 140 ml par hectare, compatible avec les équipements de fertirrigation existants.</a:t>
             </a:r>
             <a:endParaRPr lang="en-US" sz="1350" dirty="0"/>
           </a:p>
@@ -3535,7 +4523,7 @@
                 <a:ea typeface="Calibri" pitchFamily="34" charset="-122"/>
                 <a:cs typeface="Calibri" pitchFamily="34" charset="-120"/>
               </a:rPr>
-              <a:t>Analyse acrylamide (laboratoire Polymex, ISO 9001, teneur inférieure à 3,0 µg/g), screening REACH / SVHC (SGS) et certificat SOHISCERT valable jusqu'au 4 septembre 2027 : disponibles sur demande.</a:t>
+              <a:t>Les deux produits se vendent séparément mais ont été conçus pour se renforcer : l'hydro-rétenteur prolonge la disponibilité de l'eau, le fertilisant valorise cette eau disponible sans dégrader le sol.</a:t>
             </a:r>
             <a:endParaRPr lang="en-US" sz="1100" dirty="0"/>
           </a:p>
@@ -3634,6 +4622,4717 @@
 <file path=ppt/slides/slide11.xml><?xml version="1.0" encoding="utf-8"?>
 <p:sld xmlns:a="http://schemas.openxmlformats.org/drawingml/2006/main" xmlns:r="http://schemas.openxmlformats.org/officeDocument/2006/relationships" xmlns:p="http://schemas.openxmlformats.org/presentationml/2006/main">
   <p:cSld name="Slide 11">
+    <p:bg>
+      <p:bgPr>
+        <a:solidFill>
+          <a:srgbClr val="FBFAF6"/>
+        </a:solidFill>
+      </p:bgPr>
+    </p:bg>
+    <p:spTree>
+      <p:nvGrpSpPr>
+        <p:cNvPr id="1" name=""/>
+        <p:cNvGrpSpPr/>
+        <p:nvPr/>
+      </p:nvGrpSpPr>
+      <p:grpSpPr>
+        <a:xfrm>
+          <a:off x="0" y="0"/>
+          <a:ext cx="0" cy="0"/>
+          <a:chOff x="0" y="0"/>
+          <a:chExt cx="0" cy="0"/>
+        </a:xfrm>
+      </p:grpSpPr>
+      <p:sp>
+        <p:nvSpPr>
+          <p:cNvPr id="2" name="Text 0"/>
+          <p:cNvSpPr txBox="1"/>
+          <p:nvPr/>
+        </p:nvSpPr>
+        <p:spPr>
+          <a:xfrm>
+            <a:off x="594360" y="411480"/>
+            <a:ext cx="10515600" cy="274320"/>
+          </a:xfrm>
+          <a:prstGeom prst="rect">
+            <a:avLst/>
+          </a:prstGeom>
+          <a:noFill/>
+          <a:ln/>
+        </p:spPr>
+        <p:txBody>
+          <a:bodyPr wrap="square" lIns="0" tIns="0" rIns="0" bIns="0" rtlCol="0" anchor="ctr"/>
+          <a:lstStyle/>
+          <a:p>
+            <a:pPr algn="l" indent="0" marL="0">
+              <a:buNone/>
+            </a:pPr>
+            <a:r>
+              <a:rPr lang="en-US" sz="1150" b="1" spc="200" kern="0" dirty="0">
+                <a:solidFill>
+                  <a:srgbClr val="E3B23C"/>
+                </a:solidFill>
+                <a:latin typeface="Calibri" pitchFamily="34" charset="0"/>
+                <a:ea typeface="Calibri" pitchFamily="34" charset="-122"/>
+                <a:cs typeface="Calibri" pitchFamily="34" charset="-120"/>
+              </a:rPr>
+              <a:t>Le reste de la gamme</a:t>
+            </a:r>
+            <a:endParaRPr lang="en-US" sz="1150" dirty="0"/>
+          </a:p>
+        </p:txBody>
+      </p:sp>
+      <p:sp>
+        <p:nvSpPr>
+          <p:cNvPr id="3" name="Text 1"/>
+          <p:cNvSpPr txBox="1"/>
+          <p:nvPr/>
+        </p:nvSpPr>
+        <p:spPr>
+          <a:xfrm>
+            <a:off x="594360" y="731520"/>
+            <a:ext cx="10881360" cy="731520"/>
+          </a:xfrm>
+          <a:prstGeom prst="rect">
+            <a:avLst/>
+          </a:prstGeom>
+          <a:noFill/>
+          <a:ln/>
+        </p:spPr>
+        <p:txBody>
+          <a:bodyPr wrap="square" lIns="0" tIns="0" rIns="0" bIns="0" rtlCol="0" anchor="ctr"/>
+          <a:lstStyle/>
+          <a:p>
+            <a:pPr algn="l" indent="0" marL="0">
+              <a:buNone/>
+            </a:pPr>
+            <a:r>
+              <a:rPr lang="en-US" sz="3000" b="1" dirty="0">
+                <a:solidFill>
+                  <a:srgbClr val="123324"/>
+                </a:solidFill>
+                <a:latin typeface="Cambria" pitchFamily="34" charset="0"/>
+                <a:ea typeface="Cambria" pitchFamily="34" charset="-122"/>
+                <a:cs typeface="Cambria" pitchFamily="34" charset="-120"/>
+              </a:rPr>
+              <a:t>Protéger les cultures, fixer les sols</a:t>
+            </a:r>
+            <a:endParaRPr lang="en-US" sz="3000" dirty="0"/>
+          </a:p>
+        </p:txBody>
+      </p:sp>
+      <p:sp>
+        <p:nvSpPr>
+          <p:cNvPr id="4" name="Text 2"/>
+          <p:cNvSpPr txBox="1"/>
+          <p:nvPr/>
+        </p:nvSpPr>
+        <p:spPr>
+          <a:xfrm>
+            <a:off x="594360" y="1783080"/>
+            <a:ext cx="5227168" cy="411480"/>
+          </a:xfrm>
+          <a:prstGeom prst="rect">
+            <a:avLst/>
+          </a:prstGeom>
+          <a:noFill/>
+          <a:ln/>
+        </p:spPr>
+        <p:txBody>
+          <a:bodyPr wrap="square" lIns="0" tIns="0" rIns="0" bIns="0" rtlCol="0" anchor="ctr"/>
+          <a:lstStyle/>
+          <a:p>
+            <a:pPr algn="l" indent="0" marL="0">
+              <a:buNone/>
+            </a:pPr>
+            <a:r>
+              <a:rPr lang="en-US" sz="1600" b="1" dirty="0">
+                <a:solidFill>
+                  <a:srgbClr val="1F5C3A"/>
+                </a:solidFill>
+                <a:latin typeface="Cambria" pitchFamily="34" charset="0"/>
+                <a:ea typeface="Cambria" pitchFamily="34" charset="-122"/>
+                <a:cs typeface="Cambria" pitchFamily="34" charset="-120"/>
+              </a:rPr>
+              <a:t>NAPEMA® — protéger sans résidu</a:t>
+            </a:r>
+            <a:endParaRPr lang="en-US" sz="1600" dirty="0"/>
+          </a:p>
+        </p:txBody>
+      </p:sp>
+      <p:sp>
+        <p:nvSpPr>
+          <p:cNvPr id="5" name="Text 3"/>
+          <p:cNvSpPr txBox="1"/>
+          <p:nvPr/>
+        </p:nvSpPr>
+        <p:spPr>
+          <a:xfrm>
+            <a:off x="594360" y="2286000"/>
+            <a:ext cx="5227168" cy="2468880"/>
+          </a:xfrm>
+          <a:prstGeom prst="rect">
+            <a:avLst/>
+          </a:prstGeom>
+          <a:noFill/>
+          <a:ln/>
+        </p:spPr>
+        <p:txBody>
+          <a:bodyPr wrap="square" lIns="0" tIns="0" rIns="0" bIns="0" rtlCol="0" anchor="t"/>
+          <a:lstStyle/>
+          <a:p>
+            <a:pPr algn="l" marL="342900" indent="-342900">
+              <a:lnSpc>
+                <a:spcPct val="122000"/>
+              </a:lnSpc>
+              <a:spcAft>
+                <a:spcPts val="1000"/>
+              </a:spcAft>
+              <a:buSzPct val="100000"/>
+              <a:buChar char="•"/>
+            </a:pPr>
+            <a:r>
+              <a:rPr lang="en-US" sz="1350" dirty="0">
+                <a:solidFill>
+                  <a:srgbClr val="33423A"/>
+                </a:solidFill>
+                <a:latin typeface="Calibri" pitchFamily="34" charset="0"/>
+                <a:ea typeface="Calibri" pitchFamily="34" charset="-122"/>
+                <a:cs typeface="Calibri" pitchFamily="34" charset="-120"/>
+              </a:rPr>
+              <a:t>Lutte contre maladies, parasites, champignons et ravageurs, sans molécule de synthèse.</a:t>
+            </a:r>
+            <a:endParaRPr lang="en-US" sz="1350" dirty="0"/>
+          </a:p>
+          <a:p>
+            <a:pPr algn="l" marL="342900" indent="-342900">
+              <a:lnSpc>
+                <a:spcPct val="122000"/>
+              </a:lnSpc>
+              <a:spcAft>
+                <a:spcPts val="1000"/>
+              </a:spcAft>
+              <a:buSzPct val="100000"/>
+              <a:buChar char="•"/>
+            </a:pPr>
+            <a:r>
+              <a:rPr lang="en-US" sz="1350" dirty="0">
+                <a:solidFill>
+                  <a:srgbClr val="33423A"/>
+                </a:solidFill>
+                <a:latin typeface="Calibri" pitchFamily="34" charset="0"/>
+                <a:ea typeface="Calibri" pitchFamily="34" charset="-122"/>
+                <a:cs typeface="Calibri" pitchFamily="34" charset="-120"/>
+              </a:rPr>
+              <a:t>Pulvérisation foliaire et racinaire, à effet préventif comme curatif.</a:t>
+            </a:r>
+            <a:endParaRPr lang="en-US" sz="1350" dirty="0"/>
+          </a:p>
+          <a:p>
+            <a:pPr algn="l" marL="342900" indent="-342900">
+              <a:lnSpc>
+                <a:spcPct val="122000"/>
+              </a:lnSpc>
+              <a:spcAft>
+                <a:spcPts val="1000"/>
+              </a:spcAft>
+              <a:buSzPct val="100000"/>
+              <a:buChar char="•"/>
+            </a:pPr>
+            <a:r>
+              <a:rPr lang="en-US" sz="1350" dirty="0">
+                <a:solidFill>
+                  <a:srgbClr val="33423A"/>
+                </a:solidFill>
+                <a:latin typeface="Calibri" pitchFamily="34" charset="0"/>
+                <a:ea typeface="Calibri" pitchFamily="34" charset="-122"/>
+                <a:cs typeface="Calibri" pitchFamily="34" charset="-120"/>
+              </a:rPr>
+              <a:t>Aucun résidu dans le sol, la plante ou l'air : pollinisateurs et auxiliaires préservés.</a:t>
+            </a:r>
+            <a:endParaRPr lang="en-US" sz="1350" dirty="0"/>
+          </a:p>
+          <a:p>
+            <a:pPr algn="l" marL="342900" indent="-342900">
+              <a:lnSpc>
+                <a:spcPct val="122000"/>
+              </a:lnSpc>
+              <a:spcAft>
+                <a:spcPts val="1000"/>
+              </a:spcAft>
+              <a:buSzPct val="100000"/>
+              <a:buChar char="•"/>
+            </a:pPr>
+            <a:r>
+              <a:rPr lang="en-US" sz="1350" dirty="0">
+                <a:solidFill>
+                  <a:srgbClr val="33423A"/>
+                </a:solidFill>
+                <a:latin typeface="Calibri" pitchFamily="34" charset="0"/>
+                <a:ea typeface="Calibri" pitchFamily="34" charset="-122"/>
+                <a:cs typeface="Calibri" pitchFamily="34" charset="-120"/>
+              </a:rPr>
+              <a:t>Formulé sur mesure pour un problème précis : cochenille, HLB des agrumes, nématodes.</a:t>
+            </a:r>
+            <a:endParaRPr lang="en-US" sz="1350" dirty="0"/>
+          </a:p>
+        </p:txBody>
+      </p:sp>
+      <p:sp>
+        <p:nvSpPr>
+          <p:cNvPr id="6" name="Text 4"/>
+          <p:cNvSpPr txBox="1"/>
+          <p:nvPr/>
+        </p:nvSpPr>
+        <p:spPr>
+          <a:xfrm>
+            <a:off x="6370168" y="1783080"/>
+            <a:ext cx="5227168" cy="411480"/>
+          </a:xfrm>
+          <a:prstGeom prst="rect">
+            <a:avLst/>
+          </a:prstGeom>
+          <a:noFill/>
+          <a:ln/>
+        </p:spPr>
+        <p:txBody>
+          <a:bodyPr wrap="square" lIns="0" tIns="0" rIns="0" bIns="0" rtlCol="0" anchor="ctr"/>
+          <a:lstStyle/>
+          <a:p>
+            <a:pPr algn="l" indent="0" marL="0">
+              <a:buNone/>
+            </a:pPr>
+            <a:r>
+              <a:rPr lang="en-US" sz="1600" b="1" dirty="0">
+                <a:solidFill>
+                  <a:srgbClr val="1F5C3A"/>
+                </a:solidFill>
+                <a:latin typeface="Cambria" pitchFamily="34" charset="0"/>
+                <a:ea typeface="Cambria" pitchFamily="34" charset="-122"/>
+                <a:cs typeface="Cambria" pitchFamily="34" charset="-120"/>
+              </a:rPr>
+              <a:t>Paulownia ALTIFOLIA® — l'arbre des régions chaudes</a:t>
+            </a:r>
+            <a:endParaRPr lang="en-US" sz="1600" dirty="0"/>
+          </a:p>
+        </p:txBody>
+      </p:sp>
+      <p:sp>
+        <p:nvSpPr>
+          <p:cNvPr id="7" name="Text 5"/>
+          <p:cNvSpPr txBox="1"/>
+          <p:nvPr/>
+        </p:nvSpPr>
+        <p:spPr>
+          <a:xfrm>
+            <a:off x="6370168" y="2286000"/>
+            <a:ext cx="5227168" cy="2468880"/>
+          </a:xfrm>
+          <a:prstGeom prst="rect">
+            <a:avLst/>
+          </a:prstGeom>
+          <a:noFill/>
+          <a:ln/>
+        </p:spPr>
+        <p:txBody>
+          <a:bodyPr wrap="square" lIns="0" tIns="0" rIns="0" bIns="0" rtlCol="0" anchor="t"/>
+          <a:lstStyle/>
+          <a:p>
+            <a:pPr algn="l" marL="342900" indent="-342900">
+              <a:lnSpc>
+                <a:spcPct val="122000"/>
+              </a:lnSpc>
+              <a:spcAft>
+                <a:spcPts val="1000"/>
+              </a:spcAft>
+              <a:buSzPct val="100000"/>
+              <a:buChar char="•"/>
+            </a:pPr>
+            <a:r>
+              <a:rPr lang="en-US" sz="1350" dirty="0">
+                <a:solidFill>
+                  <a:srgbClr val="33423A"/>
+                </a:solidFill>
+                <a:latin typeface="Calibri" pitchFamily="34" charset="0"/>
+                <a:ea typeface="Calibri" pitchFamily="34" charset="-122"/>
+                <a:cs typeface="Calibri" pitchFamily="34" charset="-120"/>
+              </a:rPr>
+              <a:t>13 à 15 m en six à huit ans, avec un tronc de gros diamètre.</a:t>
+            </a:r>
+            <a:endParaRPr lang="en-US" sz="1350" dirty="0"/>
+          </a:p>
+          <a:p>
+            <a:pPr algn="l" marL="342900" indent="-342900">
+              <a:lnSpc>
+                <a:spcPct val="122000"/>
+              </a:lnSpc>
+              <a:spcAft>
+                <a:spcPts val="1000"/>
+              </a:spcAft>
+              <a:buSzPct val="100000"/>
+              <a:buChar char="•"/>
+            </a:pPr>
+            <a:r>
+              <a:rPr lang="en-US" sz="1350" dirty="0">
+                <a:solidFill>
+                  <a:srgbClr val="33423A"/>
+                </a:solidFill>
+                <a:latin typeface="Calibri" pitchFamily="34" charset="0"/>
+                <a:ea typeface="Calibri" pitchFamily="34" charset="-122"/>
+                <a:cs typeface="Calibri" pitchFamily="34" charset="-120"/>
+              </a:rPr>
+              <a:t>Associé à 100 g d'EVERGREEN® par plant, l'irrigation nécessaire diminue de 50 %.</a:t>
+            </a:r>
+            <a:endParaRPr lang="en-US" sz="1350" dirty="0"/>
+          </a:p>
+          <a:p>
+            <a:pPr algn="l" marL="342900" indent="-342900">
+              <a:lnSpc>
+                <a:spcPct val="122000"/>
+              </a:lnSpc>
+              <a:spcAft>
+                <a:spcPts val="1000"/>
+              </a:spcAft>
+              <a:buSzPct val="100000"/>
+              <a:buChar char="•"/>
+            </a:pPr>
+            <a:r>
+              <a:rPr lang="en-US" sz="1350" dirty="0">
+                <a:solidFill>
+                  <a:srgbClr val="33423A"/>
+                </a:solidFill>
+                <a:latin typeface="Calibri" pitchFamily="34" charset="0"/>
+                <a:ea typeface="Calibri" pitchFamily="34" charset="-122"/>
+                <a:cs typeface="Calibri" pitchFamily="34" charset="-120"/>
+              </a:rPr>
+              <a:t>Résiste de −25 °C à +45 °C ; son bois ne s'enflamme qu'à partir de 426 °C.</a:t>
+            </a:r>
+            <a:endParaRPr lang="en-US" sz="1350" dirty="0"/>
+          </a:p>
+          <a:p>
+            <a:pPr algn="l" marL="342900" indent="-342900">
+              <a:lnSpc>
+                <a:spcPct val="122000"/>
+              </a:lnSpc>
+              <a:spcAft>
+                <a:spcPts val="1000"/>
+              </a:spcAft>
+              <a:buSzPct val="100000"/>
+              <a:buChar char="•"/>
+            </a:pPr>
+            <a:r>
+              <a:rPr lang="en-US" sz="1350" dirty="0">
+                <a:solidFill>
+                  <a:srgbClr val="33423A"/>
+                </a:solidFill>
+                <a:latin typeface="Calibri" pitchFamily="34" charset="0"/>
+                <a:ea typeface="Calibri" pitchFamily="34" charset="-122"/>
+                <a:cs typeface="Calibri" pitchFamily="34" charset="-120"/>
+              </a:rPr>
+              <a:t>Brise-vent, protection des sols contre l'érosion, 400 à 700 kg de miel par hectare.</a:t>
+            </a:r>
+            <a:endParaRPr lang="en-US" sz="1350" dirty="0"/>
+          </a:p>
+        </p:txBody>
+      </p:sp>
+      <p:sp>
+        <p:nvSpPr>
+          <p:cNvPr id="8" name="Shape 6"/>
+          <p:cNvSpPr/>
+          <p:nvPr/>
+        </p:nvSpPr>
+        <p:spPr>
+          <a:xfrm>
+            <a:off x="594360" y="4846320"/>
+            <a:ext cx="11002975" cy="960120"/>
+          </a:xfrm>
+          <a:prstGeom prst="roundRect">
+            <a:avLst>
+              <a:gd name="adj" fmla="val 7619"/>
+            </a:avLst>
+          </a:prstGeom>
+          <a:solidFill>
+            <a:srgbClr val="F1F4EF"/>
+          </a:solidFill>
+          <a:ln w="9525">
+            <a:solidFill>
+              <a:srgbClr val="DCE4DA"/>
+            </a:solidFill>
+            <a:prstDash val="solid"/>
+          </a:ln>
+        </p:spPr>
+      </p:sp>
+      <p:sp>
+        <p:nvSpPr>
+          <p:cNvPr id="9" name="Text 7"/>
+          <p:cNvSpPr txBox="1"/>
+          <p:nvPr/>
+        </p:nvSpPr>
+        <p:spPr>
+          <a:xfrm>
+            <a:off x="822960" y="4983480"/>
+            <a:ext cx="10545775" cy="713232"/>
+          </a:xfrm>
+          <a:prstGeom prst="rect">
+            <a:avLst/>
+          </a:prstGeom>
+          <a:noFill/>
+          <a:ln/>
+        </p:spPr>
+        <p:txBody>
+          <a:bodyPr wrap="square" lIns="0" tIns="0" rIns="0" bIns="0" rtlCol="0" anchor="t"/>
+          <a:lstStyle/>
+          <a:p>
+            <a:pPr algn="l" indent="0" marL="0">
+              <a:lnSpc>
+                <a:spcPct val="118000"/>
+              </a:lnSpc>
+              <a:buNone/>
+            </a:pPr>
+            <a:r>
+              <a:rPr lang="en-US" sz="1100" dirty="0">
+                <a:solidFill>
+                  <a:srgbClr val="6B7C72"/>
+                </a:solidFill>
+                <a:latin typeface="Calibri" pitchFamily="34" charset="0"/>
+                <a:ea typeface="Calibri" pitchFamily="34" charset="-122"/>
+                <a:cs typeface="Calibri" pitchFamily="34" charset="-120"/>
+              </a:rPr>
+              <a:t>Plants livrés en pot (25 à 30 cm), certifiés indemnes de maladies et remplacés sous garantie en cas de perte. Première coupe à la fin de la sixième année, bois valorisé autour de 400 à 450 € le m³.</a:t>
+            </a:r>
+            <a:endParaRPr lang="en-US" sz="1100" dirty="0"/>
+          </a:p>
+        </p:txBody>
+      </p:sp>
+      <p:sp>
+        <p:nvSpPr>
+          <p:cNvPr id="10" name="Text 8"/>
+          <p:cNvSpPr txBox="1"/>
+          <p:nvPr/>
+        </p:nvSpPr>
+        <p:spPr>
+          <a:xfrm>
+            <a:off x="502920" y="6382512"/>
+            <a:ext cx="8229600" cy="274320"/>
+          </a:xfrm>
+          <a:prstGeom prst="rect">
+            <a:avLst/>
+          </a:prstGeom>
+          <a:noFill/>
+          <a:ln/>
+        </p:spPr>
+        <p:txBody>
+          <a:bodyPr wrap="square" lIns="0" tIns="0" rIns="0" bIns="0" rtlCol="0" anchor="ctr"/>
+          <a:lstStyle/>
+          <a:p>
+            <a:pPr algn="l" indent="0" marL="0">
+              <a:buNone/>
+            </a:pPr>
+            <a:r>
+              <a:rPr lang="en-US" sz="950" dirty="0">
+                <a:solidFill>
+                  <a:srgbClr val="6B7C72">
+                    <a:alpha val="80000"/>
+                  </a:srgbClr>
+                </a:solidFill>
+                <a:latin typeface="Calibri" pitchFamily="34" charset="0"/>
+                <a:ea typeface="Calibri" pitchFamily="34" charset="-122"/>
+                <a:cs typeface="Calibri" pitchFamily="34" charset="-120"/>
+              </a:rPr>
+              <a:t>Green Solutions · Dossier marché Maroc</a:t>
+            </a:r>
+            <a:endParaRPr lang="en-US" sz="950" dirty="0"/>
+          </a:p>
+        </p:txBody>
+      </p:sp>
+      <p:sp>
+        <p:nvSpPr>
+          <p:cNvPr id="11" name="Text 9"/>
+          <p:cNvSpPr txBox="1"/>
+          <p:nvPr/>
+        </p:nvSpPr>
+        <p:spPr>
+          <a:xfrm>
+            <a:off x="11140135" y="6382512"/>
+            <a:ext cx="548640" cy="274320"/>
+          </a:xfrm>
+          <a:prstGeom prst="rect">
+            <a:avLst/>
+          </a:prstGeom>
+          <a:noFill/>
+          <a:ln/>
+        </p:spPr>
+        <p:txBody>
+          <a:bodyPr wrap="square" lIns="0" tIns="0" rIns="0" bIns="0" rtlCol="0" anchor="ctr"/>
+          <a:lstStyle/>
+          <a:p>
+            <a:pPr algn="r" indent="0" marL="0">
+              <a:buNone/>
+            </a:pPr>
+            <a:r>
+              <a:rPr lang="en-US" sz="950" dirty="0">
+                <a:solidFill>
+                  <a:srgbClr val="6B7C72">
+                    <a:alpha val="80000"/>
+                  </a:srgbClr>
+                </a:solidFill>
+                <a:latin typeface="Calibri" pitchFamily="34" charset="0"/>
+                <a:ea typeface="Calibri" pitchFamily="34" charset="-122"/>
+                <a:cs typeface="Calibri" pitchFamily="34" charset="-120"/>
+              </a:rPr>
+              <a:t>10</a:t>
+            </a:r>
+            <a:endParaRPr lang="en-US" sz="950" dirty="0"/>
+          </a:p>
+        </p:txBody>
+      </p:sp>
+    </p:spTree>
+  </p:cSld>
+  <p:clrMapOvr>
+    <a:masterClrMapping/>
+  </p:clrMapOvr>
+</p:sld>
+</file>
+
+<file path=ppt/slides/slide12.xml><?xml version="1.0" encoding="utf-8"?>
+<p:sld xmlns:a="http://schemas.openxmlformats.org/drawingml/2006/main" xmlns:r="http://schemas.openxmlformats.org/officeDocument/2006/relationships" xmlns:p="http://schemas.openxmlformats.org/presentationml/2006/main">
+  <p:cSld name="Slide 12">
+    <p:bg>
+      <p:bgPr>
+        <a:solidFill>
+          <a:srgbClr val="FBFAF6"/>
+        </a:solidFill>
+      </p:bgPr>
+    </p:bg>
+    <p:spTree>
+      <p:nvGrpSpPr>
+        <p:cNvPr id="1" name=""/>
+        <p:cNvGrpSpPr/>
+        <p:nvPr/>
+      </p:nvGrpSpPr>
+      <p:grpSpPr>
+        <a:xfrm>
+          <a:off x="0" y="0"/>
+          <a:ext cx="0" cy="0"/>
+          <a:chOff x="0" y="0"/>
+          <a:chExt cx="0" cy="0"/>
+        </a:xfrm>
+      </p:grpSpPr>
+      <p:sp>
+        <p:nvSpPr>
+          <p:cNvPr id="2" name="Text 0"/>
+          <p:cNvSpPr txBox="1"/>
+          <p:nvPr/>
+        </p:nvSpPr>
+        <p:spPr>
+          <a:xfrm>
+            <a:off x="594360" y="411480"/>
+            <a:ext cx="10515600" cy="274320"/>
+          </a:xfrm>
+          <a:prstGeom prst="rect">
+            <a:avLst/>
+          </a:prstGeom>
+          <a:noFill/>
+          <a:ln/>
+        </p:spPr>
+        <p:txBody>
+          <a:bodyPr wrap="square" lIns="0" tIns="0" rIns="0" bIns="0" rtlCol="0" anchor="ctr"/>
+          <a:lstStyle/>
+          <a:p>
+            <a:pPr algn="l" indent="0" marL="0">
+              <a:buNone/>
+            </a:pPr>
+            <a:r>
+              <a:rPr lang="en-US" sz="1150" b="1" spc="200" kern="0" dirty="0">
+                <a:solidFill>
+                  <a:srgbClr val="E3B23C"/>
+                </a:solidFill>
+                <a:latin typeface="Calibri" pitchFamily="34" charset="0"/>
+                <a:ea typeface="Calibri" pitchFamily="34" charset="-122"/>
+                <a:cs typeface="Calibri" pitchFamily="34" charset="-120"/>
+              </a:rPr>
+              <a:t>ORDRES DE GRANDEUR</a:t>
+            </a:r>
+            <a:endParaRPr lang="en-US" sz="1150" dirty="0"/>
+          </a:p>
+        </p:txBody>
+      </p:sp>
+      <p:sp>
+        <p:nvSpPr>
+          <p:cNvPr id="3" name="Text 1"/>
+          <p:cNvSpPr txBox="1"/>
+          <p:nvPr/>
+        </p:nvSpPr>
+        <p:spPr>
+          <a:xfrm>
+            <a:off x="594360" y="731520"/>
+            <a:ext cx="10881360" cy="731520"/>
+          </a:xfrm>
+          <a:prstGeom prst="rect">
+            <a:avLst/>
+          </a:prstGeom>
+          <a:noFill/>
+          <a:ln/>
+        </p:spPr>
+        <p:txBody>
+          <a:bodyPr wrap="square" lIns="0" tIns="0" rIns="0" bIns="0" rtlCol="0" anchor="ctr"/>
+          <a:lstStyle/>
+          <a:p>
+            <a:pPr algn="l" indent="0" marL="0">
+              <a:buNone/>
+            </a:pPr>
+            <a:r>
+              <a:rPr lang="en-US" sz="3000" b="1" dirty="0">
+                <a:solidFill>
+                  <a:srgbClr val="123324"/>
+                </a:solidFill>
+                <a:latin typeface="Cambria" pitchFamily="34" charset="0"/>
+                <a:ea typeface="Cambria" pitchFamily="34" charset="-122"/>
+                <a:cs typeface="Cambria" pitchFamily="34" charset="-120"/>
+              </a:rPr>
+              <a:t>Économie d'eau attendue selon le mode d'irrigation</a:t>
+            </a:r>
+            <a:endParaRPr lang="en-US" sz="3000" dirty="0"/>
+          </a:p>
+        </p:txBody>
+      </p:sp>
+      <p:graphicFrame>
+        <p:nvGraphicFramePr>
+          <p:cNvPr id="4" name="Chart 0" descr=""/>
+          <p:cNvGraphicFramePr/>
+          <p:nvPr/>
+        </p:nvGraphicFramePr>
+        <p:xfrm>
+          <a:off x="594360" y="1783080"/>
+          <a:ext cx="7360920" cy="3977640"/>
+        </p:xfrm>
+        <a:graphic xmlns:a="http://schemas.openxmlformats.org/drawingml/2006/main">
+          <a:graphicData uri="http://schemas.openxmlformats.org/drawingml/2006/chart">
+            <c:chart xmlns:c="http://schemas.openxmlformats.org/drawingml/2006/chart" r:id="rId1"/>
+          </a:graphicData>
+        </a:graphic>
+      </p:graphicFrame>
+      <p:sp>
+        <p:nvSpPr>
+          <p:cNvPr id="5" name="Shape 2"/>
+          <p:cNvSpPr/>
+          <p:nvPr/>
+        </p:nvSpPr>
+        <p:spPr>
+          <a:xfrm>
+            <a:off x="8275320" y="1783080"/>
+            <a:ext cx="3291840" cy="3977640"/>
+          </a:xfrm>
+          <a:prstGeom prst="roundRect">
+            <a:avLst>
+              <a:gd name="adj" fmla="val 2778"/>
+            </a:avLst>
+          </a:prstGeom>
+          <a:solidFill>
+            <a:srgbClr val="F1F4EF"/>
+          </a:solidFill>
+          <a:ln w="9525">
+            <a:solidFill>
+              <a:srgbClr val="DCE4DA"/>
+            </a:solidFill>
+            <a:prstDash val="solid"/>
+          </a:ln>
+        </p:spPr>
+      </p:sp>
+      <p:sp>
+        <p:nvSpPr>
+          <p:cNvPr id="6" name="Text 3"/>
+          <p:cNvSpPr txBox="1"/>
+          <p:nvPr/>
+        </p:nvSpPr>
+        <p:spPr>
+          <a:xfrm>
+            <a:off x="8503920" y="2011680"/>
+            <a:ext cx="2834640" cy="457200"/>
+          </a:xfrm>
+          <a:prstGeom prst="rect">
+            <a:avLst/>
+          </a:prstGeom>
+          <a:noFill/>
+          <a:ln/>
+        </p:spPr>
+        <p:txBody>
+          <a:bodyPr wrap="square" lIns="0" tIns="0" rIns="0" bIns="0" rtlCol="0" anchor="ctr"/>
+          <a:lstStyle/>
+          <a:p>
+            <a:pPr algn="l" indent="0" marL="0">
+              <a:buNone/>
+            </a:pPr>
+            <a:r>
+              <a:rPr lang="en-US" sz="1300" b="1" dirty="0">
+                <a:solidFill>
+                  <a:srgbClr val="1F5C3A"/>
+                </a:solidFill>
+                <a:latin typeface="Cambria" pitchFamily="34" charset="0"/>
+                <a:ea typeface="Cambria" pitchFamily="34" charset="-122"/>
+                <a:cs typeface="Cambria" pitchFamily="34" charset="-120"/>
+              </a:rPr>
+              <a:t>À lire avec prudence</a:t>
+            </a:r>
+            <a:endParaRPr lang="en-US" sz="1300" dirty="0"/>
+          </a:p>
+        </p:txBody>
+      </p:sp>
+      <p:sp>
+        <p:nvSpPr>
+          <p:cNvPr id="7" name="Text 4"/>
+          <p:cNvSpPr txBox="1"/>
+          <p:nvPr/>
+        </p:nvSpPr>
+        <p:spPr>
+          <a:xfrm>
+            <a:off x="8503920" y="2560320"/>
+            <a:ext cx="2834640" cy="3017520"/>
+          </a:xfrm>
+          <a:prstGeom prst="rect">
+            <a:avLst/>
+          </a:prstGeom>
+          <a:noFill/>
+          <a:ln/>
+        </p:spPr>
+        <p:txBody>
+          <a:bodyPr wrap="square" lIns="0" tIns="0" rIns="0" bIns="0" rtlCol="0" anchor="t"/>
+          <a:lstStyle/>
+          <a:p>
+            <a:pPr algn="l" indent="0" marL="0">
+              <a:lnSpc>
+                <a:spcPct val="125000"/>
+              </a:lnSpc>
+              <a:buNone/>
+            </a:pPr>
+            <a:r>
+              <a:rPr lang="en-US" sz="1200" dirty="0">
+                <a:solidFill>
+                  <a:srgbClr val="33423A"/>
+                </a:solidFill>
+                <a:latin typeface="Calibri" pitchFamily="34" charset="0"/>
+                <a:ea typeface="Calibri" pitchFamily="34" charset="-122"/>
+                <a:cs typeface="Calibri" pitchFamily="34" charset="-120"/>
+              </a:rPr>
+              <a:t>Ces fourchettes sont indicatives et fondées sur les gains documentés de nos hydro-rétenteurs.</a:t>
+            </a:r>
+            <a:endParaRPr lang="en-US" sz="1200" dirty="0"/>
+          </a:p>
+          <a:p>
+            <a:pPr algn="l" indent="0" marL="0">
+              <a:lnSpc>
+                <a:spcPct val="125000"/>
+              </a:lnSpc>
+              <a:buNone/>
+            </a:pPr>
+            <a:endParaRPr lang="en-US" sz="1200" dirty="0"/>
+          </a:p>
+          <a:p>
+            <a:pPr algn="l" indent="0" marL="0">
+              <a:lnSpc>
+                <a:spcPct val="125000"/>
+              </a:lnSpc>
+              <a:buNone/>
+            </a:pPr>
+            <a:r>
+              <a:rPr lang="en-US" sz="1200" dirty="0">
+                <a:solidFill>
+                  <a:srgbClr val="33423A"/>
+                </a:solidFill>
+                <a:latin typeface="Calibri" pitchFamily="34" charset="0"/>
+                <a:ea typeface="Calibri" pitchFamily="34" charset="-122"/>
+                <a:cs typeface="Calibri" pitchFamily="34" charset="-120"/>
+              </a:rPr>
+              <a:t>Le résultat réel dépend du sol, du climat et de la culture. Ces chiffres donnent un ordre de grandeur : ils ne constituent en aucun cas une valeur garantie, contractuelle ou absolue.</a:t>
+            </a:r>
+            <a:endParaRPr lang="en-US" sz="1200" dirty="0"/>
+          </a:p>
+        </p:txBody>
+      </p:sp>
+      <p:sp>
+        <p:nvSpPr>
+          <p:cNvPr id="8" name="Text 5"/>
+          <p:cNvSpPr txBox="1"/>
+          <p:nvPr/>
+        </p:nvSpPr>
+        <p:spPr>
+          <a:xfrm>
+            <a:off x="502920" y="6382512"/>
+            <a:ext cx="8229600" cy="274320"/>
+          </a:xfrm>
+          <a:prstGeom prst="rect">
+            <a:avLst/>
+          </a:prstGeom>
+          <a:noFill/>
+          <a:ln/>
+        </p:spPr>
+        <p:txBody>
+          <a:bodyPr wrap="square" lIns="0" tIns="0" rIns="0" bIns="0" rtlCol="0" anchor="ctr"/>
+          <a:lstStyle/>
+          <a:p>
+            <a:pPr algn="l" indent="0" marL="0">
+              <a:buNone/>
+            </a:pPr>
+            <a:r>
+              <a:rPr lang="en-US" sz="950" dirty="0">
+                <a:solidFill>
+                  <a:srgbClr val="6B7C72">
+                    <a:alpha val="80000"/>
+                  </a:srgbClr>
+                </a:solidFill>
+                <a:latin typeface="Calibri" pitchFamily="34" charset="0"/>
+                <a:ea typeface="Calibri" pitchFamily="34" charset="-122"/>
+                <a:cs typeface="Calibri" pitchFamily="34" charset="-120"/>
+              </a:rPr>
+              <a:t>Green Solutions · Dossier marché Maroc</a:t>
+            </a:r>
+            <a:endParaRPr lang="en-US" sz="950" dirty="0"/>
+          </a:p>
+        </p:txBody>
+      </p:sp>
+      <p:sp>
+        <p:nvSpPr>
+          <p:cNvPr id="9" name="Text 6"/>
+          <p:cNvSpPr txBox="1"/>
+          <p:nvPr/>
+        </p:nvSpPr>
+        <p:spPr>
+          <a:xfrm>
+            <a:off x="11140135" y="6382512"/>
+            <a:ext cx="548640" cy="274320"/>
+          </a:xfrm>
+          <a:prstGeom prst="rect">
+            <a:avLst/>
+          </a:prstGeom>
+          <a:noFill/>
+          <a:ln/>
+        </p:spPr>
+        <p:txBody>
+          <a:bodyPr wrap="square" lIns="0" tIns="0" rIns="0" bIns="0" rtlCol="0" anchor="ctr"/>
+          <a:lstStyle/>
+          <a:p>
+            <a:pPr algn="r" indent="0" marL="0">
+              <a:buNone/>
+            </a:pPr>
+            <a:r>
+              <a:rPr lang="en-US" sz="950" dirty="0">
+                <a:solidFill>
+                  <a:srgbClr val="6B7C72">
+                    <a:alpha val="80000"/>
+                  </a:srgbClr>
+                </a:solidFill>
+                <a:latin typeface="Calibri" pitchFamily="34" charset="0"/>
+                <a:ea typeface="Calibri" pitchFamily="34" charset="-122"/>
+                <a:cs typeface="Calibri" pitchFamily="34" charset="-120"/>
+              </a:rPr>
+              <a:t>11</a:t>
+            </a:r>
+            <a:endParaRPr lang="en-US" sz="950" dirty="0"/>
+          </a:p>
+        </p:txBody>
+      </p:sp>
+    </p:spTree>
+  </p:cSld>
+  <p:clrMapOvr>
+    <a:masterClrMapping/>
+  </p:clrMapOvr>
+</p:sld>
+</file>
+
+<file path=ppt/slides/slide13.xml><?xml version="1.0" encoding="utf-8"?>
+<p:sld xmlns:a="http://schemas.openxmlformats.org/drawingml/2006/main" xmlns:r="http://schemas.openxmlformats.org/officeDocument/2006/relationships" xmlns:p="http://schemas.openxmlformats.org/presentationml/2006/main">
+  <p:cSld name="Slide 13">
+    <p:bg>
+      <p:bgPr>
+        <a:solidFill>
+          <a:srgbClr val="FBFAF6"/>
+        </a:solidFill>
+      </p:bgPr>
+    </p:bg>
+    <p:spTree>
+      <p:nvGrpSpPr>
+        <p:cNvPr id="1" name=""/>
+        <p:cNvGrpSpPr/>
+        <p:nvPr/>
+      </p:nvGrpSpPr>
+      <p:grpSpPr>
+        <a:xfrm>
+          <a:off x="0" y="0"/>
+          <a:ext cx="0" cy="0"/>
+          <a:chOff x="0" y="0"/>
+          <a:chExt cx="0" cy="0"/>
+        </a:xfrm>
+      </p:grpSpPr>
+      <p:sp>
+        <p:nvSpPr>
+          <p:cNvPr id="2" name="Text 0"/>
+          <p:cNvSpPr txBox="1"/>
+          <p:nvPr/>
+        </p:nvSpPr>
+        <p:spPr>
+          <a:xfrm>
+            <a:off x="594360" y="411480"/>
+            <a:ext cx="10515600" cy="274320"/>
+          </a:xfrm>
+          <a:prstGeom prst="rect">
+            <a:avLst/>
+          </a:prstGeom>
+          <a:noFill/>
+          <a:ln/>
+        </p:spPr>
+        <p:txBody>
+          <a:bodyPr wrap="square" lIns="0" tIns="0" rIns="0" bIns="0" rtlCol="0" anchor="ctr"/>
+          <a:lstStyle/>
+          <a:p>
+            <a:pPr algn="l" indent="0" marL="0">
+              <a:buNone/>
+            </a:pPr>
+            <a:r>
+              <a:rPr lang="en-US" sz="1150" b="1" spc="200" kern="0" dirty="0">
+                <a:solidFill>
+                  <a:srgbClr val="E3B23C"/>
+                </a:solidFill>
+                <a:latin typeface="Calibri" pitchFamily="34" charset="0"/>
+                <a:ea typeface="Calibri" pitchFamily="34" charset="-122"/>
+                <a:cs typeface="Calibri" pitchFamily="34" charset="-120"/>
+              </a:rPr>
+              <a:t>TROIS TERRAINS PRIORITAIRES</a:t>
+            </a:r>
+            <a:endParaRPr lang="en-US" sz="1150" dirty="0"/>
+          </a:p>
+        </p:txBody>
+      </p:sp>
+      <p:sp>
+        <p:nvSpPr>
+          <p:cNvPr id="3" name="Text 1"/>
+          <p:cNvSpPr txBox="1"/>
+          <p:nvPr/>
+        </p:nvSpPr>
+        <p:spPr>
+          <a:xfrm>
+            <a:off x="594360" y="731520"/>
+            <a:ext cx="10881360" cy="731520"/>
+          </a:xfrm>
+          <a:prstGeom prst="rect">
+            <a:avLst/>
+          </a:prstGeom>
+          <a:noFill/>
+          <a:ln/>
+        </p:spPr>
+        <p:txBody>
+          <a:bodyPr wrap="square" lIns="0" tIns="0" rIns="0" bIns="0" rtlCol="0" anchor="ctr"/>
+          <a:lstStyle/>
+          <a:p>
+            <a:pPr algn="l" indent="0" marL="0">
+              <a:buNone/>
+            </a:pPr>
+            <a:r>
+              <a:rPr lang="en-US" sz="3000" b="1" dirty="0">
+                <a:solidFill>
+                  <a:srgbClr val="123324"/>
+                </a:solidFill>
+                <a:latin typeface="Cambria" pitchFamily="34" charset="0"/>
+                <a:ea typeface="Cambria" pitchFamily="34" charset="-122"/>
+                <a:cs typeface="Cambria" pitchFamily="34" charset="-120"/>
+              </a:rPr>
+              <a:t>Où engager les premiers essais</a:t>
+            </a:r>
+            <a:endParaRPr lang="en-US" sz="3000" dirty="0"/>
+          </a:p>
+        </p:txBody>
+      </p:sp>
+      <p:sp>
+        <p:nvSpPr>
+          <p:cNvPr id="4" name="Shape 2"/>
+          <p:cNvSpPr/>
+          <p:nvPr/>
+        </p:nvSpPr>
+        <p:spPr>
+          <a:xfrm>
+            <a:off x="594360" y="1783080"/>
+            <a:ext cx="3472586" cy="4069080"/>
+          </a:xfrm>
+          <a:prstGeom prst="roundRect">
+            <a:avLst>
+              <a:gd name="adj" fmla="val 2633"/>
+            </a:avLst>
+          </a:prstGeom>
+          <a:solidFill>
+            <a:srgbClr val="F1F4EF"/>
+          </a:solidFill>
+          <a:ln w="9525">
+            <a:solidFill>
+              <a:srgbClr val="DCE4DA"/>
+            </a:solidFill>
+            <a:prstDash val="solid"/>
+          </a:ln>
+        </p:spPr>
+      </p:sp>
+      <p:pic>
+        <p:nvPicPr>
+          <p:cNvPr id="5" name="Image 0" descr="preencoded.png">    </p:cNvPr>
+          <p:cNvPicPr>
+            <a:picLocks noChangeAspect="1"/>
+          </p:cNvPicPr>
+          <p:nvPr/>
+        </p:nvPicPr>
+        <p:blipFill>
+          <a:blip r:embed="rId1"/>
+          <a:stretch>
+            <a:fillRect/>
+          </a:stretch>
+        </p:blipFill>
+        <p:spPr>
+          <a:xfrm>
+            <a:off x="594360" y="1783080"/>
+            <a:ext cx="3472586" cy="1691640"/>
+          </a:xfrm>
+          <a:prstGeom prst="rect">
+            <a:avLst/>
+          </a:prstGeom>
+        </p:spPr>
+      </p:pic>
+      <p:sp>
+        <p:nvSpPr>
+          <p:cNvPr id="6" name="Text 3"/>
+          <p:cNvSpPr txBox="1"/>
+          <p:nvPr/>
+        </p:nvSpPr>
+        <p:spPr>
+          <a:xfrm>
+            <a:off x="795528" y="3639312"/>
+            <a:ext cx="3070250" cy="384048"/>
+          </a:xfrm>
+          <a:prstGeom prst="rect">
+            <a:avLst/>
+          </a:prstGeom>
+          <a:noFill/>
+          <a:ln/>
+        </p:spPr>
+        <p:txBody>
+          <a:bodyPr wrap="square" lIns="0" tIns="0" rIns="0" bIns="0" rtlCol="0" anchor="ctr"/>
+          <a:lstStyle/>
+          <a:p>
+            <a:pPr algn="l" indent="0" marL="0">
+              <a:buNone/>
+            </a:pPr>
+            <a:r>
+              <a:rPr lang="en-US" sz="1500" b="1" dirty="0">
+                <a:solidFill>
+                  <a:srgbClr val="1F5C3A"/>
+                </a:solidFill>
+                <a:latin typeface="Cambria" pitchFamily="34" charset="0"/>
+                <a:ea typeface="Cambria" pitchFamily="34" charset="-122"/>
+                <a:cs typeface="Cambria" pitchFamily="34" charset="-120"/>
+              </a:rPr>
+              <a:t>Souss-Massa</a:t>
+            </a:r>
+            <a:endParaRPr lang="en-US" sz="1500" dirty="0"/>
+          </a:p>
+        </p:txBody>
+      </p:sp>
+      <p:sp>
+        <p:nvSpPr>
+          <p:cNvPr id="7" name="Text 4"/>
+          <p:cNvSpPr txBox="1"/>
+          <p:nvPr/>
+        </p:nvSpPr>
+        <p:spPr>
+          <a:xfrm>
+            <a:off x="795528" y="4041648"/>
+            <a:ext cx="3070250" cy="329184"/>
+          </a:xfrm>
+          <a:prstGeom prst="rect">
+            <a:avLst/>
+          </a:prstGeom>
+          <a:noFill/>
+          <a:ln/>
+        </p:spPr>
+        <p:txBody>
+          <a:bodyPr wrap="square" lIns="0" tIns="0" rIns="0" bIns="0" rtlCol="0" anchor="ctr"/>
+          <a:lstStyle/>
+          <a:p>
+            <a:pPr algn="l" indent="0" marL="0">
+              <a:buNone/>
+            </a:pPr>
+            <a:r>
+              <a:rPr lang="en-US" sz="1250" b="1" dirty="0">
+                <a:solidFill>
+                  <a:srgbClr val="A97C12"/>
+                </a:solidFill>
+                <a:latin typeface="Calibri" pitchFamily="34" charset="0"/>
+                <a:ea typeface="Calibri" pitchFamily="34" charset="-122"/>
+                <a:cs typeface="Calibri" pitchFamily="34" charset="-120"/>
+              </a:rPr>
+              <a:t>Agrumes et primeurs</a:t>
+            </a:r>
+            <a:endParaRPr lang="en-US" sz="1250" dirty="0"/>
+          </a:p>
+        </p:txBody>
+      </p:sp>
+      <p:sp>
+        <p:nvSpPr>
+          <p:cNvPr id="8" name="Text 5"/>
+          <p:cNvSpPr txBox="1"/>
+          <p:nvPr/>
+        </p:nvSpPr>
+        <p:spPr>
+          <a:xfrm>
+            <a:off x="795528" y="4407408"/>
+            <a:ext cx="3070250" cy="1280160"/>
+          </a:xfrm>
+          <a:prstGeom prst="rect">
+            <a:avLst/>
+          </a:prstGeom>
+          <a:noFill/>
+          <a:ln/>
+        </p:spPr>
+        <p:txBody>
+          <a:bodyPr wrap="square" lIns="0" tIns="0" rIns="0" bIns="0" rtlCol="0" anchor="t"/>
+          <a:lstStyle/>
+          <a:p>
+            <a:pPr algn="l" marL="342900" indent="-342900">
+              <a:lnSpc>
+                <a:spcPct val="116000"/>
+              </a:lnSpc>
+              <a:spcAft>
+                <a:spcPts val="700"/>
+              </a:spcAft>
+              <a:buSzPct val="100000"/>
+              <a:buChar char="•"/>
+            </a:pPr>
+            <a:r>
+              <a:rPr lang="en-US" sz="1150" dirty="0">
+                <a:solidFill>
+                  <a:srgbClr val="33423A"/>
+                </a:solidFill>
+                <a:latin typeface="Calibri" pitchFamily="34" charset="0"/>
+                <a:ea typeface="Calibri" pitchFamily="34" charset="-122"/>
+                <a:cs typeface="Calibri" pitchFamily="34" charset="-120"/>
+              </a:rPr>
+              <a:t>Cœur de la filière d'exportation, déjà largement converti au goutte-à-goutte.</a:t>
+            </a:r>
+            <a:endParaRPr lang="en-US" sz="1150" dirty="0"/>
+          </a:p>
+          <a:p>
+            <a:pPr algn="l" marL="342900" indent="-342900">
+              <a:lnSpc>
+                <a:spcPct val="116000"/>
+              </a:lnSpc>
+              <a:spcAft>
+                <a:spcPts val="700"/>
+              </a:spcAft>
+              <a:buSzPct val="100000"/>
+              <a:buChar char="•"/>
+            </a:pPr>
+            <a:r>
+              <a:rPr lang="en-US" sz="1150" dirty="0">
+                <a:solidFill>
+                  <a:srgbClr val="33423A"/>
+                </a:solidFill>
+                <a:latin typeface="Calibri" pitchFamily="34" charset="0"/>
+                <a:ea typeface="Calibri" pitchFamily="34" charset="-122"/>
+                <a:cs typeface="Calibri" pitchFamily="34" charset="-120"/>
+              </a:rPr>
+              <a:t>Nappe en rabattement continu : la pression réglementaire sur les prélèvements y est la plus forte.</a:t>
+            </a:r>
+            <a:endParaRPr lang="en-US" sz="1150" dirty="0"/>
+          </a:p>
+          <a:p>
+            <a:pPr algn="l" marL="342900" indent="-342900">
+              <a:lnSpc>
+                <a:spcPct val="116000"/>
+              </a:lnSpc>
+              <a:spcAft>
+                <a:spcPts val="700"/>
+              </a:spcAft>
+              <a:buSzPct val="100000"/>
+              <a:buChar char="•"/>
+            </a:pPr>
+            <a:r>
+              <a:rPr lang="en-US" sz="1150" dirty="0">
+                <a:solidFill>
+                  <a:srgbClr val="33423A"/>
+                </a:solidFill>
+                <a:latin typeface="Calibri" pitchFamily="34" charset="0"/>
+                <a:ea typeface="Calibri" pitchFamily="34" charset="-122"/>
+                <a:cs typeface="Calibri" pitchFamily="34" charset="-120"/>
+              </a:rPr>
+              <a:t>Acheteurs européens demandeurs de certification biologique.</a:t>
+            </a:r>
+            <a:endParaRPr lang="en-US" sz="1150" dirty="0"/>
+          </a:p>
+        </p:txBody>
+      </p:sp>
+      <p:sp>
+        <p:nvSpPr>
+          <p:cNvPr id="9" name="Shape 6"/>
+          <p:cNvSpPr/>
+          <p:nvPr/>
+        </p:nvSpPr>
+        <p:spPr>
+          <a:xfrm>
+            <a:off x="4359554" y="1783080"/>
+            <a:ext cx="3472586" cy="4069080"/>
+          </a:xfrm>
+          <a:prstGeom prst="roundRect">
+            <a:avLst>
+              <a:gd name="adj" fmla="val 2633"/>
+            </a:avLst>
+          </a:prstGeom>
+          <a:solidFill>
+            <a:srgbClr val="F1F4EF"/>
+          </a:solidFill>
+          <a:ln w="9525">
+            <a:solidFill>
+              <a:srgbClr val="DCE4DA"/>
+            </a:solidFill>
+            <a:prstDash val="solid"/>
+          </a:ln>
+        </p:spPr>
+      </p:sp>
+      <p:pic>
+        <p:nvPicPr>
+          <p:cNvPr id="10" name="Image 1" descr="preencoded.png">    </p:cNvPr>
+          <p:cNvPicPr>
+            <a:picLocks noChangeAspect="1"/>
+          </p:cNvPicPr>
+          <p:nvPr/>
+        </p:nvPicPr>
+        <p:blipFill>
+          <a:blip r:embed="rId2"/>
+          <a:stretch>
+            <a:fillRect/>
+          </a:stretch>
+        </p:blipFill>
+        <p:spPr>
+          <a:xfrm>
+            <a:off x="4359554" y="1783080"/>
+            <a:ext cx="3472586" cy="1691640"/>
+          </a:xfrm>
+          <a:prstGeom prst="rect">
+            <a:avLst/>
+          </a:prstGeom>
+        </p:spPr>
+      </p:pic>
+      <p:sp>
+        <p:nvSpPr>
+          <p:cNvPr id="11" name="Text 7"/>
+          <p:cNvSpPr txBox="1"/>
+          <p:nvPr/>
+        </p:nvSpPr>
+        <p:spPr>
+          <a:xfrm>
+            <a:off x="4560722" y="3639312"/>
+            <a:ext cx="3070250" cy="384048"/>
+          </a:xfrm>
+          <a:prstGeom prst="rect">
+            <a:avLst/>
+          </a:prstGeom>
+          <a:noFill/>
+          <a:ln/>
+        </p:spPr>
+        <p:txBody>
+          <a:bodyPr wrap="square" lIns="0" tIns="0" rIns="0" bIns="0" rtlCol="0" anchor="ctr"/>
+          <a:lstStyle/>
+          <a:p>
+            <a:pPr algn="l" indent="0" marL="0">
+              <a:buNone/>
+            </a:pPr>
+            <a:r>
+              <a:rPr lang="en-US" sz="1500" b="1" dirty="0">
+                <a:solidFill>
+                  <a:srgbClr val="1F5C3A"/>
+                </a:solidFill>
+                <a:latin typeface="Cambria" pitchFamily="34" charset="0"/>
+                <a:ea typeface="Cambria" pitchFamily="34" charset="-122"/>
+                <a:cs typeface="Cambria" pitchFamily="34" charset="-120"/>
+              </a:rPr>
+              <a:t>Haouz — Marrakech</a:t>
+            </a:r>
+            <a:endParaRPr lang="en-US" sz="1500" dirty="0"/>
+          </a:p>
+        </p:txBody>
+      </p:sp>
+      <p:sp>
+        <p:nvSpPr>
+          <p:cNvPr id="12" name="Text 8"/>
+          <p:cNvSpPr txBox="1"/>
+          <p:nvPr/>
+        </p:nvSpPr>
+        <p:spPr>
+          <a:xfrm>
+            <a:off x="4560722" y="4041648"/>
+            <a:ext cx="3070250" cy="329184"/>
+          </a:xfrm>
+          <a:prstGeom prst="rect">
+            <a:avLst/>
+          </a:prstGeom>
+          <a:noFill/>
+          <a:ln/>
+        </p:spPr>
+        <p:txBody>
+          <a:bodyPr wrap="square" lIns="0" tIns="0" rIns="0" bIns="0" rtlCol="0" anchor="ctr"/>
+          <a:lstStyle/>
+          <a:p>
+            <a:pPr algn="l" indent="0" marL="0">
+              <a:buNone/>
+            </a:pPr>
+            <a:r>
+              <a:rPr lang="en-US" sz="1250" b="1" dirty="0">
+                <a:solidFill>
+                  <a:srgbClr val="A97C12"/>
+                </a:solidFill>
+                <a:latin typeface="Calibri" pitchFamily="34" charset="0"/>
+                <a:ea typeface="Calibri" pitchFamily="34" charset="-122"/>
+                <a:cs typeface="Calibri" pitchFamily="34" charset="-120"/>
+              </a:rPr>
+              <a:t>Maraîchage et oliviers</a:t>
+            </a:r>
+            <a:endParaRPr lang="en-US" sz="1250" dirty="0"/>
+          </a:p>
+        </p:txBody>
+      </p:sp>
+      <p:sp>
+        <p:nvSpPr>
+          <p:cNvPr id="13" name="Text 9"/>
+          <p:cNvSpPr txBox="1"/>
+          <p:nvPr/>
+        </p:nvSpPr>
+        <p:spPr>
+          <a:xfrm>
+            <a:off x="4560722" y="4407408"/>
+            <a:ext cx="3070250" cy="1280160"/>
+          </a:xfrm>
+          <a:prstGeom prst="rect">
+            <a:avLst/>
+          </a:prstGeom>
+          <a:noFill/>
+          <a:ln/>
+        </p:spPr>
+        <p:txBody>
+          <a:bodyPr wrap="square" lIns="0" tIns="0" rIns="0" bIns="0" rtlCol="0" anchor="t"/>
+          <a:lstStyle/>
+          <a:p>
+            <a:pPr algn="l" marL="342900" indent="-342900">
+              <a:lnSpc>
+                <a:spcPct val="116000"/>
+              </a:lnSpc>
+              <a:spcAft>
+                <a:spcPts val="700"/>
+              </a:spcAft>
+              <a:buSzPct val="100000"/>
+              <a:buChar char="•"/>
+            </a:pPr>
+            <a:r>
+              <a:rPr lang="en-US" sz="1150" dirty="0">
+                <a:solidFill>
+                  <a:srgbClr val="33423A"/>
+                </a:solidFill>
+                <a:latin typeface="Calibri" pitchFamily="34" charset="0"/>
+                <a:ea typeface="Calibri" pitchFamily="34" charset="-122"/>
+                <a:cs typeface="Calibri" pitchFamily="34" charset="-120"/>
+              </a:rPr>
+              <a:t>Périmètres irrigués dépendants des barrages, soumis aux tours d'eau en année sèche.</a:t>
+            </a:r>
+            <a:endParaRPr lang="en-US" sz="1150" dirty="0"/>
+          </a:p>
+          <a:p>
+            <a:pPr algn="l" marL="342900" indent="-342900">
+              <a:lnSpc>
+                <a:spcPct val="116000"/>
+              </a:lnSpc>
+              <a:spcAft>
+                <a:spcPts val="700"/>
+              </a:spcAft>
+              <a:buSzPct val="100000"/>
+              <a:buChar char="•"/>
+            </a:pPr>
+            <a:r>
+              <a:rPr lang="en-US" sz="1150" dirty="0">
+                <a:solidFill>
+                  <a:srgbClr val="33423A"/>
+                </a:solidFill>
+                <a:latin typeface="Calibri" pitchFamily="34" charset="0"/>
+                <a:ea typeface="Calibri" pitchFamily="34" charset="-122"/>
+                <a:cs typeface="Calibri" pitchFamily="34" charset="-120"/>
+              </a:rPr>
+              <a:t>Forte proportion de structures moyennes, capables de décider vite sur un essai.</a:t>
+            </a:r>
+            <a:endParaRPr lang="en-US" sz="1150" dirty="0"/>
+          </a:p>
+          <a:p>
+            <a:pPr algn="l" marL="342900" indent="-342900">
+              <a:lnSpc>
+                <a:spcPct val="116000"/>
+              </a:lnSpc>
+              <a:spcAft>
+                <a:spcPts val="700"/>
+              </a:spcAft>
+              <a:buSzPct val="100000"/>
+              <a:buChar char="•"/>
+            </a:pPr>
+            <a:r>
+              <a:rPr lang="en-US" sz="1150" dirty="0">
+                <a:solidFill>
+                  <a:srgbClr val="33423A"/>
+                </a:solidFill>
+                <a:latin typeface="Calibri" pitchFamily="34" charset="0"/>
+                <a:ea typeface="Calibri" pitchFamily="34" charset="-122"/>
+                <a:cs typeface="Calibri" pitchFamily="34" charset="-120"/>
+              </a:rPr>
+              <a:t>Oléiculture en modernisation, avec des marges de progrès agronomiques nettes.</a:t>
+            </a:r>
+            <a:endParaRPr lang="en-US" sz="1150" dirty="0"/>
+          </a:p>
+        </p:txBody>
+      </p:sp>
+      <p:sp>
+        <p:nvSpPr>
+          <p:cNvPr id="14" name="Shape 10"/>
+          <p:cNvSpPr/>
+          <p:nvPr/>
+        </p:nvSpPr>
+        <p:spPr>
+          <a:xfrm>
+            <a:off x="8124749" y="1783080"/>
+            <a:ext cx="3472586" cy="4069080"/>
+          </a:xfrm>
+          <a:prstGeom prst="roundRect">
+            <a:avLst>
+              <a:gd name="adj" fmla="val 2633"/>
+            </a:avLst>
+          </a:prstGeom>
+          <a:solidFill>
+            <a:srgbClr val="F1F4EF"/>
+          </a:solidFill>
+          <a:ln w="9525">
+            <a:solidFill>
+              <a:srgbClr val="DCE4DA"/>
+            </a:solidFill>
+            <a:prstDash val="solid"/>
+          </a:ln>
+        </p:spPr>
+      </p:sp>
+      <p:pic>
+        <p:nvPicPr>
+          <p:cNvPr id="15" name="Image 2" descr="preencoded.png">    </p:cNvPr>
+          <p:cNvPicPr>
+            <a:picLocks noChangeAspect="1"/>
+          </p:cNvPicPr>
+          <p:nvPr/>
+        </p:nvPicPr>
+        <p:blipFill>
+          <a:blip r:embed="rId3"/>
+          <a:stretch>
+            <a:fillRect/>
+          </a:stretch>
+        </p:blipFill>
+        <p:spPr>
+          <a:xfrm>
+            <a:off x="8124749" y="1783080"/>
+            <a:ext cx="3472586" cy="1691640"/>
+          </a:xfrm>
+          <a:prstGeom prst="rect">
+            <a:avLst/>
+          </a:prstGeom>
+        </p:spPr>
+      </p:pic>
+      <p:sp>
+        <p:nvSpPr>
+          <p:cNvPr id="16" name="Text 11"/>
+          <p:cNvSpPr txBox="1"/>
+          <p:nvPr/>
+        </p:nvSpPr>
+        <p:spPr>
+          <a:xfrm>
+            <a:off x="8325917" y="3639312"/>
+            <a:ext cx="3070250" cy="384048"/>
+          </a:xfrm>
+          <a:prstGeom prst="rect">
+            <a:avLst/>
+          </a:prstGeom>
+          <a:noFill/>
+          <a:ln/>
+        </p:spPr>
+        <p:txBody>
+          <a:bodyPr wrap="square" lIns="0" tIns="0" rIns="0" bIns="0" rtlCol="0" anchor="ctr"/>
+          <a:lstStyle/>
+          <a:p>
+            <a:pPr algn="l" indent="0" marL="0">
+              <a:buNone/>
+            </a:pPr>
+            <a:r>
+              <a:rPr lang="en-US" sz="1500" b="1" dirty="0">
+                <a:solidFill>
+                  <a:srgbClr val="1F5C3A"/>
+                </a:solidFill>
+                <a:latin typeface="Cambria" pitchFamily="34" charset="0"/>
+                <a:ea typeface="Cambria" pitchFamily="34" charset="-122"/>
+                <a:cs typeface="Cambria" pitchFamily="34" charset="-120"/>
+              </a:rPr>
+              <a:t>Drâa-Tafilalet</a:t>
+            </a:r>
+            <a:endParaRPr lang="en-US" sz="1500" dirty="0"/>
+          </a:p>
+        </p:txBody>
+      </p:sp>
+      <p:sp>
+        <p:nvSpPr>
+          <p:cNvPr id="17" name="Text 12"/>
+          <p:cNvSpPr txBox="1"/>
+          <p:nvPr/>
+        </p:nvSpPr>
+        <p:spPr>
+          <a:xfrm>
+            <a:off x="8325917" y="4041648"/>
+            <a:ext cx="3070250" cy="329184"/>
+          </a:xfrm>
+          <a:prstGeom prst="rect">
+            <a:avLst/>
+          </a:prstGeom>
+          <a:noFill/>
+          <a:ln/>
+        </p:spPr>
+        <p:txBody>
+          <a:bodyPr wrap="square" lIns="0" tIns="0" rIns="0" bIns="0" rtlCol="0" anchor="ctr"/>
+          <a:lstStyle/>
+          <a:p>
+            <a:pPr algn="l" indent="0" marL="0">
+              <a:buNone/>
+            </a:pPr>
+            <a:r>
+              <a:rPr lang="en-US" sz="1250" b="1" dirty="0">
+                <a:solidFill>
+                  <a:srgbClr val="A97C12"/>
+                </a:solidFill>
+                <a:latin typeface="Calibri" pitchFamily="34" charset="0"/>
+                <a:ea typeface="Calibri" pitchFamily="34" charset="-122"/>
+                <a:cs typeface="Calibri" pitchFamily="34" charset="-120"/>
+              </a:rPr>
+              <a:t>Palmier dattier et arganier</a:t>
+            </a:r>
+            <a:endParaRPr lang="en-US" sz="1250" dirty="0"/>
+          </a:p>
+        </p:txBody>
+      </p:sp>
+      <p:sp>
+        <p:nvSpPr>
+          <p:cNvPr id="18" name="Text 13"/>
+          <p:cNvSpPr txBox="1"/>
+          <p:nvPr/>
+        </p:nvSpPr>
+        <p:spPr>
+          <a:xfrm>
+            <a:off x="8325917" y="4407408"/>
+            <a:ext cx="3070250" cy="1280160"/>
+          </a:xfrm>
+          <a:prstGeom prst="rect">
+            <a:avLst/>
+          </a:prstGeom>
+          <a:noFill/>
+          <a:ln/>
+        </p:spPr>
+        <p:txBody>
+          <a:bodyPr wrap="square" lIns="0" tIns="0" rIns="0" bIns="0" rtlCol="0" anchor="t"/>
+          <a:lstStyle/>
+          <a:p>
+            <a:pPr algn="l" marL="342900" indent="-342900">
+              <a:lnSpc>
+                <a:spcPct val="116000"/>
+              </a:lnSpc>
+              <a:spcAft>
+                <a:spcPts val="700"/>
+              </a:spcAft>
+              <a:buSzPct val="100000"/>
+              <a:buChar char="•"/>
+            </a:pPr>
+            <a:r>
+              <a:rPr lang="en-US" sz="1150" dirty="0">
+                <a:solidFill>
+                  <a:srgbClr val="33423A"/>
+                </a:solidFill>
+                <a:latin typeface="Calibri" pitchFamily="34" charset="0"/>
+                <a:ea typeface="Calibri" pitchFamily="34" charset="-122"/>
+                <a:cs typeface="Calibri" pitchFamily="34" charset="-120"/>
+              </a:rPr>
+              <a:t>Oasis en situation de stress hydrique structurel, moins de 100 mm de pluie par an.</a:t>
+            </a:r>
+            <a:endParaRPr lang="en-US" sz="1150" dirty="0"/>
+          </a:p>
+          <a:p>
+            <a:pPr algn="l" marL="342900" indent="-342900">
+              <a:lnSpc>
+                <a:spcPct val="116000"/>
+              </a:lnSpc>
+              <a:spcAft>
+                <a:spcPts val="700"/>
+              </a:spcAft>
+              <a:buSzPct val="100000"/>
+              <a:buChar char="•"/>
+            </a:pPr>
+            <a:r>
+              <a:rPr lang="en-US" sz="1150" dirty="0">
+                <a:solidFill>
+                  <a:srgbClr val="33423A"/>
+                </a:solidFill>
+                <a:latin typeface="Calibri" pitchFamily="34" charset="0"/>
+                <a:ea typeface="Calibri" pitchFamily="34" charset="-122"/>
+                <a:cs typeface="Calibri" pitchFamily="34" charset="-120"/>
+              </a:rPr>
+              <a:t>Enjeu de préservation autant que de rendement : lutte contre l'ensablement.</a:t>
+            </a:r>
+            <a:endParaRPr lang="en-US" sz="1150" dirty="0"/>
+          </a:p>
+          <a:p>
+            <a:pPr algn="l" marL="342900" indent="-342900">
+              <a:lnSpc>
+                <a:spcPct val="116000"/>
+              </a:lnSpc>
+              <a:spcAft>
+                <a:spcPts val="700"/>
+              </a:spcAft>
+              <a:buSzPct val="100000"/>
+              <a:buChar char="•"/>
+            </a:pPr>
+            <a:r>
+              <a:rPr lang="en-US" sz="1150" dirty="0">
+                <a:solidFill>
+                  <a:srgbClr val="33423A"/>
+                </a:solidFill>
+                <a:latin typeface="Calibri" pitchFamily="34" charset="0"/>
+                <a:ea typeface="Calibri" pitchFamily="34" charset="-122"/>
+                <a:cs typeface="Calibri" pitchFamily="34" charset="-120"/>
+              </a:rPr>
+              <a:t>Filières à forte valeur unitaire — datte de bouche, huile d'argan.</a:t>
+            </a:r>
+            <a:endParaRPr lang="en-US" sz="1150" dirty="0"/>
+          </a:p>
+        </p:txBody>
+      </p:sp>
+      <p:sp>
+        <p:nvSpPr>
+          <p:cNvPr id="19" name="Text 14"/>
+          <p:cNvSpPr txBox="1"/>
+          <p:nvPr/>
+        </p:nvSpPr>
+        <p:spPr>
+          <a:xfrm>
+            <a:off x="502920" y="6382512"/>
+            <a:ext cx="8229600" cy="274320"/>
+          </a:xfrm>
+          <a:prstGeom prst="rect">
+            <a:avLst/>
+          </a:prstGeom>
+          <a:noFill/>
+          <a:ln/>
+        </p:spPr>
+        <p:txBody>
+          <a:bodyPr wrap="square" lIns="0" tIns="0" rIns="0" bIns="0" rtlCol="0" anchor="ctr"/>
+          <a:lstStyle/>
+          <a:p>
+            <a:pPr algn="l" indent="0" marL="0">
+              <a:buNone/>
+            </a:pPr>
+            <a:r>
+              <a:rPr lang="en-US" sz="950" dirty="0">
+                <a:solidFill>
+                  <a:srgbClr val="6B7C72">
+                    <a:alpha val="80000"/>
+                  </a:srgbClr>
+                </a:solidFill>
+                <a:latin typeface="Calibri" pitchFamily="34" charset="0"/>
+                <a:ea typeface="Calibri" pitchFamily="34" charset="-122"/>
+                <a:cs typeface="Calibri" pitchFamily="34" charset="-120"/>
+              </a:rPr>
+              <a:t>Green Solutions · Dossier marché Maroc</a:t>
+            </a:r>
+            <a:endParaRPr lang="en-US" sz="950" dirty="0"/>
+          </a:p>
+        </p:txBody>
+      </p:sp>
+      <p:sp>
+        <p:nvSpPr>
+          <p:cNvPr id="20" name="Text 15"/>
+          <p:cNvSpPr txBox="1"/>
+          <p:nvPr/>
+        </p:nvSpPr>
+        <p:spPr>
+          <a:xfrm>
+            <a:off x="11140135" y="6382512"/>
+            <a:ext cx="548640" cy="274320"/>
+          </a:xfrm>
+          <a:prstGeom prst="rect">
+            <a:avLst/>
+          </a:prstGeom>
+          <a:noFill/>
+          <a:ln/>
+        </p:spPr>
+        <p:txBody>
+          <a:bodyPr wrap="square" lIns="0" tIns="0" rIns="0" bIns="0" rtlCol="0" anchor="ctr"/>
+          <a:lstStyle/>
+          <a:p>
+            <a:pPr algn="r" indent="0" marL="0">
+              <a:buNone/>
+            </a:pPr>
+            <a:r>
+              <a:rPr lang="en-US" sz="950" dirty="0">
+                <a:solidFill>
+                  <a:srgbClr val="6B7C72">
+                    <a:alpha val="80000"/>
+                  </a:srgbClr>
+                </a:solidFill>
+                <a:latin typeface="Calibri" pitchFamily="34" charset="0"/>
+                <a:ea typeface="Calibri" pitchFamily="34" charset="-122"/>
+                <a:cs typeface="Calibri" pitchFamily="34" charset="-120"/>
+              </a:rPr>
+              <a:t>12</a:t>
+            </a:r>
+            <a:endParaRPr lang="en-US" sz="950" dirty="0"/>
+          </a:p>
+        </p:txBody>
+      </p:sp>
+    </p:spTree>
+  </p:cSld>
+  <p:clrMapOvr>
+    <a:masterClrMapping/>
+  </p:clrMapOvr>
+</p:sld>
+</file>
+
+<file path=ppt/slides/slide14.xml><?xml version="1.0" encoding="utf-8"?>
+<p:sld xmlns:a="http://schemas.openxmlformats.org/drawingml/2006/main" xmlns:r="http://schemas.openxmlformats.org/officeDocument/2006/relationships" xmlns:p="http://schemas.openxmlformats.org/presentationml/2006/main">
+  <p:cSld name="Slide 14">
+    <p:bg>
+      <p:bgPr>
+        <a:solidFill>
+          <a:srgbClr val="FBFAF6"/>
+        </a:solidFill>
+      </p:bgPr>
+    </p:bg>
+    <p:spTree>
+      <p:nvGrpSpPr>
+        <p:cNvPr id="1" name=""/>
+        <p:cNvGrpSpPr/>
+        <p:nvPr/>
+      </p:nvGrpSpPr>
+      <p:grpSpPr>
+        <a:xfrm>
+          <a:off x="0" y="0"/>
+          <a:ext cx="0" cy="0"/>
+          <a:chOff x="0" y="0"/>
+          <a:chExt cx="0" cy="0"/>
+        </a:xfrm>
+      </p:grpSpPr>
+      <p:sp>
+        <p:nvSpPr>
+          <p:cNvPr id="2" name="Text 0"/>
+          <p:cNvSpPr txBox="1"/>
+          <p:nvPr/>
+        </p:nvSpPr>
+        <p:spPr>
+          <a:xfrm>
+            <a:off x="594360" y="411480"/>
+            <a:ext cx="10515600" cy="274320"/>
+          </a:xfrm>
+          <a:prstGeom prst="rect">
+            <a:avLst/>
+          </a:prstGeom>
+          <a:noFill/>
+          <a:ln/>
+        </p:spPr>
+        <p:txBody>
+          <a:bodyPr wrap="square" lIns="0" tIns="0" rIns="0" bIns="0" rtlCol="0" anchor="ctr"/>
+          <a:lstStyle/>
+          <a:p>
+            <a:pPr algn="l" indent="0" marL="0">
+              <a:buNone/>
+            </a:pPr>
+            <a:r>
+              <a:rPr lang="en-US" sz="1150" b="1" spc="200" kern="0" dirty="0">
+                <a:solidFill>
+                  <a:srgbClr val="E3B23C"/>
+                </a:solidFill>
+                <a:latin typeface="Calibri" pitchFamily="34" charset="0"/>
+                <a:ea typeface="Calibri" pitchFamily="34" charset="-122"/>
+                <a:cs typeface="Calibri" pitchFamily="34" charset="-120"/>
+              </a:rPr>
+              <a:t>COMMENT NOUS PROCÉDONS</a:t>
+            </a:r>
+            <a:endParaRPr lang="en-US" sz="1150" dirty="0"/>
+          </a:p>
+        </p:txBody>
+      </p:sp>
+      <p:sp>
+        <p:nvSpPr>
+          <p:cNvPr id="3" name="Text 1"/>
+          <p:cNvSpPr txBox="1"/>
+          <p:nvPr/>
+        </p:nvSpPr>
+        <p:spPr>
+          <a:xfrm>
+            <a:off x="594360" y="731520"/>
+            <a:ext cx="10881360" cy="731520"/>
+          </a:xfrm>
+          <a:prstGeom prst="rect">
+            <a:avLst/>
+          </a:prstGeom>
+          <a:noFill/>
+          <a:ln/>
+        </p:spPr>
+        <p:txBody>
+          <a:bodyPr wrap="square" lIns="0" tIns="0" rIns="0" bIns="0" rtlCol="0" anchor="ctr"/>
+          <a:lstStyle/>
+          <a:p>
+            <a:pPr algn="l" indent="0" marL="0">
+              <a:buNone/>
+            </a:pPr>
+            <a:r>
+              <a:rPr lang="en-US" sz="3000" b="1" dirty="0">
+                <a:solidFill>
+                  <a:srgbClr val="123324"/>
+                </a:solidFill>
+                <a:latin typeface="Cambria" pitchFamily="34" charset="0"/>
+                <a:ea typeface="Cambria" pitchFamily="34" charset="-122"/>
+                <a:cs typeface="Cambria" pitchFamily="34" charset="-120"/>
+              </a:rPr>
+              <a:t>Un déploiement par étapes, mesuré à chaque palier</a:t>
+            </a:r>
+            <a:endParaRPr lang="en-US" sz="3000" dirty="0"/>
+          </a:p>
+        </p:txBody>
+      </p:sp>
+      <p:sp>
+        <p:nvSpPr>
+          <p:cNvPr id="4" name="Shape 2"/>
+          <p:cNvSpPr/>
+          <p:nvPr/>
+        </p:nvSpPr>
+        <p:spPr>
+          <a:xfrm>
+            <a:off x="594360" y="1874520"/>
+            <a:ext cx="2545004" cy="2834640"/>
+          </a:xfrm>
+          <a:prstGeom prst="roundRect">
+            <a:avLst>
+              <a:gd name="adj" fmla="val 3593"/>
+            </a:avLst>
+          </a:prstGeom>
+          <a:solidFill>
+            <a:srgbClr val="F1F4EF"/>
+          </a:solidFill>
+          <a:ln w="9525">
+            <a:solidFill>
+              <a:srgbClr val="DCE4DA"/>
+            </a:solidFill>
+            <a:prstDash val="solid"/>
+          </a:ln>
+        </p:spPr>
+      </p:sp>
+      <p:sp>
+        <p:nvSpPr>
+          <p:cNvPr id="5" name="Shape 3"/>
+          <p:cNvSpPr/>
+          <p:nvPr/>
+        </p:nvSpPr>
+        <p:spPr>
+          <a:xfrm>
+            <a:off x="822960" y="2103120"/>
+            <a:ext cx="566928" cy="566928"/>
+          </a:xfrm>
+          <a:prstGeom prst="ellipse">
+            <a:avLst/>
+          </a:prstGeom>
+          <a:solidFill>
+            <a:srgbClr val="1F5C3A"/>
+          </a:solidFill>
+          <a:ln/>
+        </p:spPr>
+      </p:sp>
+      <p:sp>
+        <p:nvSpPr>
+          <p:cNvPr id="6" name="Text 4"/>
+          <p:cNvSpPr txBox="1"/>
+          <p:nvPr/>
+        </p:nvSpPr>
+        <p:spPr>
+          <a:xfrm>
+            <a:off x="822960" y="2103120"/>
+            <a:ext cx="566928" cy="566928"/>
+          </a:xfrm>
+          <a:prstGeom prst="rect">
+            <a:avLst/>
+          </a:prstGeom>
+          <a:noFill/>
+          <a:ln/>
+        </p:spPr>
+        <p:txBody>
+          <a:bodyPr wrap="square" lIns="0" tIns="0" rIns="0" bIns="0" rtlCol="0" anchor="ctr"/>
+          <a:lstStyle/>
+          <a:p>
+            <a:pPr algn="ctr" indent="0" marL="0">
+              <a:buNone/>
+            </a:pPr>
+            <a:r>
+              <a:rPr lang="en-US" sz="1600" b="1" dirty="0">
+                <a:solidFill>
+                  <a:srgbClr val="FFFFFF"/>
+                </a:solidFill>
+                <a:latin typeface="Cambria" pitchFamily="34" charset="0"/>
+                <a:ea typeface="Cambria" pitchFamily="34" charset="-122"/>
+                <a:cs typeface="Cambria" pitchFamily="34" charset="-120"/>
+              </a:rPr>
+              <a:t>1</a:t>
+            </a:r>
+            <a:endParaRPr lang="en-US" sz="1600" dirty="0"/>
+          </a:p>
+        </p:txBody>
+      </p:sp>
+      <p:sp>
+        <p:nvSpPr>
+          <p:cNvPr id="7" name="Text 5"/>
+          <p:cNvSpPr txBox="1"/>
+          <p:nvPr/>
+        </p:nvSpPr>
+        <p:spPr>
+          <a:xfrm>
+            <a:off x="822960" y="2788920"/>
+            <a:ext cx="2087804" cy="457200"/>
+          </a:xfrm>
+          <a:prstGeom prst="rect">
+            <a:avLst/>
+          </a:prstGeom>
+          <a:noFill/>
+          <a:ln/>
+        </p:spPr>
+        <p:txBody>
+          <a:bodyPr wrap="square" lIns="0" tIns="0" rIns="0" bIns="0" rtlCol="0" anchor="ctr"/>
+          <a:lstStyle/>
+          <a:p>
+            <a:pPr algn="l" indent="0" marL="0">
+              <a:buNone/>
+            </a:pPr>
+            <a:r>
+              <a:rPr lang="en-US" sz="1400" b="1" dirty="0">
+                <a:solidFill>
+                  <a:srgbClr val="1F5C3A"/>
+                </a:solidFill>
+                <a:latin typeface="Cambria" pitchFamily="34" charset="0"/>
+                <a:ea typeface="Cambria" pitchFamily="34" charset="-122"/>
+                <a:cs typeface="Cambria" pitchFamily="34" charset="-120"/>
+              </a:rPr>
+              <a:t>Diagnostic</a:t>
+            </a:r>
+            <a:endParaRPr lang="en-US" sz="1400" dirty="0"/>
+          </a:p>
+        </p:txBody>
+      </p:sp>
+      <p:sp>
+        <p:nvSpPr>
+          <p:cNvPr id="8" name="Text 6"/>
+          <p:cNvSpPr txBox="1"/>
+          <p:nvPr/>
+        </p:nvSpPr>
+        <p:spPr>
+          <a:xfrm>
+            <a:off x="822960" y="3291840"/>
+            <a:ext cx="2087804" cy="1234440"/>
+          </a:xfrm>
+          <a:prstGeom prst="rect">
+            <a:avLst/>
+          </a:prstGeom>
+          <a:noFill/>
+          <a:ln/>
+        </p:spPr>
+        <p:txBody>
+          <a:bodyPr wrap="square" lIns="0" tIns="0" rIns="0" bIns="0" rtlCol="0" anchor="t"/>
+          <a:lstStyle/>
+          <a:p>
+            <a:pPr algn="l" indent="0" marL="0">
+              <a:lnSpc>
+                <a:spcPct val="120000"/>
+              </a:lnSpc>
+              <a:buNone/>
+            </a:pPr>
+            <a:r>
+              <a:rPr lang="en-US" sz="1200" dirty="0">
+                <a:solidFill>
+                  <a:srgbClr val="33423A"/>
+                </a:solidFill>
+                <a:latin typeface="Calibri" pitchFamily="34" charset="0"/>
+                <a:ea typeface="Calibri" pitchFamily="34" charset="-122"/>
+                <a:cs typeface="Calibri" pitchFamily="34" charset="-120"/>
+              </a:rPr>
+              <a:t>Analyse du sol, du mode d'irrigation et de la culture. Aucun engagement à ce stade.</a:t>
+            </a:r>
+            <a:endParaRPr lang="en-US" sz="1200" dirty="0"/>
+          </a:p>
+        </p:txBody>
+      </p:sp>
+      <p:sp>
+        <p:nvSpPr>
+          <p:cNvPr id="9" name="Shape 7"/>
+          <p:cNvSpPr/>
+          <p:nvPr/>
+        </p:nvSpPr>
+        <p:spPr>
+          <a:xfrm>
+            <a:off x="3413684" y="1874520"/>
+            <a:ext cx="2545004" cy="2834640"/>
+          </a:xfrm>
+          <a:prstGeom prst="roundRect">
+            <a:avLst>
+              <a:gd name="adj" fmla="val 3593"/>
+            </a:avLst>
+          </a:prstGeom>
+          <a:solidFill>
+            <a:srgbClr val="F1F4EF"/>
+          </a:solidFill>
+          <a:ln w="9525">
+            <a:solidFill>
+              <a:srgbClr val="DCE4DA"/>
+            </a:solidFill>
+            <a:prstDash val="solid"/>
+          </a:ln>
+        </p:spPr>
+      </p:sp>
+      <p:sp>
+        <p:nvSpPr>
+          <p:cNvPr id="10" name="Shape 8"/>
+          <p:cNvSpPr/>
+          <p:nvPr/>
+        </p:nvSpPr>
+        <p:spPr>
+          <a:xfrm>
+            <a:off x="3642284" y="2103120"/>
+            <a:ext cx="566928" cy="566928"/>
+          </a:xfrm>
+          <a:prstGeom prst="ellipse">
+            <a:avLst/>
+          </a:prstGeom>
+          <a:solidFill>
+            <a:srgbClr val="1F5C3A"/>
+          </a:solidFill>
+          <a:ln/>
+        </p:spPr>
+      </p:sp>
+      <p:sp>
+        <p:nvSpPr>
+          <p:cNvPr id="11" name="Text 9"/>
+          <p:cNvSpPr txBox="1"/>
+          <p:nvPr/>
+        </p:nvSpPr>
+        <p:spPr>
+          <a:xfrm>
+            <a:off x="3642284" y="2103120"/>
+            <a:ext cx="566928" cy="566928"/>
+          </a:xfrm>
+          <a:prstGeom prst="rect">
+            <a:avLst/>
+          </a:prstGeom>
+          <a:noFill/>
+          <a:ln/>
+        </p:spPr>
+        <p:txBody>
+          <a:bodyPr wrap="square" lIns="0" tIns="0" rIns="0" bIns="0" rtlCol="0" anchor="ctr"/>
+          <a:lstStyle/>
+          <a:p>
+            <a:pPr algn="ctr" indent="0" marL="0">
+              <a:buNone/>
+            </a:pPr>
+            <a:r>
+              <a:rPr lang="en-US" sz="1600" b="1" dirty="0">
+                <a:solidFill>
+                  <a:srgbClr val="FFFFFF"/>
+                </a:solidFill>
+                <a:latin typeface="Cambria" pitchFamily="34" charset="0"/>
+                <a:ea typeface="Cambria" pitchFamily="34" charset="-122"/>
+                <a:cs typeface="Cambria" pitchFamily="34" charset="-120"/>
+              </a:rPr>
+              <a:t>2</a:t>
+            </a:r>
+            <a:endParaRPr lang="en-US" sz="1600" dirty="0"/>
+          </a:p>
+        </p:txBody>
+      </p:sp>
+      <p:sp>
+        <p:nvSpPr>
+          <p:cNvPr id="12" name="Text 10"/>
+          <p:cNvSpPr txBox="1"/>
+          <p:nvPr/>
+        </p:nvSpPr>
+        <p:spPr>
+          <a:xfrm>
+            <a:off x="3642284" y="2788920"/>
+            <a:ext cx="2087804" cy="457200"/>
+          </a:xfrm>
+          <a:prstGeom prst="rect">
+            <a:avLst/>
+          </a:prstGeom>
+          <a:noFill/>
+          <a:ln/>
+        </p:spPr>
+        <p:txBody>
+          <a:bodyPr wrap="square" lIns="0" tIns="0" rIns="0" bIns="0" rtlCol="0" anchor="ctr"/>
+          <a:lstStyle/>
+          <a:p>
+            <a:pPr algn="l" indent="0" marL="0">
+              <a:buNone/>
+            </a:pPr>
+            <a:r>
+              <a:rPr lang="en-US" sz="1400" b="1" dirty="0">
+                <a:solidFill>
+                  <a:srgbClr val="1F5C3A"/>
+                </a:solidFill>
+                <a:latin typeface="Cambria" pitchFamily="34" charset="0"/>
+                <a:ea typeface="Cambria" pitchFamily="34" charset="-122"/>
+                <a:cs typeface="Cambria" pitchFamily="34" charset="-120"/>
+              </a:rPr>
+              <a:t>Parcelle témoin</a:t>
+            </a:r>
+            <a:endParaRPr lang="en-US" sz="1400" dirty="0"/>
+          </a:p>
+        </p:txBody>
+      </p:sp>
+      <p:sp>
+        <p:nvSpPr>
+          <p:cNvPr id="13" name="Text 11"/>
+          <p:cNvSpPr txBox="1"/>
+          <p:nvPr/>
+        </p:nvSpPr>
+        <p:spPr>
+          <a:xfrm>
+            <a:off x="3642284" y="3291840"/>
+            <a:ext cx="2087804" cy="1234440"/>
+          </a:xfrm>
+          <a:prstGeom prst="rect">
+            <a:avLst/>
+          </a:prstGeom>
+          <a:noFill/>
+          <a:ln/>
+        </p:spPr>
+        <p:txBody>
+          <a:bodyPr wrap="square" lIns="0" tIns="0" rIns="0" bIns="0" rtlCol="0" anchor="t"/>
+          <a:lstStyle/>
+          <a:p>
+            <a:pPr algn="l" indent="0" marL="0">
+              <a:lnSpc>
+                <a:spcPct val="120000"/>
+              </a:lnSpc>
+              <a:buNone/>
+            </a:pPr>
+            <a:r>
+              <a:rPr lang="en-US" sz="1200" dirty="0">
+                <a:solidFill>
+                  <a:srgbClr val="33423A"/>
+                </a:solidFill>
+                <a:latin typeface="Calibri" pitchFamily="34" charset="0"/>
+                <a:ea typeface="Calibri" pitchFamily="34" charset="-122"/>
+                <a:cs typeface="Calibri" pitchFamily="34" charset="-120"/>
+              </a:rPr>
+              <a:t>Un essai comparatif sur une parcelle, avec parcelle témoin conduite à l'identique.</a:t>
+            </a:r>
+            <a:endParaRPr lang="en-US" sz="1200" dirty="0"/>
+          </a:p>
+        </p:txBody>
+      </p:sp>
+      <p:sp>
+        <p:nvSpPr>
+          <p:cNvPr id="14" name="Shape 12"/>
+          <p:cNvSpPr/>
+          <p:nvPr/>
+        </p:nvSpPr>
+        <p:spPr>
+          <a:xfrm>
+            <a:off x="6233008" y="1874520"/>
+            <a:ext cx="2545004" cy="2834640"/>
+          </a:xfrm>
+          <a:prstGeom prst="roundRect">
+            <a:avLst>
+              <a:gd name="adj" fmla="val 3593"/>
+            </a:avLst>
+          </a:prstGeom>
+          <a:solidFill>
+            <a:srgbClr val="F1F4EF"/>
+          </a:solidFill>
+          <a:ln w="9525">
+            <a:solidFill>
+              <a:srgbClr val="DCE4DA"/>
+            </a:solidFill>
+            <a:prstDash val="solid"/>
+          </a:ln>
+        </p:spPr>
+      </p:sp>
+      <p:sp>
+        <p:nvSpPr>
+          <p:cNvPr id="15" name="Shape 13"/>
+          <p:cNvSpPr/>
+          <p:nvPr/>
+        </p:nvSpPr>
+        <p:spPr>
+          <a:xfrm>
+            <a:off x="6461608" y="2103120"/>
+            <a:ext cx="566928" cy="566928"/>
+          </a:xfrm>
+          <a:prstGeom prst="ellipse">
+            <a:avLst/>
+          </a:prstGeom>
+          <a:solidFill>
+            <a:srgbClr val="1F5C3A"/>
+          </a:solidFill>
+          <a:ln/>
+        </p:spPr>
+      </p:sp>
+      <p:sp>
+        <p:nvSpPr>
+          <p:cNvPr id="16" name="Text 14"/>
+          <p:cNvSpPr txBox="1"/>
+          <p:nvPr/>
+        </p:nvSpPr>
+        <p:spPr>
+          <a:xfrm>
+            <a:off x="6461608" y="2103120"/>
+            <a:ext cx="566928" cy="566928"/>
+          </a:xfrm>
+          <a:prstGeom prst="rect">
+            <a:avLst/>
+          </a:prstGeom>
+          <a:noFill/>
+          <a:ln/>
+        </p:spPr>
+        <p:txBody>
+          <a:bodyPr wrap="square" lIns="0" tIns="0" rIns="0" bIns="0" rtlCol="0" anchor="ctr"/>
+          <a:lstStyle/>
+          <a:p>
+            <a:pPr algn="ctr" indent="0" marL="0">
+              <a:buNone/>
+            </a:pPr>
+            <a:r>
+              <a:rPr lang="en-US" sz="1600" b="1" dirty="0">
+                <a:solidFill>
+                  <a:srgbClr val="FFFFFF"/>
+                </a:solidFill>
+                <a:latin typeface="Cambria" pitchFamily="34" charset="0"/>
+                <a:ea typeface="Cambria" pitchFamily="34" charset="-122"/>
+                <a:cs typeface="Cambria" pitchFamily="34" charset="-120"/>
+              </a:rPr>
+              <a:t>3</a:t>
+            </a:r>
+            <a:endParaRPr lang="en-US" sz="1600" dirty="0"/>
+          </a:p>
+        </p:txBody>
+      </p:sp>
+      <p:sp>
+        <p:nvSpPr>
+          <p:cNvPr id="17" name="Text 15"/>
+          <p:cNvSpPr txBox="1"/>
+          <p:nvPr/>
+        </p:nvSpPr>
+        <p:spPr>
+          <a:xfrm>
+            <a:off x="6461608" y="2788920"/>
+            <a:ext cx="2087804" cy="457200"/>
+          </a:xfrm>
+          <a:prstGeom prst="rect">
+            <a:avLst/>
+          </a:prstGeom>
+          <a:noFill/>
+          <a:ln/>
+        </p:spPr>
+        <p:txBody>
+          <a:bodyPr wrap="square" lIns="0" tIns="0" rIns="0" bIns="0" rtlCol="0" anchor="ctr"/>
+          <a:lstStyle/>
+          <a:p>
+            <a:pPr algn="l" indent="0" marL="0">
+              <a:buNone/>
+            </a:pPr>
+            <a:r>
+              <a:rPr lang="en-US" sz="1400" b="1" dirty="0">
+                <a:solidFill>
+                  <a:srgbClr val="1F5C3A"/>
+                </a:solidFill>
+                <a:latin typeface="Cambria" pitchFamily="34" charset="0"/>
+                <a:ea typeface="Cambria" pitchFamily="34" charset="-122"/>
+                <a:cs typeface="Cambria" pitchFamily="34" charset="-120"/>
+              </a:rPr>
+              <a:t>Mesure</a:t>
+            </a:r>
+            <a:endParaRPr lang="en-US" sz="1400" dirty="0"/>
+          </a:p>
+        </p:txBody>
+      </p:sp>
+      <p:sp>
+        <p:nvSpPr>
+          <p:cNvPr id="18" name="Text 16"/>
+          <p:cNvSpPr txBox="1"/>
+          <p:nvPr/>
+        </p:nvSpPr>
+        <p:spPr>
+          <a:xfrm>
+            <a:off x="6461608" y="3291840"/>
+            <a:ext cx="2087804" cy="1234440"/>
+          </a:xfrm>
+          <a:prstGeom prst="rect">
+            <a:avLst/>
+          </a:prstGeom>
+          <a:noFill/>
+          <a:ln/>
+        </p:spPr>
+        <p:txBody>
+          <a:bodyPr wrap="square" lIns="0" tIns="0" rIns="0" bIns="0" rtlCol="0" anchor="t"/>
+          <a:lstStyle/>
+          <a:p>
+            <a:pPr algn="l" indent="0" marL="0">
+              <a:lnSpc>
+                <a:spcPct val="120000"/>
+              </a:lnSpc>
+              <a:buNone/>
+            </a:pPr>
+            <a:r>
+              <a:rPr lang="en-US" sz="1200" dirty="0">
+                <a:solidFill>
+                  <a:srgbClr val="33423A"/>
+                </a:solidFill>
+                <a:latin typeface="Calibri" pitchFamily="34" charset="0"/>
+                <a:ea typeface="Calibri" pitchFamily="34" charset="-122"/>
+                <a:cs typeface="Calibri" pitchFamily="34" charset="-120"/>
+              </a:rPr>
+              <a:t>Relevés de consommation et de rendement sur un cycle cultural complet.</a:t>
+            </a:r>
+            <a:endParaRPr lang="en-US" sz="1200" dirty="0"/>
+          </a:p>
+        </p:txBody>
+      </p:sp>
+      <p:sp>
+        <p:nvSpPr>
+          <p:cNvPr id="19" name="Shape 17"/>
+          <p:cNvSpPr/>
+          <p:nvPr/>
+        </p:nvSpPr>
+        <p:spPr>
+          <a:xfrm>
+            <a:off x="9052331" y="1874520"/>
+            <a:ext cx="2545004" cy="2834640"/>
+          </a:xfrm>
+          <a:prstGeom prst="roundRect">
+            <a:avLst>
+              <a:gd name="adj" fmla="val 3593"/>
+            </a:avLst>
+          </a:prstGeom>
+          <a:solidFill>
+            <a:srgbClr val="F1F4EF"/>
+          </a:solidFill>
+          <a:ln w="9525">
+            <a:solidFill>
+              <a:srgbClr val="DCE4DA"/>
+            </a:solidFill>
+            <a:prstDash val="solid"/>
+          </a:ln>
+        </p:spPr>
+      </p:sp>
+      <p:sp>
+        <p:nvSpPr>
+          <p:cNvPr id="20" name="Shape 18"/>
+          <p:cNvSpPr/>
+          <p:nvPr/>
+        </p:nvSpPr>
+        <p:spPr>
+          <a:xfrm>
+            <a:off x="9280931" y="2103120"/>
+            <a:ext cx="566928" cy="566928"/>
+          </a:xfrm>
+          <a:prstGeom prst="ellipse">
+            <a:avLst/>
+          </a:prstGeom>
+          <a:solidFill>
+            <a:srgbClr val="1F5C3A"/>
+          </a:solidFill>
+          <a:ln/>
+        </p:spPr>
+      </p:sp>
+      <p:sp>
+        <p:nvSpPr>
+          <p:cNvPr id="21" name="Text 19"/>
+          <p:cNvSpPr txBox="1"/>
+          <p:nvPr/>
+        </p:nvSpPr>
+        <p:spPr>
+          <a:xfrm>
+            <a:off x="9280931" y="2103120"/>
+            <a:ext cx="566928" cy="566928"/>
+          </a:xfrm>
+          <a:prstGeom prst="rect">
+            <a:avLst/>
+          </a:prstGeom>
+          <a:noFill/>
+          <a:ln/>
+        </p:spPr>
+        <p:txBody>
+          <a:bodyPr wrap="square" lIns="0" tIns="0" rIns="0" bIns="0" rtlCol="0" anchor="ctr"/>
+          <a:lstStyle/>
+          <a:p>
+            <a:pPr algn="ctr" indent="0" marL="0">
+              <a:buNone/>
+            </a:pPr>
+            <a:r>
+              <a:rPr lang="en-US" sz="1600" b="1" dirty="0">
+                <a:solidFill>
+                  <a:srgbClr val="FFFFFF"/>
+                </a:solidFill>
+                <a:latin typeface="Cambria" pitchFamily="34" charset="0"/>
+                <a:ea typeface="Cambria" pitchFamily="34" charset="-122"/>
+                <a:cs typeface="Cambria" pitchFamily="34" charset="-120"/>
+              </a:rPr>
+              <a:t>4</a:t>
+            </a:r>
+            <a:endParaRPr lang="en-US" sz="1600" dirty="0"/>
+          </a:p>
+        </p:txBody>
+      </p:sp>
+      <p:sp>
+        <p:nvSpPr>
+          <p:cNvPr id="22" name="Text 20"/>
+          <p:cNvSpPr txBox="1"/>
+          <p:nvPr/>
+        </p:nvSpPr>
+        <p:spPr>
+          <a:xfrm>
+            <a:off x="9280931" y="2788920"/>
+            <a:ext cx="2087804" cy="457200"/>
+          </a:xfrm>
+          <a:prstGeom prst="rect">
+            <a:avLst/>
+          </a:prstGeom>
+          <a:noFill/>
+          <a:ln/>
+        </p:spPr>
+        <p:txBody>
+          <a:bodyPr wrap="square" lIns="0" tIns="0" rIns="0" bIns="0" rtlCol="0" anchor="ctr"/>
+          <a:lstStyle/>
+          <a:p>
+            <a:pPr algn="l" indent="0" marL="0">
+              <a:buNone/>
+            </a:pPr>
+            <a:r>
+              <a:rPr lang="en-US" sz="1400" b="1" dirty="0">
+                <a:solidFill>
+                  <a:srgbClr val="1F5C3A"/>
+                </a:solidFill>
+                <a:latin typeface="Cambria" pitchFamily="34" charset="0"/>
+                <a:ea typeface="Cambria" pitchFamily="34" charset="-122"/>
+                <a:cs typeface="Cambria" pitchFamily="34" charset="-120"/>
+              </a:rPr>
+              <a:t>Extension</a:t>
+            </a:r>
+            <a:endParaRPr lang="en-US" sz="1400" dirty="0"/>
+          </a:p>
+        </p:txBody>
+      </p:sp>
+      <p:sp>
+        <p:nvSpPr>
+          <p:cNvPr id="23" name="Text 21"/>
+          <p:cNvSpPr txBox="1"/>
+          <p:nvPr/>
+        </p:nvSpPr>
+        <p:spPr>
+          <a:xfrm>
+            <a:off x="9280931" y="3291840"/>
+            <a:ext cx="2087804" cy="1234440"/>
+          </a:xfrm>
+          <a:prstGeom prst="rect">
+            <a:avLst/>
+          </a:prstGeom>
+          <a:noFill/>
+          <a:ln/>
+        </p:spPr>
+        <p:txBody>
+          <a:bodyPr wrap="square" lIns="0" tIns="0" rIns="0" bIns="0" rtlCol="0" anchor="t"/>
+          <a:lstStyle/>
+          <a:p>
+            <a:pPr algn="l" indent="0" marL="0">
+              <a:lnSpc>
+                <a:spcPct val="120000"/>
+              </a:lnSpc>
+              <a:buNone/>
+            </a:pPr>
+            <a:r>
+              <a:rPr lang="en-US" sz="1200" dirty="0">
+                <a:solidFill>
+                  <a:srgbClr val="33423A"/>
+                </a:solidFill>
+                <a:latin typeface="Calibri" pitchFamily="34" charset="0"/>
+                <a:ea typeface="Calibri" pitchFamily="34" charset="-122"/>
+                <a:cs typeface="Calibri" pitchFamily="34" charset="-120"/>
+              </a:rPr>
+              <a:t>Généralisation progressive aux autres parcelles sur la base des résultats constatés.</a:t>
+            </a:r>
+            <a:endParaRPr lang="en-US" sz="1200" dirty="0"/>
+          </a:p>
+        </p:txBody>
+      </p:sp>
+      <p:sp>
+        <p:nvSpPr>
+          <p:cNvPr id="24" name="Text 22"/>
+          <p:cNvSpPr txBox="1"/>
+          <p:nvPr/>
+        </p:nvSpPr>
+        <p:spPr>
+          <a:xfrm>
+            <a:off x="594360" y="4983480"/>
+            <a:ext cx="11002975" cy="822960"/>
+          </a:xfrm>
+          <a:prstGeom prst="rect">
+            <a:avLst/>
+          </a:prstGeom>
+          <a:noFill/>
+          <a:ln/>
+        </p:spPr>
+        <p:txBody>
+          <a:bodyPr wrap="square" lIns="0" tIns="0" rIns="0" bIns="0" rtlCol="0" anchor="t"/>
+          <a:lstStyle/>
+          <a:p>
+            <a:pPr algn="l" indent="0" marL="0">
+              <a:lnSpc>
+                <a:spcPct val="125000"/>
+              </a:lnSpc>
+              <a:buNone/>
+            </a:pPr>
+            <a:r>
+              <a:rPr lang="en-US" sz="1250" i="1" dirty="0">
+                <a:solidFill>
+                  <a:srgbClr val="6B7C72"/>
+                </a:solidFill>
+                <a:latin typeface="Calibri" pitchFamily="34" charset="0"/>
+                <a:ea typeface="Calibri" pitchFamily="34" charset="-122"/>
+                <a:cs typeface="Calibri" pitchFamily="34" charset="-120"/>
+              </a:rPr>
+              <a:t>La règle de dosage est la même partout : 3 grammes par litre de terre utile. Ce qui change d'un terrain à l'autre, c'est le volume de terre effectivement exploré par les racines.</a:t>
+            </a:r>
+            <a:endParaRPr lang="en-US" sz="1250" dirty="0"/>
+          </a:p>
+        </p:txBody>
+      </p:sp>
+      <p:sp>
+        <p:nvSpPr>
+          <p:cNvPr id="25" name="Text 23"/>
+          <p:cNvSpPr txBox="1"/>
+          <p:nvPr/>
+        </p:nvSpPr>
+        <p:spPr>
+          <a:xfrm>
+            <a:off x="502920" y="6382512"/>
+            <a:ext cx="8229600" cy="274320"/>
+          </a:xfrm>
+          <a:prstGeom prst="rect">
+            <a:avLst/>
+          </a:prstGeom>
+          <a:noFill/>
+          <a:ln/>
+        </p:spPr>
+        <p:txBody>
+          <a:bodyPr wrap="square" lIns="0" tIns="0" rIns="0" bIns="0" rtlCol="0" anchor="ctr"/>
+          <a:lstStyle/>
+          <a:p>
+            <a:pPr algn="l" indent="0" marL="0">
+              <a:buNone/>
+            </a:pPr>
+            <a:r>
+              <a:rPr lang="en-US" sz="950" dirty="0">
+                <a:solidFill>
+                  <a:srgbClr val="6B7C72">
+                    <a:alpha val="80000"/>
+                  </a:srgbClr>
+                </a:solidFill>
+                <a:latin typeface="Calibri" pitchFamily="34" charset="0"/>
+                <a:ea typeface="Calibri" pitchFamily="34" charset="-122"/>
+                <a:cs typeface="Calibri" pitchFamily="34" charset="-120"/>
+              </a:rPr>
+              <a:t>Green Solutions · Dossier marché Maroc</a:t>
+            </a:r>
+            <a:endParaRPr lang="en-US" sz="950" dirty="0"/>
+          </a:p>
+        </p:txBody>
+      </p:sp>
+      <p:sp>
+        <p:nvSpPr>
+          <p:cNvPr id="26" name="Text 24"/>
+          <p:cNvSpPr txBox="1"/>
+          <p:nvPr/>
+        </p:nvSpPr>
+        <p:spPr>
+          <a:xfrm>
+            <a:off x="11140135" y="6382512"/>
+            <a:ext cx="548640" cy="274320"/>
+          </a:xfrm>
+          <a:prstGeom prst="rect">
+            <a:avLst/>
+          </a:prstGeom>
+          <a:noFill/>
+          <a:ln/>
+        </p:spPr>
+        <p:txBody>
+          <a:bodyPr wrap="square" lIns="0" tIns="0" rIns="0" bIns="0" rtlCol="0" anchor="ctr"/>
+          <a:lstStyle/>
+          <a:p>
+            <a:pPr algn="r" indent="0" marL="0">
+              <a:buNone/>
+            </a:pPr>
+            <a:r>
+              <a:rPr lang="en-US" sz="950" dirty="0">
+                <a:solidFill>
+                  <a:srgbClr val="6B7C72">
+                    <a:alpha val="80000"/>
+                  </a:srgbClr>
+                </a:solidFill>
+                <a:latin typeface="Calibri" pitchFamily="34" charset="0"/>
+                <a:ea typeface="Calibri" pitchFamily="34" charset="-122"/>
+                <a:cs typeface="Calibri" pitchFamily="34" charset="-120"/>
+              </a:rPr>
+              <a:t>13</a:t>
+            </a:r>
+            <a:endParaRPr lang="en-US" sz="950" dirty="0"/>
+          </a:p>
+        </p:txBody>
+      </p:sp>
+    </p:spTree>
+  </p:cSld>
+  <p:clrMapOvr>
+    <a:masterClrMapping/>
+  </p:clrMapOvr>
+</p:sld>
+</file>
+
+<file path=ppt/slides/slide15.xml><?xml version="1.0" encoding="utf-8"?>
+<p:sld xmlns:a="http://schemas.openxmlformats.org/drawingml/2006/main" xmlns:r="http://schemas.openxmlformats.org/officeDocument/2006/relationships" xmlns:p="http://schemas.openxmlformats.org/presentationml/2006/main">
+  <p:cSld name="Slide 15">
+    <p:bg>
+      <p:bgPr>
+        <a:solidFill>
+          <a:srgbClr val="FBFAF6"/>
+        </a:solidFill>
+      </p:bgPr>
+    </p:bg>
+    <p:spTree>
+      <p:nvGrpSpPr>
+        <p:cNvPr id="1" name=""/>
+        <p:cNvGrpSpPr/>
+        <p:nvPr/>
+      </p:nvGrpSpPr>
+      <p:grpSpPr>
+        <a:xfrm>
+          <a:off x="0" y="0"/>
+          <a:ext cx="0" cy="0"/>
+          <a:chOff x="0" y="0"/>
+          <a:chExt cx="0" cy="0"/>
+        </a:xfrm>
+      </p:grpSpPr>
+      <p:sp>
+        <p:nvSpPr>
+          <p:cNvPr id="2" name="Text 0"/>
+          <p:cNvSpPr txBox="1"/>
+          <p:nvPr/>
+        </p:nvSpPr>
+        <p:spPr>
+          <a:xfrm>
+            <a:off x="594360" y="411480"/>
+            <a:ext cx="10515600" cy="274320"/>
+          </a:xfrm>
+          <a:prstGeom prst="rect">
+            <a:avLst/>
+          </a:prstGeom>
+          <a:noFill/>
+          <a:ln/>
+        </p:spPr>
+        <p:txBody>
+          <a:bodyPr wrap="square" lIns="0" tIns="0" rIns="0" bIns="0" rtlCol="0" anchor="ctr"/>
+          <a:lstStyle/>
+          <a:p>
+            <a:pPr algn="l" indent="0" marL="0">
+              <a:buNone/>
+            </a:pPr>
+            <a:r>
+              <a:rPr lang="en-US" sz="1150" b="1" spc="200" kern="0" dirty="0">
+                <a:solidFill>
+                  <a:srgbClr val="E3B23C"/>
+                </a:solidFill>
+                <a:latin typeface="Calibri" pitchFamily="34" charset="0"/>
+                <a:ea typeface="Calibri" pitchFamily="34" charset="-122"/>
+                <a:cs typeface="Calibri" pitchFamily="34" charset="-120"/>
+              </a:rPr>
+              <a:t>Travailler ensemble</a:t>
+            </a:r>
+            <a:endParaRPr lang="en-US" sz="1150" dirty="0"/>
+          </a:p>
+        </p:txBody>
+      </p:sp>
+      <p:sp>
+        <p:nvSpPr>
+          <p:cNvPr id="3" name="Text 1"/>
+          <p:cNvSpPr txBox="1"/>
+          <p:nvPr/>
+        </p:nvSpPr>
+        <p:spPr>
+          <a:xfrm>
+            <a:off x="594360" y="731520"/>
+            <a:ext cx="10881360" cy="731520"/>
+          </a:xfrm>
+          <a:prstGeom prst="rect">
+            <a:avLst/>
+          </a:prstGeom>
+          <a:noFill/>
+          <a:ln/>
+        </p:spPr>
+        <p:txBody>
+          <a:bodyPr wrap="square" lIns="0" tIns="0" rIns="0" bIns="0" rtlCol="0" anchor="ctr"/>
+          <a:lstStyle/>
+          <a:p>
+            <a:pPr algn="l" indent="0" marL="0">
+              <a:buNone/>
+            </a:pPr>
+            <a:r>
+              <a:rPr lang="en-US" sz="3000" b="1" dirty="0">
+                <a:solidFill>
+                  <a:srgbClr val="123324"/>
+                </a:solidFill>
+                <a:latin typeface="Cambria" pitchFamily="34" charset="0"/>
+                <a:ea typeface="Cambria" pitchFamily="34" charset="-122"/>
+                <a:cs typeface="Cambria" pitchFamily="34" charset="-120"/>
+              </a:rPr>
+              <a:t>Un partenaire local pour le Maroc</a:t>
+            </a:r>
+            <a:endParaRPr lang="en-US" sz="3000" dirty="0"/>
+          </a:p>
+        </p:txBody>
+      </p:sp>
+      <p:sp>
+        <p:nvSpPr>
+          <p:cNvPr id="4" name="Shape 2"/>
+          <p:cNvSpPr/>
+          <p:nvPr/>
+        </p:nvSpPr>
+        <p:spPr>
+          <a:xfrm>
+            <a:off x="594360" y="1874520"/>
+            <a:ext cx="2545004" cy="2834640"/>
+          </a:xfrm>
+          <a:prstGeom prst="roundRect">
+            <a:avLst>
+              <a:gd name="adj" fmla="val 3593"/>
+            </a:avLst>
+          </a:prstGeom>
+          <a:solidFill>
+            <a:srgbClr val="F1F4EF"/>
+          </a:solidFill>
+          <a:ln w="9525">
+            <a:solidFill>
+              <a:srgbClr val="DCE4DA"/>
+            </a:solidFill>
+            <a:prstDash val="solid"/>
+          </a:ln>
+        </p:spPr>
+      </p:sp>
+      <p:sp>
+        <p:nvSpPr>
+          <p:cNvPr id="5" name="Shape 3"/>
+          <p:cNvSpPr/>
+          <p:nvPr/>
+        </p:nvSpPr>
+        <p:spPr>
+          <a:xfrm>
+            <a:off x="822960" y="2103120"/>
+            <a:ext cx="566928" cy="566928"/>
+          </a:xfrm>
+          <a:prstGeom prst="ellipse">
+            <a:avLst/>
+          </a:prstGeom>
+          <a:solidFill>
+            <a:srgbClr val="1F5C3A"/>
+          </a:solidFill>
+          <a:ln/>
+        </p:spPr>
+      </p:sp>
+      <p:sp>
+        <p:nvSpPr>
+          <p:cNvPr id="6" name="Text 4"/>
+          <p:cNvSpPr txBox="1"/>
+          <p:nvPr/>
+        </p:nvSpPr>
+        <p:spPr>
+          <a:xfrm>
+            <a:off x="822960" y="2103120"/>
+            <a:ext cx="566928" cy="566928"/>
+          </a:xfrm>
+          <a:prstGeom prst="rect">
+            <a:avLst/>
+          </a:prstGeom>
+          <a:noFill/>
+          <a:ln/>
+        </p:spPr>
+        <p:txBody>
+          <a:bodyPr wrap="square" lIns="0" tIns="0" rIns="0" bIns="0" rtlCol="0" anchor="ctr"/>
+          <a:lstStyle/>
+          <a:p>
+            <a:pPr algn="ctr" indent="0" marL="0">
+              <a:buNone/>
+            </a:pPr>
+            <a:r>
+              <a:rPr lang="en-US" sz="1600" b="1" dirty="0">
+                <a:solidFill>
+                  <a:srgbClr val="FFFFFF"/>
+                </a:solidFill>
+                <a:latin typeface="Cambria" pitchFamily="34" charset="0"/>
+                <a:ea typeface="Cambria" pitchFamily="34" charset="-122"/>
+                <a:cs typeface="Cambria" pitchFamily="34" charset="-120"/>
+              </a:rPr>
+              <a:t>1</a:t>
+            </a:r>
+            <a:endParaRPr lang="en-US" sz="1600" dirty="0"/>
+          </a:p>
+        </p:txBody>
+      </p:sp>
+      <p:sp>
+        <p:nvSpPr>
+          <p:cNvPr id="7" name="Text 5"/>
+          <p:cNvSpPr txBox="1"/>
+          <p:nvPr/>
+        </p:nvSpPr>
+        <p:spPr>
+          <a:xfrm>
+            <a:off x="822960" y="2788920"/>
+            <a:ext cx="2087804" cy="457200"/>
+          </a:xfrm>
+          <a:prstGeom prst="rect">
+            <a:avLst/>
+          </a:prstGeom>
+          <a:noFill/>
+          <a:ln/>
+        </p:spPr>
+        <p:txBody>
+          <a:bodyPr wrap="square" lIns="0" tIns="0" rIns="0" bIns="0" rtlCol="0" anchor="ctr"/>
+          <a:lstStyle/>
+          <a:p>
+            <a:pPr algn="l" indent="0" marL="0">
+              <a:buNone/>
+            </a:pPr>
+            <a:r>
+              <a:rPr lang="en-US" sz="1400" b="1" dirty="0">
+                <a:solidFill>
+                  <a:srgbClr val="1F5C3A"/>
+                </a:solidFill>
+                <a:latin typeface="Cambria" pitchFamily="34" charset="0"/>
+                <a:ea typeface="Cambria" pitchFamily="34" charset="-122"/>
+                <a:cs typeface="Cambria" pitchFamily="34" charset="-120"/>
+              </a:rPr>
+              <a:t>Distribution</a:t>
+            </a:r>
+            <a:endParaRPr lang="en-US" sz="1400" dirty="0"/>
+          </a:p>
+        </p:txBody>
+      </p:sp>
+      <p:sp>
+        <p:nvSpPr>
+          <p:cNvPr id="8" name="Text 6"/>
+          <p:cNvSpPr txBox="1"/>
+          <p:nvPr/>
+        </p:nvSpPr>
+        <p:spPr>
+          <a:xfrm>
+            <a:off x="822960" y="3291840"/>
+            <a:ext cx="2087804" cy="1234440"/>
+          </a:xfrm>
+          <a:prstGeom prst="rect">
+            <a:avLst/>
+          </a:prstGeom>
+          <a:noFill/>
+          <a:ln/>
+        </p:spPr>
+        <p:txBody>
+          <a:bodyPr wrap="square" lIns="0" tIns="0" rIns="0" bIns="0" rtlCol="0" anchor="t"/>
+          <a:lstStyle/>
+          <a:p>
+            <a:pPr algn="l" indent="0" marL="0">
+              <a:lnSpc>
+                <a:spcPct val="120000"/>
+              </a:lnSpc>
+              <a:buNone/>
+            </a:pPr>
+            <a:r>
+              <a:rPr lang="en-US" sz="1200" dirty="0">
+                <a:solidFill>
+                  <a:srgbClr val="33423A"/>
+                </a:solidFill>
+                <a:latin typeface="Calibri" pitchFamily="34" charset="0"/>
+                <a:ea typeface="Calibri" pitchFamily="34" charset="-122"/>
+                <a:cs typeface="Calibri" pitchFamily="34" charset="-120"/>
+              </a:rPr>
+              <a:t>Exclusivité territoriale et stock de lancement pour la première saison commerciale.</a:t>
+            </a:r>
+            <a:endParaRPr lang="en-US" sz="1200" dirty="0"/>
+          </a:p>
+        </p:txBody>
+      </p:sp>
+      <p:sp>
+        <p:nvSpPr>
+          <p:cNvPr id="9" name="Shape 7"/>
+          <p:cNvSpPr/>
+          <p:nvPr/>
+        </p:nvSpPr>
+        <p:spPr>
+          <a:xfrm>
+            <a:off x="3413684" y="1874520"/>
+            <a:ext cx="2545004" cy="2834640"/>
+          </a:xfrm>
+          <a:prstGeom prst="roundRect">
+            <a:avLst>
+              <a:gd name="adj" fmla="val 3593"/>
+            </a:avLst>
+          </a:prstGeom>
+          <a:solidFill>
+            <a:srgbClr val="F1F4EF"/>
+          </a:solidFill>
+          <a:ln w="9525">
+            <a:solidFill>
+              <a:srgbClr val="DCE4DA"/>
+            </a:solidFill>
+            <a:prstDash val="solid"/>
+          </a:ln>
+        </p:spPr>
+      </p:sp>
+      <p:sp>
+        <p:nvSpPr>
+          <p:cNvPr id="10" name="Shape 8"/>
+          <p:cNvSpPr/>
+          <p:nvPr/>
+        </p:nvSpPr>
+        <p:spPr>
+          <a:xfrm>
+            <a:off x="3642284" y="2103120"/>
+            <a:ext cx="566928" cy="566928"/>
+          </a:xfrm>
+          <a:prstGeom prst="ellipse">
+            <a:avLst/>
+          </a:prstGeom>
+          <a:solidFill>
+            <a:srgbClr val="1F5C3A"/>
+          </a:solidFill>
+          <a:ln/>
+        </p:spPr>
+      </p:sp>
+      <p:sp>
+        <p:nvSpPr>
+          <p:cNvPr id="11" name="Text 9"/>
+          <p:cNvSpPr txBox="1"/>
+          <p:nvPr/>
+        </p:nvSpPr>
+        <p:spPr>
+          <a:xfrm>
+            <a:off x="3642284" y="2103120"/>
+            <a:ext cx="566928" cy="566928"/>
+          </a:xfrm>
+          <a:prstGeom prst="rect">
+            <a:avLst/>
+          </a:prstGeom>
+          <a:noFill/>
+          <a:ln/>
+        </p:spPr>
+        <p:txBody>
+          <a:bodyPr wrap="square" lIns="0" tIns="0" rIns="0" bIns="0" rtlCol="0" anchor="ctr"/>
+          <a:lstStyle/>
+          <a:p>
+            <a:pPr algn="ctr" indent="0" marL="0">
+              <a:buNone/>
+            </a:pPr>
+            <a:r>
+              <a:rPr lang="en-US" sz="1600" b="1" dirty="0">
+                <a:solidFill>
+                  <a:srgbClr val="FFFFFF"/>
+                </a:solidFill>
+                <a:latin typeface="Cambria" pitchFamily="34" charset="0"/>
+                <a:ea typeface="Cambria" pitchFamily="34" charset="-122"/>
+                <a:cs typeface="Cambria" pitchFamily="34" charset="-120"/>
+              </a:rPr>
+              <a:t>2</a:t>
+            </a:r>
+            <a:endParaRPr lang="en-US" sz="1600" dirty="0"/>
+          </a:p>
+        </p:txBody>
+      </p:sp>
+      <p:sp>
+        <p:nvSpPr>
+          <p:cNvPr id="12" name="Text 10"/>
+          <p:cNvSpPr txBox="1"/>
+          <p:nvPr/>
+        </p:nvSpPr>
+        <p:spPr>
+          <a:xfrm>
+            <a:off x="3642284" y="2788920"/>
+            <a:ext cx="2087804" cy="457200"/>
+          </a:xfrm>
+          <a:prstGeom prst="rect">
+            <a:avLst/>
+          </a:prstGeom>
+          <a:noFill/>
+          <a:ln/>
+        </p:spPr>
+        <p:txBody>
+          <a:bodyPr wrap="square" lIns="0" tIns="0" rIns="0" bIns="0" rtlCol="0" anchor="ctr"/>
+          <a:lstStyle/>
+          <a:p>
+            <a:pPr algn="l" indent="0" marL="0">
+              <a:buNone/>
+            </a:pPr>
+            <a:r>
+              <a:rPr lang="en-US" sz="1400" b="1" dirty="0">
+                <a:solidFill>
+                  <a:srgbClr val="1F5C3A"/>
+                </a:solidFill>
+                <a:latin typeface="Cambria" pitchFamily="34" charset="0"/>
+                <a:ea typeface="Cambria" pitchFamily="34" charset="-122"/>
+                <a:cs typeface="Cambria" pitchFamily="34" charset="-120"/>
+              </a:rPr>
+              <a:t>Formation</a:t>
+            </a:r>
+            <a:endParaRPr lang="en-US" sz="1400" dirty="0"/>
+          </a:p>
+        </p:txBody>
+      </p:sp>
+      <p:sp>
+        <p:nvSpPr>
+          <p:cNvPr id="13" name="Text 11"/>
+          <p:cNvSpPr txBox="1"/>
+          <p:nvPr/>
+        </p:nvSpPr>
+        <p:spPr>
+          <a:xfrm>
+            <a:off x="3642284" y="3291840"/>
+            <a:ext cx="2087804" cy="1234440"/>
+          </a:xfrm>
+          <a:prstGeom prst="rect">
+            <a:avLst/>
+          </a:prstGeom>
+          <a:noFill/>
+          <a:ln/>
+        </p:spPr>
+        <p:txBody>
+          <a:bodyPr wrap="square" lIns="0" tIns="0" rIns="0" bIns="0" rtlCol="0" anchor="t"/>
+          <a:lstStyle/>
+          <a:p>
+            <a:pPr algn="l" indent="0" marL="0">
+              <a:lnSpc>
+                <a:spcPct val="120000"/>
+              </a:lnSpc>
+              <a:buNone/>
+            </a:pPr>
+            <a:r>
+              <a:rPr lang="en-US" sz="1200" dirty="0">
+                <a:solidFill>
+                  <a:srgbClr val="33423A"/>
+                </a:solidFill>
+                <a:latin typeface="Calibri" pitchFamily="34" charset="0"/>
+                <a:ea typeface="Calibri" pitchFamily="34" charset="-122"/>
+                <a:cs typeface="Calibri" pitchFamily="34" charset="-120"/>
+              </a:rPr>
+              <a:t>Formation technique des équipes, protocoles de dosage et mises à jour à chaque saison.</a:t>
+            </a:r>
+            <a:endParaRPr lang="en-US" sz="1200" dirty="0"/>
+          </a:p>
+        </p:txBody>
+      </p:sp>
+      <p:sp>
+        <p:nvSpPr>
+          <p:cNvPr id="14" name="Shape 12"/>
+          <p:cNvSpPr/>
+          <p:nvPr/>
+        </p:nvSpPr>
+        <p:spPr>
+          <a:xfrm>
+            <a:off x="6233008" y="1874520"/>
+            <a:ext cx="2545004" cy="2834640"/>
+          </a:xfrm>
+          <a:prstGeom prst="roundRect">
+            <a:avLst>
+              <a:gd name="adj" fmla="val 3593"/>
+            </a:avLst>
+          </a:prstGeom>
+          <a:solidFill>
+            <a:srgbClr val="F1F4EF"/>
+          </a:solidFill>
+          <a:ln w="9525">
+            <a:solidFill>
+              <a:srgbClr val="DCE4DA"/>
+            </a:solidFill>
+            <a:prstDash val="solid"/>
+          </a:ln>
+        </p:spPr>
+      </p:sp>
+      <p:sp>
+        <p:nvSpPr>
+          <p:cNvPr id="15" name="Shape 13"/>
+          <p:cNvSpPr/>
+          <p:nvPr/>
+        </p:nvSpPr>
+        <p:spPr>
+          <a:xfrm>
+            <a:off x="6461608" y="2103120"/>
+            <a:ext cx="566928" cy="566928"/>
+          </a:xfrm>
+          <a:prstGeom prst="ellipse">
+            <a:avLst/>
+          </a:prstGeom>
+          <a:solidFill>
+            <a:srgbClr val="1F5C3A"/>
+          </a:solidFill>
+          <a:ln/>
+        </p:spPr>
+      </p:sp>
+      <p:sp>
+        <p:nvSpPr>
+          <p:cNvPr id="16" name="Text 14"/>
+          <p:cNvSpPr txBox="1"/>
+          <p:nvPr/>
+        </p:nvSpPr>
+        <p:spPr>
+          <a:xfrm>
+            <a:off x="6461608" y="2103120"/>
+            <a:ext cx="566928" cy="566928"/>
+          </a:xfrm>
+          <a:prstGeom prst="rect">
+            <a:avLst/>
+          </a:prstGeom>
+          <a:noFill/>
+          <a:ln/>
+        </p:spPr>
+        <p:txBody>
+          <a:bodyPr wrap="square" lIns="0" tIns="0" rIns="0" bIns="0" rtlCol="0" anchor="ctr"/>
+          <a:lstStyle/>
+          <a:p>
+            <a:pPr algn="ctr" indent="0" marL="0">
+              <a:buNone/>
+            </a:pPr>
+            <a:r>
+              <a:rPr lang="en-US" sz="1600" b="1" dirty="0">
+                <a:solidFill>
+                  <a:srgbClr val="FFFFFF"/>
+                </a:solidFill>
+                <a:latin typeface="Cambria" pitchFamily="34" charset="0"/>
+                <a:ea typeface="Cambria" pitchFamily="34" charset="-122"/>
+                <a:cs typeface="Cambria" pitchFamily="34" charset="-120"/>
+              </a:rPr>
+              <a:t>3</a:t>
+            </a:r>
+            <a:endParaRPr lang="en-US" sz="1600" dirty="0"/>
+          </a:p>
+        </p:txBody>
+      </p:sp>
+      <p:sp>
+        <p:nvSpPr>
+          <p:cNvPr id="17" name="Text 15"/>
+          <p:cNvSpPr txBox="1"/>
+          <p:nvPr/>
+        </p:nvSpPr>
+        <p:spPr>
+          <a:xfrm>
+            <a:off x="6461608" y="2788920"/>
+            <a:ext cx="2087804" cy="457200"/>
+          </a:xfrm>
+          <a:prstGeom prst="rect">
+            <a:avLst/>
+          </a:prstGeom>
+          <a:noFill/>
+          <a:ln/>
+        </p:spPr>
+        <p:txBody>
+          <a:bodyPr wrap="square" lIns="0" tIns="0" rIns="0" bIns="0" rtlCol="0" anchor="ctr"/>
+          <a:lstStyle/>
+          <a:p>
+            <a:pPr algn="l" indent="0" marL="0">
+              <a:buNone/>
+            </a:pPr>
+            <a:r>
+              <a:rPr lang="en-US" sz="1400" b="1" dirty="0">
+                <a:solidFill>
+                  <a:srgbClr val="1F5C3A"/>
+                </a:solidFill>
+                <a:latin typeface="Cambria" pitchFamily="34" charset="0"/>
+                <a:ea typeface="Cambria" pitchFamily="34" charset="-122"/>
+                <a:cs typeface="Cambria" pitchFamily="34" charset="-120"/>
+              </a:rPr>
+              <a:t>Essais conjoints</a:t>
+            </a:r>
+            <a:endParaRPr lang="en-US" sz="1400" dirty="0"/>
+          </a:p>
+        </p:txBody>
+      </p:sp>
+      <p:sp>
+        <p:nvSpPr>
+          <p:cNvPr id="18" name="Text 16"/>
+          <p:cNvSpPr txBox="1"/>
+          <p:nvPr/>
+        </p:nvSpPr>
+        <p:spPr>
+          <a:xfrm>
+            <a:off x="6461608" y="3291840"/>
+            <a:ext cx="2087804" cy="1234440"/>
+          </a:xfrm>
+          <a:prstGeom prst="rect">
+            <a:avLst/>
+          </a:prstGeom>
+          <a:noFill/>
+          <a:ln/>
+        </p:spPr>
+        <p:txBody>
+          <a:bodyPr wrap="square" lIns="0" tIns="0" rIns="0" bIns="0" rtlCol="0" anchor="t"/>
+          <a:lstStyle/>
+          <a:p>
+            <a:pPr algn="l" indent="0" marL="0">
+              <a:lnSpc>
+                <a:spcPct val="120000"/>
+              </a:lnSpc>
+              <a:buNone/>
+            </a:pPr>
+            <a:r>
+              <a:rPr lang="en-US" sz="1200" dirty="0">
+                <a:solidFill>
+                  <a:srgbClr val="33423A"/>
+                </a:solidFill>
+                <a:latin typeface="Calibri" pitchFamily="34" charset="0"/>
+                <a:ea typeface="Calibri" pitchFamily="34" charset="-122"/>
+                <a:cs typeface="Calibri" pitchFamily="34" charset="-120"/>
+              </a:rPr>
+              <a:t>Parcelles de démonstration avec témoin, résultats partagés avec les producteurs.</a:t>
+            </a:r>
+            <a:endParaRPr lang="en-US" sz="1200" dirty="0"/>
+          </a:p>
+        </p:txBody>
+      </p:sp>
+      <p:sp>
+        <p:nvSpPr>
+          <p:cNvPr id="19" name="Shape 17"/>
+          <p:cNvSpPr/>
+          <p:nvPr/>
+        </p:nvSpPr>
+        <p:spPr>
+          <a:xfrm>
+            <a:off x="9052331" y="1874520"/>
+            <a:ext cx="2545004" cy="2834640"/>
+          </a:xfrm>
+          <a:prstGeom prst="roundRect">
+            <a:avLst>
+              <a:gd name="adj" fmla="val 3593"/>
+            </a:avLst>
+          </a:prstGeom>
+          <a:solidFill>
+            <a:srgbClr val="F1F4EF"/>
+          </a:solidFill>
+          <a:ln w="9525">
+            <a:solidFill>
+              <a:srgbClr val="DCE4DA"/>
+            </a:solidFill>
+            <a:prstDash val="solid"/>
+          </a:ln>
+        </p:spPr>
+      </p:sp>
+      <p:sp>
+        <p:nvSpPr>
+          <p:cNvPr id="20" name="Shape 18"/>
+          <p:cNvSpPr/>
+          <p:nvPr/>
+        </p:nvSpPr>
+        <p:spPr>
+          <a:xfrm>
+            <a:off x="9280931" y="2103120"/>
+            <a:ext cx="566928" cy="566928"/>
+          </a:xfrm>
+          <a:prstGeom prst="ellipse">
+            <a:avLst/>
+          </a:prstGeom>
+          <a:solidFill>
+            <a:srgbClr val="1F5C3A"/>
+          </a:solidFill>
+          <a:ln/>
+        </p:spPr>
+      </p:sp>
+      <p:sp>
+        <p:nvSpPr>
+          <p:cNvPr id="21" name="Text 19"/>
+          <p:cNvSpPr txBox="1"/>
+          <p:nvPr/>
+        </p:nvSpPr>
+        <p:spPr>
+          <a:xfrm>
+            <a:off x="9280931" y="2103120"/>
+            <a:ext cx="566928" cy="566928"/>
+          </a:xfrm>
+          <a:prstGeom prst="rect">
+            <a:avLst/>
+          </a:prstGeom>
+          <a:noFill/>
+          <a:ln/>
+        </p:spPr>
+        <p:txBody>
+          <a:bodyPr wrap="square" lIns="0" tIns="0" rIns="0" bIns="0" rtlCol="0" anchor="ctr"/>
+          <a:lstStyle/>
+          <a:p>
+            <a:pPr algn="ctr" indent="0" marL="0">
+              <a:buNone/>
+            </a:pPr>
+            <a:r>
+              <a:rPr lang="en-US" sz="1600" b="1" dirty="0">
+                <a:solidFill>
+                  <a:srgbClr val="FFFFFF"/>
+                </a:solidFill>
+                <a:latin typeface="Cambria" pitchFamily="34" charset="0"/>
+                <a:ea typeface="Cambria" pitchFamily="34" charset="-122"/>
+                <a:cs typeface="Cambria" pitchFamily="34" charset="-120"/>
+              </a:rPr>
+              <a:t>4</a:t>
+            </a:r>
+            <a:endParaRPr lang="en-US" sz="1600" dirty="0"/>
+          </a:p>
+        </p:txBody>
+      </p:sp>
+      <p:sp>
+        <p:nvSpPr>
+          <p:cNvPr id="22" name="Text 20"/>
+          <p:cNvSpPr txBox="1"/>
+          <p:nvPr/>
+        </p:nvSpPr>
+        <p:spPr>
+          <a:xfrm>
+            <a:off x="9280931" y="2788920"/>
+            <a:ext cx="2087804" cy="457200"/>
+          </a:xfrm>
+          <a:prstGeom prst="rect">
+            <a:avLst/>
+          </a:prstGeom>
+          <a:noFill/>
+          <a:ln/>
+        </p:spPr>
+        <p:txBody>
+          <a:bodyPr wrap="square" lIns="0" tIns="0" rIns="0" bIns="0" rtlCol="0" anchor="ctr"/>
+          <a:lstStyle/>
+          <a:p>
+            <a:pPr algn="l" indent="0" marL="0">
+              <a:buNone/>
+            </a:pPr>
+            <a:r>
+              <a:rPr lang="en-US" sz="1400" b="1" dirty="0">
+                <a:solidFill>
+                  <a:srgbClr val="1F5C3A"/>
+                </a:solidFill>
+                <a:latin typeface="Cambria" pitchFamily="34" charset="0"/>
+                <a:ea typeface="Cambria" pitchFamily="34" charset="-122"/>
+                <a:cs typeface="Cambria" pitchFamily="34" charset="-120"/>
+              </a:rPr>
+              <a:t>Institutions</a:t>
+            </a:r>
+            <a:endParaRPr lang="en-US" sz="1400" dirty="0"/>
+          </a:p>
+        </p:txBody>
+      </p:sp>
+      <p:sp>
+        <p:nvSpPr>
+          <p:cNvPr id="23" name="Text 21"/>
+          <p:cNvSpPr txBox="1"/>
+          <p:nvPr/>
+        </p:nvSpPr>
+        <p:spPr>
+          <a:xfrm>
+            <a:off x="9280931" y="3291840"/>
+            <a:ext cx="2087804" cy="1234440"/>
+          </a:xfrm>
+          <a:prstGeom prst="rect">
+            <a:avLst/>
+          </a:prstGeom>
+          <a:noFill/>
+          <a:ln/>
+        </p:spPr>
+        <p:txBody>
+          <a:bodyPr wrap="square" lIns="0" tIns="0" rIns="0" bIns="0" rtlCol="0" anchor="t"/>
+          <a:lstStyle/>
+          <a:p>
+            <a:pPr algn="l" indent="0" marL="0">
+              <a:lnSpc>
+                <a:spcPct val="120000"/>
+              </a:lnSpc>
+              <a:buNone/>
+            </a:pPr>
+            <a:r>
+              <a:rPr lang="en-US" sz="1200" dirty="0">
+                <a:solidFill>
+                  <a:srgbClr val="33423A"/>
+                </a:solidFill>
+                <a:latin typeface="Calibri" pitchFamily="34" charset="0"/>
+                <a:ea typeface="Calibri" pitchFamily="34" charset="-122"/>
+                <a:cs typeface="Calibri" pitchFamily="34" charset="-120"/>
+              </a:rPr>
+              <a:t>Dialogue avec le ministère de l'Agriculture et les programmes de sécurité alimentaire.</a:t>
+            </a:r>
+            <a:endParaRPr lang="en-US" sz="1200" dirty="0"/>
+          </a:p>
+        </p:txBody>
+      </p:sp>
+      <p:sp>
+        <p:nvSpPr>
+          <p:cNvPr id="24" name="Text 22"/>
+          <p:cNvSpPr txBox="1"/>
+          <p:nvPr/>
+        </p:nvSpPr>
+        <p:spPr>
+          <a:xfrm>
+            <a:off x="594360" y="4983480"/>
+            <a:ext cx="11002975" cy="822960"/>
+          </a:xfrm>
+          <a:prstGeom prst="rect">
+            <a:avLst/>
+          </a:prstGeom>
+          <a:noFill/>
+          <a:ln/>
+        </p:spPr>
+        <p:txBody>
+          <a:bodyPr wrap="square" lIns="0" tIns="0" rIns="0" bIns="0" rtlCol="0" anchor="t"/>
+          <a:lstStyle/>
+          <a:p>
+            <a:pPr algn="l" indent="0" marL="0">
+              <a:lnSpc>
+                <a:spcPct val="125000"/>
+              </a:lnSpc>
+              <a:buNone/>
+            </a:pPr>
+            <a:r>
+              <a:rPr lang="en-US" sz="1250" i="1" dirty="0">
+                <a:solidFill>
+                  <a:srgbClr val="6B7C72"/>
+                </a:solidFill>
+                <a:latin typeface="Calibri" pitchFamily="34" charset="0"/>
+                <a:ea typeface="Calibri" pitchFamily="34" charset="-122"/>
+                <a:cs typeface="Calibri" pitchFamily="34" charset="-120"/>
+              </a:rPr>
+              <a:t>Le cadre s'adapte au territoire : un importateur, un distributeur d'intrants ou un groupement de producteurs peut porter le partenariat.</a:t>
+            </a:r>
+            <a:endParaRPr lang="en-US" sz="1250" dirty="0"/>
+          </a:p>
+        </p:txBody>
+      </p:sp>
+      <p:sp>
+        <p:nvSpPr>
+          <p:cNvPr id="25" name="Text 23"/>
+          <p:cNvSpPr txBox="1"/>
+          <p:nvPr/>
+        </p:nvSpPr>
+        <p:spPr>
+          <a:xfrm>
+            <a:off x="502920" y="6382512"/>
+            <a:ext cx="8229600" cy="274320"/>
+          </a:xfrm>
+          <a:prstGeom prst="rect">
+            <a:avLst/>
+          </a:prstGeom>
+          <a:noFill/>
+          <a:ln/>
+        </p:spPr>
+        <p:txBody>
+          <a:bodyPr wrap="square" lIns="0" tIns="0" rIns="0" bIns="0" rtlCol="0" anchor="ctr"/>
+          <a:lstStyle/>
+          <a:p>
+            <a:pPr algn="l" indent="0" marL="0">
+              <a:buNone/>
+            </a:pPr>
+            <a:r>
+              <a:rPr lang="en-US" sz="950" dirty="0">
+                <a:solidFill>
+                  <a:srgbClr val="6B7C72">
+                    <a:alpha val="80000"/>
+                  </a:srgbClr>
+                </a:solidFill>
+                <a:latin typeface="Calibri" pitchFamily="34" charset="0"/>
+                <a:ea typeface="Calibri" pitchFamily="34" charset="-122"/>
+                <a:cs typeface="Calibri" pitchFamily="34" charset="-120"/>
+              </a:rPr>
+              <a:t>Green Solutions · Dossier marché Maroc</a:t>
+            </a:r>
+            <a:endParaRPr lang="en-US" sz="950" dirty="0"/>
+          </a:p>
+        </p:txBody>
+      </p:sp>
+      <p:sp>
+        <p:nvSpPr>
+          <p:cNvPr id="26" name="Text 24"/>
+          <p:cNvSpPr txBox="1"/>
+          <p:nvPr/>
+        </p:nvSpPr>
+        <p:spPr>
+          <a:xfrm>
+            <a:off x="11140135" y="6382512"/>
+            <a:ext cx="548640" cy="274320"/>
+          </a:xfrm>
+          <a:prstGeom prst="rect">
+            <a:avLst/>
+          </a:prstGeom>
+          <a:noFill/>
+          <a:ln/>
+        </p:spPr>
+        <p:txBody>
+          <a:bodyPr wrap="square" lIns="0" tIns="0" rIns="0" bIns="0" rtlCol="0" anchor="ctr"/>
+          <a:lstStyle/>
+          <a:p>
+            <a:pPr algn="r" indent="0" marL="0">
+              <a:buNone/>
+            </a:pPr>
+            <a:r>
+              <a:rPr lang="en-US" sz="950" dirty="0">
+                <a:solidFill>
+                  <a:srgbClr val="6B7C72">
+                    <a:alpha val="80000"/>
+                  </a:srgbClr>
+                </a:solidFill>
+                <a:latin typeface="Calibri" pitchFamily="34" charset="0"/>
+                <a:ea typeface="Calibri" pitchFamily="34" charset="-122"/>
+                <a:cs typeface="Calibri" pitchFamily="34" charset="-120"/>
+              </a:rPr>
+              <a:t>14</a:t>
+            </a:r>
+            <a:endParaRPr lang="en-US" sz="950" dirty="0"/>
+          </a:p>
+        </p:txBody>
+      </p:sp>
+    </p:spTree>
+  </p:cSld>
+  <p:clrMapOvr>
+    <a:masterClrMapping/>
+  </p:clrMapOvr>
+</p:sld>
+</file>
+
+<file path=ppt/slides/slide16.xml><?xml version="1.0" encoding="utf-8"?>
+<p:sld xmlns:a="http://schemas.openxmlformats.org/drawingml/2006/main" xmlns:r="http://schemas.openxmlformats.org/officeDocument/2006/relationships" xmlns:p="http://schemas.openxmlformats.org/presentationml/2006/main">
+  <p:cSld name="Slide 16">
+    <p:bg>
+      <p:bgPr>
+        <a:solidFill>
+          <a:srgbClr val="FBFAF6"/>
+        </a:solidFill>
+      </p:bgPr>
+    </p:bg>
+    <p:spTree>
+      <p:nvGrpSpPr>
+        <p:cNvPr id="1" name=""/>
+        <p:cNvGrpSpPr/>
+        <p:nvPr/>
+      </p:nvGrpSpPr>
+      <p:grpSpPr>
+        <a:xfrm>
+          <a:off x="0" y="0"/>
+          <a:ext cx="0" cy="0"/>
+          <a:chOff x="0" y="0"/>
+          <a:chExt cx="0" cy="0"/>
+        </a:xfrm>
+      </p:grpSpPr>
+      <p:sp>
+        <p:nvSpPr>
+          <p:cNvPr id="2" name="Text 0"/>
+          <p:cNvSpPr txBox="1"/>
+          <p:nvPr/>
+        </p:nvSpPr>
+        <p:spPr>
+          <a:xfrm>
+            <a:off x="594360" y="411480"/>
+            <a:ext cx="10515600" cy="274320"/>
+          </a:xfrm>
+          <a:prstGeom prst="rect">
+            <a:avLst/>
+          </a:prstGeom>
+          <a:noFill/>
+          <a:ln/>
+        </p:spPr>
+        <p:txBody>
+          <a:bodyPr wrap="square" lIns="0" tIns="0" rIns="0" bIns="0" rtlCol="0" anchor="ctr"/>
+          <a:lstStyle/>
+          <a:p>
+            <a:pPr algn="l" indent="0" marL="0">
+              <a:buNone/>
+            </a:pPr>
+            <a:r>
+              <a:rPr lang="en-US" sz="1150" b="1" spc="200" kern="0" dirty="0">
+                <a:solidFill>
+                  <a:srgbClr val="E3B23C"/>
+                </a:solidFill>
+                <a:latin typeface="Calibri" pitchFamily="34" charset="0"/>
+                <a:ea typeface="Calibri" pitchFamily="34" charset="-122"/>
+                <a:cs typeface="Calibri" pitchFamily="34" charset="-120"/>
+              </a:rPr>
+              <a:t>CE QU'IL FAUT ANTICIPER</a:t>
+            </a:r>
+            <a:endParaRPr lang="en-US" sz="1150" dirty="0"/>
+          </a:p>
+        </p:txBody>
+      </p:sp>
+      <p:sp>
+        <p:nvSpPr>
+          <p:cNvPr id="3" name="Text 1"/>
+          <p:cNvSpPr txBox="1"/>
+          <p:nvPr/>
+        </p:nvSpPr>
+        <p:spPr>
+          <a:xfrm>
+            <a:off x="594360" y="731520"/>
+            <a:ext cx="10881360" cy="731520"/>
+          </a:xfrm>
+          <a:prstGeom prst="rect">
+            <a:avLst/>
+          </a:prstGeom>
+          <a:noFill/>
+          <a:ln/>
+        </p:spPr>
+        <p:txBody>
+          <a:bodyPr wrap="square" lIns="0" tIns="0" rIns="0" bIns="0" rtlCol="0" anchor="ctr"/>
+          <a:lstStyle/>
+          <a:p>
+            <a:pPr algn="l" indent="0" marL="0">
+              <a:buNone/>
+            </a:pPr>
+            <a:r>
+              <a:rPr lang="en-US" sz="3000" b="1" dirty="0">
+                <a:solidFill>
+                  <a:srgbClr val="123324"/>
+                </a:solidFill>
+                <a:latin typeface="Cambria" pitchFamily="34" charset="0"/>
+                <a:ea typeface="Cambria" pitchFamily="34" charset="-122"/>
+                <a:cs typeface="Cambria" pitchFamily="34" charset="-120"/>
+              </a:rPr>
+              <a:t>Risques identifiés et réponses</a:t>
+            </a:r>
+            <a:endParaRPr lang="en-US" sz="3000" dirty="0"/>
+          </a:p>
+        </p:txBody>
+      </p:sp>
+      <p:sp>
+        <p:nvSpPr>
+          <p:cNvPr id="4" name="Text 2"/>
+          <p:cNvSpPr txBox="1"/>
+          <p:nvPr/>
+        </p:nvSpPr>
+        <p:spPr>
+          <a:xfrm>
+            <a:off x="594360" y="1783080"/>
+            <a:ext cx="5227168" cy="411480"/>
+          </a:xfrm>
+          <a:prstGeom prst="rect">
+            <a:avLst/>
+          </a:prstGeom>
+          <a:noFill/>
+          <a:ln/>
+        </p:spPr>
+        <p:txBody>
+          <a:bodyPr wrap="square" lIns="0" tIns="0" rIns="0" bIns="0" rtlCol="0" anchor="ctr"/>
+          <a:lstStyle/>
+          <a:p>
+            <a:pPr algn="l" indent="0" marL="0">
+              <a:buNone/>
+            </a:pPr>
+            <a:r>
+              <a:rPr lang="en-US" sz="1600" b="1" dirty="0">
+                <a:solidFill>
+                  <a:srgbClr val="1F5C3A"/>
+                </a:solidFill>
+                <a:latin typeface="Cambria" pitchFamily="34" charset="0"/>
+                <a:ea typeface="Cambria" pitchFamily="34" charset="-122"/>
+                <a:cs typeface="Cambria" pitchFamily="34" charset="-120"/>
+              </a:rPr>
+              <a:t>Risques</a:t>
+            </a:r>
+            <a:endParaRPr lang="en-US" sz="1600" dirty="0"/>
+          </a:p>
+        </p:txBody>
+      </p:sp>
+      <p:sp>
+        <p:nvSpPr>
+          <p:cNvPr id="5" name="Text 3"/>
+          <p:cNvSpPr txBox="1"/>
+          <p:nvPr/>
+        </p:nvSpPr>
+        <p:spPr>
+          <a:xfrm>
+            <a:off x="594360" y="2286000"/>
+            <a:ext cx="5227168" cy="2468880"/>
+          </a:xfrm>
+          <a:prstGeom prst="rect">
+            <a:avLst/>
+          </a:prstGeom>
+          <a:noFill/>
+          <a:ln/>
+        </p:spPr>
+        <p:txBody>
+          <a:bodyPr wrap="square" lIns="0" tIns="0" rIns="0" bIns="0" rtlCol="0" anchor="t"/>
+          <a:lstStyle/>
+          <a:p>
+            <a:pPr algn="l" marL="342900" indent="-342900">
+              <a:lnSpc>
+                <a:spcPct val="122000"/>
+              </a:lnSpc>
+              <a:spcAft>
+                <a:spcPts val="1000"/>
+              </a:spcAft>
+              <a:buSzPct val="100000"/>
+              <a:buChar char="•"/>
+            </a:pPr>
+            <a:r>
+              <a:rPr lang="en-US" sz="1350" dirty="0">
+                <a:solidFill>
+                  <a:srgbClr val="33423A"/>
+                </a:solidFill>
+                <a:latin typeface="Calibri" pitchFamily="34" charset="0"/>
+                <a:ea typeface="Calibri" pitchFamily="34" charset="-122"/>
+                <a:cs typeface="Calibri" pitchFamily="34" charset="-120"/>
+              </a:rPr>
+              <a:t>Variabilité interannuelle de la pluviométrie : une campagne humide masque l'intérêt du produit.</a:t>
+            </a:r>
+            <a:endParaRPr lang="en-US" sz="1350" dirty="0"/>
+          </a:p>
+          <a:p>
+            <a:pPr algn="l" marL="342900" indent="-342900">
+              <a:lnSpc>
+                <a:spcPct val="122000"/>
+              </a:lnSpc>
+              <a:spcAft>
+                <a:spcPts val="1000"/>
+              </a:spcAft>
+              <a:buSzPct val="100000"/>
+              <a:buChar char="•"/>
+            </a:pPr>
+            <a:r>
+              <a:rPr lang="en-US" sz="1350" dirty="0">
+                <a:solidFill>
+                  <a:srgbClr val="33423A"/>
+                </a:solidFill>
+                <a:latin typeface="Calibri" pitchFamily="34" charset="0"/>
+                <a:ea typeface="Calibri" pitchFamily="34" charset="-122"/>
+                <a:cs typeface="Calibri" pitchFamily="34" charset="-120"/>
+              </a:rPr>
+              <a:t>Fragmentation du foncier : beaucoup de petites exploitations, décision d'achat dispersée.</a:t>
+            </a:r>
+            <a:endParaRPr lang="en-US" sz="1350" dirty="0"/>
+          </a:p>
+          <a:p>
+            <a:pPr algn="l" marL="342900" indent="-342900">
+              <a:lnSpc>
+                <a:spcPct val="122000"/>
+              </a:lnSpc>
+              <a:spcAft>
+                <a:spcPts val="1000"/>
+              </a:spcAft>
+              <a:buSzPct val="100000"/>
+              <a:buChar char="•"/>
+            </a:pPr>
+            <a:r>
+              <a:rPr lang="en-US" sz="1350" dirty="0">
+                <a:solidFill>
+                  <a:srgbClr val="33423A"/>
+                </a:solidFill>
+                <a:latin typeface="Calibri" pitchFamily="34" charset="0"/>
+                <a:ea typeface="Calibri" pitchFamily="34" charset="-122"/>
+                <a:cs typeface="Calibri" pitchFamily="34" charset="-120"/>
+              </a:rPr>
+              <a:t>Concurrence de solutions bas de gamme à base de sodium, qui ont laissé de mauvais souvenirs.</a:t>
+            </a:r>
+            <a:endParaRPr lang="en-US" sz="1350" dirty="0"/>
+          </a:p>
+          <a:p>
+            <a:pPr algn="l" marL="342900" indent="-342900">
+              <a:lnSpc>
+                <a:spcPct val="122000"/>
+              </a:lnSpc>
+              <a:spcAft>
+                <a:spcPts val="1000"/>
+              </a:spcAft>
+              <a:buSzPct val="100000"/>
+              <a:buChar char="•"/>
+            </a:pPr>
+            <a:r>
+              <a:rPr lang="en-US" sz="1350" dirty="0">
+                <a:solidFill>
+                  <a:srgbClr val="33423A"/>
+                </a:solidFill>
+                <a:latin typeface="Calibri" pitchFamily="34" charset="0"/>
+                <a:ea typeface="Calibri" pitchFamily="34" charset="-122"/>
+                <a:cs typeface="Calibri" pitchFamily="34" charset="-120"/>
+              </a:rPr>
+              <a:t>Trésorerie des exploitations après plusieurs campagnes déficitaires.</a:t>
+            </a:r>
+            <a:endParaRPr lang="en-US" sz="1350" dirty="0"/>
+          </a:p>
+        </p:txBody>
+      </p:sp>
+      <p:sp>
+        <p:nvSpPr>
+          <p:cNvPr id="6" name="Text 4"/>
+          <p:cNvSpPr txBox="1"/>
+          <p:nvPr/>
+        </p:nvSpPr>
+        <p:spPr>
+          <a:xfrm>
+            <a:off x="6370168" y="1783080"/>
+            <a:ext cx="5227168" cy="411480"/>
+          </a:xfrm>
+          <a:prstGeom prst="rect">
+            <a:avLst/>
+          </a:prstGeom>
+          <a:noFill/>
+          <a:ln/>
+        </p:spPr>
+        <p:txBody>
+          <a:bodyPr wrap="square" lIns="0" tIns="0" rIns="0" bIns="0" rtlCol="0" anchor="ctr"/>
+          <a:lstStyle/>
+          <a:p>
+            <a:pPr algn="l" indent="0" marL="0">
+              <a:buNone/>
+            </a:pPr>
+            <a:r>
+              <a:rPr lang="en-US" sz="1600" b="1" dirty="0">
+                <a:solidFill>
+                  <a:srgbClr val="1F5C3A"/>
+                </a:solidFill>
+                <a:latin typeface="Cambria" pitchFamily="34" charset="0"/>
+                <a:ea typeface="Cambria" pitchFamily="34" charset="-122"/>
+                <a:cs typeface="Cambria" pitchFamily="34" charset="-120"/>
+              </a:rPr>
+              <a:t>Réponses</a:t>
+            </a:r>
+            <a:endParaRPr lang="en-US" sz="1600" dirty="0"/>
+          </a:p>
+        </p:txBody>
+      </p:sp>
+      <p:sp>
+        <p:nvSpPr>
+          <p:cNvPr id="7" name="Text 5"/>
+          <p:cNvSpPr txBox="1"/>
+          <p:nvPr/>
+        </p:nvSpPr>
+        <p:spPr>
+          <a:xfrm>
+            <a:off x="6370168" y="2286000"/>
+            <a:ext cx="5227168" cy="2468880"/>
+          </a:xfrm>
+          <a:prstGeom prst="rect">
+            <a:avLst/>
+          </a:prstGeom>
+          <a:noFill/>
+          <a:ln/>
+        </p:spPr>
+        <p:txBody>
+          <a:bodyPr wrap="square" lIns="0" tIns="0" rIns="0" bIns="0" rtlCol="0" anchor="t"/>
+          <a:lstStyle/>
+          <a:p>
+            <a:pPr algn="l" marL="342900" indent="-342900">
+              <a:lnSpc>
+                <a:spcPct val="122000"/>
+              </a:lnSpc>
+              <a:spcAft>
+                <a:spcPts val="1000"/>
+              </a:spcAft>
+              <a:buSzPct val="100000"/>
+              <a:buChar char="•"/>
+            </a:pPr>
+            <a:r>
+              <a:rPr lang="en-US" sz="1350" dirty="0">
+                <a:solidFill>
+                  <a:srgbClr val="33423A"/>
+                </a:solidFill>
+                <a:latin typeface="Calibri" pitchFamily="34" charset="0"/>
+                <a:ea typeface="Calibri" pitchFamily="34" charset="-122"/>
+                <a:cs typeface="Calibri" pitchFamily="34" charset="-120"/>
+              </a:rPr>
+              <a:t>Conduire l'essai sur un cycle complet avec parcelle témoin, pour objectiver le gain même en année favorable.</a:t>
+            </a:r>
+            <a:endParaRPr lang="en-US" sz="1350" dirty="0"/>
+          </a:p>
+          <a:p>
+            <a:pPr algn="l" marL="342900" indent="-342900">
+              <a:lnSpc>
+                <a:spcPct val="122000"/>
+              </a:lnSpc>
+              <a:spcAft>
+                <a:spcPts val="1000"/>
+              </a:spcAft>
+              <a:buSzPct val="100000"/>
+              <a:buChar char="•"/>
+            </a:pPr>
+            <a:r>
+              <a:rPr lang="en-US" sz="1350" dirty="0">
+                <a:solidFill>
+                  <a:srgbClr val="33423A"/>
+                </a:solidFill>
+                <a:latin typeface="Calibri" pitchFamily="34" charset="0"/>
+                <a:ea typeface="Calibri" pitchFamily="34" charset="-122"/>
+                <a:cs typeface="Calibri" pitchFamily="34" charset="-120"/>
+              </a:rPr>
+              <a:t>Passer par les coopératives et les groupements, plutôt que par l'exploitation individuelle.</a:t>
+            </a:r>
+            <a:endParaRPr lang="en-US" sz="1350" dirty="0"/>
+          </a:p>
+          <a:p>
+            <a:pPr algn="l" marL="342900" indent="-342900">
+              <a:lnSpc>
+                <a:spcPct val="122000"/>
+              </a:lnSpc>
+              <a:spcAft>
+                <a:spcPts val="1000"/>
+              </a:spcAft>
+              <a:buSzPct val="100000"/>
+              <a:buChar char="•"/>
+            </a:pPr>
+            <a:r>
+              <a:rPr lang="en-US" sz="1350" dirty="0">
+                <a:solidFill>
+                  <a:srgbClr val="33423A"/>
+                </a:solidFill>
+                <a:latin typeface="Calibri" pitchFamily="34" charset="0"/>
+                <a:ea typeface="Calibri" pitchFamily="34" charset="-122"/>
+                <a:cs typeface="Calibri" pitchFamily="34" charset="-120"/>
+              </a:rPr>
+              <a:t>Documenter la différence de formulation : potassium et non sodium, compatible cultures alimentaires.</a:t>
+            </a:r>
+            <a:endParaRPr lang="en-US" sz="1350" dirty="0"/>
+          </a:p>
+          <a:p>
+            <a:pPr algn="l" marL="342900" indent="-342900">
+              <a:lnSpc>
+                <a:spcPct val="122000"/>
+              </a:lnSpc>
+              <a:spcAft>
+                <a:spcPts val="1000"/>
+              </a:spcAft>
+              <a:buSzPct val="100000"/>
+              <a:buChar char="•"/>
+            </a:pPr>
+            <a:r>
+              <a:rPr lang="en-US" sz="1350" dirty="0">
+                <a:solidFill>
+                  <a:srgbClr val="33423A"/>
+                </a:solidFill>
+                <a:latin typeface="Calibri" pitchFamily="34" charset="0"/>
+                <a:ea typeface="Calibri" pitchFamily="34" charset="-122"/>
+                <a:cs typeface="Calibri" pitchFamily="34" charset="-120"/>
+              </a:rPr>
+              <a:t>Étaler l'engagement : la durée d'effet de 3 à 4 ans amortit le coût sur plusieurs campagnes.</a:t>
+            </a:r>
+            <a:endParaRPr lang="en-US" sz="1350" dirty="0"/>
+          </a:p>
+        </p:txBody>
+      </p:sp>
+      <p:sp>
+        <p:nvSpPr>
+          <p:cNvPr id="8" name="Shape 6"/>
+          <p:cNvSpPr/>
+          <p:nvPr/>
+        </p:nvSpPr>
+        <p:spPr>
+          <a:xfrm>
+            <a:off x="594360" y="4846320"/>
+            <a:ext cx="11002975" cy="960120"/>
+          </a:xfrm>
+          <a:prstGeom prst="roundRect">
+            <a:avLst>
+              <a:gd name="adj" fmla="val 7619"/>
+            </a:avLst>
+          </a:prstGeom>
+          <a:solidFill>
+            <a:srgbClr val="F1F4EF"/>
+          </a:solidFill>
+          <a:ln w="9525">
+            <a:solidFill>
+              <a:srgbClr val="DCE4DA"/>
+            </a:solidFill>
+            <a:prstDash val="solid"/>
+          </a:ln>
+        </p:spPr>
+      </p:sp>
+      <p:sp>
+        <p:nvSpPr>
+          <p:cNvPr id="9" name="Text 7"/>
+          <p:cNvSpPr txBox="1"/>
+          <p:nvPr/>
+        </p:nvSpPr>
+        <p:spPr>
+          <a:xfrm>
+            <a:off x="822960" y="4983480"/>
+            <a:ext cx="10545775" cy="713232"/>
+          </a:xfrm>
+          <a:prstGeom prst="rect">
+            <a:avLst/>
+          </a:prstGeom>
+          <a:noFill/>
+          <a:ln/>
+        </p:spPr>
+        <p:txBody>
+          <a:bodyPr wrap="square" lIns="0" tIns="0" rIns="0" bIns="0" rtlCol="0" anchor="t"/>
+          <a:lstStyle/>
+          <a:p>
+            <a:pPr algn="l" indent="0" marL="0">
+              <a:lnSpc>
+                <a:spcPct val="118000"/>
+              </a:lnSpc>
+              <a:buNone/>
+            </a:pPr>
+            <a:r>
+              <a:rPr lang="en-US" sz="1100" dirty="0">
+                <a:solidFill>
+                  <a:srgbClr val="6B7C72"/>
+                </a:solidFill>
+                <a:latin typeface="Calibri" pitchFamily="34" charset="0"/>
+                <a:ea typeface="Calibri" pitchFamily="34" charset="-122"/>
+                <a:cs typeface="Calibri" pitchFamily="34" charset="-120"/>
+              </a:rPr>
+              <a:t>Analyse acrylamide (laboratoire Polymex, ISO 9001, teneur inférieure à 3,0 µg/g), screening REACH / SVHC (SGS) et certificat SOHISCERT valable jusqu'au 4 septembre 2027 : disponibles sur demande.</a:t>
+            </a:r>
+            <a:endParaRPr lang="en-US" sz="1100" dirty="0"/>
+          </a:p>
+        </p:txBody>
+      </p:sp>
+      <p:sp>
+        <p:nvSpPr>
+          <p:cNvPr id="10" name="Text 8"/>
+          <p:cNvSpPr txBox="1"/>
+          <p:nvPr/>
+        </p:nvSpPr>
+        <p:spPr>
+          <a:xfrm>
+            <a:off x="502920" y="6382512"/>
+            <a:ext cx="8229600" cy="274320"/>
+          </a:xfrm>
+          <a:prstGeom prst="rect">
+            <a:avLst/>
+          </a:prstGeom>
+          <a:noFill/>
+          <a:ln/>
+        </p:spPr>
+        <p:txBody>
+          <a:bodyPr wrap="square" lIns="0" tIns="0" rIns="0" bIns="0" rtlCol="0" anchor="ctr"/>
+          <a:lstStyle/>
+          <a:p>
+            <a:pPr algn="l" indent="0" marL="0">
+              <a:buNone/>
+            </a:pPr>
+            <a:r>
+              <a:rPr lang="en-US" sz="950" dirty="0">
+                <a:solidFill>
+                  <a:srgbClr val="6B7C72">
+                    <a:alpha val="80000"/>
+                  </a:srgbClr>
+                </a:solidFill>
+                <a:latin typeface="Calibri" pitchFamily="34" charset="0"/>
+                <a:ea typeface="Calibri" pitchFamily="34" charset="-122"/>
+                <a:cs typeface="Calibri" pitchFamily="34" charset="-120"/>
+              </a:rPr>
+              <a:t>Green Solutions · Dossier marché Maroc</a:t>
+            </a:r>
+            <a:endParaRPr lang="en-US" sz="950" dirty="0"/>
+          </a:p>
+        </p:txBody>
+      </p:sp>
+      <p:sp>
+        <p:nvSpPr>
+          <p:cNvPr id="11" name="Text 9"/>
+          <p:cNvSpPr txBox="1"/>
+          <p:nvPr/>
+        </p:nvSpPr>
+        <p:spPr>
+          <a:xfrm>
+            <a:off x="11140135" y="6382512"/>
+            <a:ext cx="548640" cy="274320"/>
+          </a:xfrm>
+          <a:prstGeom prst="rect">
+            <a:avLst/>
+          </a:prstGeom>
+          <a:noFill/>
+          <a:ln/>
+        </p:spPr>
+        <p:txBody>
+          <a:bodyPr wrap="square" lIns="0" tIns="0" rIns="0" bIns="0" rtlCol="0" anchor="ctr"/>
+          <a:lstStyle/>
+          <a:p>
+            <a:pPr algn="r" indent="0" marL="0">
+              <a:buNone/>
+            </a:pPr>
+            <a:r>
+              <a:rPr lang="en-US" sz="950" dirty="0">
+                <a:solidFill>
+                  <a:srgbClr val="6B7C72">
+                    <a:alpha val="80000"/>
+                  </a:srgbClr>
+                </a:solidFill>
+                <a:latin typeface="Calibri" pitchFamily="34" charset="0"/>
+                <a:ea typeface="Calibri" pitchFamily="34" charset="-122"/>
+                <a:cs typeface="Calibri" pitchFamily="34" charset="-120"/>
+              </a:rPr>
+              <a:t>15</a:t>
+            </a:r>
+            <a:endParaRPr lang="en-US" sz="950" dirty="0"/>
+          </a:p>
+        </p:txBody>
+      </p:sp>
+    </p:spTree>
+  </p:cSld>
+  <p:clrMapOvr>
+    <a:masterClrMapping/>
+  </p:clrMapOvr>
+</p:sld>
+</file>
+
+<file path=ppt/slides/slide17.xml><?xml version="1.0" encoding="utf-8"?>
+<p:sld xmlns:a="http://schemas.openxmlformats.org/drawingml/2006/main" xmlns:r="http://schemas.openxmlformats.org/officeDocument/2006/relationships" xmlns:p="http://schemas.openxmlformats.org/presentationml/2006/main">
+  <p:cSld name="Slide 17">
+    <p:bg>
+      <p:bgPr>
+        <a:solidFill>
+          <a:srgbClr val="FBFAF6"/>
+        </a:solidFill>
+      </p:bgPr>
+    </p:bg>
+    <p:spTree>
+      <p:nvGrpSpPr>
+        <p:cNvPr id="1" name=""/>
+        <p:cNvGrpSpPr/>
+        <p:nvPr/>
+      </p:nvGrpSpPr>
+      <p:grpSpPr>
+        <a:xfrm>
+          <a:off x="0" y="0"/>
+          <a:ext cx="0" cy="0"/>
+          <a:chOff x="0" y="0"/>
+          <a:chExt cx="0" cy="0"/>
+        </a:xfrm>
+      </p:grpSpPr>
+      <p:sp>
+        <p:nvSpPr>
+          <p:cNvPr id="2" name="Text 0"/>
+          <p:cNvSpPr txBox="1"/>
+          <p:nvPr/>
+        </p:nvSpPr>
+        <p:spPr>
+          <a:xfrm>
+            <a:off x="594360" y="411480"/>
+            <a:ext cx="10515600" cy="274320"/>
+          </a:xfrm>
+          <a:prstGeom prst="rect">
+            <a:avLst/>
+          </a:prstGeom>
+          <a:noFill/>
+          <a:ln/>
+        </p:spPr>
+        <p:txBody>
+          <a:bodyPr wrap="square" lIns="0" tIns="0" rIns="0" bIns="0" rtlCol="0" anchor="ctr"/>
+          <a:lstStyle/>
+          <a:p>
+            <a:pPr algn="l" indent="0" marL="0">
+              <a:buNone/>
+            </a:pPr>
+            <a:r>
+              <a:rPr lang="en-US" sz="1150" b="1" spc="200" kern="0" dirty="0">
+                <a:solidFill>
+                  <a:srgbClr val="E3B23C"/>
+                </a:solidFill>
+                <a:latin typeface="Calibri" pitchFamily="34" charset="0"/>
+                <a:ea typeface="Calibri" pitchFamily="34" charset="-122"/>
+                <a:cs typeface="Calibri" pitchFamily="34" charset="-120"/>
+              </a:rPr>
+              <a:t>Sources</a:t>
+            </a:r>
+            <a:endParaRPr lang="en-US" sz="1150" dirty="0"/>
+          </a:p>
+        </p:txBody>
+      </p:sp>
+      <p:sp>
+        <p:nvSpPr>
+          <p:cNvPr id="3" name="Text 1"/>
+          <p:cNvSpPr txBox="1"/>
+          <p:nvPr/>
+        </p:nvSpPr>
+        <p:spPr>
+          <a:xfrm>
+            <a:off x="594360" y="731520"/>
+            <a:ext cx="10881360" cy="731520"/>
+          </a:xfrm>
+          <a:prstGeom prst="rect">
+            <a:avLst/>
+          </a:prstGeom>
+          <a:noFill/>
+          <a:ln/>
+        </p:spPr>
+        <p:txBody>
+          <a:bodyPr wrap="square" lIns="0" tIns="0" rIns="0" bIns="0" rtlCol="0" anchor="ctr"/>
+          <a:lstStyle/>
+          <a:p>
+            <a:pPr algn="l" indent="0" marL="0">
+              <a:buNone/>
+            </a:pPr>
+            <a:r>
+              <a:rPr lang="en-US" sz="3000" b="1" dirty="0">
+                <a:solidFill>
+                  <a:srgbClr val="123324"/>
+                </a:solidFill>
+                <a:latin typeface="Cambria" pitchFamily="34" charset="0"/>
+                <a:ea typeface="Cambria" pitchFamily="34" charset="-122"/>
+                <a:cs typeface="Cambria" pitchFamily="34" charset="-120"/>
+              </a:rPr>
+              <a:t>Sources et hypothèses de travail</a:t>
+            </a:r>
+            <a:endParaRPr lang="en-US" sz="3000" dirty="0"/>
+          </a:p>
+        </p:txBody>
+      </p:sp>
+      <p:sp>
+        <p:nvSpPr>
+          <p:cNvPr id="4" name="Text 2"/>
+          <p:cNvSpPr txBox="1"/>
+          <p:nvPr/>
+        </p:nvSpPr>
+        <p:spPr>
+          <a:xfrm>
+            <a:off x="594360" y="1783080"/>
+            <a:ext cx="5227168" cy="411480"/>
+          </a:xfrm>
+          <a:prstGeom prst="rect">
+            <a:avLst/>
+          </a:prstGeom>
+          <a:noFill/>
+          <a:ln/>
+        </p:spPr>
+        <p:txBody>
+          <a:bodyPr wrap="square" lIns="0" tIns="0" rIns="0" bIns="0" rtlCol="0" anchor="ctr"/>
+          <a:lstStyle/>
+          <a:p>
+            <a:pPr algn="l" indent="0" marL="0">
+              <a:buNone/>
+            </a:pPr>
+            <a:r>
+              <a:rPr lang="en-US" sz="1600" b="1" dirty="0">
+                <a:solidFill>
+                  <a:srgbClr val="1F5C3A"/>
+                </a:solidFill>
+                <a:latin typeface="Cambria" pitchFamily="34" charset="0"/>
+                <a:ea typeface="Cambria" pitchFamily="34" charset="-122"/>
+                <a:cs typeface="Cambria" pitchFamily="34" charset="-120"/>
+              </a:rPr>
+              <a:t>Sources principales</a:t>
+            </a:r>
+            <a:endParaRPr lang="en-US" sz="1600" dirty="0"/>
+          </a:p>
+        </p:txBody>
+      </p:sp>
+      <p:sp>
+        <p:nvSpPr>
+          <p:cNvPr id="5" name="Text 3"/>
+          <p:cNvSpPr txBox="1"/>
+          <p:nvPr/>
+        </p:nvSpPr>
+        <p:spPr>
+          <a:xfrm>
+            <a:off x="594360" y="2286000"/>
+            <a:ext cx="5227168" cy="2468880"/>
+          </a:xfrm>
+          <a:prstGeom prst="rect">
+            <a:avLst/>
+          </a:prstGeom>
+          <a:noFill/>
+          <a:ln/>
+        </p:spPr>
+        <p:txBody>
+          <a:bodyPr wrap="square" lIns="0" tIns="0" rIns="0" bIns="0" rtlCol="0" anchor="t"/>
+          <a:lstStyle/>
+          <a:p>
+            <a:pPr algn="l" marL="342900" indent="-342900">
+              <a:lnSpc>
+                <a:spcPct val="122000"/>
+              </a:lnSpc>
+              <a:spcAft>
+                <a:spcPts val="1000"/>
+              </a:spcAft>
+              <a:buSzPct val="100000"/>
+              <a:buChar char="•"/>
+            </a:pPr>
+            <a:r>
+              <a:rPr lang="en-US" sz="1350" dirty="0">
+                <a:solidFill>
+                  <a:srgbClr val="33423A"/>
+                </a:solidFill>
+                <a:latin typeface="Calibri" pitchFamily="34" charset="0"/>
+                <a:ea typeface="Calibri" pitchFamily="34" charset="-122"/>
+                <a:cs typeface="Calibri" pitchFamily="34" charset="-120"/>
+              </a:rPr>
+              <a:t>Haut-Commissariat au Plan (HCP) : comptes nationaux et emploi.</a:t>
+            </a:r>
+            <a:endParaRPr lang="en-US" sz="1350" dirty="0"/>
+          </a:p>
+          <a:p>
+            <a:pPr algn="l" marL="342900" indent="-342900">
+              <a:lnSpc>
+                <a:spcPct val="122000"/>
+              </a:lnSpc>
+              <a:spcAft>
+                <a:spcPts val="1000"/>
+              </a:spcAft>
+              <a:buSzPct val="100000"/>
+              <a:buChar char="•"/>
+            </a:pPr>
+            <a:r>
+              <a:rPr lang="en-US" sz="1350" dirty="0">
+                <a:solidFill>
+                  <a:srgbClr val="33423A"/>
+                </a:solidFill>
+                <a:latin typeface="Calibri" pitchFamily="34" charset="0"/>
+                <a:ea typeface="Calibri" pitchFamily="34" charset="-122"/>
+                <a:cs typeface="Calibri" pitchFamily="34" charset="-120"/>
+              </a:rPr>
+              <a:t>Ministère de l'Agriculture : stratégie Génération Green, statistiques des filières.</a:t>
+            </a:r>
+            <a:endParaRPr lang="en-US" sz="1350" dirty="0"/>
+          </a:p>
+          <a:p>
+            <a:pPr algn="l" marL="342900" indent="-342900">
+              <a:lnSpc>
+                <a:spcPct val="122000"/>
+              </a:lnSpc>
+              <a:spcAft>
+                <a:spcPts val="1000"/>
+              </a:spcAft>
+              <a:buSzPct val="100000"/>
+              <a:buChar char="•"/>
+            </a:pPr>
+            <a:r>
+              <a:rPr lang="en-US" sz="1350" dirty="0">
+                <a:solidFill>
+                  <a:srgbClr val="33423A"/>
+                </a:solidFill>
+                <a:latin typeface="Calibri" pitchFamily="34" charset="0"/>
+                <a:ea typeface="Calibri" pitchFamily="34" charset="-122"/>
+                <a:cs typeface="Calibri" pitchFamily="34" charset="-120"/>
+              </a:rPr>
+              <a:t>Office des changes : exportations agroalimentaires.</a:t>
+            </a:r>
+            <a:endParaRPr lang="en-US" sz="1350" dirty="0"/>
+          </a:p>
+          <a:p>
+            <a:pPr algn="l" marL="342900" indent="-342900">
+              <a:lnSpc>
+                <a:spcPct val="122000"/>
+              </a:lnSpc>
+              <a:spcAft>
+                <a:spcPts val="1000"/>
+              </a:spcAft>
+              <a:buSzPct val="100000"/>
+              <a:buChar char="•"/>
+            </a:pPr>
+            <a:r>
+              <a:rPr lang="en-US" sz="1350" dirty="0">
+                <a:solidFill>
+                  <a:srgbClr val="33423A"/>
+                </a:solidFill>
+                <a:latin typeface="Calibri" pitchFamily="34" charset="0"/>
+                <a:ea typeface="Calibri" pitchFamily="34" charset="-122"/>
+                <a:cs typeface="Calibri" pitchFamily="34" charset="-120"/>
+              </a:rPr>
+              <a:t>FAO (FAOSTAT, AQUASTAT) et Banque mondiale (WDI).</a:t>
+            </a:r>
+            <a:endParaRPr lang="en-US" sz="1350" dirty="0"/>
+          </a:p>
+        </p:txBody>
+      </p:sp>
+      <p:sp>
+        <p:nvSpPr>
+          <p:cNvPr id="6" name="Text 4"/>
+          <p:cNvSpPr txBox="1"/>
+          <p:nvPr/>
+        </p:nvSpPr>
+        <p:spPr>
+          <a:xfrm>
+            <a:off x="6370168" y="1783080"/>
+            <a:ext cx="5227168" cy="411480"/>
+          </a:xfrm>
+          <a:prstGeom prst="rect">
+            <a:avLst/>
+          </a:prstGeom>
+          <a:noFill/>
+          <a:ln/>
+        </p:spPr>
+        <p:txBody>
+          <a:bodyPr wrap="square" lIns="0" tIns="0" rIns="0" bIns="0" rtlCol="0" anchor="ctr"/>
+          <a:lstStyle/>
+          <a:p>
+            <a:pPr algn="l" indent="0" marL="0">
+              <a:buNone/>
+            </a:pPr>
+            <a:r>
+              <a:rPr lang="en-US" sz="1600" b="1" dirty="0">
+                <a:solidFill>
+                  <a:srgbClr val="1F5C3A"/>
+                </a:solidFill>
+                <a:latin typeface="Cambria" pitchFamily="34" charset="0"/>
+                <a:ea typeface="Cambria" pitchFamily="34" charset="-122"/>
+                <a:cs typeface="Cambria" pitchFamily="34" charset="-120"/>
+              </a:rPr>
+              <a:t>Hypothèses de travail</a:t>
+            </a:r>
+            <a:endParaRPr lang="en-US" sz="1600" dirty="0"/>
+          </a:p>
+        </p:txBody>
+      </p:sp>
+      <p:sp>
+        <p:nvSpPr>
+          <p:cNvPr id="7" name="Text 5"/>
+          <p:cNvSpPr txBox="1"/>
+          <p:nvPr/>
+        </p:nvSpPr>
+        <p:spPr>
+          <a:xfrm>
+            <a:off x="6370168" y="2286000"/>
+            <a:ext cx="5227168" cy="2468880"/>
+          </a:xfrm>
+          <a:prstGeom prst="rect">
+            <a:avLst/>
+          </a:prstGeom>
+          <a:noFill/>
+          <a:ln/>
+        </p:spPr>
+        <p:txBody>
+          <a:bodyPr wrap="square" lIns="0" tIns="0" rIns="0" bIns="0" rtlCol="0" anchor="t"/>
+          <a:lstStyle/>
+          <a:p>
+            <a:pPr algn="l" marL="342900" indent="-342900">
+              <a:lnSpc>
+                <a:spcPct val="122000"/>
+              </a:lnSpc>
+              <a:spcAft>
+                <a:spcPts val="1000"/>
+              </a:spcAft>
+              <a:buSzPct val="100000"/>
+              <a:buChar char="•"/>
+            </a:pPr>
+            <a:r>
+              <a:rPr lang="en-US" sz="1350" dirty="0">
+                <a:solidFill>
+                  <a:srgbClr val="33423A"/>
+                </a:solidFill>
+                <a:latin typeface="Calibri" pitchFamily="34" charset="0"/>
+                <a:ea typeface="Calibri" pitchFamily="34" charset="-122"/>
+                <a:cs typeface="Calibri" pitchFamily="34" charset="-120"/>
+              </a:rPr>
+              <a:t>Les chiffres sont des ordres de grandeur arrondis, tirés des dernières données publiques disponibles.</a:t>
+            </a:r>
+            <a:endParaRPr lang="en-US" sz="1350" dirty="0"/>
+          </a:p>
+          <a:p>
+            <a:pPr algn="l" marL="342900" indent="-342900">
+              <a:lnSpc>
+                <a:spcPct val="122000"/>
+              </a:lnSpc>
+              <a:spcAft>
+                <a:spcPts val="1000"/>
+              </a:spcAft>
+              <a:buSzPct val="100000"/>
+              <a:buChar char="•"/>
+            </a:pPr>
+            <a:r>
+              <a:rPr lang="en-US" sz="1350" dirty="0">
+                <a:solidFill>
+                  <a:srgbClr val="33423A"/>
+                </a:solidFill>
+                <a:latin typeface="Calibri" pitchFamily="34" charset="0"/>
+                <a:ea typeface="Calibri" pitchFamily="34" charset="-122"/>
+                <a:cs typeface="Calibri" pitchFamily="34" charset="-120"/>
+              </a:rPr>
+              <a:t>Les gains d'eau et de rendement sont indicatifs et varient selon le sol, le climat et la culture.</a:t>
+            </a:r>
+            <a:endParaRPr lang="en-US" sz="1350" dirty="0"/>
+          </a:p>
+          <a:p>
+            <a:pPr algn="l" marL="342900" indent="-342900">
+              <a:lnSpc>
+                <a:spcPct val="122000"/>
+              </a:lnSpc>
+              <a:spcAft>
+                <a:spcPts val="1000"/>
+              </a:spcAft>
+              <a:buSzPct val="100000"/>
+              <a:buChar char="•"/>
+            </a:pPr>
+            <a:r>
+              <a:rPr lang="en-US" sz="1350" dirty="0">
+                <a:solidFill>
+                  <a:srgbClr val="33423A"/>
+                </a:solidFill>
+                <a:latin typeface="Calibri" pitchFamily="34" charset="0"/>
+                <a:ea typeface="Calibri" pitchFamily="34" charset="-122"/>
+                <a:cs typeface="Calibri" pitchFamily="34" charset="-120"/>
+              </a:rPr>
+              <a:t>Document de travail commercial : chiffres à actualiser avant toute soumission officielle.</a:t>
+            </a:r>
+            <a:endParaRPr lang="en-US" sz="1350" dirty="0"/>
+          </a:p>
+        </p:txBody>
+      </p:sp>
+      <p:sp>
+        <p:nvSpPr>
+          <p:cNvPr id="8" name="Shape 6"/>
+          <p:cNvSpPr/>
+          <p:nvPr/>
+        </p:nvSpPr>
+        <p:spPr>
+          <a:xfrm>
+            <a:off x="594360" y="4846320"/>
+            <a:ext cx="11002975" cy="960120"/>
+          </a:xfrm>
+          <a:prstGeom prst="roundRect">
+            <a:avLst>
+              <a:gd name="adj" fmla="val 7619"/>
+            </a:avLst>
+          </a:prstGeom>
+          <a:solidFill>
+            <a:srgbClr val="F1F4EF"/>
+          </a:solidFill>
+          <a:ln w="9525">
+            <a:solidFill>
+              <a:srgbClr val="DCE4DA"/>
+            </a:solidFill>
+            <a:prstDash val="solid"/>
+          </a:ln>
+        </p:spPr>
+      </p:sp>
+      <p:sp>
+        <p:nvSpPr>
+          <p:cNvPr id="9" name="Text 7"/>
+          <p:cNvSpPr txBox="1"/>
+          <p:nvPr/>
+        </p:nvSpPr>
+        <p:spPr>
+          <a:xfrm>
+            <a:off x="822960" y="4983480"/>
+            <a:ext cx="10545775" cy="713232"/>
+          </a:xfrm>
+          <a:prstGeom prst="rect">
+            <a:avLst/>
+          </a:prstGeom>
+          <a:noFill/>
+          <a:ln/>
+        </p:spPr>
+        <p:txBody>
+          <a:bodyPr wrap="square" lIns="0" tIns="0" rIns="0" bIns="0" rtlCol="0" anchor="t"/>
+          <a:lstStyle/>
+          <a:p>
+            <a:pPr algn="l" indent="0" marL="0">
+              <a:lnSpc>
+                <a:spcPct val="118000"/>
+              </a:lnSpc>
+              <a:buNone/>
+            </a:pPr>
+            <a:r>
+              <a:rPr lang="en-US" sz="1100" dirty="0">
+                <a:solidFill>
+                  <a:srgbClr val="6B7C72"/>
+                </a:solidFill>
+                <a:latin typeface="Calibri" pitchFamily="34" charset="0"/>
+                <a:ea typeface="Calibri" pitchFamily="34" charset="-122"/>
+                <a:cs typeface="Calibri" pitchFamily="34" charset="-120"/>
+              </a:rPr>
+              <a:t>Rapports d'essais, certificats (SOHISCERT, analyses Polymex et SGS) et fiches techniques : disponibles sur demande.</a:t>
+            </a:r>
+            <a:endParaRPr lang="en-US" sz="1100" dirty="0"/>
+          </a:p>
+        </p:txBody>
+      </p:sp>
+      <p:sp>
+        <p:nvSpPr>
+          <p:cNvPr id="10" name="Text 8"/>
+          <p:cNvSpPr txBox="1"/>
+          <p:nvPr/>
+        </p:nvSpPr>
+        <p:spPr>
+          <a:xfrm>
+            <a:off x="502920" y="6382512"/>
+            <a:ext cx="8229600" cy="274320"/>
+          </a:xfrm>
+          <a:prstGeom prst="rect">
+            <a:avLst/>
+          </a:prstGeom>
+          <a:noFill/>
+          <a:ln/>
+        </p:spPr>
+        <p:txBody>
+          <a:bodyPr wrap="square" lIns="0" tIns="0" rIns="0" bIns="0" rtlCol="0" anchor="ctr"/>
+          <a:lstStyle/>
+          <a:p>
+            <a:pPr algn="l" indent="0" marL="0">
+              <a:buNone/>
+            </a:pPr>
+            <a:r>
+              <a:rPr lang="en-US" sz="950" dirty="0">
+                <a:solidFill>
+                  <a:srgbClr val="6B7C72">
+                    <a:alpha val="80000"/>
+                  </a:srgbClr>
+                </a:solidFill>
+                <a:latin typeface="Calibri" pitchFamily="34" charset="0"/>
+                <a:ea typeface="Calibri" pitchFamily="34" charset="-122"/>
+                <a:cs typeface="Calibri" pitchFamily="34" charset="-120"/>
+              </a:rPr>
+              <a:t>Green Solutions · Dossier marché Maroc</a:t>
+            </a:r>
+            <a:endParaRPr lang="en-US" sz="950" dirty="0"/>
+          </a:p>
+        </p:txBody>
+      </p:sp>
+      <p:sp>
+        <p:nvSpPr>
+          <p:cNvPr id="11" name="Text 9"/>
+          <p:cNvSpPr txBox="1"/>
+          <p:nvPr/>
+        </p:nvSpPr>
+        <p:spPr>
+          <a:xfrm>
+            <a:off x="11140135" y="6382512"/>
+            <a:ext cx="548640" cy="274320"/>
+          </a:xfrm>
+          <a:prstGeom prst="rect">
+            <a:avLst/>
+          </a:prstGeom>
+          <a:noFill/>
+          <a:ln/>
+        </p:spPr>
+        <p:txBody>
+          <a:bodyPr wrap="square" lIns="0" tIns="0" rIns="0" bIns="0" rtlCol="0" anchor="ctr"/>
+          <a:lstStyle/>
+          <a:p>
+            <a:pPr algn="r" indent="0" marL="0">
+              <a:buNone/>
+            </a:pPr>
+            <a:r>
+              <a:rPr lang="en-US" sz="950" dirty="0">
+                <a:solidFill>
+                  <a:srgbClr val="6B7C72">
+                    <a:alpha val="80000"/>
+                  </a:srgbClr>
+                </a:solidFill>
+                <a:latin typeface="Calibri" pitchFamily="34" charset="0"/>
+                <a:ea typeface="Calibri" pitchFamily="34" charset="-122"/>
+                <a:cs typeface="Calibri" pitchFamily="34" charset="-120"/>
+              </a:rPr>
+              <a:t>16</a:t>
+            </a:r>
+            <a:endParaRPr lang="en-US" sz="950" dirty="0"/>
+          </a:p>
+        </p:txBody>
+      </p:sp>
+    </p:spTree>
+  </p:cSld>
+  <p:clrMapOvr>
+    <a:masterClrMapping/>
+  </p:clrMapOvr>
+</p:sld>
+</file>
+
+<file path=ppt/slides/slide18.xml><?xml version="1.0" encoding="utf-8"?>
+<p:sld xmlns:a="http://schemas.openxmlformats.org/drawingml/2006/main" xmlns:r="http://schemas.openxmlformats.org/officeDocument/2006/relationships" xmlns:p="http://schemas.openxmlformats.org/presentationml/2006/main">
+  <p:cSld name="Slide 18">
     <p:spTree>
       <p:nvGrpSpPr>
         <p:cNvPr id="1" name=""/>
@@ -3927,7 +9626,7 @@
                 <a:ea typeface="Calibri" pitchFamily="34" charset="-122"/>
                 <a:cs typeface="Calibri" pitchFamily="34" charset="-120"/>
               </a:rPr>
-              <a:t>10</a:t>
+              <a:t>17</a:t>
             </a:r>
             <a:endParaRPr lang="en-US" sz="950" dirty="0"/>
           </a:p>
@@ -5406,7 +11105,7 @@
                 <a:ea typeface="Calibri" pitchFamily="34" charset="-122"/>
                 <a:cs typeface="Calibri" pitchFamily="34" charset="-120"/>
               </a:rPr>
-              <a:t>LES FILIÈRES</a:t>
+              <a:t>ÉCONOMIE ET SÉCURITÉ ALIMENTAIRE</a:t>
             </a:r>
             <a:endParaRPr lang="en-US" sz="1150" dirty="0"/>
           </a:p>
@@ -5445,42 +11144,26 @@
                 <a:ea typeface="Cambria" pitchFamily="34" charset="-122"/>
                 <a:cs typeface="Cambria" pitchFamily="34" charset="-120"/>
               </a:rPr>
-              <a:t>Quatre productions portent la valeur à l'export</a:t>
+              <a:t>Exporter des primeurs, importer du blé</a:t>
             </a:r>
             <a:endParaRPr lang="en-US" sz="3000" dirty="0"/>
           </a:p>
         </p:txBody>
       </p:sp>
-      <p:graphicFrame>
-        <p:nvGraphicFramePr>
-          <p:cNvPr id="4" name="Chart 0" descr=""/>
-          <p:cNvGraphicFramePr/>
-          <p:nvPr/>
-        </p:nvGraphicFramePr>
-        <p:xfrm>
-          <a:off x="594360" y="1783080"/>
-          <a:ext cx="7360920" cy="3977640"/>
-        </p:xfrm>
-        <a:graphic xmlns:a="http://schemas.openxmlformats.org/drawingml/2006/main">
-          <a:graphicData uri="http://schemas.openxmlformats.org/drawingml/2006/chart">
-            <c:chart xmlns:c="http://schemas.openxmlformats.org/drawingml/2006/chart" r:id="rId1"/>
-          </a:graphicData>
-        </a:graphic>
-      </p:graphicFrame>
-      <p:sp>
-        <p:nvSpPr>
-          <p:cNvPr id="5" name="Shape 2"/>
+      <p:sp>
+        <p:nvSpPr>
+          <p:cNvPr id="4" name="Shape 2"/>
           <p:cNvSpPr/>
           <p:nvPr/>
         </p:nvSpPr>
         <p:spPr>
           <a:xfrm>
-            <a:off x="8275320" y="1783080"/>
-            <a:ext cx="3291840" cy="3977640"/>
+            <a:off x="594360" y="1874520"/>
+            <a:ext cx="2545004" cy="2514600"/>
           </a:xfrm>
           <a:prstGeom prst="roundRect">
             <a:avLst>
-              <a:gd name="adj" fmla="val 2778"/>
+              <a:gd name="adj" fmla="val 3636"/>
             </a:avLst>
           </a:prstGeom>
           <a:solidFill>
@@ -5496,14 +11179,14 @@
       </p:sp>
       <p:sp>
         <p:nvSpPr>
-          <p:cNvPr id="6" name="Text 3"/>
-          <p:cNvSpPr txBox="1"/>
-          <p:nvPr/>
-        </p:nvSpPr>
-        <p:spPr>
-          <a:xfrm>
-            <a:off x="8503920" y="2011680"/>
-            <a:ext cx="2834640" cy="457200"/>
+          <p:cNvPr id="5" name="Text 3"/>
+          <p:cNvSpPr txBox="1"/>
+          <p:nvPr/>
+        </p:nvSpPr>
+        <p:spPr>
+          <a:xfrm>
+            <a:off x="777240" y="2148840"/>
+            <a:ext cx="2179244" cy="960120"/>
           </a:xfrm>
           <a:prstGeom prst="rect">
             <a:avLst/>
@@ -5515,11 +11198,11 @@
           <a:bodyPr wrap="square" lIns="0" tIns="0" rIns="0" bIns="0" rtlCol="0" anchor="ctr"/>
           <a:lstStyle/>
           <a:p>
-            <a:pPr algn="l" indent="0" marL="0">
-              <a:buNone/>
-            </a:pPr>
-            <a:r>
-              <a:rPr lang="en-US" sz="1300" b="1" dirty="0">
+            <a:pPr algn="ctr" indent="0" marL="0">
+              <a:buNone/>
+            </a:pPr>
+            <a:r>
+              <a:rPr lang="en-US" sz="3800" b="1" dirty="0">
                 <a:solidFill>
                   <a:srgbClr val="1F5C3A"/>
                 </a:solidFill>
@@ -5527,22 +11210,388 @@
                 <a:ea typeface="Cambria" pitchFamily="34" charset="-122"/>
                 <a:cs typeface="Cambria" pitchFamily="34" charset="-120"/>
               </a:rPr>
-              <a:t>Lecture</a:t>
-            </a:r>
-            <a:endParaRPr lang="en-US" sz="1300" dirty="0"/>
-          </a:p>
-        </p:txBody>
-      </p:sp>
-      <p:sp>
-        <p:nvSpPr>
-          <p:cNvPr id="7" name="Text 4"/>
-          <p:cNvSpPr txBox="1"/>
-          <p:nvPr/>
-        </p:nvSpPr>
-        <p:spPr>
-          <a:xfrm>
-            <a:off x="8503920" y="2560320"/>
-            <a:ext cx="2834640" cy="3017520"/>
+              <a:t>Top 5</a:t>
+            </a:r>
+            <a:endParaRPr lang="en-US" sz="3800" dirty="0"/>
+          </a:p>
+        </p:txBody>
+      </p:sp>
+      <p:sp>
+        <p:nvSpPr>
+          <p:cNvPr id="6" name="Text 4"/>
+          <p:cNvSpPr txBox="1"/>
+          <p:nvPr/>
+        </p:nvSpPr>
+        <p:spPr>
+          <a:xfrm>
+            <a:off x="795528" y="3154680"/>
+            <a:ext cx="2142668" cy="1051560"/>
+          </a:xfrm>
+          <a:prstGeom prst="rect">
+            <a:avLst/>
+          </a:prstGeom>
+          <a:noFill/>
+          <a:ln/>
+        </p:spPr>
+        <p:txBody>
+          <a:bodyPr wrap="square" lIns="0" tIns="0" rIns="0" bIns="0" rtlCol="0" anchor="t"/>
+          <a:lstStyle/>
+          <a:p>
+            <a:pPr algn="ctr" indent="0" marL="0">
+              <a:lnSpc>
+                <a:spcPct val="118000"/>
+              </a:lnSpc>
+              <a:buNone/>
+            </a:pPr>
+            <a:r>
+              <a:rPr lang="en-US" sz="1250" dirty="0">
+                <a:solidFill>
+                  <a:srgbClr val="33423A"/>
+                </a:solidFill>
+                <a:latin typeface="Calibri" pitchFamily="34" charset="0"/>
+                <a:ea typeface="Calibri" pitchFamily="34" charset="-122"/>
+                <a:cs typeface="Calibri" pitchFamily="34" charset="-120"/>
+              </a:rPr>
+              <a:t>des exportateurs mondiaux de tomates fraîches</a:t>
+            </a:r>
+            <a:endParaRPr lang="en-US" sz="1250" dirty="0"/>
+          </a:p>
+        </p:txBody>
+      </p:sp>
+      <p:sp>
+        <p:nvSpPr>
+          <p:cNvPr id="7" name="Shape 5"/>
+          <p:cNvSpPr/>
+          <p:nvPr/>
+        </p:nvSpPr>
+        <p:spPr>
+          <a:xfrm>
+            <a:off x="3413684" y="1874520"/>
+            <a:ext cx="2545004" cy="2514600"/>
+          </a:xfrm>
+          <a:prstGeom prst="roundRect">
+            <a:avLst>
+              <a:gd name="adj" fmla="val 3636"/>
+            </a:avLst>
+          </a:prstGeom>
+          <a:solidFill>
+            <a:srgbClr val="F1F4EF"/>
+          </a:solidFill>
+          <a:ln w="9525">
+            <a:solidFill>
+              <a:srgbClr val="DCE4DA"/>
+            </a:solidFill>
+            <a:prstDash val="solid"/>
+          </a:ln>
+        </p:spPr>
+      </p:sp>
+      <p:sp>
+        <p:nvSpPr>
+          <p:cNvPr id="8" name="Text 6"/>
+          <p:cNvSpPr txBox="1"/>
+          <p:nvPr/>
+        </p:nvSpPr>
+        <p:spPr>
+          <a:xfrm>
+            <a:off x="3596564" y="2148840"/>
+            <a:ext cx="2179244" cy="960120"/>
+          </a:xfrm>
+          <a:prstGeom prst="rect">
+            <a:avLst/>
+          </a:prstGeom>
+          <a:noFill/>
+          <a:ln/>
+        </p:spPr>
+        <p:txBody>
+          <a:bodyPr wrap="square" lIns="0" tIns="0" rIns="0" bIns="0" rtlCol="0" anchor="ctr"/>
+          <a:lstStyle/>
+          <a:p>
+            <a:pPr algn="ctr" indent="0" marL="0">
+              <a:buNone/>
+            </a:pPr>
+            <a:r>
+              <a:rPr lang="en-US" sz="3000" b="1" dirty="0">
+                <a:solidFill>
+                  <a:srgbClr val="1F5C3A"/>
+                </a:solidFill>
+                <a:latin typeface="Cambria" pitchFamily="34" charset="0"/>
+                <a:ea typeface="Cambria" pitchFamily="34" charset="-122"/>
+                <a:cs typeface="Cambria" pitchFamily="34" charset="-120"/>
+              </a:rPr>
+              <a:t>≈ 80 Md DH</a:t>
+            </a:r>
+            <a:endParaRPr lang="en-US" sz="3000" dirty="0"/>
+          </a:p>
+        </p:txBody>
+      </p:sp>
+      <p:sp>
+        <p:nvSpPr>
+          <p:cNvPr id="9" name="Text 7"/>
+          <p:cNvSpPr txBox="1"/>
+          <p:nvPr/>
+        </p:nvSpPr>
+        <p:spPr>
+          <a:xfrm>
+            <a:off x="3614852" y="3154680"/>
+            <a:ext cx="2142668" cy="1051560"/>
+          </a:xfrm>
+          <a:prstGeom prst="rect">
+            <a:avLst/>
+          </a:prstGeom>
+          <a:noFill/>
+          <a:ln/>
+        </p:spPr>
+        <p:txBody>
+          <a:bodyPr wrap="square" lIns="0" tIns="0" rIns="0" bIns="0" rtlCol="0" anchor="t"/>
+          <a:lstStyle/>
+          <a:p>
+            <a:pPr algn="ctr" indent="0" marL="0">
+              <a:lnSpc>
+                <a:spcPct val="118000"/>
+              </a:lnSpc>
+              <a:buNone/>
+            </a:pPr>
+            <a:r>
+              <a:rPr lang="en-US" sz="1250" dirty="0">
+                <a:solidFill>
+                  <a:srgbClr val="33423A"/>
+                </a:solidFill>
+                <a:latin typeface="Calibri" pitchFamily="34" charset="0"/>
+                <a:ea typeface="Calibri" pitchFamily="34" charset="-122"/>
+                <a:cs typeface="Calibri" pitchFamily="34" charset="-120"/>
+              </a:rPr>
+              <a:t>d'exportations agroalimentaires par an</a:t>
+            </a:r>
+            <a:endParaRPr lang="en-US" sz="1250" dirty="0"/>
+          </a:p>
+        </p:txBody>
+      </p:sp>
+      <p:sp>
+        <p:nvSpPr>
+          <p:cNvPr id="10" name="Shape 8"/>
+          <p:cNvSpPr/>
+          <p:nvPr/>
+        </p:nvSpPr>
+        <p:spPr>
+          <a:xfrm>
+            <a:off x="6233008" y="1874520"/>
+            <a:ext cx="2545004" cy="2514600"/>
+          </a:xfrm>
+          <a:prstGeom prst="roundRect">
+            <a:avLst>
+              <a:gd name="adj" fmla="val 3636"/>
+            </a:avLst>
+          </a:prstGeom>
+          <a:solidFill>
+            <a:srgbClr val="F1F4EF"/>
+          </a:solidFill>
+          <a:ln w="9525">
+            <a:solidFill>
+              <a:srgbClr val="DCE4DA"/>
+            </a:solidFill>
+            <a:prstDash val="solid"/>
+          </a:ln>
+        </p:spPr>
+      </p:sp>
+      <p:sp>
+        <p:nvSpPr>
+          <p:cNvPr id="11" name="Text 9"/>
+          <p:cNvSpPr txBox="1"/>
+          <p:nvPr/>
+        </p:nvSpPr>
+        <p:spPr>
+          <a:xfrm>
+            <a:off x="6415888" y="2148840"/>
+            <a:ext cx="2179244" cy="960120"/>
+          </a:xfrm>
+          <a:prstGeom prst="rect">
+            <a:avLst/>
+          </a:prstGeom>
+          <a:noFill/>
+          <a:ln/>
+        </p:spPr>
+        <p:txBody>
+          <a:bodyPr wrap="square" lIns="0" tIns="0" rIns="0" bIns="0" rtlCol="0" anchor="ctr"/>
+          <a:lstStyle/>
+          <a:p>
+            <a:pPr algn="ctr" indent="0" marL="0">
+              <a:buNone/>
+            </a:pPr>
+            <a:r>
+              <a:rPr lang="en-US" sz="3800" b="1" dirty="0">
+                <a:solidFill>
+                  <a:srgbClr val="1F5C3A"/>
+                </a:solidFill>
+                <a:latin typeface="Cambria" pitchFamily="34" charset="0"/>
+                <a:ea typeface="Cambria" pitchFamily="34" charset="-122"/>
+                <a:cs typeface="Cambria" pitchFamily="34" charset="-120"/>
+              </a:rPr>
+              <a:t>&gt; 50 %</a:t>
+            </a:r>
+            <a:endParaRPr lang="en-US" sz="3800" dirty="0"/>
+          </a:p>
+        </p:txBody>
+      </p:sp>
+      <p:sp>
+        <p:nvSpPr>
+          <p:cNvPr id="12" name="Text 10"/>
+          <p:cNvSpPr txBox="1"/>
+          <p:nvPr/>
+        </p:nvSpPr>
+        <p:spPr>
+          <a:xfrm>
+            <a:off x="6434176" y="3154680"/>
+            <a:ext cx="2142668" cy="1051560"/>
+          </a:xfrm>
+          <a:prstGeom prst="rect">
+            <a:avLst/>
+          </a:prstGeom>
+          <a:noFill/>
+          <a:ln/>
+        </p:spPr>
+        <p:txBody>
+          <a:bodyPr wrap="square" lIns="0" tIns="0" rIns="0" bIns="0" rtlCol="0" anchor="t"/>
+          <a:lstStyle/>
+          <a:p>
+            <a:pPr algn="ctr" indent="0" marL="0">
+              <a:lnSpc>
+                <a:spcPct val="118000"/>
+              </a:lnSpc>
+              <a:buNone/>
+            </a:pPr>
+            <a:r>
+              <a:rPr lang="en-US" sz="1250" dirty="0">
+                <a:solidFill>
+                  <a:srgbClr val="33423A"/>
+                </a:solidFill>
+                <a:latin typeface="Calibri" pitchFamily="34" charset="0"/>
+                <a:ea typeface="Calibri" pitchFamily="34" charset="-122"/>
+                <a:cs typeface="Calibri" pitchFamily="34" charset="-120"/>
+              </a:rPr>
+              <a:t>du blé consommé importé les années de sécheresse</a:t>
+            </a:r>
+            <a:endParaRPr lang="en-US" sz="1250" dirty="0"/>
+          </a:p>
+        </p:txBody>
+      </p:sp>
+      <p:sp>
+        <p:nvSpPr>
+          <p:cNvPr id="13" name="Shape 11"/>
+          <p:cNvSpPr/>
+          <p:nvPr/>
+        </p:nvSpPr>
+        <p:spPr>
+          <a:xfrm>
+            <a:off x="9052331" y="1874520"/>
+            <a:ext cx="2545004" cy="2514600"/>
+          </a:xfrm>
+          <a:prstGeom prst="roundRect">
+            <a:avLst>
+              <a:gd name="adj" fmla="val 3636"/>
+            </a:avLst>
+          </a:prstGeom>
+          <a:solidFill>
+            <a:srgbClr val="F1F4EF"/>
+          </a:solidFill>
+          <a:ln w="9525">
+            <a:solidFill>
+              <a:srgbClr val="DCE4DA"/>
+            </a:solidFill>
+            <a:prstDash val="solid"/>
+          </a:ln>
+        </p:spPr>
+      </p:sp>
+      <p:sp>
+        <p:nvSpPr>
+          <p:cNvPr id="14" name="Text 12"/>
+          <p:cNvSpPr txBox="1"/>
+          <p:nvPr/>
+        </p:nvSpPr>
+        <p:spPr>
+          <a:xfrm>
+            <a:off x="9235211" y="2148840"/>
+            <a:ext cx="2179244" cy="960120"/>
+          </a:xfrm>
+          <a:prstGeom prst="rect">
+            <a:avLst/>
+          </a:prstGeom>
+          <a:noFill/>
+          <a:ln/>
+        </p:spPr>
+        <p:txBody>
+          <a:bodyPr wrap="square" lIns="0" tIns="0" rIns="0" bIns="0" rtlCol="0" anchor="ctr"/>
+          <a:lstStyle/>
+          <a:p>
+            <a:pPr algn="ctr" indent="0" marL="0">
+              <a:buNone/>
+            </a:pPr>
+            <a:r>
+              <a:rPr lang="en-US" sz="3800" b="1" dirty="0">
+                <a:solidFill>
+                  <a:srgbClr val="1F5C3A"/>
+                </a:solidFill>
+                <a:latin typeface="Cambria" pitchFamily="34" charset="0"/>
+                <a:ea typeface="Cambria" pitchFamily="34" charset="-122"/>
+                <a:cs typeface="Cambria" pitchFamily="34" charset="-120"/>
+              </a:rPr>
+              <a:t>2030</a:t>
+            </a:r>
+            <a:endParaRPr lang="en-US" sz="3800" dirty="0"/>
+          </a:p>
+        </p:txBody>
+      </p:sp>
+      <p:sp>
+        <p:nvSpPr>
+          <p:cNvPr id="15" name="Text 13"/>
+          <p:cNvSpPr txBox="1"/>
+          <p:nvPr/>
+        </p:nvSpPr>
+        <p:spPr>
+          <a:xfrm>
+            <a:off x="9253499" y="3154680"/>
+            <a:ext cx="2142668" cy="1051560"/>
+          </a:xfrm>
+          <a:prstGeom prst="rect">
+            <a:avLst/>
+          </a:prstGeom>
+          <a:noFill/>
+          <a:ln/>
+        </p:spPr>
+        <p:txBody>
+          <a:bodyPr wrap="square" lIns="0" tIns="0" rIns="0" bIns="0" rtlCol="0" anchor="t"/>
+          <a:lstStyle/>
+          <a:p>
+            <a:pPr algn="ctr" indent="0" marL="0">
+              <a:lnSpc>
+                <a:spcPct val="118000"/>
+              </a:lnSpc>
+              <a:buNone/>
+            </a:pPr>
+            <a:r>
+              <a:rPr lang="en-US" sz="1250" dirty="0">
+                <a:solidFill>
+                  <a:srgbClr val="33423A"/>
+                </a:solidFill>
+                <a:latin typeface="Calibri" pitchFamily="34" charset="0"/>
+                <a:ea typeface="Calibri" pitchFamily="34" charset="-122"/>
+                <a:cs typeface="Calibri" pitchFamily="34" charset="-120"/>
+              </a:rPr>
+              <a:t>horizon de la stratégie Génération Green, après le Plan Maroc Vert</a:t>
+            </a:r>
+            <a:endParaRPr lang="en-US" sz="1250" dirty="0"/>
+          </a:p>
+        </p:txBody>
+      </p:sp>
+      <p:sp>
+        <p:nvSpPr>
+          <p:cNvPr id="16" name="Text 14"/>
+          <p:cNvSpPr txBox="1"/>
+          <p:nvPr/>
+        </p:nvSpPr>
+        <p:spPr>
+          <a:xfrm>
+            <a:off x="594360" y="4709160"/>
+            <a:ext cx="11002975" cy="1097280"/>
           </a:xfrm>
           <a:prstGeom prst="rect">
             <a:avLst/>
@@ -5556,12 +11605,12 @@
           <a:p>
             <a:pPr algn="l" indent="0" marL="0">
               <a:lnSpc>
-                <a:spcPct val="125000"/>
+                <a:spcPct val="130000"/>
               </a:lnSpc>
               <a:buNone/>
             </a:pPr>
             <a:r>
-              <a:rPr lang="en-US" sz="1200" dirty="0">
+              <a:rPr lang="en-US" sz="1350" dirty="0">
                 <a:solidFill>
                   <a:srgbClr val="33423A"/>
                 </a:solidFill>
@@ -5569,44 +11618,15 @@
                 <a:ea typeface="Calibri" pitchFamily="34" charset="-122"/>
                 <a:cs typeface="Calibri" pitchFamily="34" charset="-120"/>
               </a:rPr>
-              <a:t>Agrumes et tomate sont irrigués et destinés à l'export : ce sont les cultures où l'économie d'eau se convertit directement en marge.</a:t>
-            </a:r>
-            <a:endParaRPr lang="en-US" sz="1200" dirty="0"/>
-          </a:p>
-          <a:p>
-            <a:pPr algn="l" indent="0" marL="0">
-              <a:lnSpc>
-                <a:spcPct val="125000"/>
-              </a:lnSpc>
-              <a:buNone/>
-            </a:pPr>
-            <a:endParaRPr lang="en-US" sz="1200" dirty="0"/>
-          </a:p>
-          <a:p>
-            <a:pPr algn="l" indent="0" marL="0">
-              <a:lnSpc>
-                <a:spcPct val="125000"/>
-              </a:lnSpc>
-              <a:buNone/>
-            </a:pPr>
-            <a:r>
-              <a:rPr lang="en-US" sz="1200" dirty="0">
-                <a:solidFill>
-                  <a:srgbClr val="33423A"/>
-                </a:solidFill>
-                <a:latin typeface="Calibri" pitchFamily="34" charset="0"/>
-                <a:ea typeface="Calibri" pitchFamily="34" charset="-122"/>
-                <a:cs typeface="Calibri" pitchFamily="34" charset="-120"/>
-              </a:rPr>
-              <a:t>* Les céréales sont majoritairement pluviales ; le volume varie fortement d'une campagne à l'autre selon la pluviométrie.</a:t>
-            </a:r>
-            <a:endParaRPr lang="en-US" sz="1200" dirty="0"/>
-          </a:p>
-        </p:txBody>
-      </p:sp>
-      <p:sp>
-        <p:nvSpPr>
-          <p:cNvPr id="8" name="Text 5"/>
+              <a:t>Le Maroc exporte tomates, agrumes, fruits rouges et olives vers l'Europe et l'Afrique, mais dépend de l'étranger pour une large part de son blé. Avec des barrages au plus bas, les dotations d'irrigation ont été réduites et le dessalement s'est ouvert à l'agriculture, notamment à Chtouka.</a:t>
+            </a:r>
+            <a:endParaRPr lang="en-US" sz="1350" dirty="0"/>
+          </a:p>
+        </p:txBody>
+      </p:sp>
+      <p:sp>
+        <p:nvSpPr>
+          <p:cNvPr id="17" name="Text 15"/>
           <p:cNvSpPr txBox="1"/>
           <p:nvPr/>
         </p:nvSpPr>
@@ -5647,7 +11667,7 @@
       </p:sp>
       <p:sp>
         <p:nvSpPr>
-          <p:cNvPr id="9" name="Text 6"/>
+          <p:cNvPr id="18" name="Text 16"/>
           <p:cNvSpPr txBox="1"/>
           <p:nvPr/>
         </p:nvSpPr>
@@ -5751,7 +11771,7 @@
                 <a:ea typeface="Calibri" pitchFamily="34" charset="-122"/>
                 <a:cs typeface="Calibri" pitchFamily="34" charset="-120"/>
               </a:rPr>
-              <a:t>NOTRE RÉPONSE</a:t>
+              <a:t>LES FILIÈRES</a:t>
             </a:r>
             <a:endParaRPr lang="en-US" sz="1150" dirty="0"/>
           </a:p>
@@ -5790,340 +11810,42 @@
                 <a:ea typeface="Cambria" pitchFamily="34" charset="-122"/>
                 <a:cs typeface="Cambria" pitchFamily="34" charset="-120"/>
               </a:rPr>
-              <a:t>Deux technologies, deux contraintes différentes</a:t>
+              <a:t>Quatre productions portent la valeur à l'export</a:t>
             </a:r>
             <a:endParaRPr lang="en-US" sz="3000" dirty="0"/>
           </a:p>
         </p:txBody>
       </p:sp>
-      <p:sp>
-        <p:nvSpPr>
-          <p:cNvPr id="4" name="Text 2"/>
-          <p:cNvSpPr txBox="1"/>
-          <p:nvPr/>
-        </p:nvSpPr>
-        <p:spPr>
-          <a:xfrm>
-            <a:off x="594360" y="1783080"/>
-            <a:ext cx="5227168" cy="411480"/>
-          </a:xfrm>
-          <a:prstGeom prst="rect">
-            <a:avLst/>
-          </a:prstGeom>
-          <a:noFill/>
-          <a:ln/>
-        </p:spPr>
-        <p:txBody>
-          <a:bodyPr wrap="square" lIns="0" tIns="0" rIns="0" bIns="0" rtlCol="0" anchor="ctr"/>
-          <a:lstStyle/>
-          <a:p>
-            <a:pPr algn="l" indent="0" marL="0">
-              <a:buNone/>
-            </a:pPr>
-            <a:r>
-              <a:rPr lang="en-US" sz="1600" b="1" dirty="0">
-                <a:solidFill>
-                  <a:srgbClr val="1F5C3A"/>
-                </a:solidFill>
-                <a:latin typeface="Cambria" pitchFamily="34" charset="0"/>
-                <a:ea typeface="Cambria" pitchFamily="34" charset="-122"/>
-                <a:cs typeface="Cambria" pitchFamily="34" charset="-120"/>
-              </a:rPr>
-              <a:t>EVERGREEN® — retenir l'eau</a:t>
-            </a:r>
-            <a:endParaRPr lang="en-US" sz="1600" dirty="0"/>
-          </a:p>
-        </p:txBody>
-      </p:sp>
-      <p:sp>
-        <p:nvSpPr>
-          <p:cNvPr id="5" name="Text 3"/>
-          <p:cNvSpPr txBox="1"/>
-          <p:nvPr/>
-        </p:nvSpPr>
-        <p:spPr>
-          <a:xfrm>
-            <a:off x="594360" y="2286000"/>
-            <a:ext cx="5227168" cy="2468880"/>
-          </a:xfrm>
-          <a:prstGeom prst="rect">
-            <a:avLst/>
-          </a:prstGeom>
-          <a:noFill/>
-          <a:ln/>
-        </p:spPr>
-        <p:txBody>
-          <a:bodyPr wrap="square" lIns="0" tIns="0" rIns="0" bIns="0" rtlCol="0" anchor="t"/>
-          <a:lstStyle/>
-          <a:p>
-            <a:pPr algn="l" marL="342900" indent="-342900">
-              <a:lnSpc>
-                <a:spcPct val="122000"/>
-              </a:lnSpc>
-              <a:spcAft>
-                <a:spcPts val="1000"/>
-              </a:spcAft>
-              <a:buSzPct val="100000"/>
-              <a:buChar char="•"/>
-            </a:pPr>
-            <a:r>
-              <a:rPr lang="en-US" sz="1350" dirty="0">
-                <a:solidFill>
-                  <a:srgbClr val="33423A"/>
-                </a:solidFill>
-                <a:latin typeface="Calibri" pitchFamily="34" charset="0"/>
-                <a:ea typeface="Calibri" pitchFamily="34" charset="-122"/>
-                <a:cs typeface="Calibri" pitchFamily="34" charset="-120"/>
-              </a:rPr>
-              <a:t>Hydro-rétenteur à base de potassium, placé dans la zone racinaire à la plantation ou à la reprise.</a:t>
-            </a:r>
-            <a:endParaRPr lang="en-US" sz="1350" dirty="0"/>
-          </a:p>
-          <a:p>
-            <a:pPr algn="l" marL="342900" indent="-342900">
-              <a:lnSpc>
-                <a:spcPct val="122000"/>
-              </a:lnSpc>
-              <a:spcAft>
-                <a:spcPts val="1000"/>
-              </a:spcAft>
-              <a:buSzPct val="100000"/>
-              <a:buChar char="•"/>
-            </a:pPr>
-            <a:r>
-              <a:rPr lang="en-US" sz="1350" dirty="0">
-                <a:solidFill>
-                  <a:srgbClr val="33423A"/>
-                </a:solidFill>
-                <a:latin typeface="Calibri" pitchFamily="34" charset="0"/>
-                <a:ea typeface="Calibri" pitchFamily="34" charset="-122"/>
-                <a:cs typeface="Calibri" pitchFamily="34" charset="-120"/>
-              </a:rPr>
-              <a:t>Capte l'eau de pluie ou d'irrigation et la restitue à la plante au fur et à mesure, en supprimant le stress hydrique des phases critiques.</a:t>
-            </a:r>
-            <a:endParaRPr lang="en-US" sz="1350" dirty="0"/>
-          </a:p>
-          <a:p>
-            <a:pPr algn="l" marL="342900" indent="-342900">
-              <a:lnSpc>
-                <a:spcPct val="122000"/>
-              </a:lnSpc>
-              <a:spcAft>
-                <a:spcPts val="1000"/>
-              </a:spcAft>
-              <a:buSzPct val="100000"/>
-              <a:buChar char="•"/>
-            </a:pPr>
-            <a:r>
-              <a:rPr lang="en-US" sz="1350" dirty="0">
-                <a:solidFill>
-                  <a:srgbClr val="33423A"/>
-                </a:solidFill>
-                <a:latin typeface="Calibri" pitchFamily="34" charset="0"/>
-                <a:ea typeface="Calibri" pitchFamily="34" charset="-122"/>
-                <a:cs typeface="Calibri" pitchFamily="34" charset="-120"/>
-              </a:rPr>
-              <a:t>Capacité d'absorption de l'ordre de 300 fois son poids ; durée d'effet utile de 3 à 4 ans dans le sol.</a:t>
-            </a:r>
-            <a:endParaRPr lang="en-US" sz="1350" dirty="0"/>
-          </a:p>
-          <a:p>
-            <a:pPr algn="l" marL="342900" indent="-342900">
-              <a:lnSpc>
-                <a:spcPct val="122000"/>
-              </a:lnSpc>
-              <a:spcAft>
-                <a:spcPts val="1000"/>
-              </a:spcAft>
-              <a:buSzPct val="100000"/>
-              <a:buChar char="•"/>
-            </a:pPr>
-            <a:r>
-              <a:rPr lang="en-US" sz="1350" dirty="0">
-                <a:solidFill>
-                  <a:srgbClr val="33423A"/>
-                </a:solidFill>
-                <a:latin typeface="Calibri" pitchFamily="34" charset="0"/>
-                <a:ea typeface="Calibri" pitchFamily="34" charset="-122"/>
-                <a:cs typeface="Calibri" pitchFamily="34" charset="-120"/>
-              </a:rPr>
-              <a:t>Se dégrade de 20 à 25 % par an, sans accumulation ni risque de surdosage.</a:t>
-            </a:r>
-            <a:endParaRPr lang="en-US" sz="1350" dirty="0"/>
-          </a:p>
-        </p:txBody>
-      </p:sp>
-      <p:sp>
-        <p:nvSpPr>
-          <p:cNvPr id="6" name="Text 4"/>
-          <p:cNvSpPr txBox="1"/>
-          <p:nvPr/>
-        </p:nvSpPr>
-        <p:spPr>
-          <a:xfrm>
-            <a:off x="6370168" y="1783080"/>
-            <a:ext cx="5227168" cy="411480"/>
-          </a:xfrm>
-          <a:prstGeom prst="rect">
-            <a:avLst/>
-          </a:prstGeom>
-          <a:noFill/>
-          <a:ln/>
-        </p:spPr>
-        <p:txBody>
-          <a:bodyPr wrap="square" lIns="0" tIns="0" rIns="0" bIns="0" rtlCol="0" anchor="ctr"/>
-          <a:lstStyle/>
-          <a:p>
-            <a:pPr algn="l" indent="0" marL="0">
-              <a:buNone/>
-            </a:pPr>
-            <a:r>
-              <a:rPr lang="en-US" sz="1600" b="1" dirty="0">
-                <a:solidFill>
-                  <a:srgbClr val="1F5C3A"/>
-                </a:solidFill>
-                <a:latin typeface="Cambria" pitchFamily="34" charset="0"/>
-                <a:ea typeface="Cambria" pitchFamily="34" charset="-122"/>
-                <a:cs typeface="Cambria" pitchFamily="34" charset="-120"/>
-              </a:rPr>
-              <a:t>ECOFERT® — nourrir sans épuiser</a:t>
-            </a:r>
-            <a:endParaRPr lang="en-US" sz="1600" dirty="0"/>
-          </a:p>
-        </p:txBody>
-      </p:sp>
-      <p:sp>
-        <p:nvSpPr>
-          <p:cNvPr id="7" name="Text 5"/>
-          <p:cNvSpPr txBox="1"/>
-          <p:nvPr/>
-        </p:nvSpPr>
-        <p:spPr>
-          <a:xfrm>
-            <a:off x="6370168" y="2286000"/>
-            <a:ext cx="5227168" cy="2468880"/>
-          </a:xfrm>
-          <a:prstGeom prst="rect">
-            <a:avLst/>
-          </a:prstGeom>
-          <a:noFill/>
-          <a:ln/>
-        </p:spPr>
-        <p:txBody>
-          <a:bodyPr wrap="square" lIns="0" tIns="0" rIns="0" bIns="0" rtlCol="0" anchor="t"/>
-          <a:lstStyle/>
-          <a:p>
-            <a:pPr algn="l" marL="342900" indent="-342900">
-              <a:lnSpc>
-                <a:spcPct val="122000"/>
-              </a:lnSpc>
-              <a:spcAft>
-                <a:spcPts val="1000"/>
-              </a:spcAft>
-              <a:buSzPct val="100000"/>
-              <a:buChar char="•"/>
-            </a:pPr>
-            <a:r>
-              <a:rPr lang="en-US" sz="1350" dirty="0">
-                <a:solidFill>
-                  <a:srgbClr val="33423A"/>
-                </a:solidFill>
-                <a:latin typeface="Calibri" pitchFamily="34" charset="0"/>
-                <a:ea typeface="Calibri" pitchFamily="34" charset="-122"/>
-                <a:cs typeface="Calibri" pitchFamily="34" charset="-120"/>
-              </a:rPr>
-              <a:t>Fertilisant en microdoses d'acides aminés, azote, phosphore et potassium, issu de ressources renouvelables.</a:t>
-            </a:r>
-            <a:endParaRPr lang="en-US" sz="1350" dirty="0"/>
-          </a:p>
-          <a:p>
-            <a:pPr algn="l" marL="342900" indent="-342900">
-              <a:lnSpc>
-                <a:spcPct val="122000"/>
-              </a:lnSpc>
-              <a:spcAft>
-                <a:spcPts val="1000"/>
-              </a:spcAft>
-              <a:buSzPct val="100000"/>
-              <a:buChar char="•"/>
-            </a:pPr>
-            <a:r>
-              <a:rPr lang="en-US" sz="1350" dirty="0">
-                <a:solidFill>
-                  <a:srgbClr val="33423A"/>
-                </a:solidFill>
-                <a:latin typeface="Calibri" pitchFamily="34" charset="0"/>
-                <a:ea typeface="Calibri" pitchFamily="34" charset="-122"/>
-                <a:cs typeface="Calibri" pitchFamily="34" charset="-120"/>
-              </a:rPr>
-              <a:t>Non chélatant : il n'appauvrit pas le complexe argilo-humique et n'augmente ni la salinité ni la teneur en nitrates.</a:t>
-            </a:r>
-            <a:endParaRPr lang="en-US" sz="1350" dirty="0"/>
-          </a:p>
-          <a:p>
-            <a:pPr algn="l" marL="342900" indent="-342900">
-              <a:lnSpc>
-                <a:spcPct val="122000"/>
-              </a:lnSpc>
-              <a:spcAft>
-                <a:spcPts val="1000"/>
-              </a:spcAft>
-              <a:buSzPct val="100000"/>
-              <a:buChar char="•"/>
-            </a:pPr>
-            <a:r>
-              <a:rPr lang="en-US" sz="1350" dirty="0">
-                <a:solidFill>
-                  <a:srgbClr val="33423A"/>
-                </a:solidFill>
-                <a:latin typeface="Calibri" pitchFamily="34" charset="0"/>
-                <a:ea typeface="Calibri" pitchFamily="34" charset="-122"/>
-                <a:cs typeface="Calibri" pitchFamily="34" charset="-120"/>
-              </a:rPr>
-              <a:t>Certifié SOHISCERT et EU Bio — condition d'accès aux cahiers des charges des acheteurs européens.</a:t>
-            </a:r>
-            <a:endParaRPr lang="en-US" sz="1350" dirty="0"/>
-          </a:p>
-          <a:p>
-            <a:pPr algn="l" marL="342900" indent="-342900">
-              <a:lnSpc>
-                <a:spcPct val="122000"/>
-              </a:lnSpc>
-              <a:spcAft>
-                <a:spcPts val="1000"/>
-              </a:spcAft>
-              <a:buSzPct val="100000"/>
-              <a:buChar char="•"/>
-            </a:pPr>
-            <a:r>
-              <a:rPr lang="en-US" sz="1350" dirty="0">
-                <a:solidFill>
-                  <a:srgbClr val="33423A"/>
-                </a:solidFill>
-                <a:latin typeface="Calibri" pitchFamily="34" charset="0"/>
-                <a:ea typeface="Calibri" pitchFamily="34" charset="-122"/>
-                <a:cs typeface="Calibri" pitchFamily="34" charset="-120"/>
-              </a:rPr>
-              <a:t>1 à 4 flacons de 140 ml par hectare, compatible avec les équipements de fertirrigation existants.</a:t>
-            </a:r>
-            <a:endParaRPr lang="en-US" sz="1350" dirty="0"/>
-          </a:p>
-        </p:txBody>
-      </p:sp>
-      <p:sp>
-        <p:nvSpPr>
-          <p:cNvPr id="8" name="Shape 6"/>
+      <p:graphicFrame>
+        <p:nvGraphicFramePr>
+          <p:cNvPr id="4" name="Chart 0" descr=""/>
+          <p:cNvGraphicFramePr/>
+          <p:nvPr/>
+        </p:nvGraphicFramePr>
+        <p:xfrm>
+          <a:off x="594360" y="1783080"/>
+          <a:ext cx="7360920" cy="3977640"/>
+        </p:xfrm>
+        <a:graphic xmlns:a="http://schemas.openxmlformats.org/drawingml/2006/main">
+          <a:graphicData uri="http://schemas.openxmlformats.org/drawingml/2006/chart">
+            <c:chart xmlns:c="http://schemas.openxmlformats.org/drawingml/2006/chart" r:id="rId1"/>
+          </a:graphicData>
+        </a:graphic>
+      </p:graphicFrame>
+      <p:sp>
+        <p:nvSpPr>
+          <p:cNvPr id="5" name="Shape 2"/>
           <p:cNvSpPr/>
           <p:nvPr/>
         </p:nvSpPr>
         <p:spPr>
           <a:xfrm>
-            <a:off x="594360" y="4846320"/>
-            <a:ext cx="11002975" cy="960120"/>
+            <a:off x="8275320" y="1783080"/>
+            <a:ext cx="3291840" cy="3977640"/>
           </a:xfrm>
           <a:prstGeom prst="roundRect">
             <a:avLst>
-              <a:gd name="adj" fmla="val 7619"/>
+              <a:gd name="adj" fmla="val 2778"/>
             </a:avLst>
           </a:prstGeom>
           <a:solidFill>
@@ -6139,14 +11861,53 @@
       </p:sp>
       <p:sp>
         <p:nvSpPr>
-          <p:cNvPr id="9" name="Text 7"/>
-          <p:cNvSpPr txBox="1"/>
-          <p:nvPr/>
-        </p:nvSpPr>
-        <p:spPr>
-          <a:xfrm>
-            <a:off x="822960" y="4983480"/>
-            <a:ext cx="10545775" cy="713232"/>
+          <p:cNvPr id="6" name="Text 3"/>
+          <p:cNvSpPr txBox="1"/>
+          <p:nvPr/>
+        </p:nvSpPr>
+        <p:spPr>
+          <a:xfrm>
+            <a:off x="8503920" y="2011680"/>
+            <a:ext cx="2834640" cy="457200"/>
+          </a:xfrm>
+          <a:prstGeom prst="rect">
+            <a:avLst/>
+          </a:prstGeom>
+          <a:noFill/>
+          <a:ln/>
+        </p:spPr>
+        <p:txBody>
+          <a:bodyPr wrap="square" lIns="0" tIns="0" rIns="0" bIns="0" rtlCol="0" anchor="ctr"/>
+          <a:lstStyle/>
+          <a:p>
+            <a:pPr algn="l" indent="0" marL="0">
+              <a:buNone/>
+            </a:pPr>
+            <a:r>
+              <a:rPr lang="en-US" sz="1300" b="1" dirty="0">
+                <a:solidFill>
+                  <a:srgbClr val="1F5C3A"/>
+                </a:solidFill>
+                <a:latin typeface="Cambria" pitchFamily="34" charset="0"/>
+                <a:ea typeface="Cambria" pitchFamily="34" charset="-122"/>
+                <a:cs typeface="Cambria" pitchFamily="34" charset="-120"/>
+              </a:rPr>
+              <a:t>Lecture</a:t>
+            </a:r>
+            <a:endParaRPr lang="en-US" sz="1300" dirty="0"/>
+          </a:p>
+        </p:txBody>
+      </p:sp>
+      <p:sp>
+        <p:nvSpPr>
+          <p:cNvPr id="7" name="Text 4"/>
+          <p:cNvSpPr txBox="1"/>
+          <p:nvPr/>
+        </p:nvSpPr>
+        <p:spPr>
+          <a:xfrm>
+            <a:off x="8503920" y="2560320"/>
+            <a:ext cx="2834640" cy="3017520"/>
           </a:xfrm>
           <a:prstGeom prst="rect">
             <a:avLst/>
@@ -6160,28 +11921,57 @@
           <a:p>
             <a:pPr algn="l" indent="0" marL="0">
               <a:lnSpc>
-                <a:spcPct val="118000"/>
+                <a:spcPct val="125000"/>
               </a:lnSpc>
               <a:buNone/>
             </a:pPr>
             <a:r>
-              <a:rPr lang="en-US" sz="1100" dirty="0">
-                <a:solidFill>
-                  <a:srgbClr val="6B7C72"/>
-                </a:solidFill>
-                <a:latin typeface="Calibri" pitchFamily="34" charset="0"/>
-                <a:ea typeface="Calibri" pitchFamily="34" charset="-122"/>
-                <a:cs typeface="Calibri" pitchFamily="34" charset="-120"/>
-              </a:rPr>
-              <a:t>Les deux produits se vendent séparément mais ont été conçus pour se renforcer : l'hydro-rétenteur prolonge la disponibilité de l'eau, le fertilisant valorise cette eau disponible sans dégrader le sol.</a:t>
-            </a:r>
-            <a:endParaRPr lang="en-US" sz="1100" dirty="0"/>
-          </a:p>
-        </p:txBody>
-      </p:sp>
-      <p:sp>
-        <p:nvSpPr>
-          <p:cNvPr id="10" name="Text 8"/>
+              <a:rPr lang="en-US" sz="1200" dirty="0">
+                <a:solidFill>
+                  <a:srgbClr val="33423A"/>
+                </a:solidFill>
+                <a:latin typeface="Calibri" pitchFamily="34" charset="0"/>
+                <a:ea typeface="Calibri" pitchFamily="34" charset="-122"/>
+                <a:cs typeface="Calibri" pitchFamily="34" charset="-120"/>
+              </a:rPr>
+              <a:t>Agrumes et tomate sont irrigués et destinés à l'export : ce sont les cultures où l'économie d'eau se convertit directement en marge.</a:t>
+            </a:r>
+            <a:endParaRPr lang="en-US" sz="1200" dirty="0"/>
+          </a:p>
+          <a:p>
+            <a:pPr algn="l" indent="0" marL="0">
+              <a:lnSpc>
+                <a:spcPct val="125000"/>
+              </a:lnSpc>
+              <a:buNone/>
+            </a:pPr>
+            <a:endParaRPr lang="en-US" sz="1200" dirty="0"/>
+          </a:p>
+          <a:p>
+            <a:pPr algn="l" indent="0" marL="0">
+              <a:lnSpc>
+                <a:spcPct val="125000"/>
+              </a:lnSpc>
+              <a:buNone/>
+            </a:pPr>
+            <a:r>
+              <a:rPr lang="en-US" sz="1200" dirty="0">
+                <a:solidFill>
+                  <a:srgbClr val="33423A"/>
+                </a:solidFill>
+                <a:latin typeface="Calibri" pitchFamily="34" charset="0"/>
+                <a:ea typeface="Calibri" pitchFamily="34" charset="-122"/>
+                <a:cs typeface="Calibri" pitchFamily="34" charset="-120"/>
+              </a:rPr>
+              <a:t>* Les céréales sont majoritairement pluviales ; le volume varie fortement d'une campagne à l'autre selon la pluviométrie.</a:t>
+            </a:r>
+            <a:endParaRPr lang="en-US" sz="1200" dirty="0"/>
+          </a:p>
+        </p:txBody>
+      </p:sp>
+      <p:sp>
+        <p:nvSpPr>
+          <p:cNvPr id="8" name="Text 5"/>
           <p:cNvSpPr txBox="1"/>
           <p:nvPr/>
         </p:nvSpPr>
@@ -6222,7 +12012,7 @@
       </p:sp>
       <p:sp>
         <p:nvSpPr>
-          <p:cNvPr id="11" name="Text 9"/>
+          <p:cNvPr id="9" name="Text 6"/>
           <p:cNvSpPr txBox="1"/>
           <p:nvPr/>
         </p:nvSpPr>
@@ -6326,7 +12116,7 @@
                 <a:ea typeface="Calibri" pitchFamily="34" charset="-122"/>
                 <a:cs typeface="Calibri" pitchFamily="34" charset="-120"/>
               </a:rPr>
-              <a:t>ORDRES DE GRANDEUR</a:t>
+              <a:t>PREMIÈRE FILIÈRE</a:t>
             </a:r>
             <a:endParaRPr lang="en-US" sz="1150" dirty="0"/>
           </a:p>
@@ -6365,168 +12155,181 @@
                 <a:ea typeface="Cambria" pitchFamily="34" charset="-122"/>
                 <a:cs typeface="Cambria" pitchFamily="34" charset="-120"/>
               </a:rPr>
-              <a:t>Économie d'eau attendue selon le mode d'irrigation</a:t>
+              <a:t>Tomate sous serre du Souss : l'export au litre près</a:t>
             </a:r>
             <a:endParaRPr lang="en-US" sz="3000" dirty="0"/>
           </a:p>
         </p:txBody>
       </p:sp>
-      <p:graphicFrame>
-        <p:nvGraphicFramePr>
-          <p:cNvPr id="4" name="Chart 0" descr=""/>
-          <p:cNvGraphicFramePr/>
-          <p:nvPr/>
-        </p:nvGraphicFramePr>
-        <p:xfrm>
-          <a:off x="594360" y="1783080"/>
-          <a:ext cx="7360920" cy="3977640"/>
-        </p:xfrm>
-        <a:graphic xmlns:a="http://schemas.openxmlformats.org/drawingml/2006/main">
-          <a:graphicData uri="http://schemas.openxmlformats.org/drawingml/2006/chart">
-            <c:chart xmlns:c="http://schemas.openxmlformats.org/drawingml/2006/chart" r:id="rId1"/>
-          </a:graphicData>
-        </a:graphic>
-      </p:graphicFrame>
-      <p:sp>
-        <p:nvSpPr>
-          <p:cNvPr id="5" name="Shape 2"/>
-          <p:cNvSpPr/>
-          <p:nvPr/>
-        </p:nvSpPr>
-        <p:spPr>
-          <a:xfrm>
-            <a:off x="8275320" y="1783080"/>
-            <a:ext cx="3291840" cy="3977640"/>
-          </a:xfrm>
-          <a:prstGeom prst="roundRect">
-            <a:avLst>
-              <a:gd name="adj" fmla="val 2778"/>
-            </a:avLst>
-          </a:prstGeom>
-          <a:solidFill>
-            <a:srgbClr val="F1F4EF"/>
-          </a:solidFill>
-          <a:ln w="9525">
-            <a:solidFill>
-              <a:srgbClr val="DCE4DA"/>
-            </a:solidFill>
-            <a:prstDash val="solid"/>
-          </a:ln>
-        </p:spPr>
+      <p:pic>
+        <p:nvPicPr>
+          <p:cNvPr id="4" name="Image 0" descr="preencoded.png">    </p:cNvPr>
+          <p:cNvPicPr>
+            <a:picLocks noChangeAspect="1"/>
+          </p:cNvPicPr>
+          <p:nvPr/>
+        </p:nvPicPr>
+        <p:blipFill>
+          <a:blip r:embed="rId1"/>
+          <a:stretch>
+            <a:fillRect/>
+          </a:stretch>
+        </p:blipFill>
+        <p:spPr>
+          <a:xfrm>
+            <a:off x="6522415" y="1783080"/>
+            <a:ext cx="5074920" cy="3794760"/>
+          </a:xfrm>
+          <a:prstGeom prst="rect">
+            <a:avLst/>
+          </a:prstGeom>
+        </p:spPr>
+      </p:pic>
+      <p:sp>
+        <p:nvSpPr>
+          <p:cNvPr id="5" name="Text 2"/>
+          <p:cNvSpPr txBox="1"/>
+          <p:nvPr/>
+        </p:nvSpPr>
+        <p:spPr>
+          <a:xfrm>
+            <a:off x="594360" y="1783080"/>
+            <a:ext cx="5379415" cy="4251960"/>
+          </a:xfrm>
+          <a:prstGeom prst="rect">
+            <a:avLst/>
+          </a:prstGeom>
+          <a:noFill/>
+          <a:ln/>
+        </p:spPr>
+        <p:txBody>
+          <a:bodyPr wrap="square" lIns="0" tIns="0" rIns="0" bIns="0" rtlCol="0" anchor="t"/>
+          <a:lstStyle/>
+          <a:p>
+            <a:pPr algn="l" marL="342900" indent="-342900">
+              <a:lnSpc>
+                <a:spcPct val="122000"/>
+              </a:lnSpc>
+              <a:spcAft>
+                <a:spcPts val="1100"/>
+              </a:spcAft>
+              <a:buSzPct val="100000"/>
+              <a:buChar char="•"/>
+            </a:pPr>
+            <a:r>
+              <a:rPr lang="en-US" sz="1400" dirty="0">
+                <a:solidFill>
+                  <a:srgbClr val="33423A"/>
+                </a:solidFill>
+                <a:latin typeface="Calibri" pitchFamily="34" charset="0"/>
+                <a:ea typeface="Calibri" pitchFamily="34" charset="-122"/>
+                <a:cs typeface="Calibri" pitchFamily="34" charset="-120"/>
+              </a:rPr>
+              <a:t>Le Souss-Massa concentre l'essentiel des serres de tomates destinées à l'Europe, de l'automne au printemps.</a:t>
+            </a:r>
+            <a:endParaRPr lang="en-US" sz="1400" dirty="0"/>
+          </a:p>
+          <a:p>
+            <a:pPr algn="l" marL="342900" indent="-342900">
+              <a:lnSpc>
+                <a:spcPct val="122000"/>
+              </a:lnSpc>
+              <a:spcAft>
+                <a:spcPts val="1100"/>
+              </a:spcAft>
+              <a:buSzPct val="100000"/>
+              <a:buChar char="•"/>
+            </a:pPr>
+            <a:r>
+              <a:rPr lang="en-US" sz="1400" dirty="0">
+                <a:solidFill>
+                  <a:srgbClr val="33423A"/>
+                </a:solidFill>
+                <a:latin typeface="Calibri" pitchFamily="34" charset="0"/>
+                <a:ea typeface="Calibri" pitchFamily="34" charset="-122"/>
+                <a:cs typeface="Calibri" pitchFamily="34" charset="-120"/>
+              </a:rPr>
+              <a:t>La nappe du Souss baisse depuis des décennies ; une partie des exploitations est irriguée à l'eau dessalée de Chtouka.</a:t>
+            </a:r>
+            <a:endParaRPr lang="en-US" sz="1400" dirty="0"/>
+          </a:p>
+          <a:p>
+            <a:pPr algn="l" marL="342900" indent="-342900">
+              <a:lnSpc>
+                <a:spcPct val="122000"/>
+              </a:lnSpc>
+              <a:spcAft>
+                <a:spcPts val="1100"/>
+              </a:spcAft>
+              <a:buSzPct val="100000"/>
+              <a:buChar char="•"/>
+            </a:pPr>
+            <a:r>
+              <a:rPr lang="en-US" sz="1400" dirty="0">
+                <a:solidFill>
+                  <a:srgbClr val="33423A"/>
+                </a:solidFill>
+                <a:latin typeface="Calibri" pitchFamily="34" charset="0"/>
+                <a:ea typeface="Calibri" pitchFamily="34" charset="-122"/>
+                <a:cs typeface="Calibri" pitchFamily="34" charset="-120"/>
+              </a:rPr>
+              <a:t>L'eau dessalée coûte nettement plus cher que l'eau de forage : chaque litre économisé améliore directement la marge.</a:t>
+            </a:r>
+            <a:endParaRPr lang="en-US" sz="1400" dirty="0"/>
+          </a:p>
+          <a:p>
+            <a:pPr algn="l" marL="342900" indent="-342900">
+              <a:lnSpc>
+                <a:spcPct val="122000"/>
+              </a:lnSpc>
+              <a:spcAft>
+                <a:spcPts val="1100"/>
+              </a:spcAft>
+              <a:buSzPct val="100000"/>
+              <a:buChar char="•"/>
+            </a:pPr>
+            <a:r>
+              <a:rPr lang="en-US" sz="1400" dirty="0">
+                <a:solidFill>
+                  <a:srgbClr val="33423A"/>
+                </a:solidFill>
+                <a:latin typeface="Calibri" pitchFamily="34" charset="0"/>
+                <a:ea typeface="Calibri" pitchFamily="34" charset="-122"/>
+                <a:cs typeface="Calibri" pitchFamily="34" charset="-120"/>
+              </a:rPr>
+              <a:t>Les exportateurs doivent respecter des limites de résidus strictes : NAPEMA® traite les ravageurs sans résidu.</a:t>
+            </a:r>
+            <a:endParaRPr lang="en-US" sz="1400" dirty="0"/>
+          </a:p>
+          <a:p>
+            <a:pPr algn="l" marL="342900" indent="-342900">
+              <a:lnSpc>
+                <a:spcPct val="122000"/>
+              </a:lnSpc>
+              <a:spcAft>
+                <a:spcPts val="1100"/>
+              </a:spcAft>
+              <a:buSzPct val="100000"/>
+              <a:buChar char="•"/>
+            </a:pPr>
+            <a:r>
+              <a:rPr lang="en-US" sz="1400" dirty="0">
+                <a:solidFill>
+                  <a:srgbClr val="33423A"/>
+                </a:solidFill>
+                <a:latin typeface="Calibri" pitchFamily="34" charset="0"/>
+                <a:ea typeface="Calibri" pitchFamily="34" charset="-122"/>
+                <a:cs typeface="Calibri" pitchFamily="34" charset="-120"/>
+              </a:rPr>
+              <a:t>Retenir l'eau dans le sol espace les apports et réduit le drainage perdu sous la serre.</a:t>
+            </a:r>
+            <a:endParaRPr lang="en-US" sz="1400" dirty="0"/>
+          </a:p>
+        </p:txBody>
       </p:sp>
       <p:sp>
         <p:nvSpPr>
           <p:cNvPr id="6" name="Text 3"/>
-          <p:cNvSpPr txBox="1"/>
-          <p:nvPr/>
-        </p:nvSpPr>
-        <p:spPr>
-          <a:xfrm>
-            <a:off x="8503920" y="2011680"/>
-            <a:ext cx="2834640" cy="457200"/>
-          </a:xfrm>
-          <a:prstGeom prst="rect">
-            <a:avLst/>
-          </a:prstGeom>
-          <a:noFill/>
-          <a:ln/>
-        </p:spPr>
-        <p:txBody>
-          <a:bodyPr wrap="square" lIns="0" tIns="0" rIns="0" bIns="0" rtlCol="0" anchor="ctr"/>
-          <a:lstStyle/>
-          <a:p>
-            <a:pPr algn="l" indent="0" marL="0">
-              <a:buNone/>
-            </a:pPr>
-            <a:r>
-              <a:rPr lang="en-US" sz="1300" b="1" dirty="0">
-                <a:solidFill>
-                  <a:srgbClr val="1F5C3A"/>
-                </a:solidFill>
-                <a:latin typeface="Cambria" pitchFamily="34" charset="0"/>
-                <a:ea typeface="Cambria" pitchFamily="34" charset="-122"/>
-                <a:cs typeface="Cambria" pitchFamily="34" charset="-120"/>
-              </a:rPr>
-              <a:t>À lire avec prudence</a:t>
-            </a:r>
-            <a:endParaRPr lang="en-US" sz="1300" dirty="0"/>
-          </a:p>
-        </p:txBody>
-      </p:sp>
-      <p:sp>
-        <p:nvSpPr>
-          <p:cNvPr id="7" name="Text 4"/>
-          <p:cNvSpPr txBox="1"/>
-          <p:nvPr/>
-        </p:nvSpPr>
-        <p:spPr>
-          <a:xfrm>
-            <a:off x="8503920" y="2560320"/>
-            <a:ext cx="2834640" cy="3017520"/>
-          </a:xfrm>
-          <a:prstGeom prst="rect">
-            <a:avLst/>
-          </a:prstGeom>
-          <a:noFill/>
-          <a:ln/>
-        </p:spPr>
-        <p:txBody>
-          <a:bodyPr wrap="square" lIns="0" tIns="0" rIns="0" bIns="0" rtlCol="0" anchor="t"/>
-          <a:lstStyle/>
-          <a:p>
-            <a:pPr algn="l" indent="0" marL="0">
-              <a:lnSpc>
-                <a:spcPct val="125000"/>
-              </a:lnSpc>
-              <a:buNone/>
-            </a:pPr>
-            <a:r>
-              <a:rPr lang="en-US" sz="1200" dirty="0">
-                <a:solidFill>
-                  <a:srgbClr val="33423A"/>
-                </a:solidFill>
-                <a:latin typeface="Calibri" pitchFamily="34" charset="0"/>
-                <a:ea typeface="Calibri" pitchFamily="34" charset="-122"/>
-                <a:cs typeface="Calibri" pitchFamily="34" charset="-120"/>
-              </a:rPr>
-              <a:t>Ces fourchettes sont indicatives et fondées sur les gains documentés de nos hydro-rétenteurs.</a:t>
-            </a:r>
-            <a:endParaRPr lang="en-US" sz="1200" dirty="0"/>
-          </a:p>
-          <a:p>
-            <a:pPr algn="l" indent="0" marL="0">
-              <a:lnSpc>
-                <a:spcPct val="125000"/>
-              </a:lnSpc>
-              <a:buNone/>
-            </a:pPr>
-            <a:endParaRPr lang="en-US" sz="1200" dirty="0"/>
-          </a:p>
-          <a:p>
-            <a:pPr algn="l" indent="0" marL="0">
-              <a:lnSpc>
-                <a:spcPct val="125000"/>
-              </a:lnSpc>
-              <a:buNone/>
-            </a:pPr>
-            <a:r>
-              <a:rPr lang="en-US" sz="1200" dirty="0">
-                <a:solidFill>
-                  <a:srgbClr val="33423A"/>
-                </a:solidFill>
-                <a:latin typeface="Calibri" pitchFamily="34" charset="0"/>
-                <a:ea typeface="Calibri" pitchFamily="34" charset="-122"/>
-                <a:cs typeface="Calibri" pitchFamily="34" charset="-120"/>
-              </a:rPr>
-              <a:t>Le résultat réel dépend du sol, du climat et de la culture. Ces chiffres donnent un ordre de grandeur : ils ne constituent en aucun cas une valeur garantie, contractuelle ou absolue.</a:t>
-            </a:r>
-            <a:endParaRPr lang="en-US" sz="1200" dirty="0"/>
-          </a:p>
-        </p:txBody>
-      </p:sp>
-      <p:sp>
-        <p:nvSpPr>
-          <p:cNvPr id="8" name="Text 5"/>
           <p:cNvSpPr txBox="1"/>
           <p:nvPr/>
         </p:nvSpPr>
@@ -6567,7 +12370,7 @@
       </p:sp>
       <p:sp>
         <p:nvSpPr>
-          <p:cNvPr id="9" name="Text 6"/>
+          <p:cNvPr id="7" name="Text 4"/>
           <p:cNvSpPr txBox="1"/>
           <p:nvPr/>
         </p:nvSpPr>
@@ -6671,7 +12474,7 @@
                 <a:ea typeface="Calibri" pitchFamily="34" charset="-122"/>
                 <a:cs typeface="Calibri" pitchFamily="34" charset="-120"/>
               </a:rPr>
-              <a:t>TROIS TERRAINS PRIORITAIRES</a:t>
+              <a:t>DEUXIÈME FILIÈRE</a:t>
             </a:r>
             <a:endParaRPr lang="en-US" sz="1150" dirty="0"/>
           </a:p>
@@ -6710,42 +12513,15 @@
                 <a:ea typeface="Cambria" pitchFamily="34" charset="-122"/>
                 <a:cs typeface="Cambria" pitchFamily="34" charset="-120"/>
               </a:rPr>
-              <a:t>Où engager les premiers essais</a:t>
+              <a:t>Agrumes et olivier : des vergers à protéger de la sécheresse</a:t>
             </a:r>
             <a:endParaRPr lang="en-US" sz="3000" dirty="0"/>
           </a:p>
         </p:txBody>
-      </p:sp>
-      <p:sp>
-        <p:nvSpPr>
-          <p:cNvPr id="4" name="Shape 2"/>
-          <p:cNvSpPr/>
-          <p:nvPr/>
-        </p:nvSpPr>
-        <p:spPr>
-          <a:xfrm>
-            <a:off x="594360" y="1783080"/>
-            <a:ext cx="3472586" cy="4069080"/>
-          </a:xfrm>
-          <a:prstGeom prst="roundRect">
-            <a:avLst>
-              <a:gd name="adj" fmla="val 2633"/>
-            </a:avLst>
-          </a:prstGeom>
-          <a:solidFill>
-            <a:srgbClr val="F1F4EF"/>
-          </a:solidFill>
-          <a:ln w="9525">
-            <a:solidFill>
-              <a:srgbClr val="DCE4DA"/>
-            </a:solidFill>
-            <a:prstDash val="solid"/>
-          </a:ln>
-        </p:spPr>
       </p:sp>
       <p:pic>
         <p:nvPicPr>
-          <p:cNvPr id="5" name="Image 0" descr="preencoded.png">    </p:cNvPr>
+          <p:cNvPr id="4" name="Image 0" descr="preencoded.png">    </p:cNvPr>
           <p:cNvPicPr>
             <a:picLocks noChangeAspect="1"/>
           </p:cNvPicPr>
@@ -6760,7 +12536,7 @@
         <p:spPr>
           <a:xfrm>
             <a:off x="594360" y="1783080"/>
-            <a:ext cx="3472586" cy="1691640"/>
+            <a:ext cx="5074920" cy="3794760"/>
           </a:xfrm>
           <a:prstGeom prst="rect">
             <a:avLst/>
@@ -6769,92 +12545,14 @@
       </p:pic>
       <p:sp>
         <p:nvSpPr>
-          <p:cNvPr id="6" name="Text 3"/>
-          <p:cNvSpPr txBox="1"/>
-          <p:nvPr/>
-        </p:nvSpPr>
-        <p:spPr>
-          <a:xfrm>
-            <a:off x="795528" y="3639312"/>
-            <a:ext cx="3070250" cy="384048"/>
-          </a:xfrm>
-          <a:prstGeom prst="rect">
-            <a:avLst/>
-          </a:prstGeom>
-          <a:noFill/>
-          <a:ln/>
-        </p:spPr>
-        <p:txBody>
-          <a:bodyPr wrap="square" lIns="0" tIns="0" rIns="0" bIns="0" rtlCol="0" anchor="ctr"/>
-          <a:lstStyle/>
-          <a:p>
-            <a:pPr algn="l" indent="0" marL="0">
-              <a:buNone/>
-            </a:pPr>
-            <a:r>
-              <a:rPr lang="en-US" sz="1500" b="1" dirty="0">
-                <a:solidFill>
-                  <a:srgbClr val="1F5C3A"/>
-                </a:solidFill>
-                <a:latin typeface="Cambria" pitchFamily="34" charset="0"/>
-                <a:ea typeface="Cambria" pitchFamily="34" charset="-122"/>
-                <a:cs typeface="Cambria" pitchFamily="34" charset="-120"/>
-              </a:rPr>
-              <a:t>Souss-Massa</a:t>
-            </a:r>
-            <a:endParaRPr lang="en-US" sz="1500" dirty="0"/>
-          </a:p>
-        </p:txBody>
-      </p:sp>
-      <p:sp>
-        <p:nvSpPr>
-          <p:cNvPr id="7" name="Text 4"/>
-          <p:cNvSpPr txBox="1"/>
-          <p:nvPr/>
-        </p:nvSpPr>
-        <p:spPr>
-          <a:xfrm>
-            <a:off x="795528" y="4041648"/>
-            <a:ext cx="3070250" cy="329184"/>
-          </a:xfrm>
-          <a:prstGeom prst="rect">
-            <a:avLst/>
-          </a:prstGeom>
-          <a:noFill/>
-          <a:ln/>
-        </p:spPr>
-        <p:txBody>
-          <a:bodyPr wrap="square" lIns="0" tIns="0" rIns="0" bIns="0" rtlCol="0" anchor="ctr"/>
-          <a:lstStyle/>
-          <a:p>
-            <a:pPr algn="l" indent="0" marL="0">
-              <a:buNone/>
-            </a:pPr>
-            <a:r>
-              <a:rPr lang="en-US" sz="1250" b="1" dirty="0">
-                <a:solidFill>
-                  <a:srgbClr val="A97C12"/>
-                </a:solidFill>
-                <a:latin typeface="Calibri" pitchFamily="34" charset="0"/>
-                <a:ea typeface="Calibri" pitchFamily="34" charset="-122"/>
-                <a:cs typeface="Calibri" pitchFamily="34" charset="-120"/>
-              </a:rPr>
-              <a:t>Agrumes et primeurs</a:t>
-            </a:r>
-            <a:endParaRPr lang="en-US" sz="1250" dirty="0"/>
-          </a:p>
-        </p:txBody>
-      </p:sp>
-      <p:sp>
-        <p:nvSpPr>
-          <p:cNvPr id="8" name="Text 5"/>
-          <p:cNvSpPr txBox="1"/>
-          <p:nvPr/>
-        </p:nvSpPr>
-        <p:spPr>
-          <a:xfrm>
-            <a:off x="795528" y="4407408"/>
-            <a:ext cx="3070250" cy="1280160"/>
+          <p:cNvPr id="5" name="Text 2"/>
+          <p:cNvSpPr txBox="1"/>
+          <p:nvPr/>
+        </p:nvSpPr>
+        <p:spPr>
+          <a:xfrm>
+            <a:off x="6217920" y="1783080"/>
+            <a:ext cx="5379415" cy="4251960"/>
           </a:xfrm>
           <a:prstGeom prst="rect">
             <a:avLst/>
@@ -6868,16 +12566,16 @@
           <a:p>
             <a:pPr algn="l" marL="342900" indent="-342900">
               <a:lnSpc>
-                <a:spcPct val="116000"/>
+                <a:spcPct val="122000"/>
               </a:lnSpc>
               <a:spcAft>
-                <a:spcPts val="700"/>
+                <a:spcPts val="1100"/>
               </a:spcAft>
               <a:buSzPct val="100000"/>
               <a:buChar char="•"/>
             </a:pPr>
             <a:r>
-              <a:rPr lang="en-US" sz="1150" dirty="0">
+              <a:rPr lang="en-US" sz="1400" dirty="0">
                 <a:solidFill>
                   <a:srgbClr val="33423A"/>
                 </a:solidFill>
@@ -6885,23 +12583,23 @@
                 <a:ea typeface="Calibri" pitchFamily="34" charset="-122"/>
                 <a:cs typeface="Calibri" pitchFamily="34" charset="-120"/>
               </a:rPr>
-              <a:t>Cœur de la filière d'exportation, déjà largement converti au goutte-à-goutte.</a:t>
-            </a:r>
-            <a:endParaRPr lang="en-US" sz="1150" dirty="0"/>
+              <a:t>Agrumes du Souss, du Gharb et de Berkane, olivier du Haouz et du Saïss : des cultures pérennes à fort investissement.</a:t>
+            </a:r>
+            <a:endParaRPr lang="en-US" sz="1400" dirty="0"/>
           </a:p>
           <a:p>
             <a:pPr algn="l" marL="342900" indent="-342900">
               <a:lnSpc>
-                <a:spcPct val="116000"/>
+                <a:spcPct val="122000"/>
               </a:lnSpc>
               <a:spcAft>
-                <a:spcPts val="700"/>
+                <a:spcPts val="1100"/>
               </a:spcAft>
               <a:buSzPct val="100000"/>
               <a:buChar char="•"/>
             </a:pPr>
             <a:r>
-              <a:rPr lang="en-US" sz="1150" dirty="0">
+              <a:rPr lang="en-US" sz="1400" dirty="0">
                 <a:solidFill>
                   <a:srgbClr val="33423A"/>
                 </a:solidFill>
@@ -6909,23 +12607,23 @@
                 <a:ea typeface="Calibri" pitchFamily="34" charset="-122"/>
                 <a:cs typeface="Calibri" pitchFamily="34" charset="-120"/>
               </a:rPr>
-              <a:t>Nappe en rabattement continu : la pression réglementaire sur les prélèvements y est la plus forte.</a:t>
-            </a:r>
-            <a:endParaRPr lang="en-US" sz="1150" dirty="0"/>
+              <a:t>Les restrictions d'eau des dernières campagnes ont conduit des producteurs à arracher une partie de leurs vergers d'agrumes.</a:t>
+            </a:r>
+            <a:endParaRPr lang="en-US" sz="1400" dirty="0"/>
           </a:p>
           <a:p>
             <a:pPr algn="l" marL="342900" indent="-342900">
               <a:lnSpc>
-                <a:spcPct val="116000"/>
+                <a:spcPct val="122000"/>
               </a:lnSpc>
               <a:spcAft>
-                <a:spcPts val="700"/>
+                <a:spcPts val="1100"/>
               </a:spcAft>
               <a:buSzPct val="100000"/>
               <a:buChar char="•"/>
             </a:pPr>
             <a:r>
-              <a:rPr lang="en-US" sz="1150" dirty="0">
+              <a:rPr lang="en-US" sz="1400" dirty="0">
                 <a:solidFill>
                   <a:srgbClr val="33423A"/>
                 </a:solidFill>
@@ -6933,174 +12631,23 @@
                 <a:ea typeface="Calibri" pitchFamily="34" charset="-122"/>
                 <a:cs typeface="Calibri" pitchFamily="34" charset="-120"/>
               </a:rPr>
-              <a:t>Acheteurs européens demandeurs de certification biologique.</a:t>
-            </a:r>
-            <a:endParaRPr lang="en-US" sz="1150" dirty="0"/>
-          </a:p>
-        </p:txBody>
-      </p:sp>
-      <p:sp>
-        <p:nvSpPr>
-          <p:cNvPr id="9" name="Shape 6"/>
-          <p:cNvSpPr/>
-          <p:nvPr/>
-        </p:nvSpPr>
-        <p:spPr>
-          <a:xfrm>
-            <a:off x="4359554" y="1783080"/>
-            <a:ext cx="3472586" cy="4069080"/>
-          </a:xfrm>
-          <a:prstGeom prst="roundRect">
-            <a:avLst>
-              <a:gd name="adj" fmla="val 2633"/>
-            </a:avLst>
-          </a:prstGeom>
-          <a:solidFill>
-            <a:srgbClr val="F1F4EF"/>
-          </a:solidFill>
-          <a:ln w="9525">
-            <a:solidFill>
-              <a:srgbClr val="DCE4DA"/>
-            </a:solidFill>
-            <a:prstDash val="solid"/>
-          </a:ln>
-        </p:spPr>
-      </p:sp>
-      <p:pic>
-        <p:nvPicPr>
-          <p:cNvPr id="10" name="Image 1" descr="preencoded.png">    </p:cNvPr>
-          <p:cNvPicPr>
-            <a:picLocks noChangeAspect="1"/>
-          </p:cNvPicPr>
-          <p:nvPr/>
-        </p:nvPicPr>
-        <p:blipFill>
-          <a:blip r:embed="rId2"/>
-          <a:stretch>
-            <a:fillRect/>
-          </a:stretch>
-        </p:blipFill>
-        <p:spPr>
-          <a:xfrm>
-            <a:off x="4359554" y="1783080"/>
-            <a:ext cx="3472586" cy="1691640"/>
-          </a:xfrm>
-          <a:prstGeom prst="rect">
-            <a:avLst/>
-          </a:prstGeom>
-        </p:spPr>
-      </p:pic>
-      <p:sp>
-        <p:nvSpPr>
-          <p:cNvPr id="11" name="Text 7"/>
-          <p:cNvSpPr txBox="1"/>
-          <p:nvPr/>
-        </p:nvSpPr>
-        <p:spPr>
-          <a:xfrm>
-            <a:off x="4560722" y="3639312"/>
-            <a:ext cx="3070250" cy="384048"/>
-          </a:xfrm>
-          <a:prstGeom prst="rect">
-            <a:avLst/>
-          </a:prstGeom>
-          <a:noFill/>
-          <a:ln/>
-        </p:spPr>
-        <p:txBody>
-          <a:bodyPr wrap="square" lIns="0" tIns="0" rIns="0" bIns="0" rtlCol="0" anchor="ctr"/>
-          <a:lstStyle/>
-          <a:p>
-            <a:pPr algn="l" indent="0" marL="0">
-              <a:buNone/>
-            </a:pPr>
-            <a:r>
-              <a:rPr lang="en-US" sz="1500" b="1" dirty="0">
-                <a:solidFill>
-                  <a:srgbClr val="1F5C3A"/>
-                </a:solidFill>
-                <a:latin typeface="Cambria" pitchFamily="34" charset="0"/>
-                <a:ea typeface="Cambria" pitchFamily="34" charset="-122"/>
-                <a:cs typeface="Cambria" pitchFamily="34" charset="-120"/>
-              </a:rPr>
-              <a:t>Haouz — Marrakech</a:t>
-            </a:r>
-            <a:endParaRPr lang="en-US" sz="1500" dirty="0"/>
-          </a:p>
-        </p:txBody>
-      </p:sp>
-      <p:sp>
-        <p:nvSpPr>
-          <p:cNvPr id="12" name="Text 8"/>
-          <p:cNvSpPr txBox="1"/>
-          <p:nvPr/>
-        </p:nvSpPr>
-        <p:spPr>
-          <a:xfrm>
-            <a:off x="4560722" y="4041648"/>
-            <a:ext cx="3070250" cy="329184"/>
-          </a:xfrm>
-          <a:prstGeom prst="rect">
-            <a:avLst/>
-          </a:prstGeom>
-          <a:noFill/>
-          <a:ln/>
-        </p:spPr>
-        <p:txBody>
-          <a:bodyPr wrap="square" lIns="0" tIns="0" rIns="0" bIns="0" rtlCol="0" anchor="ctr"/>
-          <a:lstStyle/>
-          <a:p>
-            <a:pPr algn="l" indent="0" marL="0">
-              <a:buNone/>
-            </a:pPr>
-            <a:r>
-              <a:rPr lang="en-US" sz="1250" b="1" dirty="0">
-                <a:solidFill>
-                  <a:srgbClr val="A97C12"/>
-                </a:solidFill>
-                <a:latin typeface="Calibri" pitchFamily="34" charset="0"/>
-                <a:ea typeface="Calibri" pitchFamily="34" charset="-122"/>
-                <a:cs typeface="Calibri" pitchFamily="34" charset="-120"/>
-              </a:rPr>
-              <a:t>Maraîchage et oliviers</a:t>
-            </a:r>
-            <a:endParaRPr lang="en-US" sz="1250" dirty="0"/>
-          </a:p>
-        </p:txBody>
-      </p:sp>
-      <p:sp>
-        <p:nvSpPr>
-          <p:cNvPr id="13" name="Text 9"/>
-          <p:cNvSpPr txBox="1"/>
-          <p:nvPr/>
-        </p:nvSpPr>
-        <p:spPr>
-          <a:xfrm>
-            <a:off x="4560722" y="4407408"/>
-            <a:ext cx="3070250" cy="1280160"/>
-          </a:xfrm>
-          <a:prstGeom prst="rect">
-            <a:avLst/>
-          </a:prstGeom>
-          <a:noFill/>
-          <a:ln/>
-        </p:spPr>
-        <p:txBody>
-          <a:bodyPr wrap="square" lIns="0" tIns="0" rIns="0" bIns="0" rtlCol="0" anchor="t"/>
-          <a:lstStyle/>
+              <a:t>L'olivier, souvent conduit en pluvial, voit sa récolte chuter fortement les années sans pluie de printemps.</a:t>
+            </a:r>
+            <a:endParaRPr lang="en-US" sz="1400" dirty="0"/>
+          </a:p>
           <a:p>
             <a:pPr algn="l" marL="342900" indent="-342900">
               <a:lnSpc>
-                <a:spcPct val="116000"/>
+                <a:spcPct val="122000"/>
               </a:lnSpc>
               <a:spcAft>
-                <a:spcPts val="700"/>
+                <a:spcPts val="1100"/>
               </a:spcAft>
               <a:buSzPct val="100000"/>
               <a:buChar char="•"/>
             </a:pPr>
             <a:r>
-              <a:rPr lang="en-US" sz="1150" dirty="0">
+              <a:rPr lang="en-US" sz="1400" dirty="0">
                 <a:solidFill>
                   <a:srgbClr val="33423A"/>
                 </a:solidFill>
@@ -7108,23 +12655,23 @@
                 <a:ea typeface="Calibri" pitchFamily="34" charset="-122"/>
                 <a:cs typeface="Calibri" pitchFamily="34" charset="-120"/>
               </a:rPr>
-              <a:t>Périmètres irrigués dépendants des barrages, soumis aux tours d'eau en année sèche.</a:t>
-            </a:r>
-            <a:endParaRPr lang="en-US" sz="1150" dirty="0"/>
+              <a:t>Un verger perdu coûte plusieurs années de production : protéger les racines du stress hydrique protège le capital.</a:t>
+            </a:r>
+            <a:endParaRPr lang="en-US" sz="1400" dirty="0"/>
           </a:p>
           <a:p>
             <a:pPr algn="l" marL="342900" indent="-342900">
               <a:lnSpc>
-                <a:spcPct val="116000"/>
+                <a:spcPct val="122000"/>
               </a:lnSpc>
               <a:spcAft>
-                <a:spcPts val="700"/>
+                <a:spcPts val="1100"/>
               </a:spcAft>
               <a:buSzPct val="100000"/>
               <a:buChar char="•"/>
             </a:pPr>
             <a:r>
-              <a:rPr lang="en-US" sz="1150" dirty="0">
+              <a:rPr lang="en-US" sz="1400" dirty="0">
                 <a:solidFill>
                   <a:srgbClr val="33423A"/>
                 </a:solidFill>
@@ -7132,262 +12679,15 @@
                 <a:ea typeface="Calibri" pitchFamily="34" charset="-122"/>
                 <a:cs typeface="Calibri" pitchFamily="34" charset="-120"/>
               </a:rPr>
-              <a:t>Forte proportion de structures moyennes, capables de décider vite sur un essai.</a:t>
-            </a:r>
-            <a:endParaRPr lang="en-US" sz="1150" dirty="0"/>
-          </a:p>
-          <a:p>
-            <a:pPr algn="l" marL="342900" indent="-342900">
-              <a:lnSpc>
-                <a:spcPct val="116000"/>
-              </a:lnSpc>
-              <a:spcAft>
-                <a:spcPts val="700"/>
-              </a:spcAft>
-              <a:buSzPct val="100000"/>
-              <a:buChar char="•"/>
-            </a:pPr>
-            <a:r>
-              <a:rPr lang="en-US" sz="1150" dirty="0">
-                <a:solidFill>
-                  <a:srgbClr val="33423A"/>
-                </a:solidFill>
-                <a:latin typeface="Calibri" pitchFamily="34" charset="0"/>
-                <a:ea typeface="Calibri" pitchFamily="34" charset="-122"/>
-                <a:cs typeface="Calibri" pitchFamily="34" charset="-120"/>
-              </a:rPr>
-              <a:t>Oléiculture en modernisation, avec des marges de progrès agronomiques nettes.</a:t>
-            </a:r>
-            <a:endParaRPr lang="en-US" sz="1150" dirty="0"/>
-          </a:p>
-        </p:txBody>
-      </p:sp>
-      <p:sp>
-        <p:nvSpPr>
-          <p:cNvPr id="14" name="Shape 10"/>
-          <p:cNvSpPr/>
-          <p:nvPr/>
-        </p:nvSpPr>
-        <p:spPr>
-          <a:xfrm>
-            <a:off x="8124749" y="1783080"/>
-            <a:ext cx="3472586" cy="4069080"/>
-          </a:xfrm>
-          <a:prstGeom prst="roundRect">
-            <a:avLst>
-              <a:gd name="adj" fmla="val 2633"/>
-            </a:avLst>
-          </a:prstGeom>
-          <a:solidFill>
-            <a:srgbClr val="F1F4EF"/>
-          </a:solidFill>
-          <a:ln w="9525">
-            <a:solidFill>
-              <a:srgbClr val="DCE4DA"/>
-            </a:solidFill>
-            <a:prstDash val="solid"/>
-          </a:ln>
-        </p:spPr>
-      </p:sp>
-      <p:pic>
-        <p:nvPicPr>
-          <p:cNvPr id="15" name="Image 2" descr="preencoded.png">    </p:cNvPr>
-          <p:cNvPicPr>
-            <a:picLocks noChangeAspect="1"/>
-          </p:cNvPicPr>
-          <p:nvPr/>
-        </p:nvPicPr>
-        <p:blipFill>
-          <a:blip r:embed="rId3"/>
-          <a:stretch>
-            <a:fillRect/>
-          </a:stretch>
-        </p:blipFill>
-        <p:spPr>
-          <a:xfrm>
-            <a:off x="8124749" y="1783080"/>
-            <a:ext cx="3472586" cy="1691640"/>
-          </a:xfrm>
-          <a:prstGeom prst="rect">
-            <a:avLst/>
-          </a:prstGeom>
-        </p:spPr>
-      </p:pic>
-      <p:sp>
-        <p:nvSpPr>
-          <p:cNvPr id="16" name="Text 11"/>
-          <p:cNvSpPr txBox="1"/>
-          <p:nvPr/>
-        </p:nvSpPr>
-        <p:spPr>
-          <a:xfrm>
-            <a:off x="8325917" y="3639312"/>
-            <a:ext cx="3070250" cy="384048"/>
-          </a:xfrm>
-          <a:prstGeom prst="rect">
-            <a:avLst/>
-          </a:prstGeom>
-          <a:noFill/>
-          <a:ln/>
-        </p:spPr>
-        <p:txBody>
-          <a:bodyPr wrap="square" lIns="0" tIns="0" rIns="0" bIns="0" rtlCol="0" anchor="ctr"/>
-          <a:lstStyle/>
-          <a:p>
-            <a:pPr algn="l" indent="0" marL="0">
-              <a:buNone/>
-            </a:pPr>
-            <a:r>
-              <a:rPr lang="en-US" sz="1500" b="1" dirty="0">
-                <a:solidFill>
-                  <a:srgbClr val="1F5C3A"/>
-                </a:solidFill>
-                <a:latin typeface="Cambria" pitchFamily="34" charset="0"/>
-                <a:ea typeface="Cambria" pitchFamily="34" charset="-122"/>
-                <a:cs typeface="Cambria" pitchFamily="34" charset="-120"/>
-              </a:rPr>
-              <a:t>Drâa-Tafilalet</a:t>
-            </a:r>
-            <a:endParaRPr lang="en-US" sz="1500" dirty="0"/>
-          </a:p>
-        </p:txBody>
-      </p:sp>
-      <p:sp>
-        <p:nvSpPr>
-          <p:cNvPr id="17" name="Text 12"/>
-          <p:cNvSpPr txBox="1"/>
-          <p:nvPr/>
-        </p:nvSpPr>
-        <p:spPr>
-          <a:xfrm>
-            <a:off x="8325917" y="4041648"/>
-            <a:ext cx="3070250" cy="329184"/>
-          </a:xfrm>
-          <a:prstGeom prst="rect">
-            <a:avLst/>
-          </a:prstGeom>
-          <a:noFill/>
-          <a:ln/>
-        </p:spPr>
-        <p:txBody>
-          <a:bodyPr wrap="square" lIns="0" tIns="0" rIns="0" bIns="0" rtlCol="0" anchor="ctr"/>
-          <a:lstStyle/>
-          <a:p>
-            <a:pPr algn="l" indent="0" marL="0">
-              <a:buNone/>
-            </a:pPr>
-            <a:r>
-              <a:rPr lang="en-US" sz="1250" b="1" dirty="0">
-                <a:solidFill>
-                  <a:srgbClr val="A97C12"/>
-                </a:solidFill>
-                <a:latin typeface="Calibri" pitchFamily="34" charset="0"/>
-                <a:ea typeface="Calibri" pitchFamily="34" charset="-122"/>
-                <a:cs typeface="Calibri" pitchFamily="34" charset="-120"/>
-              </a:rPr>
-              <a:t>Palmier dattier et arganier</a:t>
-            </a:r>
-            <a:endParaRPr lang="en-US" sz="1250" dirty="0"/>
-          </a:p>
-        </p:txBody>
-      </p:sp>
-      <p:sp>
-        <p:nvSpPr>
-          <p:cNvPr id="18" name="Text 13"/>
-          <p:cNvSpPr txBox="1"/>
-          <p:nvPr/>
-        </p:nvSpPr>
-        <p:spPr>
-          <a:xfrm>
-            <a:off x="8325917" y="4407408"/>
-            <a:ext cx="3070250" cy="1280160"/>
-          </a:xfrm>
-          <a:prstGeom prst="rect">
-            <a:avLst/>
-          </a:prstGeom>
-          <a:noFill/>
-          <a:ln/>
-        </p:spPr>
-        <p:txBody>
-          <a:bodyPr wrap="square" lIns="0" tIns="0" rIns="0" bIns="0" rtlCol="0" anchor="t"/>
-          <a:lstStyle/>
-          <a:p>
-            <a:pPr algn="l" marL="342900" indent="-342900">
-              <a:lnSpc>
-                <a:spcPct val="116000"/>
-              </a:lnSpc>
-              <a:spcAft>
-                <a:spcPts val="700"/>
-              </a:spcAft>
-              <a:buSzPct val="100000"/>
-              <a:buChar char="•"/>
-            </a:pPr>
-            <a:r>
-              <a:rPr lang="en-US" sz="1150" dirty="0">
-                <a:solidFill>
-                  <a:srgbClr val="33423A"/>
-                </a:solidFill>
-                <a:latin typeface="Calibri" pitchFamily="34" charset="0"/>
-                <a:ea typeface="Calibri" pitchFamily="34" charset="-122"/>
-                <a:cs typeface="Calibri" pitchFamily="34" charset="-120"/>
-              </a:rPr>
-              <a:t>Oasis en situation de stress hydrique structurel, moins de 100 mm de pluie par an.</a:t>
-            </a:r>
-            <a:endParaRPr lang="en-US" sz="1150" dirty="0"/>
-          </a:p>
-          <a:p>
-            <a:pPr algn="l" marL="342900" indent="-342900">
-              <a:lnSpc>
-                <a:spcPct val="116000"/>
-              </a:lnSpc>
-              <a:spcAft>
-                <a:spcPts val="700"/>
-              </a:spcAft>
-              <a:buSzPct val="100000"/>
-              <a:buChar char="•"/>
-            </a:pPr>
-            <a:r>
-              <a:rPr lang="en-US" sz="1150" dirty="0">
-                <a:solidFill>
-                  <a:srgbClr val="33423A"/>
-                </a:solidFill>
-                <a:latin typeface="Calibri" pitchFamily="34" charset="0"/>
-                <a:ea typeface="Calibri" pitchFamily="34" charset="-122"/>
-                <a:cs typeface="Calibri" pitchFamily="34" charset="-120"/>
-              </a:rPr>
-              <a:t>Enjeu de préservation autant que de rendement : lutte contre l'ensablement.</a:t>
-            </a:r>
-            <a:endParaRPr lang="en-US" sz="1150" dirty="0"/>
-          </a:p>
-          <a:p>
-            <a:pPr algn="l" marL="342900" indent="-342900">
-              <a:lnSpc>
-                <a:spcPct val="116000"/>
-              </a:lnSpc>
-              <a:spcAft>
-                <a:spcPts val="700"/>
-              </a:spcAft>
-              <a:buSzPct val="100000"/>
-              <a:buChar char="•"/>
-            </a:pPr>
-            <a:r>
-              <a:rPr lang="en-US" sz="1150" dirty="0">
-                <a:solidFill>
-                  <a:srgbClr val="33423A"/>
-                </a:solidFill>
-                <a:latin typeface="Calibri" pitchFamily="34" charset="0"/>
-                <a:ea typeface="Calibri" pitchFamily="34" charset="-122"/>
-                <a:cs typeface="Calibri" pitchFamily="34" charset="-120"/>
-              </a:rPr>
-              <a:t>Filières à forte valeur unitaire — datte de bouche, huile d'argan.</a:t>
-            </a:r>
-            <a:endParaRPr lang="en-US" sz="1150" dirty="0"/>
-          </a:p>
-        </p:txBody>
-      </p:sp>
-      <p:sp>
-        <p:nvSpPr>
-          <p:cNvPr id="19" name="Text 14"/>
+              <a:t>EVERGREEN® posé à la plantation ou au rajeunissement du verger prolonge la réserve d'eau entre deux irrigations.</a:t>
+            </a:r>
+            <a:endParaRPr lang="en-US" sz="1400" dirty="0"/>
+          </a:p>
+        </p:txBody>
+      </p:sp>
+      <p:sp>
+        <p:nvSpPr>
+          <p:cNvPr id="6" name="Text 3"/>
           <p:cNvSpPr txBox="1"/>
           <p:nvPr/>
         </p:nvSpPr>
@@ -7428,7 +12728,7 @@
       </p:sp>
       <p:sp>
         <p:nvSpPr>
-          <p:cNvPr id="20" name="Text 15"/>
+          <p:cNvPr id="7" name="Text 4"/>
           <p:cNvSpPr txBox="1"/>
           <p:nvPr/>
         </p:nvSpPr>
@@ -7532,7 +12832,7 @@
                 <a:ea typeface="Calibri" pitchFamily="34" charset="-122"/>
                 <a:cs typeface="Calibri" pitchFamily="34" charset="-120"/>
               </a:rPr>
-              <a:t>COMMENT NOUS PROCÉDONS</a:t>
+              <a:t>Potentiel de rendement</a:t>
             </a:r>
             <a:endParaRPr lang="en-US" sz="1150" dirty="0"/>
           </a:p>
@@ -7571,26 +12871,42 @@
                 <a:ea typeface="Cambria" pitchFamily="34" charset="-122"/>
                 <a:cs typeface="Cambria" pitchFamily="34" charset="-120"/>
               </a:rPr>
-              <a:t>Un déploiement par étapes, mesuré à chaque palier</a:t>
+              <a:t>Gain de rendement attendu par culture</a:t>
             </a:r>
             <a:endParaRPr lang="en-US" sz="3000" dirty="0"/>
           </a:p>
         </p:txBody>
       </p:sp>
-      <p:sp>
-        <p:nvSpPr>
-          <p:cNvPr id="4" name="Shape 2"/>
+      <p:graphicFrame>
+        <p:nvGraphicFramePr>
+          <p:cNvPr id="4" name="Chart 0" descr=""/>
+          <p:cNvGraphicFramePr/>
+          <p:nvPr/>
+        </p:nvGraphicFramePr>
+        <p:xfrm>
+          <a:off x="594360" y="1783080"/>
+          <a:ext cx="7360920" cy="3977640"/>
+        </p:xfrm>
+        <a:graphic xmlns:a="http://schemas.openxmlformats.org/drawingml/2006/main">
+          <a:graphicData uri="http://schemas.openxmlformats.org/drawingml/2006/chart">
+            <c:chart xmlns:c="http://schemas.openxmlformats.org/drawingml/2006/chart" r:id="rId1"/>
+          </a:graphicData>
+        </a:graphic>
+      </p:graphicFrame>
+      <p:sp>
+        <p:nvSpPr>
+          <p:cNvPr id="5" name="Shape 2"/>
           <p:cNvSpPr/>
           <p:nvPr/>
         </p:nvSpPr>
         <p:spPr>
           <a:xfrm>
-            <a:off x="594360" y="1874520"/>
-            <a:ext cx="2545004" cy="2834640"/>
+            <a:off x="8275320" y="1783080"/>
+            <a:ext cx="3291840" cy="3977640"/>
           </a:xfrm>
           <a:prstGeom prst="roundRect">
             <a:avLst>
-              <a:gd name="adj" fmla="val 3593"/>
+              <a:gd name="adj" fmla="val 2778"/>
             </a:avLst>
           </a:prstGeom>
           <a:solidFill>
@@ -7606,34 +12922,14 @@
       </p:sp>
       <p:sp>
         <p:nvSpPr>
-          <p:cNvPr id="5" name="Shape 3"/>
-          <p:cNvSpPr/>
-          <p:nvPr/>
-        </p:nvSpPr>
-        <p:spPr>
-          <a:xfrm>
-            <a:off x="822960" y="2103120"/>
-            <a:ext cx="566928" cy="566928"/>
-          </a:xfrm>
-          <a:prstGeom prst="ellipse">
-            <a:avLst/>
-          </a:prstGeom>
-          <a:solidFill>
-            <a:srgbClr val="1F5C3A"/>
-          </a:solidFill>
-          <a:ln/>
-        </p:spPr>
-      </p:sp>
-      <p:sp>
-        <p:nvSpPr>
-          <p:cNvPr id="6" name="Text 4"/>
-          <p:cNvSpPr txBox="1"/>
-          <p:nvPr/>
-        </p:nvSpPr>
-        <p:spPr>
-          <a:xfrm>
-            <a:off x="822960" y="2103120"/>
-            <a:ext cx="566928" cy="566928"/>
+          <p:cNvPr id="6" name="Text 3"/>
+          <p:cNvSpPr txBox="1"/>
+          <p:nvPr/>
+        </p:nvSpPr>
+        <p:spPr>
+          <a:xfrm>
+            <a:off x="8503920" y="2011680"/>
+            <a:ext cx="2834640" cy="457200"/>
           </a:xfrm>
           <a:prstGeom prst="rect">
             <a:avLst/>
@@ -7645,616 +12941,34 @@
           <a:bodyPr wrap="square" lIns="0" tIns="0" rIns="0" bIns="0" rtlCol="0" anchor="ctr"/>
           <a:lstStyle/>
           <a:p>
-            <a:pPr algn="ctr" indent="0" marL="0">
-              <a:buNone/>
-            </a:pPr>
-            <a:r>
-              <a:rPr lang="en-US" sz="1600" b="1" dirty="0">
-                <a:solidFill>
-                  <a:srgbClr val="FFFFFF"/>
+            <a:pPr algn="l" indent="0" marL="0">
+              <a:buNone/>
+            </a:pPr>
+            <a:r>
+              <a:rPr lang="en-US" sz="1300" b="1" dirty="0">
+                <a:solidFill>
+                  <a:srgbClr val="1F5C3A"/>
                 </a:solidFill>
                 <a:latin typeface="Cambria" pitchFamily="34" charset="0"/>
                 <a:ea typeface="Cambria" pitchFamily="34" charset="-122"/>
                 <a:cs typeface="Cambria" pitchFamily="34" charset="-120"/>
               </a:rPr>
-              <a:t>1</a:t>
-            </a:r>
-            <a:endParaRPr lang="en-US" sz="1600" dirty="0"/>
-          </a:p>
-        </p:txBody>
-      </p:sp>
-      <p:sp>
-        <p:nvSpPr>
-          <p:cNvPr id="7" name="Text 5"/>
-          <p:cNvSpPr txBox="1"/>
-          <p:nvPr/>
-        </p:nvSpPr>
-        <p:spPr>
-          <a:xfrm>
-            <a:off x="822960" y="2788920"/>
-            <a:ext cx="2087804" cy="457200"/>
-          </a:xfrm>
-          <a:prstGeom prst="rect">
-            <a:avLst/>
-          </a:prstGeom>
-          <a:noFill/>
-          <a:ln/>
-        </p:spPr>
-        <p:txBody>
-          <a:bodyPr wrap="square" lIns="0" tIns="0" rIns="0" bIns="0" rtlCol="0" anchor="ctr"/>
-          <a:lstStyle/>
-          <a:p>
-            <a:pPr algn="l" indent="0" marL="0">
-              <a:buNone/>
-            </a:pPr>
-            <a:r>
-              <a:rPr lang="en-US" sz="1400" b="1" dirty="0">
-                <a:solidFill>
-                  <a:srgbClr val="1F5C3A"/>
-                </a:solidFill>
-                <a:latin typeface="Cambria" pitchFamily="34" charset="0"/>
-                <a:ea typeface="Cambria" pitchFamily="34" charset="-122"/>
-                <a:cs typeface="Cambria" pitchFamily="34" charset="-120"/>
-              </a:rPr>
-              <a:t>Diagnostic</a:t>
-            </a:r>
-            <a:endParaRPr lang="en-US" sz="1400" dirty="0"/>
-          </a:p>
-        </p:txBody>
-      </p:sp>
-      <p:sp>
-        <p:nvSpPr>
-          <p:cNvPr id="8" name="Text 6"/>
-          <p:cNvSpPr txBox="1"/>
-          <p:nvPr/>
-        </p:nvSpPr>
-        <p:spPr>
-          <a:xfrm>
-            <a:off x="822960" y="3291840"/>
-            <a:ext cx="2087804" cy="1234440"/>
-          </a:xfrm>
-          <a:prstGeom prst="rect">
-            <a:avLst/>
-          </a:prstGeom>
-          <a:noFill/>
-          <a:ln/>
-        </p:spPr>
-        <p:txBody>
-          <a:bodyPr wrap="square" lIns="0" tIns="0" rIns="0" bIns="0" rtlCol="0" anchor="t"/>
-          <a:lstStyle/>
-          <a:p>
-            <a:pPr algn="l" indent="0" marL="0">
-              <a:lnSpc>
-                <a:spcPct val="120000"/>
-              </a:lnSpc>
-              <a:buNone/>
-            </a:pPr>
-            <a:r>
-              <a:rPr lang="en-US" sz="1200" dirty="0">
-                <a:solidFill>
-                  <a:srgbClr val="33423A"/>
-                </a:solidFill>
-                <a:latin typeface="Calibri" pitchFamily="34" charset="0"/>
-                <a:ea typeface="Calibri" pitchFamily="34" charset="-122"/>
-                <a:cs typeface="Calibri" pitchFamily="34" charset="-120"/>
-              </a:rPr>
-              <a:t>Analyse du sol, du mode d'irrigation et de la culture. Aucun engagement à ce stade.</a:t>
-            </a:r>
-            <a:endParaRPr lang="en-US" sz="1200" dirty="0"/>
-          </a:p>
-        </p:txBody>
-      </p:sp>
-      <p:sp>
-        <p:nvSpPr>
-          <p:cNvPr id="9" name="Shape 7"/>
-          <p:cNvSpPr/>
-          <p:nvPr/>
-        </p:nvSpPr>
-        <p:spPr>
-          <a:xfrm>
-            <a:off x="3413684" y="1874520"/>
-            <a:ext cx="2545004" cy="2834640"/>
-          </a:xfrm>
-          <a:prstGeom prst="roundRect">
-            <a:avLst>
-              <a:gd name="adj" fmla="val 3593"/>
-            </a:avLst>
-          </a:prstGeom>
-          <a:solidFill>
-            <a:srgbClr val="F1F4EF"/>
-          </a:solidFill>
-          <a:ln w="9525">
-            <a:solidFill>
-              <a:srgbClr val="DCE4DA"/>
-            </a:solidFill>
-            <a:prstDash val="solid"/>
-          </a:ln>
-        </p:spPr>
-      </p:sp>
-      <p:sp>
-        <p:nvSpPr>
-          <p:cNvPr id="10" name="Shape 8"/>
-          <p:cNvSpPr/>
-          <p:nvPr/>
-        </p:nvSpPr>
-        <p:spPr>
-          <a:xfrm>
-            <a:off x="3642284" y="2103120"/>
-            <a:ext cx="566928" cy="566928"/>
-          </a:xfrm>
-          <a:prstGeom prst="ellipse">
-            <a:avLst/>
-          </a:prstGeom>
-          <a:solidFill>
-            <a:srgbClr val="1F5C3A"/>
-          </a:solidFill>
-          <a:ln/>
-        </p:spPr>
-      </p:sp>
-      <p:sp>
-        <p:nvSpPr>
-          <p:cNvPr id="11" name="Text 9"/>
-          <p:cNvSpPr txBox="1"/>
-          <p:nvPr/>
-        </p:nvSpPr>
-        <p:spPr>
-          <a:xfrm>
-            <a:off x="3642284" y="2103120"/>
-            <a:ext cx="566928" cy="566928"/>
-          </a:xfrm>
-          <a:prstGeom prst="rect">
-            <a:avLst/>
-          </a:prstGeom>
-          <a:noFill/>
-          <a:ln/>
-        </p:spPr>
-        <p:txBody>
-          <a:bodyPr wrap="square" lIns="0" tIns="0" rIns="0" bIns="0" rtlCol="0" anchor="ctr"/>
-          <a:lstStyle/>
-          <a:p>
-            <a:pPr algn="ctr" indent="0" marL="0">
-              <a:buNone/>
-            </a:pPr>
-            <a:r>
-              <a:rPr lang="en-US" sz="1600" b="1" dirty="0">
-                <a:solidFill>
-                  <a:srgbClr val="FFFFFF"/>
-                </a:solidFill>
-                <a:latin typeface="Cambria" pitchFamily="34" charset="0"/>
-                <a:ea typeface="Cambria" pitchFamily="34" charset="-122"/>
-                <a:cs typeface="Cambria" pitchFamily="34" charset="-120"/>
-              </a:rPr>
-              <a:t>2</a:t>
-            </a:r>
-            <a:endParaRPr lang="en-US" sz="1600" dirty="0"/>
-          </a:p>
-        </p:txBody>
-      </p:sp>
-      <p:sp>
-        <p:nvSpPr>
-          <p:cNvPr id="12" name="Text 10"/>
-          <p:cNvSpPr txBox="1"/>
-          <p:nvPr/>
-        </p:nvSpPr>
-        <p:spPr>
-          <a:xfrm>
-            <a:off x="3642284" y="2788920"/>
-            <a:ext cx="2087804" cy="457200"/>
-          </a:xfrm>
-          <a:prstGeom prst="rect">
-            <a:avLst/>
-          </a:prstGeom>
-          <a:noFill/>
-          <a:ln/>
-        </p:spPr>
-        <p:txBody>
-          <a:bodyPr wrap="square" lIns="0" tIns="0" rIns="0" bIns="0" rtlCol="0" anchor="ctr"/>
-          <a:lstStyle/>
-          <a:p>
-            <a:pPr algn="l" indent="0" marL="0">
-              <a:buNone/>
-            </a:pPr>
-            <a:r>
-              <a:rPr lang="en-US" sz="1400" b="1" dirty="0">
-                <a:solidFill>
-                  <a:srgbClr val="1F5C3A"/>
-                </a:solidFill>
-                <a:latin typeface="Cambria" pitchFamily="34" charset="0"/>
-                <a:ea typeface="Cambria" pitchFamily="34" charset="-122"/>
-                <a:cs typeface="Cambria" pitchFamily="34" charset="-120"/>
-              </a:rPr>
-              <a:t>Parcelle témoin</a:t>
-            </a:r>
-            <a:endParaRPr lang="en-US" sz="1400" dirty="0"/>
-          </a:p>
-        </p:txBody>
-      </p:sp>
-      <p:sp>
-        <p:nvSpPr>
-          <p:cNvPr id="13" name="Text 11"/>
-          <p:cNvSpPr txBox="1"/>
-          <p:nvPr/>
-        </p:nvSpPr>
-        <p:spPr>
-          <a:xfrm>
-            <a:off x="3642284" y="3291840"/>
-            <a:ext cx="2087804" cy="1234440"/>
-          </a:xfrm>
-          <a:prstGeom prst="rect">
-            <a:avLst/>
-          </a:prstGeom>
-          <a:noFill/>
-          <a:ln/>
-        </p:spPr>
-        <p:txBody>
-          <a:bodyPr wrap="square" lIns="0" tIns="0" rIns="0" bIns="0" rtlCol="0" anchor="t"/>
-          <a:lstStyle/>
-          <a:p>
-            <a:pPr algn="l" indent="0" marL="0">
-              <a:lnSpc>
-                <a:spcPct val="120000"/>
-              </a:lnSpc>
-              <a:buNone/>
-            </a:pPr>
-            <a:r>
-              <a:rPr lang="en-US" sz="1200" dirty="0">
-                <a:solidFill>
-                  <a:srgbClr val="33423A"/>
-                </a:solidFill>
-                <a:latin typeface="Calibri" pitchFamily="34" charset="0"/>
-                <a:ea typeface="Calibri" pitchFamily="34" charset="-122"/>
-                <a:cs typeface="Calibri" pitchFamily="34" charset="-120"/>
-              </a:rPr>
-              <a:t>Un essai comparatif sur une parcelle, avec parcelle témoin conduite à l'identique.</a:t>
-            </a:r>
-            <a:endParaRPr lang="en-US" sz="1200" dirty="0"/>
-          </a:p>
-        </p:txBody>
-      </p:sp>
-      <p:sp>
-        <p:nvSpPr>
-          <p:cNvPr id="14" name="Shape 12"/>
-          <p:cNvSpPr/>
-          <p:nvPr/>
-        </p:nvSpPr>
-        <p:spPr>
-          <a:xfrm>
-            <a:off x="6233008" y="1874520"/>
-            <a:ext cx="2545004" cy="2834640"/>
-          </a:xfrm>
-          <a:prstGeom prst="roundRect">
-            <a:avLst>
-              <a:gd name="adj" fmla="val 3593"/>
-            </a:avLst>
-          </a:prstGeom>
-          <a:solidFill>
-            <a:srgbClr val="F1F4EF"/>
-          </a:solidFill>
-          <a:ln w="9525">
-            <a:solidFill>
-              <a:srgbClr val="DCE4DA"/>
-            </a:solidFill>
-            <a:prstDash val="solid"/>
-          </a:ln>
-        </p:spPr>
-      </p:sp>
-      <p:sp>
-        <p:nvSpPr>
-          <p:cNvPr id="15" name="Shape 13"/>
-          <p:cNvSpPr/>
-          <p:nvPr/>
-        </p:nvSpPr>
-        <p:spPr>
-          <a:xfrm>
-            <a:off x="6461608" y="2103120"/>
-            <a:ext cx="566928" cy="566928"/>
-          </a:xfrm>
-          <a:prstGeom prst="ellipse">
-            <a:avLst/>
-          </a:prstGeom>
-          <a:solidFill>
-            <a:srgbClr val="1F5C3A"/>
-          </a:solidFill>
-          <a:ln/>
-        </p:spPr>
-      </p:sp>
-      <p:sp>
-        <p:nvSpPr>
-          <p:cNvPr id="16" name="Text 14"/>
-          <p:cNvSpPr txBox="1"/>
-          <p:nvPr/>
-        </p:nvSpPr>
-        <p:spPr>
-          <a:xfrm>
-            <a:off x="6461608" y="2103120"/>
-            <a:ext cx="566928" cy="566928"/>
-          </a:xfrm>
-          <a:prstGeom prst="rect">
-            <a:avLst/>
-          </a:prstGeom>
-          <a:noFill/>
-          <a:ln/>
-        </p:spPr>
-        <p:txBody>
-          <a:bodyPr wrap="square" lIns="0" tIns="0" rIns="0" bIns="0" rtlCol="0" anchor="ctr"/>
-          <a:lstStyle/>
-          <a:p>
-            <a:pPr algn="ctr" indent="0" marL="0">
-              <a:buNone/>
-            </a:pPr>
-            <a:r>
-              <a:rPr lang="en-US" sz="1600" b="1" dirty="0">
-                <a:solidFill>
-                  <a:srgbClr val="FFFFFF"/>
-                </a:solidFill>
-                <a:latin typeface="Cambria" pitchFamily="34" charset="0"/>
-                <a:ea typeface="Cambria" pitchFamily="34" charset="-122"/>
-                <a:cs typeface="Cambria" pitchFamily="34" charset="-120"/>
-              </a:rPr>
-              <a:t>3</a:t>
-            </a:r>
-            <a:endParaRPr lang="en-US" sz="1600" dirty="0"/>
-          </a:p>
-        </p:txBody>
-      </p:sp>
-      <p:sp>
-        <p:nvSpPr>
-          <p:cNvPr id="17" name="Text 15"/>
-          <p:cNvSpPr txBox="1"/>
-          <p:nvPr/>
-        </p:nvSpPr>
-        <p:spPr>
-          <a:xfrm>
-            <a:off x="6461608" y="2788920"/>
-            <a:ext cx="2087804" cy="457200"/>
-          </a:xfrm>
-          <a:prstGeom prst="rect">
-            <a:avLst/>
-          </a:prstGeom>
-          <a:noFill/>
-          <a:ln/>
-        </p:spPr>
-        <p:txBody>
-          <a:bodyPr wrap="square" lIns="0" tIns="0" rIns="0" bIns="0" rtlCol="0" anchor="ctr"/>
-          <a:lstStyle/>
-          <a:p>
-            <a:pPr algn="l" indent="0" marL="0">
-              <a:buNone/>
-            </a:pPr>
-            <a:r>
-              <a:rPr lang="en-US" sz="1400" b="1" dirty="0">
-                <a:solidFill>
-                  <a:srgbClr val="1F5C3A"/>
-                </a:solidFill>
-                <a:latin typeface="Cambria" pitchFamily="34" charset="0"/>
-                <a:ea typeface="Cambria" pitchFamily="34" charset="-122"/>
-                <a:cs typeface="Cambria" pitchFamily="34" charset="-120"/>
-              </a:rPr>
-              <a:t>Mesure</a:t>
-            </a:r>
-            <a:endParaRPr lang="en-US" sz="1400" dirty="0"/>
-          </a:p>
-        </p:txBody>
-      </p:sp>
-      <p:sp>
-        <p:nvSpPr>
-          <p:cNvPr id="18" name="Text 16"/>
-          <p:cNvSpPr txBox="1"/>
-          <p:nvPr/>
-        </p:nvSpPr>
-        <p:spPr>
-          <a:xfrm>
-            <a:off x="6461608" y="3291840"/>
-            <a:ext cx="2087804" cy="1234440"/>
-          </a:xfrm>
-          <a:prstGeom prst="rect">
-            <a:avLst/>
-          </a:prstGeom>
-          <a:noFill/>
-          <a:ln/>
-        </p:spPr>
-        <p:txBody>
-          <a:bodyPr wrap="square" lIns="0" tIns="0" rIns="0" bIns="0" rtlCol="0" anchor="t"/>
-          <a:lstStyle/>
-          <a:p>
-            <a:pPr algn="l" indent="0" marL="0">
-              <a:lnSpc>
-                <a:spcPct val="120000"/>
-              </a:lnSpc>
-              <a:buNone/>
-            </a:pPr>
-            <a:r>
-              <a:rPr lang="en-US" sz="1200" dirty="0">
-                <a:solidFill>
-                  <a:srgbClr val="33423A"/>
-                </a:solidFill>
-                <a:latin typeface="Calibri" pitchFamily="34" charset="0"/>
-                <a:ea typeface="Calibri" pitchFamily="34" charset="-122"/>
-                <a:cs typeface="Calibri" pitchFamily="34" charset="-120"/>
-              </a:rPr>
-              <a:t>Relevés de consommation et de rendement sur un cycle cultural complet.</a:t>
-            </a:r>
-            <a:endParaRPr lang="en-US" sz="1200" dirty="0"/>
-          </a:p>
-        </p:txBody>
-      </p:sp>
-      <p:sp>
-        <p:nvSpPr>
-          <p:cNvPr id="19" name="Shape 17"/>
-          <p:cNvSpPr/>
-          <p:nvPr/>
-        </p:nvSpPr>
-        <p:spPr>
-          <a:xfrm>
-            <a:off x="9052331" y="1874520"/>
-            <a:ext cx="2545004" cy="2834640"/>
-          </a:xfrm>
-          <a:prstGeom prst="roundRect">
-            <a:avLst>
-              <a:gd name="adj" fmla="val 3593"/>
-            </a:avLst>
-          </a:prstGeom>
-          <a:solidFill>
-            <a:srgbClr val="F1F4EF"/>
-          </a:solidFill>
-          <a:ln w="9525">
-            <a:solidFill>
-              <a:srgbClr val="DCE4DA"/>
-            </a:solidFill>
-            <a:prstDash val="solid"/>
-          </a:ln>
-        </p:spPr>
-      </p:sp>
-      <p:sp>
-        <p:nvSpPr>
-          <p:cNvPr id="20" name="Shape 18"/>
-          <p:cNvSpPr/>
-          <p:nvPr/>
-        </p:nvSpPr>
-        <p:spPr>
-          <a:xfrm>
-            <a:off x="9280931" y="2103120"/>
-            <a:ext cx="566928" cy="566928"/>
-          </a:xfrm>
-          <a:prstGeom prst="ellipse">
-            <a:avLst/>
-          </a:prstGeom>
-          <a:solidFill>
-            <a:srgbClr val="1F5C3A"/>
-          </a:solidFill>
-          <a:ln/>
-        </p:spPr>
-      </p:sp>
-      <p:sp>
-        <p:nvSpPr>
-          <p:cNvPr id="21" name="Text 19"/>
-          <p:cNvSpPr txBox="1"/>
-          <p:nvPr/>
-        </p:nvSpPr>
-        <p:spPr>
-          <a:xfrm>
-            <a:off x="9280931" y="2103120"/>
-            <a:ext cx="566928" cy="566928"/>
-          </a:xfrm>
-          <a:prstGeom prst="rect">
-            <a:avLst/>
-          </a:prstGeom>
-          <a:noFill/>
-          <a:ln/>
-        </p:spPr>
-        <p:txBody>
-          <a:bodyPr wrap="square" lIns="0" tIns="0" rIns="0" bIns="0" rtlCol="0" anchor="ctr"/>
-          <a:lstStyle/>
-          <a:p>
-            <a:pPr algn="ctr" indent="0" marL="0">
-              <a:buNone/>
-            </a:pPr>
-            <a:r>
-              <a:rPr lang="en-US" sz="1600" b="1" dirty="0">
-                <a:solidFill>
-                  <a:srgbClr val="FFFFFF"/>
-                </a:solidFill>
-                <a:latin typeface="Cambria" pitchFamily="34" charset="0"/>
-                <a:ea typeface="Cambria" pitchFamily="34" charset="-122"/>
-                <a:cs typeface="Cambria" pitchFamily="34" charset="-120"/>
-              </a:rPr>
-              <a:t>4</a:t>
-            </a:r>
-            <a:endParaRPr lang="en-US" sz="1600" dirty="0"/>
-          </a:p>
-        </p:txBody>
-      </p:sp>
-      <p:sp>
-        <p:nvSpPr>
-          <p:cNvPr id="22" name="Text 20"/>
-          <p:cNvSpPr txBox="1"/>
-          <p:nvPr/>
-        </p:nvSpPr>
-        <p:spPr>
-          <a:xfrm>
-            <a:off x="9280931" y="2788920"/>
-            <a:ext cx="2087804" cy="457200"/>
-          </a:xfrm>
-          <a:prstGeom prst="rect">
-            <a:avLst/>
-          </a:prstGeom>
-          <a:noFill/>
-          <a:ln/>
-        </p:spPr>
-        <p:txBody>
-          <a:bodyPr wrap="square" lIns="0" tIns="0" rIns="0" bIns="0" rtlCol="0" anchor="ctr"/>
-          <a:lstStyle/>
-          <a:p>
-            <a:pPr algn="l" indent="0" marL="0">
-              <a:buNone/>
-            </a:pPr>
-            <a:r>
-              <a:rPr lang="en-US" sz="1400" b="1" dirty="0">
-                <a:solidFill>
-                  <a:srgbClr val="1F5C3A"/>
-                </a:solidFill>
-                <a:latin typeface="Cambria" pitchFamily="34" charset="0"/>
-                <a:ea typeface="Cambria" pitchFamily="34" charset="-122"/>
-                <a:cs typeface="Cambria" pitchFamily="34" charset="-120"/>
-              </a:rPr>
-              <a:t>Extension</a:t>
-            </a:r>
-            <a:endParaRPr lang="en-US" sz="1400" dirty="0"/>
-          </a:p>
-        </p:txBody>
-      </p:sp>
-      <p:sp>
-        <p:nvSpPr>
-          <p:cNvPr id="23" name="Text 21"/>
-          <p:cNvSpPr txBox="1"/>
-          <p:nvPr/>
-        </p:nvSpPr>
-        <p:spPr>
-          <a:xfrm>
-            <a:off x="9280931" y="3291840"/>
-            <a:ext cx="2087804" cy="1234440"/>
-          </a:xfrm>
-          <a:prstGeom prst="rect">
-            <a:avLst/>
-          </a:prstGeom>
-          <a:noFill/>
-          <a:ln/>
-        </p:spPr>
-        <p:txBody>
-          <a:bodyPr wrap="square" lIns="0" tIns="0" rIns="0" bIns="0" rtlCol="0" anchor="t"/>
-          <a:lstStyle/>
-          <a:p>
-            <a:pPr algn="l" indent="0" marL="0">
-              <a:lnSpc>
-                <a:spcPct val="120000"/>
-              </a:lnSpc>
-              <a:buNone/>
-            </a:pPr>
-            <a:r>
-              <a:rPr lang="en-US" sz="1200" dirty="0">
-                <a:solidFill>
-                  <a:srgbClr val="33423A"/>
-                </a:solidFill>
-                <a:latin typeface="Calibri" pitchFamily="34" charset="0"/>
-                <a:ea typeface="Calibri" pitchFamily="34" charset="-122"/>
-                <a:cs typeface="Calibri" pitchFamily="34" charset="-120"/>
-              </a:rPr>
-              <a:t>Généralisation progressive aux autres parcelles sur la base des résultats constatés.</a:t>
-            </a:r>
-            <a:endParaRPr lang="en-US" sz="1200" dirty="0"/>
-          </a:p>
-        </p:txBody>
-      </p:sp>
-      <p:sp>
-        <p:nvSpPr>
-          <p:cNvPr id="24" name="Text 22"/>
-          <p:cNvSpPr txBox="1"/>
-          <p:nvPr/>
-        </p:nvSpPr>
-        <p:spPr>
-          <a:xfrm>
-            <a:off x="594360" y="4983480"/>
-            <a:ext cx="11002975" cy="822960"/>
+              <a:t>À lire avec prudence</a:t>
+            </a:r>
+            <a:endParaRPr lang="en-US" sz="1300" dirty="0"/>
+          </a:p>
+        </p:txBody>
+      </p:sp>
+      <p:sp>
+        <p:nvSpPr>
+          <p:cNvPr id="7" name="Text 4"/>
+          <p:cNvSpPr txBox="1"/>
+          <p:nvPr/>
+        </p:nvSpPr>
+        <p:spPr>
+          <a:xfrm>
+            <a:off x="8503920" y="2560320"/>
+            <a:ext cx="2834640" cy="3017520"/>
           </a:xfrm>
           <a:prstGeom prst="rect">
             <a:avLst/>
@@ -8273,23 +12987,52 @@
               <a:buNone/>
             </a:pPr>
             <a:r>
-              <a:rPr lang="en-US" sz="1250" i="1" dirty="0">
-                <a:solidFill>
-                  <a:srgbClr val="6B7C72"/>
-                </a:solidFill>
-                <a:latin typeface="Calibri" pitchFamily="34" charset="0"/>
-                <a:ea typeface="Calibri" pitchFamily="34" charset="-122"/>
-                <a:cs typeface="Calibri" pitchFamily="34" charset="-120"/>
-              </a:rPr>
-              <a:t>La règle de dosage est la même partout : 3 grammes par litre de terre utile. Ce qui change d'un terrain à l'autre, c'est le volume de terre effectivement exploré par les racines.</a:t>
-            </a:r>
-            <a:endParaRPr lang="en-US" sz="1250" dirty="0"/>
-          </a:p>
-        </p:txBody>
-      </p:sp>
-      <p:sp>
-        <p:nvSpPr>
-          <p:cNvPr id="25" name="Text 23"/>
+              <a:rPr lang="en-US" sz="1200" dirty="0">
+                <a:solidFill>
+                  <a:srgbClr val="33423A"/>
+                </a:solidFill>
+                <a:latin typeface="Calibri" pitchFamily="34" charset="0"/>
+                <a:ea typeface="Calibri" pitchFamily="34" charset="-122"/>
+                <a:cs typeface="Calibri" pitchFamily="34" charset="-120"/>
+              </a:rPr>
+              <a:t>Fourchettes retenues par notre calculateur de dose, pour une culture conduite normalement avec EVERGREEN® à la plantation.</a:t>
+            </a:r>
+            <a:endParaRPr lang="en-US" sz="1200" dirty="0"/>
+          </a:p>
+          <a:p>
+            <a:pPr algn="l" indent="0" marL="0">
+              <a:lnSpc>
+                <a:spcPct val="125000"/>
+              </a:lnSpc>
+              <a:buNone/>
+            </a:pPr>
+            <a:endParaRPr lang="en-US" sz="1200" dirty="0"/>
+          </a:p>
+          <a:p>
+            <a:pPr algn="l" indent="0" marL="0">
+              <a:lnSpc>
+                <a:spcPct val="125000"/>
+              </a:lnSpc>
+              <a:buNone/>
+            </a:pPr>
+            <a:r>
+              <a:rPr lang="en-US" sz="1200" dirty="0">
+                <a:solidFill>
+                  <a:srgbClr val="33423A"/>
+                </a:solidFill>
+                <a:latin typeface="Calibri" pitchFamily="34" charset="0"/>
+                <a:ea typeface="Calibri" pitchFamily="34" charset="-122"/>
+                <a:cs typeface="Calibri" pitchFamily="34" charset="-120"/>
+              </a:rPr>
+              <a:t>Le résultat réel dépend du sol, du climat et de la conduite. Pour les céréales, aucun gain n'est avancé sans essai de terrain.</a:t>
+            </a:r>
+            <a:endParaRPr lang="en-US" sz="1200" dirty="0"/>
+          </a:p>
+        </p:txBody>
+      </p:sp>
+      <p:sp>
+        <p:nvSpPr>
+          <p:cNvPr id="8" name="Text 5"/>
           <p:cNvSpPr txBox="1"/>
           <p:nvPr/>
         </p:nvSpPr>
@@ -8330,7 +13073,7 @@
       </p:sp>
       <p:sp>
         <p:nvSpPr>
-          <p:cNvPr id="26" name="Text 24"/>
+          <p:cNvPr id="9" name="Text 6"/>
           <p:cNvSpPr txBox="1"/>
           <p:nvPr/>
         </p:nvSpPr>

--- a/public/documents/countries/maroc.pptx
+++ b/public/documents/countries/maroc.pptx
@@ -3727,7 +3727,7 @@
       </p:sp>
       <p:pic>
         <p:nvPicPr>
-          <p:cNvPr id="5" name="Image 1" descr="C:\Users\Utilisateur\dev\green-solutions-web\public\images\logo-icon.png">    </p:cNvPr>
+          <p:cNvPr id="5" name="Image 1" descr="C:\Users\Utilisateur\dev\gsw-dossiers\public\images\logo-icon.png">    </p:cNvPr>
           <p:cNvPicPr>
             <a:picLocks noChangeAspect="1"/>
           </p:cNvPicPr>
@@ -3751,7 +3751,7 @@
       </p:pic>
       <p:pic>
         <p:nvPicPr>
-          <p:cNvPr id="6" name="Image 2" descr="C:\Users\Utilisateur\dev\green-solutions-web\scripts\dossiers\drapeaux\maroc.png">    </p:cNvPr>
+          <p:cNvPr id="6" name="Image 2" descr="C:\Users\Utilisateur\dev\gsw-dossiers\scripts\dossiers\drapeaux\maroc.png">    </p:cNvPr>
           <p:cNvPicPr>
             <a:picLocks noChangeAspect="1"/>
           </p:cNvPicPr>
@@ -9518,7 +9518,7 @@
                 <a:ea typeface="Calibri" pitchFamily="34" charset="-122"/>
                 <a:cs typeface="Calibri" pitchFamily="34" charset="-120"/>
               </a:rPr>
-              <a:t>contact@evergreen-ecosorb.com · 821 Chemin des Clapiers, 83220 Le Pradet, France</a:t>
+              <a:t>contact@evergreen-ecosorb.com · Green Solutions Groupe AIM SA, 46, route de la Condémine, 1475 Forel, Suisse</a:t>
             </a:r>
             <a:endParaRPr lang="en-US" sz="1400" dirty="0"/>
           </a:p>
@@ -9526,7 +9526,7 @@
       </p:sp>
       <p:pic>
         <p:nvPicPr>
-          <p:cNvPr id="6" name="Image 1" descr="C:\Users\Utilisateur\dev\green-solutions-web\scripts\dossiers\sceau-aim-clair.png">    </p:cNvPr>
+          <p:cNvPr id="6" name="Image 1" descr="C:\Users\Utilisateur\dev\gsw-dossiers\scripts\dossiers\sceau-aim-clair.png">    </p:cNvPr>
           <p:cNvPicPr>
             <a:picLocks noChangeAspect="1"/>
           </p:cNvPicPr>

--- a/public/documents/countries/maroc.pptx
+++ b/public/documents/countries/maroc.pptx
@@ -124,7 +124,7 @@
 </p:presentation>
 </file>
 
-<file path=ppt/charts/chart45.xml><?xml version="1.0" encoding="utf-8"?>
+<file path=ppt/charts/chart1.xml><?xml version="1.0" encoding="utf-8"?>
 <c:chartSpace xmlns:c="http://schemas.openxmlformats.org/drawingml/2006/chart" xmlns:a="http://schemas.openxmlformats.org/drawingml/2006/main" xmlns:r="http://schemas.openxmlformats.org/officeDocument/2006/relationships">
   <c:date1904 val="0"/>
   <c:roundedCorners val="1"/>
@@ -369,7 +369,7 @@
 </c:chartSpace>
 </file>
 
-<file path=ppt/charts/chart46.xml><?xml version="1.0" encoding="utf-8"?>
+<file path=ppt/charts/chart2.xml><?xml version="1.0" encoding="utf-8"?>
 <c:chartSpace xmlns:c="http://schemas.openxmlformats.org/drawingml/2006/chart" xmlns:a="http://schemas.openxmlformats.org/drawingml/2006/main" xmlns:r="http://schemas.openxmlformats.org/officeDocument/2006/relationships">
   <c:date1904 val="0"/>
   <c:roundedCorners val="1"/>
@@ -660,7 +660,7 @@
 </c:chartSpace>
 </file>
 
-<file path=ppt/charts/chart47.xml><?xml version="1.0" encoding="utf-8"?>
+<file path=ppt/charts/chart3.xml><?xml version="1.0" encoding="utf-8"?>
 <c:chartSpace xmlns:c="http://schemas.openxmlformats.org/drawingml/2006/chart" xmlns:a="http://schemas.openxmlformats.org/drawingml/2006/main" xmlns:r="http://schemas.openxmlformats.org/officeDocument/2006/relationships">
   <c:date1904 val="0"/>
   <c:roundedCorners val="1"/>
@@ -1025,7 +1025,7 @@
 </c:chartSpace>
 </file>
 
-<file path=ppt/charts/chart48.xml><?xml version="1.0" encoding="utf-8"?>
+<file path=ppt/charts/chart4.xml><?xml version="1.0" encoding="utf-8"?>
 <c:chartSpace xmlns:c="http://schemas.openxmlformats.org/drawingml/2006/chart" xmlns:a="http://schemas.openxmlformats.org/drawingml/2006/main" xmlns:r="http://schemas.openxmlformats.org/officeDocument/2006/relationships">
   <c:date1904 val="0"/>
   <c:roundedCorners val="1"/>
@@ -3727,7 +3727,7 @@
       </p:sp>
       <p:pic>
         <p:nvPicPr>
-          <p:cNvPr id="5" name="Image 1" descr="C:\Users\Utilisateur\dev\gsw-dossiers\public\images\logo-icon.png">    </p:cNvPr>
+          <p:cNvPr id="5" name="Image 1" descr="C:\Users\Utilisateur\dev\green-solutions-web\public\images\logo-icon.png">    </p:cNvPr>
           <p:cNvPicPr>
             <a:picLocks noChangeAspect="1"/>
           </p:cNvPicPr>
@@ -3751,7 +3751,7 @@
       </p:pic>
       <p:pic>
         <p:nvPicPr>
-          <p:cNvPr id="6" name="Image 2" descr="C:\Users\Utilisateur\dev\gsw-dossiers\scripts\dossiers\drapeaux\maroc.png">    </p:cNvPr>
+          <p:cNvPr id="6" name="Image 2" descr="C:\Users\Utilisateur\dev\green-solutions-web\scripts\dossiers\drapeaux\maroc.png">    </p:cNvPr>
           <p:cNvPicPr>
             <a:picLocks noChangeAspect="1"/>
           </p:cNvPicPr>
@@ -3765,8 +3765,8 @@
         </p:blipFill>
         <p:spPr>
           <a:xfrm>
-            <a:off x="3648456" y="1389888"/>
-            <a:ext cx="1965960" cy="1310640"/>
+            <a:off x="3649991" y="1389888"/>
+            <a:ext cx="1964425" cy="1310640"/>
           </a:xfrm>
           <a:prstGeom prst="rect">
             <a:avLst/>
@@ -3781,8 +3781,8 @@
         </p:nvSpPr>
         <p:spPr>
           <a:xfrm>
-            <a:off x="3648456" y="1389888"/>
-            <a:ext cx="1965960" cy="1310640"/>
+            <a:off x="3649991" y="1389888"/>
+            <a:ext cx="1964425" cy="1310640"/>
           </a:xfrm>
           <a:prstGeom prst="rect">
             <a:avLst/>
@@ -9036,6 +9036,30 @@
             </a:r>
             <a:endParaRPr lang="en-US" sz="1350" dirty="0"/>
           </a:p>
+          <a:p>
+            <a:pPr algn="l" marL="342900" indent="-342900">
+              <a:lnSpc>
+                <a:spcPct val="122000"/>
+              </a:lnSpc>
+              <a:spcAft>
+                <a:spcPts val="1000"/>
+              </a:spcAft>
+              <a:buSzPct val="100000"/>
+              <a:buChar char="•"/>
+            </a:pPr>
+            <a:r>
+              <a:rPr lang="en-US" sz="1350" dirty="0">
+                <a:solidFill>
+                  <a:srgbClr val="33423A"/>
+                </a:solidFill>
+                <a:latin typeface="Calibri" pitchFamily="34" charset="0"/>
+                <a:ea typeface="Calibri" pitchFamily="34" charset="-122"/>
+                <a:cs typeface="Calibri" pitchFamily="34" charset="-120"/>
+              </a:rPr>
+              <a:t>Photographies : Hamza EL GHAZALI (CC BY-SA 4.0) — via Wikimedia Commons.</a:t>
+            </a:r>
+            <a:endParaRPr lang="en-US" sz="1350" dirty="0"/>
+          </a:p>
         </p:txBody>
       </p:sp>
       <p:sp>
@@ -9526,7 +9550,7 @@
       </p:sp>
       <p:pic>
         <p:nvPicPr>
-          <p:cNvPr id="6" name="Image 1" descr="C:\Users\Utilisateur\dev\gsw-dossiers\scripts\dossiers\sceau-aim-clair.png">    </p:cNvPr>
+          <p:cNvPr id="6" name="Image 1" descr="C:\Users\Utilisateur\dev\green-solutions-web\scripts\dossiers\sceau-aim-clair.png">    </p:cNvPr>
           <p:cNvPicPr>
             <a:picLocks noChangeAspect="1"/>
           </p:cNvPicPr>

--- a/public/documents/countries/maroc.pptx
+++ b/public/documents/countries/maroc.pptx
@@ -23,9 +23,10 @@
     <p:sldId id="271" r:id="rId17"/>
     <p:sldId id="272" r:id="rId18"/>
     <p:sldId id="273" r:id="rId19"/>
+    <p:sldId id="274" r:id="rId20"/>
   </p:sldIdLst>
   <p:notesMasterIdLst>
-    <p:notesMasterId r:id="rId20"/>
+    <p:notesMasterId r:id="rId21"/>
   </p:notesMasterIdLst>
   <p:sldSz cx="12192000" cy="6858000"/>
   <p:notesSz cx="6858000" cy="12192000"/>
@@ -124,7 +125,266 @@
 </p:presentation>
 </file>
 
-<file path=ppt/charts/chart1.xml><?xml version="1.0" encoding="utf-8"?>
+<file path=ppt/charts/chart71.xml><?xml version="1.0" encoding="utf-8"?>
+<c:chartSpace xmlns:c="http://schemas.openxmlformats.org/drawingml/2006/chart" xmlns:a="http://schemas.openxmlformats.org/drawingml/2006/main" xmlns:r="http://schemas.openxmlformats.org/officeDocument/2006/relationships">
+  <c:date1904 val="0"/>
+  <c:roundedCorners val="1"/>
+  <c:chart>
+    <c:autoTitleDeleted val="1"/>
+    <c:plotArea>
+      <c:layout/>
+      <c:barChart>
+        <c:barDir val="col"/>
+        <c:grouping val="clustered"/>
+        <c:varyColors val="0"/>
+        <c:ser>
+          <c:idx val="0"/>
+          <c:order val="0"/>
+          <c:tx>
+            <c:strRef>
+              <c:f>Sheet1!$B$1</c:f>
+              <c:strCache>
+                <c:ptCount val="1"/>
+                <c:pt idx="0">
+                  <c:v>Indice mondial du nombre et de la durée des sécheresses</c:v>
+                </c:pt>
+              </c:strCache>
+            </c:strRef>
+          </c:tx>
+          <c:spPr>
+            <a:solidFill>
+              <a:srgbClr val="1F5C3A"/>
+            </a:solidFill>
+            <a:effectLst/>
+          </c:spPr>
+          <c:invertIfNegative val="0"/>
+          <c:dLbls>
+            <c:numFmt formatCode="[$-40C]0" sourceLinked="0"/>
+            <c:txPr>
+              <a:bodyPr/>
+              <a:lstStyle/>
+              <a:p>
+                <a:pPr>
+                  <a:defRPr b="0" i="0" strike="noStrike" sz="1100" u="none">
+                    <a:solidFill>
+                      <a:srgbClr val="123324"/>
+                    </a:solidFill>
+                    <a:latin typeface="Calibri"/>
+                  </a:defRPr>
+                </a:pPr>
+              </a:p>
+            </c:txPr>
+            <c:showLegendKey val="0"/>
+            <c:showVal val="1"/>
+            <c:showCatName val="0"/>
+            <c:showSerName val="0"/>
+            <c:showPercent val="0"/>
+            <c:showBubbleSize val="0"/>
+            <c:showLeaderLines val="0"/>
+          </c:dLbls>
+          <c:dPt>
+            <c:idx val="0"/>
+            <c:invertIfNegative val="0"/>
+            <c:bubble3D val="0"/>
+            <c:spPr>
+              <a:solidFill>
+                <a:srgbClr val="1F5C3A"/>
+              </a:solidFill>
+              <a:effectLst/>
+            </c:spPr>
+          </c:dPt>
+          <c:dPt>
+            <c:idx val="1"/>
+            <c:invertIfNegative val="0"/>
+            <c:bubble3D val="0"/>
+            <c:spPr>
+              <a:solidFill>
+                <a:srgbClr val="E3B23C"/>
+              </a:solidFill>
+              <a:effectLst/>
+            </c:spPr>
+          </c:dPt>
+          <c:cat>
+            <c:multiLvlStrRef>
+              <c:f>Sheet1!$A$2:$A$3</c:f>
+              <c:multiLvlStrCache>
+                <c:ptCount val="2"/>
+                <c:lvl>
+                  <c:pt idx="0">
+                    <c:v>1980–1999</c:v>
+                  </c:pt>
+                  <c:pt idx="1">
+                    <c:v>Depuis 2000</c:v>
+                  </c:pt>
+                </c:lvl>
+              </c:multiLvlStrCache>
+            </c:multiLvlStrRef>
+          </c:cat>
+          <c:val>
+            <c:numRef>
+              <c:f>Sheet1!$B$2:$B$3</c:f>
+              <c:numCache>
+                <c:formatCode>General</c:formatCode>
+                <c:ptCount val="2"/>
+                <c:pt idx="0">
+                  <c:v>100</c:v>
+                </c:pt>
+                <c:pt idx="1">
+                  <c:v>129</c:v>
+                </c:pt>
+              </c:numCache>
+            </c:numRef>
+          </c:val>
+        </c:ser>
+        <c:dLbls>
+          <c:numFmt formatCode="[$-40C]0" sourceLinked="0"/>
+          <c:txPr>
+            <a:bodyPr/>
+            <a:lstStyle/>
+            <a:p>
+              <a:pPr>
+                <a:defRPr b="0" i="0" strike="noStrike" sz="1100" u="none">
+                  <a:solidFill>
+                    <a:srgbClr val="123324"/>
+                  </a:solidFill>
+                  <a:latin typeface="Calibri"/>
+                </a:defRPr>
+              </a:pPr>
+            </a:p>
+          </c:txPr>
+          <c:showLegendKey val="0"/>
+          <c:showVal val="1"/>
+          <c:showCatName val="0"/>
+          <c:showSerName val="0"/>
+          <c:showPercent val="0"/>
+          <c:showBubbleSize val="0"/>
+          <c:showLeaderLines val="0"/>
+        </c:dLbls>
+        <c:gapWidth val="150"/>
+        <c:overlap val="0"/>
+        <c:axId val="2094734554"/>
+        <c:axId val="2094734552"/>
+        <c:axId val="2094734556"/>
+      </c:barChart>
+      <c:catAx>
+        <c:axId val="2094734554"/>
+        <c:scaling>
+          <c:orientation val="minMax"/>
+        </c:scaling>
+        <c:delete val="0"/>
+        <c:axPos val="b"/>
+        <c:numFmt formatCode="General" sourceLinked="1"/>
+        <c:majorTickMark val="out"/>
+        <c:minorTickMark val="none"/>
+        <c:tickLblPos val="low"/>
+        <c:spPr>
+          <a:ln w="12700" cap="flat">
+            <a:solidFill>
+              <a:srgbClr val="888888"/>
+            </a:solidFill>
+            <a:prstDash val="solid"/>
+            <a:round/>
+          </a:ln>
+        </c:spPr>
+        <c:txPr>
+          <a:bodyPr/>
+          <a:lstStyle/>
+          <a:p>
+            <a:pPr>
+              <a:defRPr sz="1100" b="0" i="0" u="none" strike="noStrike">
+                <a:solidFill>
+                  <a:srgbClr val="6B7C72"/>
+                </a:solidFill>
+                <a:latin typeface="Calibri"/>
+              </a:defRPr>
+            </a:pPr>
+            <a:endParaRPr lang="en-US"/>
+          </a:p>
+        </c:txPr>
+        <c:crossAx val="2094734552"/>
+        <c:crosses val="autoZero"/>
+        <c:auto val="1"/>
+        <c:lblAlgn val="ctr"/>
+        <c:noMultiLvlLbl val="1"/>
+      </c:catAx>
+      <c:valAx>
+        <c:axId val="2094734552"/>
+        <c:scaling>
+          <c:orientation val="minMax"/>
+          <c:max val="140"/>
+          <c:min val="0"/>
+        </c:scaling>
+        <c:delete val="0"/>
+        <c:axPos val="l"/>
+        <c:majorGridlines>
+          <c:spPr>
+            <a:ln w="9525" cap="flat">
+              <a:solidFill>
+                <a:srgbClr val="DCE4DA"/>
+              </a:solidFill>
+              <a:prstDash val="solid"/>
+              <a:round/>
+            </a:ln>
+          </c:spPr>
+        </c:majorGridlines>
+        <c:numFmt formatCode="General" sourceLinked="0"/>
+        <c:majorTickMark val="out"/>
+        <c:minorTickMark val="none"/>
+        <c:tickLblPos val="nextTo"/>
+        <c:spPr>
+          <a:ln w="12700" cap="flat">
+            <a:solidFill>
+              <a:srgbClr val="888888"/>
+            </a:solidFill>
+            <a:prstDash val="solid"/>
+            <a:round/>
+          </a:ln>
+        </c:spPr>
+        <c:txPr>
+          <a:bodyPr/>
+          <a:lstStyle/>
+          <a:p>
+            <a:pPr>
+              <a:defRPr sz="1100" b="0" i="0" u="none" strike="noStrike">
+                <a:solidFill>
+                  <a:srgbClr val="6B7C72"/>
+                </a:solidFill>
+                <a:latin typeface="Calibri"/>
+              </a:defRPr>
+            </a:pPr>
+            <a:endParaRPr lang="en-US"/>
+          </a:p>
+        </c:txPr>
+        <c:crossAx val="2094734554"/>
+        <c:crosses val="autoZero"/>
+        <c:crossBetween val="between"/>
+        <c:majorUnit val="20"/>
+      </c:valAx>
+      <c:spPr>
+        <a:noFill/>
+        <a:ln>
+          <a:noFill/>
+        </a:ln>
+        <a:effectLst/>
+      </c:spPr>
+    </c:plotArea>
+    <c:plotVisOnly val="1"/>
+    <c:dispBlanksAs val="span"/>
+  </c:chart>
+  <c:spPr>
+    <a:noFill/>
+    <a:ln>
+      <a:noFill/>
+    </a:ln>
+    <a:effectLst/>
+  </c:spPr>
+  <c:externalData r:id="rId1">
+    <c:autoUpdate val="0"/>
+  </c:externalData>
+</c:chartSpace>
+</file>
+
+<file path=ppt/charts/chart72.xml><?xml version="1.0" encoding="utf-8"?>
 <c:chartSpace xmlns:c="http://schemas.openxmlformats.org/drawingml/2006/chart" xmlns:a="http://schemas.openxmlformats.org/drawingml/2006/main" xmlns:r="http://schemas.openxmlformats.org/officeDocument/2006/relationships">
   <c:date1904 val="0"/>
   <c:roundedCorners val="1"/>
@@ -369,7 +629,7 @@
 </c:chartSpace>
 </file>
 
-<file path=ppt/charts/chart2.xml><?xml version="1.0" encoding="utf-8"?>
+<file path=ppt/charts/chart73.xml><?xml version="1.0" encoding="utf-8"?>
 <c:chartSpace xmlns:c="http://schemas.openxmlformats.org/drawingml/2006/chart" xmlns:a="http://schemas.openxmlformats.org/drawingml/2006/main" xmlns:r="http://schemas.openxmlformats.org/officeDocument/2006/relationships">
   <c:date1904 val="0"/>
   <c:roundedCorners val="1"/>
@@ -660,7 +920,7 @@
 </c:chartSpace>
 </file>
 
-<file path=ppt/charts/chart3.xml><?xml version="1.0" encoding="utf-8"?>
+<file path=ppt/charts/chart74.xml><?xml version="1.0" encoding="utf-8"?>
 <c:chartSpace xmlns:c="http://schemas.openxmlformats.org/drawingml/2006/chart" xmlns:a="http://schemas.openxmlformats.org/drawingml/2006/main" xmlns:r="http://schemas.openxmlformats.org/officeDocument/2006/relationships">
   <c:date1904 val="0"/>
   <c:roundedCorners val="1"/>
@@ -1025,7 +1285,7 @@
 </c:chartSpace>
 </file>
 
-<file path=ppt/charts/chart4.xml><?xml version="1.0" encoding="utf-8"?>
+<file path=ppt/charts/chart75.xml><?xml version="1.0" encoding="utf-8"?>
 <c:chartSpace xmlns:c="http://schemas.openxmlformats.org/drawingml/2006/chart" xmlns:a="http://schemas.openxmlformats.org/drawingml/2006/main" xmlns:r="http://schemas.openxmlformats.org/officeDocument/2006/relationships">
   <c:date1904 val="0"/>
   <c:roundedCorners val="1"/>
@@ -2589,6 +2849,94 @@
             <a:fld id="{F7021451-1387-4CA6-816F-3879F97B5CBC}" type="slidenum">
               <a:rPr lang="en-US"/>
               <a:t>18</a:t>
+            </a:fld>
+            <a:endParaRPr lang="en-US"/>
+          </a:p>
+        </p:txBody>
+      </p:sp>
+    </p:spTree>
+    <p:extLst>
+      <p:ext uri="{BB962C8B-B14F-4D97-AF65-F5344CB8AC3E}">
+        <p14:creationId xmlns:p14="http://schemas.microsoft.com/office/powerpoint/2010/main" val="1024086991"/>
+      </p:ext>
+    </p:extLst>
+  </p:cSld>
+  <p:clrMapOvr>
+    <a:masterClrMapping/>
+  </p:clrMapOvr>
+</p:notes>
+</file>
+
+<file path=ppt/notesSlides/notesSlide19.xml><?xml version="1.0" encoding="utf-8"?>
+<p:notes xmlns:a="http://schemas.openxmlformats.org/drawingml/2006/main" xmlns:r="http://schemas.openxmlformats.org/officeDocument/2006/relationships" xmlns:p="http://schemas.openxmlformats.org/presentationml/2006/main">
+  <p:cSld>
+    <p:spTree>
+      <p:nvGrpSpPr>
+        <p:cNvPr id="1" name=""/>
+        <p:cNvGrpSpPr/>
+        <p:nvPr/>
+      </p:nvGrpSpPr>
+      <p:grpSpPr>
+        <a:xfrm>
+          <a:off x="0" y="0"/>
+          <a:ext cx="0" cy="0"/>
+          <a:chOff x="0" y="0"/>
+          <a:chExt cx="0" cy="0"/>
+        </a:xfrm>
+      </p:grpSpPr>
+      <p:sp>
+        <p:nvSpPr>
+          <p:cNvPr id="2" name="Slide Image Placeholder 1"/>
+          <p:cNvSpPr>
+            <a:spLocks noGrp="1" noRot="1" noChangeAspect="1"/>
+          </p:cNvSpPr>
+          <p:nvPr>
+            <p:ph type="sldImg"/>
+          </p:nvPr>
+        </p:nvSpPr>
+        <p:spPr/>
+      </p:sp>
+      <p:sp>
+        <p:nvSpPr>
+          <p:cNvPr id="3" name="Notes Placeholder 2"/>
+          <p:cNvSpPr>
+            <a:spLocks noGrp="1"/>
+          </p:cNvSpPr>
+          <p:nvPr>
+            <p:ph type="body" idx="1"/>
+          </p:nvPr>
+        </p:nvSpPr>
+        <p:spPr/>
+        <p:txBody>
+          <a:bodyPr/>
+          <a:lstStyle/>
+          <a:p>
+            <a:r>
+              <a:rPr lang="en-US" dirty="0"/>
+              <a:t/>
+            </a:r>
+            <a:endParaRPr lang="en-US" dirty="0"/>
+          </a:p>
+        </p:txBody>
+      </p:sp>
+      <p:sp>
+        <p:nvSpPr>
+          <p:cNvPr id="4" name="Slide Number Placeholder 3"/>
+          <p:cNvSpPr>
+            <a:spLocks noGrp="1"/>
+          </p:cNvSpPr>
+          <p:nvPr>
+            <p:ph type="sldNum" sz="quarter" idx="10"/>
+          </p:nvPr>
+        </p:nvSpPr>
+        <p:spPr/>
+        <p:txBody>
+          <a:bodyPr/>
+          <a:lstStyle/>
+          <a:p>
+            <a:fld id="{F7021451-1387-4CA6-816F-3879F97B5CBC}" type="slidenum">
+              <a:rPr lang="en-US"/>
+              <a:t>19</a:t>
             </a:fld>
             <a:endParaRPr lang="en-US"/>
           </a:p>
@@ -3727,7 +4075,7 @@
       </p:sp>
       <p:pic>
         <p:nvPicPr>
-          <p:cNvPr id="5" name="Image 1" descr="C:\Users\Utilisateur\dev\green-solutions-web\public\images\logo-icon.png">    </p:cNvPr>
+          <p:cNvPr id="5" name="Image 1" descr="/workspace/scratch/50eb4f7d8e13/green-solutions-web/public/images/logo-icon.png">    </p:cNvPr>
           <p:cNvPicPr>
             <a:picLocks noChangeAspect="1"/>
           </p:cNvPicPr>
@@ -3751,7 +4099,7 @@
       </p:pic>
       <p:pic>
         <p:nvPicPr>
-          <p:cNvPr id="6" name="Image 2" descr="C:\Users\Utilisateur\dev\green-solutions-web\scripts\dossiers\drapeaux\maroc.png">    </p:cNvPr>
+          <p:cNvPr id="6" name="Image 2" descr="/workspace/scratch/50eb4f7d8e13/green-solutions-web/scripts/dossiers/drapeaux/maroc.png">    </p:cNvPr>
           <p:cNvPicPr>
             <a:picLocks noChangeAspect="1"/>
           </p:cNvPicPr>
@@ -4101,7 +4449,7 @@
                 <a:ea typeface="Calibri" pitchFamily="34" charset="-122"/>
                 <a:cs typeface="Calibri" pitchFamily="34" charset="-120"/>
               </a:rPr>
-              <a:t>NOTRE RÉPONSE</a:t>
+              <a:t>Potentiel de rendement</a:t>
             </a:r>
             <a:endParaRPr lang="en-US" sz="1150" dirty="0"/>
           </a:p>
@@ -4140,340 +4488,42 @@
                 <a:ea typeface="Cambria" pitchFamily="34" charset="-122"/>
                 <a:cs typeface="Cambria" pitchFamily="34" charset="-120"/>
               </a:rPr>
-              <a:t>Deux technologies, deux contraintes différentes</a:t>
+              <a:t>Gain de rendement attendu par culture</a:t>
             </a:r>
             <a:endParaRPr lang="en-US" sz="3000" dirty="0"/>
           </a:p>
         </p:txBody>
       </p:sp>
-      <p:sp>
-        <p:nvSpPr>
-          <p:cNvPr id="4" name="Text 2"/>
-          <p:cNvSpPr txBox="1"/>
-          <p:nvPr/>
-        </p:nvSpPr>
-        <p:spPr>
-          <a:xfrm>
-            <a:off x="594360" y="1783080"/>
-            <a:ext cx="5227168" cy="411480"/>
-          </a:xfrm>
-          <a:prstGeom prst="rect">
-            <a:avLst/>
-          </a:prstGeom>
-          <a:noFill/>
-          <a:ln/>
-        </p:spPr>
-        <p:txBody>
-          <a:bodyPr wrap="square" lIns="0" tIns="0" rIns="0" bIns="0" rtlCol="0" anchor="ctr"/>
-          <a:lstStyle/>
-          <a:p>
-            <a:pPr algn="l" indent="0" marL="0">
-              <a:buNone/>
-            </a:pPr>
-            <a:r>
-              <a:rPr lang="en-US" sz="1600" b="1" dirty="0">
-                <a:solidFill>
-                  <a:srgbClr val="1F5C3A"/>
-                </a:solidFill>
-                <a:latin typeface="Cambria" pitchFamily="34" charset="0"/>
-                <a:ea typeface="Cambria" pitchFamily="34" charset="-122"/>
-                <a:cs typeface="Cambria" pitchFamily="34" charset="-120"/>
-              </a:rPr>
-              <a:t>EVERGREEN® — retenir l'eau</a:t>
-            </a:r>
-            <a:endParaRPr lang="en-US" sz="1600" dirty="0"/>
-          </a:p>
-        </p:txBody>
-      </p:sp>
-      <p:sp>
-        <p:nvSpPr>
-          <p:cNvPr id="5" name="Text 3"/>
-          <p:cNvSpPr txBox="1"/>
-          <p:nvPr/>
-        </p:nvSpPr>
-        <p:spPr>
-          <a:xfrm>
-            <a:off x="594360" y="2286000"/>
-            <a:ext cx="5227168" cy="2468880"/>
-          </a:xfrm>
-          <a:prstGeom prst="rect">
-            <a:avLst/>
-          </a:prstGeom>
-          <a:noFill/>
-          <a:ln/>
-        </p:spPr>
-        <p:txBody>
-          <a:bodyPr wrap="square" lIns="0" tIns="0" rIns="0" bIns="0" rtlCol="0" anchor="t"/>
-          <a:lstStyle/>
-          <a:p>
-            <a:pPr algn="l" marL="342900" indent="-342900">
-              <a:lnSpc>
-                <a:spcPct val="122000"/>
-              </a:lnSpc>
-              <a:spcAft>
-                <a:spcPts val="1000"/>
-              </a:spcAft>
-              <a:buSzPct val="100000"/>
-              <a:buChar char="•"/>
-            </a:pPr>
-            <a:r>
-              <a:rPr lang="en-US" sz="1350" dirty="0">
-                <a:solidFill>
-                  <a:srgbClr val="33423A"/>
-                </a:solidFill>
-                <a:latin typeface="Calibri" pitchFamily="34" charset="0"/>
-                <a:ea typeface="Calibri" pitchFamily="34" charset="-122"/>
-                <a:cs typeface="Calibri" pitchFamily="34" charset="-120"/>
-              </a:rPr>
-              <a:t>Hydro-rétenteur à base de potassium, placé dans la zone racinaire à la plantation ou à la reprise.</a:t>
-            </a:r>
-            <a:endParaRPr lang="en-US" sz="1350" dirty="0"/>
-          </a:p>
-          <a:p>
-            <a:pPr algn="l" marL="342900" indent="-342900">
-              <a:lnSpc>
-                <a:spcPct val="122000"/>
-              </a:lnSpc>
-              <a:spcAft>
-                <a:spcPts val="1000"/>
-              </a:spcAft>
-              <a:buSzPct val="100000"/>
-              <a:buChar char="•"/>
-            </a:pPr>
-            <a:r>
-              <a:rPr lang="en-US" sz="1350" dirty="0">
-                <a:solidFill>
-                  <a:srgbClr val="33423A"/>
-                </a:solidFill>
-                <a:latin typeface="Calibri" pitchFamily="34" charset="0"/>
-                <a:ea typeface="Calibri" pitchFamily="34" charset="-122"/>
-                <a:cs typeface="Calibri" pitchFamily="34" charset="-120"/>
-              </a:rPr>
-              <a:t>Capte l'eau de pluie ou d'irrigation et la restitue à la plante au fur et à mesure, en supprimant le stress hydrique des phases critiques.</a:t>
-            </a:r>
-            <a:endParaRPr lang="en-US" sz="1350" dirty="0"/>
-          </a:p>
-          <a:p>
-            <a:pPr algn="l" marL="342900" indent="-342900">
-              <a:lnSpc>
-                <a:spcPct val="122000"/>
-              </a:lnSpc>
-              <a:spcAft>
-                <a:spcPts val="1000"/>
-              </a:spcAft>
-              <a:buSzPct val="100000"/>
-              <a:buChar char="•"/>
-            </a:pPr>
-            <a:r>
-              <a:rPr lang="en-US" sz="1350" dirty="0">
-                <a:solidFill>
-                  <a:srgbClr val="33423A"/>
-                </a:solidFill>
-                <a:latin typeface="Calibri" pitchFamily="34" charset="0"/>
-                <a:ea typeface="Calibri" pitchFamily="34" charset="-122"/>
-                <a:cs typeface="Calibri" pitchFamily="34" charset="-120"/>
-              </a:rPr>
-              <a:t>Capacité d'absorption de l'ordre de 300 fois son poids ; durée d'effet utile de 3 à 4 ans dans le sol.</a:t>
-            </a:r>
-            <a:endParaRPr lang="en-US" sz="1350" dirty="0"/>
-          </a:p>
-          <a:p>
-            <a:pPr algn="l" marL="342900" indent="-342900">
-              <a:lnSpc>
-                <a:spcPct val="122000"/>
-              </a:lnSpc>
-              <a:spcAft>
-                <a:spcPts val="1000"/>
-              </a:spcAft>
-              <a:buSzPct val="100000"/>
-              <a:buChar char="•"/>
-            </a:pPr>
-            <a:r>
-              <a:rPr lang="en-US" sz="1350" dirty="0">
-                <a:solidFill>
-                  <a:srgbClr val="33423A"/>
-                </a:solidFill>
-                <a:latin typeface="Calibri" pitchFamily="34" charset="0"/>
-                <a:ea typeface="Calibri" pitchFamily="34" charset="-122"/>
-                <a:cs typeface="Calibri" pitchFamily="34" charset="-120"/>
-              </a:rPr>
-              <a:t>Se dégrade de 20 à 25 % par an, sans accumulation ni risque de surdosage.</a:t>
-            </a:r>
-            <a:endParaRPr lang="en-US" sz="1350" dirty="0"/>
-          </a:p>
-        </p:txBody>
-      </p:sp>
-      <p:sp>
-        <p:nvSpPr>
-          <p:cNvPr id="6" name="Text 4"/>
-          <p:cNvSpPr txBox="1"/>
-          <p:nvPr/>
-        </p:nvSpPr>
-        <p:spPr>
-          <a:xfrm>
-            <a:off x="6370168" y="1783080"/>
-            <a:ext cx="5227168" cy="411480"/>
-          </a:xfrm>
-          <a:prstGeom prst="rect">
-            <a:avLst/>
-          </a:prstGeom>
-          <a:noFill/>
-          <a:ln/>
-        </p:spPr>
-        <p:txBody>
-          <a:bodyPr wrap="square" lIns="0" tIns="0" rIns="0" bIns="0" rtlCol="0" anchor="ctr"/>
-          <a:lstStyle/>
-          <a:p>
-            <a:pPr algn="l" indent="0" marL="0">
-              <a:buNone/>
-            </a:pPr>
-            <a:r>
-              <a:rPr lang="en-US" sz="1600" b="1" dirty="0">
-                <a:solidFill>
-                  <a:srgbClr val="1F5C3A"/>
-                </a:solidFill>
-                <a:latin typeface="Cambria" pitchFamily="34" charset="0"/>
-                <a:ea typeface="Cambria" pitchFamily="34" charset="-122"/>
-                <a:cs typeface="Cambria" pitchFamily="34" charset="-120"/>
-              </a:rPr>
-              <a:t>ECOFERT® — nourrir sans épuiser</a:t>
-            </a:r>
-            <a:endParaRPr lang="en-US" sz="1600" dirty="0"/>
-          </a:p>
-        </p:txBody>
-      </p:sp>
-      <p:sp>
-        <p:nvSpPr>
-          <p:cNvPr id="7" name="Text 5"/>
-          <p:cNvSpPr txBox="1"/>
-          <p:nvPr/>
-        </p:nvSpPr>
-        <p:spPr>
-          <a:xfrm>
-            <a:off x="6370168" y="2286000"/>
-            <a:ext cx="5227168" cy="2468880"/>
-          </a:xfrm>
-          <a:prstGeom prst="rect">
-            <a:avLst/>
-          </a:prstGeom>
-          <a:noFill/>
-          <a:ln/>
-        </p:spPr>
-        <p:txBody>
-          <a:bodyPr wrap="square" lIns="0" tIns="0" rIns="0" bIns="0" rtlCol="0" anchor="t"/>
-          <a:lstStyle/>
-          <a:p>
-            <a:pPr algn="l" marL="342900" indent="-342900">
-              <a:lnSpc>
-                <a:spcPct val="122000"/>
-              </a:lnSpc>
-              <a:spcAft>
-                <a:spcPts val="1000"/>
-              </a:spcAft>
-              <a:buSzPct val="100000"/>
-              <a:buChar char="•"/>
-            </a:pPr>
-            <a:r>
-              <a:rPr lang="en-US" sz="1350" dirty="0">
-                <a:solidFill>
-                  <a:srgbClr val="33423A"/>
-                </a:solidFill>
-                <a:latin typeface="Calibri" pitchFamily="34" charset="0"/>
-                <a:ea typeface="Calibri" pitchFamily="34" charset="-122"/>
-                <a:cs typeface="Calibri" pitchFamily="34" charset="-120"/>
-              </a:rPr>
-              <a:t>Fertilisant en microdoses d'acides aminés, azote, phosphore et potassium, issu de ressources renouvelables.</a:t>
-            </a:r>
-            <a:endParaRPr lang="en-US" sz="1350" dirty="0"/>
-          </a:p>
-          <a:p>
-            <a:pPr algn="l" marL="342900" indent="-342900">
-              <a:lnSpc>
-                <a:spcPct val="122000"/>
-              </a:lnSpc>
-              <a:spcAft>
-                <a:spcPts val="1000"/>
-              </a:spcAft>
-              <a:buSzPct val="100000"/>
-              <a:buChar char="•"/>
-            </a:pPr>
-            <a:r>
-              <a:rPr lang="en-US" sz="1350" dirty="0">
-                <a:solidFill>
-                  <a:srgbClr val="33423A"/>
-                </a:solidFill>
-                <a:latin typeface="Calibri" pitchFamily="34" charset="0"/>
-                <a:ea typeface="Calibri" pitchFamily="34" charset="-122"/>
-                <a:cs typeface="Calibri" pitchFamily="34" charset="-120"/>
-              </a:rPr>
-              <a:t>Non chélatant : il n'appauvrit pas le complexe argilo-humique et n'augmente ni la salinité ni la teneur en nitrates.</a:t>
-            </a:r>
-            <a:endParaRPr lang="en-US" sz="1350" dirty="0"/>
-          </a:p>
-          <a:p>
-            <a:pPr algn="l" marL="342900" indent="-342900">
-              <a:lnSpc>
-                <a:spcPct val="122000"/>
-              </a:lnSpc>
-              <a:spcAft>
-                <a:spcPts val="1000"/>
-              </a:spcAft>
-              <a:buSzPct val="100000"/>
-              <a:buChar char="•"/>
-            </a:pPr>
-            <a:r>
-              <a:rPr lang="en-US" sz="1350" dirty="0">
-                <a:solidFill>
-                  <a:srgbClr val="33423A"/>
-                </a:solidFill>
-                <a:latin typeface="Calibri" pitchFamily="34" charset="0"/>
-                <a:ea typeface="Calibri" pitchFamily="34" charset="-122"/>
-                <a:cs typeface="Calibri" pitchFamily="34" charset="-120"/>
-              </a:rPr>
-              <a:t>Certifié SOHISCERT et EU Bio — condition d'accès aux cahiers des charges des acheteurs européens.</a:t>
-            </a:r>
-            <a:endParaRPr lang="en-US" sz="1350" dirty="0"/>
-          </a:p>
-          <a:p>
-            <a:pPr algn="l" marL="342900" indent="-342900">
-              <a:lnSpc>
-                <a:spcPct val="122000"/>
-              </a:lnSpc>
-              <a:spcAft>
-                <a:spcPts val="1000"/>
-              </a:spcAft>
-              <a:buSzPct val="100000"/>
-              <a:buChar char="•"/>
-            </a:pPr>
-            <a:r>
-              <a:rPr lang="en-US" sz="1350" dirty="0">
-                <a:solidFill>
-                  <a:srgbClr val="33423A"/>
-                </a:solidFill>
-                <a:latin typeface="Calibri" pitchFamily="34" charset="0"/>
-                <a:ea typeface="Calibri" pitchFamily="34" charset="-122"/>
-                <a:cs typeface="Calibri" pitchFamily="34" charset="-120"/>
-              </a:rPr>
-              <a:t>1 à 4 flacons de 140 ml par hectare, compatible avec les équipements de fertirrigation existants.</a:t>
-            </a:r>
-            <a:endParaRPr lang="en-US" sz="1350" dirty="0"/>
-          </a:p>
-        </p:txBody>
-      </p:sp>
-      <p:sp>
-        <p:nvSpPr>
-          <p:cNvPr id="8" name="Shape 6"/>
+      <p:graphicFrame>
+        <p:nvGraphicFramePr>
+          <p:cNvPr id="4" name="Chart 0" descr=""/>
+          <p:cNvGraphicFramePr/>
+          <p:nvPr/>
+        </p:nvGraphicFramePr>
+        <p:xfrm>
+          <a:off x="594360" y="1783080"/>
+          <a:ext cx="7360920" cy="3977640"/>
+        </p:xfrm>
+        <a:graphic xmlns:a="http://schemas.openxmlformats.org/drawingml/2006/main">
+          <a:graphicData uri="http://schemas.openxmlformats.org/drawingml/2006/chart">
+            <c:chart xmlns:c="http://schemas.openxmlformats.org/drawingml/2006/chart" r:id="rId1"/>
+          </a:graphicData>
+        </a:graphic>
+      </p:graphicFrame>
+      <p:sp>
+        <p:nvSpPr>
+          <p:cNvPr id="5" name="Shape 2"/>
           <p:cNvSpPr/>
           <p:nvPr/>
         </p:nvSpPr>
         <p:spPr>
           <a:xfrm>
-            <a:off x="594360" y="4846320"/>
-            <a:ext cx="11002975" cy="960120"/>
+            <a:off x="8275320" y="1783080"/>
+            <a:ext cx="3291840" cy="3977640"/>
           </a:xfrm>
           <a:prstGeom prst="roundRect">
             <a:avLst>
-              <a:gd name="adj" fmla="val 7619"/>
+              <a:gd name="adj" fmla="val 2778"/>
             </a:avLst>
           </a:prstGeom>
           <a:solidFill>
@@ -4489,14 +4539,53 @@
       </p:sp>
       <p:sp>
         <p:nvSpPr>
-          <p:cNvPr id="9" name="Text 7"/>
-          <p:cNvSpPr txBox="1"/>
-          <p:nvPr/>
-        </p:nvSpPr>
-        <p:spPr>
-          <a:xfrm>
-            <a:off x="822960" y="4983480"/>
-            <a:ext cx="10545775" cy="713232"/>
+          <p:cNvPr id="6" name="Text 3"/>
+          <p:cNvSpPr txBox="1"/>
+          <p:nvPr/>
+        </p:nvSpPr>
+        <p:spPr>
+          <a:xfrm>
+            <a:off x="8503920" y="2011680"/>
+            <a:ext cx="2834640" cy="457200"/>
+          </a:xfrm>
+          <a:prstGeom prst="rect">
+            <a:avLst/>
+          </a:prstGeom>
+          <a:noFill/>
+          <a:ln/>
+        </p:spPr>
+        <p:txBody>
+          <a:bodyPr wrap="square" lIns="0" tIns="0" rIns="0" bIns="0" rtlCol="0" anchor="ctr"/>
+          <a:lstStyle/>
+          <a:p>
+            <a:pPr algn="l" indent="0" marL="0">
+              <a:buNone/>
+            </a:pPr>
+            <a:r>
+              <a:rPr lang="en-US" sz="1300" b="1" dirty="0">
+                <a:solidFill>
+                  <a:srgbClr val="1F5C3A"/>
+                </a:solidFill>
+                <a:latin typeface="Cambria" pitchFamily="34" charset="0"/>
+                <a:ea typeface="Cambria" pitchFamily="34" charset="-122"/>
+                <a:cs typeface="Cambria" pitchFamily="34" charset="-120"/>
+              </a:rPr>
+              <a:t>À lire avec prudence</a:t>
+            </a:r>
+            <a:endParaRPr lang="en-US" sz="1300" dirty="0"/>
+          </a:p>
+        </p:txBody>
+      </p:sp>
+      <p:sp>
+        <p:nvSpPr>
+          <p:cNvPr id="7" name="Text 4"/>
+          <p:cNvSpPr txBox="1"/>
+          <p:nvPr/>
+        </p:nvSpPr>
+        <p:spPr>
+          <a:xfrm>
+            <a:off x="8503920" y="2560320"/>
+            <a:ext cx="2834640" cy="3017520"/>
           </a:xfrm>
           <a:prstGeom prst="rect">
             <a:avLst/>
@@ -4510,28 +4599,57 @@
           <a:p>
             <a:pPr algn="l" indent="0" marL="0">
               <a:lnSpc>
-                <a:spcPct val="118000"/>
+                <a:spcPct val="125000"/>
               </a:lnSpc>
               <a:buNone/>
             </a:pPr>
             <a:r>
-              <a:rPr lang="en-US" sz="1100" dirty="0">
-                <a:solidFill>
-                  <a:srgbClr val="6B7C72"/>
-                </a:solidFill>
-                <a:latin typeface="Calibri" pitchFamily="34" charset="0"/>
-                <a:ea typeface="Calibri" pitchFamily="34" charset="-122"/>
-                <a:cs typeface="Calibri" pitchFamily="34" charset="-120"/>
-              </a:rPr>
-              <a:t>Les deux produits se vendent séparément mais ont été conçus pour se renforcer : l'hydro-rétenteur prolonge la disponibilité de l'eau, le fertilisant valorise cette eau disponible sans dégrader le sol.</a:t>
-            </a:r>
-            <a:endParaRPr lang="en-US" sz="1100" dirty="0"/>
-          </a:p>
-        </p:txBody>
-      </p:sp>
-      <p:sp>
-        <p:nvSpPr>
-          <p:cNvPr id="10" name="Text 8"/>
+              <a:rPr lang="en-US" sz="1200" dirty="0">
+                <a:solidFill>
+                  <a:srgbClr val="33423A"/>
+                </a:solidFill>
+                <a:latin typeface="Calibri" pitchFamily="34" charset="0"/>
+                <a:ea typeface="Calibri" pitchFamily="34" charset="-122"/>
+                <a:cs typeface="Calibri" pitchFamily="34" charset="-120"/>
+              </a:rPr>
+              <a:t>Fourchettes retenues par notre calculateur de dose, pour une culture conduite normalement avec EVERGREEN® à la plantation.</a:t>
+            </a:r>
+            <a:endParaRPr lang="en-US" sz="1200" dirty="0"/>
+          </a:p>
+          <a:p>
+            <a:pPr algn="l" indent="0" marL="0">
+              <a:lnSpc>
+                <a:spcPct val="125000"/>
+              </a:lnSpc>
+              <a:buNone/>
+            </a:pPr>
+            <a:endParaRPr lang="en-US" sz="1200" dirty="0"/>
+          </a:p>
+          <a:p>
+            <a:pPr algn="l" indent="0" marL="0">
+              <a:lnSpc>
+                <a:spcPct val="125000"/>
+              </a:lnSpc>
+              <a:buNone/>
+            </a:pPr>
+            <a:r>
+              <a:rPr lang="en-US" sz="1200" dirty="0">
+                <a:solidFill>
+                  <a:srgbClr val="33423A"/>
+                </a:solidFill>
+                <a:latin typeface="Calibri" pitchFamily="34" charset="0"/>
+                <a:ea typeface="Calibri" pitchFamily="34" charset="-122"/>
+                <a:cs typeface="Calibri" pitchFamily="34" charset="-120"/>
+              </a:rPr>
+              <a:t>Le résultat réel dépend du sol, du climat et de la conduite. Pour les céréales, aucun gain n'est avancé sans essai de terrain.</a:t>
+            </a:r>
+            <a:endParaRPr lang="en-US" sz="1200" dirty="0"/>
+          </a:p>
+        </p:txBody>
+      </p:sp>
+      <p:sp>
+        <p:nvSpPr>
+          <p:cNvPr id="8" name="Text 5"/>
           <p:cNvSpPr txBox="1"/>
           <p:nvPr/>
         </p:nvSpPr>
@@ -4572,7 +4690,7 @@
       </p:sp>
       <p:sp>
         <p:nvSpPr>
-          <p:cNvPr id="11" name="Text 9"/>
+          <p:cNvPr id="9" name="Text 6"/>
           <p:cNvSpPr txBox="1"/>
           <p:nvPr/>
         </p:nvSpPr>
@@ -4676,7 +4794,7 @@
                 <a:ea typeface="Calibri" pitchFamily="34" charset="-122"/>
                 <a:cs typeface="Calibri" pitchFamily="34" charset="-120"/>
               </a:rPr>
-              <a:t>Le reste de la gamme</a:t>
+              <a:t>NOTRE RÉPONSE</a:t>
             </a:r>
             <a:endParaRPr lang="en-US" sz="1150" dirty="0"/>
           </a:p>
@@ -4715,7 +4833,7 @@
                 <a:ea typeface="Cambria" pitchFamily="34" charset="-122"/>
                 <a:cs typeface="Cambria" pitchFamily="34" charset="-120"/>
               </a:rPr>
-              <a:t>Protéger les cultures, fixer les sols</a:t>
+              <a:t>Deux technologies, deux contraintes différentes</a:t>
             </a:r>
             <a:endParaRPr lang="en-US" sz="3000" dirty="0"/>
           </a:p>
@@ -4754,7 +4872,7 @@
                 <a:ea typeface="Cambria" pitchFamily="34" charset="-122"/>
                 <a:cs typeface="Cambria" pitchFamily="34" charset="-120"/>
               </a:rPr>
-              <a:t>NAPEMA® — protéger sans résidu</a:t>
+              <a:t>EVERGREEN® — retenir l'eau</a:t>
             </a:r>
             <a:endParaRPr lang="en-US" sz="1600" dirty="0"/>
           </a:p>
@@ -4800,7 +4918,7 @@
                 <a:ea typeface="Calibri" pitchFamily="34" charset="-122"/>
                 <a:cs typeface="Calibri" pitchFamily="34" charset="-120"/>
               </a:rPr>
-              <a:t>Lutte contre maladies, parasites, champignons et ravageurs, sans molécule de synthèse.</a:t>
+              <a:t>Hydro-rétenteur à base de potassium, placé dans la zone racinaire à la plantation ou à la reprise.</a:t>
             </a:r>
             <a:endParaRPr lang="en-US" sz="1350" dirty="0"/>
           </a:p>
@@ -4824,7 +4942,7 @@
                 <a:ea typeface="Calibri" pitchFamily="34" charset="-122"/>
                 <a:cs typeface="Calibri" pitchFamily="34" charset="-120"/>
               </a:rPr>
-              <a:t>Pulvérisation foliaire et racinaire, à effet préventif comme curatif.</a:t>
+              <a:t>Capte l'eau de pluie ou d'irrigation et la restitue à la plante au fur et à mesure, en supprimant le stress hydrique des phases critiques.</a:t>
             </a:r>
             <a:endParaRPr lang="en-US" sz="1350" dirty="0"/>
           </a:p>
@@ -4848,7 +4966,7 @@
                 <a:ea typeface="Calibri" pitchFamily="34" charset="-122"/>
                 <a:cs typeface="Calibri" pitchFamily="34" charset="-120"/>
               </a:rPr>
-              <a:t>Aucun résidu dans le sol, la plante ou l'air : pollinisateurs et auxiliaires préservés.</a:t>
+              <a:t>Capacité d'absorption de l'ordre de 300 fois son poids ; durée d'effet utile de 3 à 4 ans dans le sol.</a:t>
             </a:r>
             <a:endParaRPr lang="en-US" sz="1350" dirty="0"/>
           </a:p>
@@ -4872,7 +4990,7 @@
                 <a:ea typeface="Calibri" pitchFamily="34" charset="-122"/>
                 <a:cs typeface="Calibri" pitchFamily="34" charset="-120"/>
               </a:rPr>
-              <a:t>Formulé sur mesure pour un problème précis : cochenille, HLB des agrumes, nématodes.</a:t>
+              <a:t>Se dégrade de 20 à 25 % par an, sans accumulation ni risque de surdosage.</a:t>
             </a:r>
             <a:endParaRPr lang="en-US" sz="1350" dirty="0"/>
           </a:p>
@@ -4911,7 +5029,7 @@
                 <a:ea typeface="Cambria" pitchFamily="34" charset="-122"/>
                 <a:cs typeface="Cambria" pitchFamily="34" charset="-120"/>
               </a:rPr>
-              <a:t>Paulownia ALTIFOLIA® — l'arbre des régions chaudes</a:t>
+              <a:t>ECOFERT® — nourrir sans épuiser</a:t>
             </a:r>
             <a:endParaRPr lang="en-US" sz="1600" dirty="0"/>
           </a:p>
@@ -4957,7 +5075,7 @@
                 <a:ea typeface="Calibri" pitchFamily="34" charset="-122"/>
                 <a:cs typeface="Calibri" pitchFamily="34" charset="-120"/>
               </a:rPr>
-              <a:t>13 à 15 m en six à huit ans, avec un tronc de gros diamètre.</a:t>
+              <a:t>Fertilisant en microdoses d'acides aminés, azote, phosphore et potassium, issu de ressources renouvelables.</a:t>
             </a:r>
             <a:endParaRPr lang="en-US" sz="1350" dirty="0"/>
           </a:p>
@@ -4981,7 +5099,7 @@
                 <a:ea typeface="Calibri" pitchFamily="34" charset="-122"/>
                 <a:cs typeface="Calibri" pitchFamily="34" charset="-120"/>
               </a:rPr>
-              <a:t>Associé à 100 g d'EVERGREEN® par plant, l'irrigation nécessaire diminue de 50 %.</a:t>
+              <a:t>Non chélatant : il n'appauvrit pas le complexe argilo-humique et n'augmente ni la salinité ni la teneur en nitrates.</a:t>
             </a:r>
             <a:endParaRPr lang="en-US" sz="1350" dirty="0"/>
           </a:p>
@@ -5005,7 +5123,7 @@
                 <a:ea typeface="Calibri" pitchFamily="34" charset="-122"/>
                 <a:cs typeface="Calibri" pitchFamily="34" charset="-120"/>
               </a:rPr>
-              <a:t>Résiste de −25 °C à +45 °C ; son bois ne s'enflamme qu'à partir de 426 °C.</a:t>
+              <a:t>Certifié SOHISCERT et EU Bio — condition d'accès aux cahiers des charges des acheteurs européens.</a:t>
             </a:r>
             <a:endParaRPr lang="en-US" sz="1350" dirty="0"/>
           </a:p>
@@ -5029,7 +5147,7 @@
                 <a:ea typeface="Calibri" pitchFamily="34" charset="-122"/>
                 <a:cs typeface="Calibri" pitchFamily="34" charset="-120"/>
               </a:rPr>
-              <a:t>Brise-vent, protection des sols contre l'érosion, 400 à 700 kg de miel par hectare.</a:t>
+              <a:t>1 à 4 flacons de 140 ml par hectare, compatible avec les équipements de fertirrigation existants.</a:t>
             </a:r>
             <a:endParaRPr lang="en-US" sz="1350" dirty="0"/>
           </a:p>
@@ -5098,7 +5216,7 @@
                 <a:ea typeface="Calibri" pitchFamily="34" charset="-122"/>
                 <a:cs typeface="Calibri" pitchFamily="34" charset="-120"/>
               </a:rPr>
-              <a:t>Plants livrés en pot (25 à 30 cm), certifiés indemnes de maladies et remplacés sous garantie en cas de perte. Première coupe à la fin de la sixième année, bois valorisé autour de 400 à 450 € le m³.</a:t>
+              <a:t>Les deux produits se vendent séparément mais ont été conçus pour se renforcer : l'hydro-rétenteur prolonge la disponibilité de l'eau, le fertilisant valorise cette eau disponible sans dégrader le sol.</a:t>
             </a:r>
             <a:endParaRPr lang="en-US" sz="1100" dirty="0"/>
           </a:p>
@@ -5251,7 +5369,7 @@
                 <a:ea typeface="Calibri" pitchFamily="34" charset="-122"/>
                 <a:cs typeface="Calibri" pitchFamily="34" charset="-120"/>
               </a:rPr>
-              <a:t>ORDRES DE GRANDEUR</a:t>
+              <a:t>Le reste de la gamme</a:t>
             </a:r>
             <a:endParaRPr lang="en-US" sz="1150" dirty="0"/>
           </a:p>
@@ -5290,42 +5408,340 @@
                 <a:ea typeface="Cambria" pitchFamily="34" charset="-122"/>
                 <a:cs typeface="Cambria" pitchFamily="34" charset="-120"/>
               </a:rPr>
-              <a:t>Économie d'eau attendue selon le mode d'irrigation</a:t>
+              <a:t>Protéger les cultures, fixer les sols</a:t>
             </a:r>
             <a:endParaRPr lang="en-US" sz="3000" dirty="0"/>
           </a:p>
         </p:txBody>
       </p:sp>
-      <p:graphicFrame>
-        <p:nvGraphicFramePr>
-          <p:cNvPr id="4" name="Chart 0" descr=""/>
-          <p:cNvGraphicFramePr/>
-          <p:nvPr/>
-        </p:nvGraphicFramePr>
-        <p:xfrm>
-          <a:off x="594360" y="1783080"/>
-          <a:ext cx="7360920" cy="3977640"/>
-        </p:xfrm>
-        <a:graphic xmlns:a="http://schemas.openxmlformats.org/drawingml/2006/main">
-          <a:graphicData uri="http://schemas.openxmlformats.org/drawingml/2006/chart">
-            <c:chart xmlns:c="http://schemas.openxmlformats.org/drawingml/2006/chart" r:id="rId1"/>
-          </a:graphicData>
-        </a:graphic>
-      </p:graphicFrame>
-      <p:sp>
-        <p:nvSpPr>
-          <p:cNvPr id="5" name="Shape 2"/>
+      <p:sp>
+        <p:nvSpPr>
+          <p:cNvPr id="4" name="Text 2"/>
+          <p:cNvSpPr txBox="1"/>
+          <p:nvPr/>
+        </p:nvSpPr>
+        <p:spPr>
+          <a:xfrm>
+            <a:off x="594360" y="1783080"/>
+            <a:ext cx="5227168" cy="411480"/>
+          </a:xfrm>
+          <a:prstGeom prst="rect">
+            <a:avLst/>
+          </a:prstGeom>
+          <a:noFill/>
+          <a:ln/>
+        </p:spPr>
+        <p:txBody>
+          <a:bodyPr wrap="square" lIns="0" tIns="0" rIns="0" bIns="0" rtlCol="0" anchor="ctr"/>
+          <a:lstStyle/>
+          <a:p>
+            <a:pPr algn="l" indent="0" marL="0">
+              <a:buNone/>
+            </a:pPr>
+            <a:r>
+              <a:rPr lang="en-US" sz="1600" b="1" dirty="0">
+                <a:solidFill>
+                  <a:srgbClr val="1F5C3A"/>
+                </a:solidFill>
+                <a:latin typeface="Cambria" pitchFamily="34" charset="0"/>
+                <a:ea typeface="Cambria" pitchFamily="34" charset="-122"/>
+                <a:cs typeface="Cambria" pitchFamily="34" charset="-120"/>
+              </a:rPr>
+              <a:t>NAPEMA® — protéger sans résidu</a:t>
+            </a:r>
+            <a:endParaRPr lang="en-US" sz="1600" dirty="0"/>
+          </a:p>
+        </p:txBody>
+      </p:sp>
+      <p:sp>
+        <p:nvSpPr>
+          <p:cNvPr id="5" name="Text 3"/>
+          <p:cNvSpPr txBox="1"/>
+          <p:nvPr/>
+        </p:nvSpPr>
+        <p:spPr>
+          <a:xfrm>
+            <a:off x="594360" y="2286000"/>
+            <a:ext cx="5227168" cy="2468880"/>
+          </a:xfrm>
+          <a:prstGeom prst="rect">
+            <a:avLst/>
+          </a:prstGeom>
+          <a:noFill/>
+          <a:ln/>
+        </p:spPr>
+        <p:txBody>
+          <a:bodyPr wrap="square" lIns="0" tIns="0" rIns="0" bIns="0" rtlCol="0" anchor="t"/>
+          <a:lstStyle/>
+          <a:p>
+            <a:pPr algn="l" marL="342900" indent="-342900">
+              <a:lnSpc>
+                <a:spcPct val="122000"/>
+              </a:lnSpc>
+              <a:spcAft>
+                <a:spcPts val="1000"/>
+              </a:spcAft>
+              <a:buSzPct val="100000"/>
+              <a:buChar char="•"/>
+            </a:pPr>
+            <a:r>
+              <a:rPr lang="en-US" sz="1350" dirty="0">
+                <a:solidFill>
+                  <a:srgbClr val="33423A"/>
+                </a:solidFill>
+                <a:latin typeface="Calibri" pitchFamily="34" charset="0"/>
+                <a:ea typeface="Calibri" pitchFamily="34" charset="-122"/>
+                <a:cs typeface="Calibri" pitchFamily="34" charset="-120"/>
+              </a:rPr>
+              <a:t>Lutte contre maladies, parasites, champignons et ravageurs, sans molécule de synthèse.</a:t>
+            </a:r>
+            <a:endParaRPr lang="en-US" sz="1350" dirty="0"/>
+          </a:p>
+          <a:p>
+            <a:pPr algn="l" marL="342900" indent="-342900">
+              <a:lnSpc>
+                <a:spcPct val="122000"/>
+              </a:lnSpc>
+              <a:spcAft>
+                <a:spcPts val="1000"/>
+              </a:spcAft>
+              <a:buSzPct val="100000"/>
+              <a:buChar char="•"/>
+            </a:pPr>
+            <a:r>
+              <a:rPr lang="en-US" sz="1350" dirty="0">
+                <a:solidFill>
+                  <a:srgbClr val="33423A"/>
+                </a:solidFill>
+                <a:latin typeface="Calibri" pitchFamily="34" charset="0"/>
+                <a:ea typeface="Calibri" pitchFamily="34" charset="-122"/>
+                <a:cs typeface="Calibri" pitchFamily="34" charset="-120"/>
+              </a:rPr>
+              <a:t>Pulvérisation foliaire et racinaire, à effet préventif comme curatif.</a:t>
+            </a:r>
+            <a:endParaRPr lang="en-US" sz="1350" dirty="0"/>
+          </a:p>
+          <a:p>
+            <a:pPr algn="l" marL="342900" indent="-342900">
+              <a:lnSpc>
+                <a:spcPct val="122000"/>
+              </a:lnSpc>
+              <a:spcAft>
+                <a:spcPts val="1000"/>
+              </a:spcAft>
+              <a:buSzPct val="100000"/>
+              <a:buChar char="•"/>
+            </a:pPr>
+            <a:r>
+              <a:rPr lang="en-US" sz="1350" dirty="0">
+                <a:solidFill>
+                  <a:srgbClr val="33423A"/>
+                </a:solidFill>
+                <a:latin typeface="Calibri" pitchFamily="34" charset="0"/>
+                <a:ea typeface="Calibri" pitchFamily="34" charset="-122"/>
+                <a:cs typeface="Calibri" pitchFamily="34" charset="-120"/>
+              </a:rPr>
+              <a:t>Aucun résidu dans le sol, la plante ou l'air : pollinisateurs et auxiliaires préservés.</a:t>
+            </a:r>
+            <a:endParaRPr lang="en-US" sz="1350" dirty="0"/>
+          </a:p>
+          <a:p>
+            <a:pPr algn="l" marL="342900" indent="-342900">
+              <a:lnSpc>
+                <a:spcPct val="122000"/>
+              </a:lnSpc>
+              <a:spcAft>
+                <a:spcPts val="1000"/>
+              </a:spcAft>
+              <a:buSzPct val="100000"/>
+              <a:buChar char="•"/>
+            </a:pPr>
+            <a:r>
+              <a:rPr lang="en-US" sz="1350" dirty="0">
+                <a:solidFill>
+                  <a:srgbClr val="33423A"/>
+                </a:solidFill>
+                <a:latin typeface="Calibri" pitchFamily="34" charset="0"/>
+                <a:ea typeface="Calibri" pitchFamily="34" charset="-122"/>
+                <a:cs typeface="Calibri" pitchFamily="34" charset="-120"/>
+              </a:rPr>
+              <a:t>Formulé sur mesure pour un problème précis : cochenille, HLB des agrumes, nématodes.</a:t>
+            </a:r>
+            <a:endParaRPr lang="en-US" sz="1350" dirty="0"/>
+          </a:p>
+        </p:txBody>
+      </p:sp>
+      <p:sp>
+        <p:nvSpPr>
+          <p:cNvPr id="6" name="Text 4"/>
+          <p:cNvSpPr txBox="1"/>
+          <p:nvPr/>
+        </p:nvSpPr>
+        <p:spPr>
+          <a:xfrm>
+            <a:off x="6370168" y="1783080"/>
+            <a:ext cx="5227168" cy="411480"/>
+          </a:xfrm>
+          <a:prstGeom prst="rect">
+            <a:avLst/>
+          </a:prstGeom>
+          <a:noFill/>
+          <a:ln/>
+        </p:spPr>
+        <p:txBody>
+          <a:bodyPr wrap="square" lIns="0" tIns="0" rIns="0" bIns="0" rtlCol="0" anchor="ctr"/>
+          <a:lstStyle/>
+          <a:p>
+            <a:pPr algn="l" indent="0" marL="0">
+              <a:buNone/>
+            </a:pPr>
+            <a:r>
+              <a:rPr lang="en-US" sz="1600" b="1" dirty="0">
+                <a:solidFill>
+                  <a:srgbClr val="1F5C3A"/>
+                </a:solidFill>
+                <a:latin typeface="Cambria" pitchFamily="34" charset="0"/>
+                <a:ea typeface="Cambria" pitchFamily="34" charset="-122"/>
+                <a:cs typeface="Cambria" pitchFamily="34" charset="-120"/>
+              </a:rPr>
+              <a:t>Paulownia ALTIFOLIA® — l'arbre des régions chaudes</a:t>
+            </a:r>
+            <a:endParaRPr lang="en-US" sz="1600" dirty="0"/>
+          </a:p>
+        </p:txBody>
+      </p:sp>
+      <p:sp>
+        <p:nvSpPr>
+          <p:cNvPr id="7" name="Text 5"/>
+          <p:cNvSpPr txBox="1"/>
+          <p:nvPr/>
+        </p:nvSpPr>
+        <p:spPr>
+          <a:xfrm>
+            <a:off x="6370168" y="2286000"/>
+            <a:ext cx="5227168" cy="2468880"/>
+          </a:xfrm>
+          <a:prstGeom prst="rect">
+            <a:avLst/>
+          </a:prstGeom>
+          <a:noFill/>
+          <a:ln/>
+        </p:spPr>
+        <p:txBody>
+          <a:bodyPr wrap="square" lIns="0" tIns="0" rIns="0" bIns="0" rtlCol="0" anchor="t"/>
+          <a:lstStyle/>
+          <a:p>
+            <a:pPr algn="l" marL="342900" indent="-342900">
+              <a:lnSpc>
+                <a:spcPct val="122000"/>
+              </a:lnSpc>
+              <a:spcAft>
+                <a:spcPts val="1000"/>
+              </a:spcAft>
+              <a:buSzPct val="100000"/>
+              <a:buChar char="•"/>
+            </a:pPr>
+            <a:r>
+              <a:rPr lang="en-US" sz="1350" dirty="0">
+                <a:solidFill>
+                  <a:srgbClr val="33423A"/>
+                </a:solidFill>
+                <a:latin typeface="Calibri" pitchFamily="34" charset="0"/>
+                <a:ea typeface="Calibri" pitchFamily="34" charset="-122"/>
+                <a:cs typeface="Calibri" pitchFamily="34" charset="-120"/>
+              </a:rPr>
+              <a:t>13 à 15 m en six à huit ans, avec un tronc de gros diamètre.</a:t>
+            </a:r>
+            <a:endParaRPr lang="en-US" sz="1350" dirty="0"/>
+          </a:p>
+          <a:p>
+            <a:pPr algn="l" marL="342900" indent="-342900">
+              <a:lnSpc>
+                <a:spcPct val="122000"/>
+              </a:lnSpc>
+              <a:spcAft>
+                <a:spcPts val="1000"/>
+              </a:spcAft>
+              <a:buSzPct val="100000"/>
+              <a:buChar char="•"/>
+            </a:pPr>
+            <a:r>
+              <a:rPr lang="en-US" sz="1350" dirty="0">
+                <a:solidFill>
+                  <a:srgbClr val="33423A"/>
+                </a:solidFill>
+                <a:latin typeface="Calibri" pitchFamily="34" charset="0"/>
+                <a:ea typeface="Calibri" pitchFamily="34" charset="-122"/>
+                <a:cs typeface="Calibri" pitchFamily="34" charset="-120"/>
+              </a:rPr>
+              <a:t>Associé à 100 g d'EVERGREEN® par plant, l'irrigation nécessaire diminue de 50 %.</a:t>
+            </a:r>
+            <a:endParaRPr lang="en-US" sz="1350" dirty="0"/>
+          </a:p>
+          <a:p>
+            <a:pPr algn="l" marL="342900" indent="-342900">
+              <a:lnSpc>
+                <a:spcPct val="122000"/>
+              </a:lnSpc>
+              <a:spcAft>
+                <a:spcPts val="1000"/>
+              </a:spcAft>
+              <a:buSzPct val="100000"/>
+              <a:buChar char="•"/>
+            </a:pPr>
+            <a:r>
+              <a:rPr lang="en-US" sz="1350" dirty="0">
+                <a:solidFill>
+                  <a:srgbClr val="33423A"/>
+                </a:solidFill>
+                <a:latin typeface="Calibri" pitchFamily="34" charset="0"/>
+                <a:ea typeface="Calibri" pitchFamily="34" charset="-122"/>
+                <a:cs typeface="Calibri" pitchFamily="34" charset="-120"/>
+              </a:rPr>
+              <a:t>Résiste de −25 °C à +45 °C ; son bois ne s'enflamme qu'à partir de 426 °C.</a:t>
+            </a:r>
+            <a:endParaRPr lang="en-US" sz="1350" dirty="0"/>
+          </a:p>
+          <a:p>
+            <a:pPr algn="l" marL="342900" indent="-342900">
+              <a:lnSpc>
+                <a:spcPct val="122000"/>
+              </a:lnSpc>
+              <a:spcAft>
+                <a:spcPts val="1000"/>
+              </a:spcAft>
+              <a:buSzPct val="100000"/>
+              <a:buChar char="•"/>
+            </a:pPr>
+            <a:r>
+              <a:rPr lang="en-US" sz="1350" dirty="0">
+                <a:solidFill>
+                  <a:srgbClr val="33423A"/>
+                </a:solidFill>
+                <a:latin typeface="Calibri" pitchFamily="34" charset="0"/>
+                <a:ea typeface="Calibri" pitchFamily="34" charset="-122"/>
+                <a:cs typeface="Calibri" pitchFamily="34" charset="-120"/>
+              </a:rPr>
+              <a:t>Brise-vent, protection des sols contre l'érosion, 400 à 700 kg de miel par hectare.</a:t>
+            </a:r>
+            <a:endParaRPr lang="en-US" sz="1350" dirty="0"/>
+          </a:p>
+        </p:txBody>
+      </p:sp>
+      <p:sp>
+        <p:nvSpPr>
+          <p:cNvPr id="8" name="Shape 6"/>
           <p:cNvSpPr/>
           <p:nvPr/>
         </p:nvSpPr>
         <p:spPr>
           <a:xfrm>
-            <a:off x="8275320" y="1783080"/>
-            <a:ext cx="3291840" cy="3977640"/>
+            <a:off x="594360" y="4846320"/>
+            <a:ext cx="11002975" cy="960120"/>
           </a:xfrm>
           <a:prstGeom prst="roundRect">
             <a:avLst>
-              <a:gd name="adj" fmla="val 2778"/>
+              <a:gd name="adj" fmla="val 7619"/>
             </a:avLst>
           </a:prstGeom>
           <a:solidFill>
@@ -5341,53 +5757,14 @@
       </p:sp>
       <p:sp>
         <p:nvSpPr>
-          <p:cNvPr id="6" name="Text 3"/>
-          <p:cNvSpPr txBox="1"/>
-          <p:nvPr/>
-        </p:nvSpPr>
-        <p:spPr>
-          <a:xfrm>
-            <a:off x="8503920" y="2011680"/>
-            <a:ext cx="2834640" cy="457200"/>
-          </a:xfrm>
-          <a:prstGeom prst="rect">
-            <a:avLst/>
-          </a:prstGeom>
-          <a:noFill/>
-          <a:ln/>
-        </p:spPr>
-        <p:txBody>
-          <a:bodyPr wrap="square" lIns="0" tIns="0" rIns="0" bIns="0" rtlCol="0" anchor="ctr"/>
-          <a:lstStyle/>
-          <a:p>
-            <a:pPr algn="l" indent="0" marL="0">
-              <a:buNone/>
-            </a:pPr>
-            <a:r>
-              <a:rPr lang="en-US" sz="1300" b="1" dirty="0">
-                <a:solidFill>
-                  <a:srgbClr val="1F5C3A"/>
-                </a:solidFill>
-                <a:latin typeface="Cambria" pitchFamily="34" charset="0"/>
-                <a:ea typeface="Cambria" pitchFamily="34" charset="-122"/>
-                <a:cs typeface="Cambria" pitchFamily="34" charset="-120"/>
-              </a:rPr>
-              <a:t>À lire avec prudence</a:t>
-            </a:r>
-            <a:endParaRPr lang="en-US" sz="1300" dirty="0"/>
-          </a:p>
-        </p:txBody>
-      </p:sp>
-      <p:sp>
-        <p:nvSpPr>
-          <p:cNvPr id="7" name="Text 4"/>
-          <p:cNvSpPr txBox="1"/>
-          <p:nvPr/>
-        </p:nvSpPr>
-        <p:spPr>
-          <a:xfrm>
-            <a:off x="8503920" y="2560320"/>
-            <a:ext cx="2834640" cy="3017520"/>
+          <p:cNvPr id="9" name="Text 7"/>
+          <p:cNvSpPr txBox="1"/>
+          <p:nvPr/>
+        </p:nvSpPr>
+        <p:spPr>
+          <a:xfrm>
+            <a:off x="822960" y="4983480"/>
+            <a:ext cx="10545775" cy="713232"/>
           </a:xfrm>
           <a:prstGeom prst="rect">
             <a:avLst/>
@@ -5401,57 +5778,28 @@
           <a:p>
             <a:pPr algn="l" indent="0" marL="0">
               <a:lnSpc>
-                <a:spcPct val="125000"/>
+                <a:spcPct val="118000"/>
               </a:lnSpc>
               <a:buNone/>
             </a:pPr>
             <a:r>
-              <a:rPr lang="en-US" sz="1200" dirty="0">
-                <a:solidFill>
-                  <a:srgbClr val="33423A"/>
-                </a:solidFill>
-                <a:latin typeface="Calibri" pitchFamily="34" charset="0"/>
-                <a:ea typeface="Calibri" pitchFamily="34" charset="-122"/>
-                <a:cs typeface="Calibri" pitchFamily="34" charset="-120"/>
-              </a:rPr>
-              <a:t>Ces fourchettes sont indicatives et fondées sur les gains documentés de nos hydro-rétenteurs.</a:t>
-            </a:r>
-            <a:endParaRPr lang="en-US" sz="1200" dirty="0"/>
-          </a:p>
-          <a:p>
-            <a:pPr algn="l" indent="0" marL="0">
-              <a:lnSpc>
-                <a:spcPct val="125000"/>
-              </a:lnSpc>
-              <a:buNone/>
-            </a:pPr>
-            <a:endParaRPr lang="en-US" sz="1200" dirty="0"/>
-          </a:p>
-          <a:p>
-            <a:pPr algn="l" indent="0" marL="0">
-              <a:lnSpc>
-                <a:spcPct val="125000"/>
-              </a:lnSpc>
-              <a:buNone/>
-            </a:pPr>
-            <a:r>
-              <a:rPr lang="en-US" sz="1200" dirty="0">
-                <a:solidFill>
-                  <a:srgbClr val="33423A"/>
-                </a:solidFill>
-                <a:latin typeface="Calibri" pitchFamily="34" charset="0"/>
-                <a:ea typeface="Calibri" pitchFamily="34" charset="-122"/>
-                <a:cs typeface="Calibri" pitchFamily="34" charset="-120"/>
-              </a:rPr>
-              <a:t>Le résultat réel dépend du sol, du climat et de la culture. Ces chiffres donnent un ordre de grandeur : ils ne constituent en aucun cas une valeur garantie, contractuelle ou absolue.</a:t>
-            </a:r>
-            <a:endParaRPr lang="en-US" sz="1200" dirty="0"/>
-          </a:p>
-        </p:txBody>
-      </p:sp>
-      <p:sp>
-        <p:nvSpPr>
-          <p:cNvPr id="8" name="Text 5"/>
+              <a:rPr lang="en-US" sz="1100" dirty="0">
+                <a:solidFill>
+                  <a:srgbClr val="6B7C72"/>
+                </a:solidFill>
+                <a:latin typeface="Calibri" pitchFamily="34" charset="0"/>
+                <a:ea typeface="Calibri" pitchFamily="34" charset="-122"/>
+                <a:cs typeface="Calibri" pitchFamily="34" charset="-120"/>
+              </a:rPr>
+              <a:t>Plants livrés en pot (25 à 30 cm), certifiés indemnes de maladies et remplacés sous garantie en cas de perte. Première coupe à la fin de la sixième année, bois valorisé autour de 400 à 450 € le m³.</a:t>
+            </a:r>
+            <a:endParaRPr lang="en-US" sz="1100" dirty="0"/>
+          </a:p>
+        </p:txBody>
+      </p:sp>
+      <p:sp>
+        <p:nvSpPr>
+          <p:cNvPr id="10" name="Text 8"/>
           <p:cNvSpPr txBox="1"/>
           <p:nvPr/>
         </p:nvSpPr>
@@ -5492,7 +5840,7 @@
       </p:sp>
       <p:sp>
         <p:nvSpPr>
-          <p:cNvPr id="9" name="Text 6"/>
+          <p:cNvPr id="11" name="Text 9"/>
           <p:cNvSpPr txBox="1"/>
           <p:nvPr/>
         </p:nvSpPr>
@@ -5596,7 +5944,7 @@
                 <a:ea typeface="Calibri" pitchFamily="34" charset="-122"/>
                 <a:cs typeface="Calibri" pitchFamily="34" charset="-120"/>
               </a:rPr>
-              <a:t>TROIS TERRAINS PRIORITAIRES</a:t>
+              <a:t>ORDRES DE GRANDEUR</a:t>
             </a:r>
             <a:endParaRPr lang="en-US" sz="1150" dirty="0"/>
           </a:p>
@@ -5635,26 +5983,42 @@
                 <a:ea typeface="Cambria" pitchFamily="34" charset="-122"/>
                 <a:cs typeface="Cambria" pitchFamily="34" charset="-120"/>
               </a:rPr>
-              <a:t>Où engager les premiers essais</a:t>
+              <a:t>Économie d'eau attendue selon le mode d'irrigation</a:t>
             </a:r>
             <a:endParaRPr lang="en-US" sz="3000" dirty="0"/>
           </a:p>
         </p:txBody>
       </p:sp>
-      <p:sp>
-        <p:nvSpPr>
-          <p:cNvPr id="4" name="Shape 2"/>
+      <p:graphicFrame>
+        <p:nvGraphicFramePr>
+          <p:cNvPr id="4" name="Chart 0" descr=""/>
+          <p:cNvGraphicFramePr/>
+          <p:nvPr/>
+        </p:nvGraphicFramePr>
+        <p:xfrm>
+          <a:off x="594360" y="1783080"/>
+          <a:ext cx="7360920" cy="3977640"/>
+        </p:xfrm>
+        <a:graphic xmlns:a="http://schemas.openxmlformats.org/drawingml/2006/main">
+          <a:graphicData uri="http://schemas.openxmlformats.org/drawingml/2006/chart">
+            <c:chart xmlns:c="http://schemas.openxmlformats.org/drawingml/2006/chart" r:id="rId1"/>
+          </a:graphicData>
+        </a:graphic>
+      </p:graphicFrame>
+      <p:sp>
+        <p:nvSpPr>
+          <p:cNvPr id="5" name="Shape 2"/>
           <p:cNvSpPr/>
           <p:nvPr/>
         </p:nvSpPr>
         <p:spPr>
           <a:xfrm>
-            <a:off x="594360" y="1783080"/>
-            <a:ext cx="3472586" cy="4069080"/>
+            <a:off x="8275320" y="1783080"/>
+            <a:ext cx="3291840" cy="3977640"/>
           </a:xfrm>
           <a:prstGeom prst="roundRect">
             <a:avLst>
-              <a:gd name="adj" fmla="val 2633"/>
+              <a:gd name="adj" fmla="val 2778"/>
             </a:avLst>
           </a:prstGeom>
           <a:solidFill>
@@ -5668,30 +6032,6 @@
           </a:ln>
         </p:spPr>
       </p:sp>
-      <p:pic>
-        <p:nvPicPr>
-          <p:cNvPr id="5" name="Image 0" descr="preencoded.png">    </p:cNvPr>
-          <p:cNvPicPr>
-            <a:picLocks noChangeAspect="1"/>
-          </p:cNvPicPr>
-          <p:nvPr/>
-        </p:nvPicPr>
-        <p:blipFill>
-          <a:blip r:embed="rId1"/>
-          <a:stretch>
-            <a:fillRect/>
-          </a:stretch>
-        </p:blipFill>
-        <p:spPr>
-          <a:xfrm>
-            <a:off x="594360" y="1783080"/>
-            <a:ext cx="3472586" cy="1691640"/>
-          </a:xfrm>
-          <a:prstGeom prst="rect">
-            <a:avLst/>
-          </a:prstGeom>
-        </p:spPr>
-      </p:pic>
       <p:sp>
         <p:nvSpPr>
           <p:cNvPr id="6" name="Text 3"/>
@@ -5700,8 +6040,8 @@
         </p:nvSpPr>
         <p:spPr>
           <a:xfrm>
-            <a:off x="795528" y="3639312"/>
-            <a:ext cx="3070250" cy="384048"/>
+            <a:off x="8503920" y="2011680"/>
+            <a:ext cx="2834640" cy="457200"/>
           </a:xfrm>
           <a:prstGeom prst="rect">
             <a:avLst/>
@@ -5717,7 +6057,7 @@
               <a:buNone/>
             </a:pPr>
             <a:r>
-              <a:rPr lang="en-US" sz="1500" b="1" dirty="0">
+              <a:rPr lang="en-US" sz="1300" b="1" dirty="0">
                 <a:solidFill>
                   <a:srgbClr val="1F5C3A"/>
                 </a:solidFill>
@@ -5725,9 +6065,9 @@
                 <a:ea typeface="Cambria" pitchFamily="34" charset="-122"/>
                 <a:cs typeface="Cambria" pitchFamily="34" charset="-120"/>
               </a:rPr>
-              <a:t>Souss-Massa</a:t>
-            </a:r>
-            <a:endParaRPr lang="en-US" sz="1500" dirty="0"/>
+              <a:t>À lire avec prudence</a:t>
+            </a:r>
+            <a:endParaRPr lang="en-US" sz="1300" dirty="0"/>
           </a:p>
         </p:txBody>
       </p:sp>
@@ -5739,580 +6079,72 @@
         </p:nvSpPr>
         <p:spPr>
           <a:xfrm>
-            <a:off x="795528" y="4041648"/>
-            <a:ext cx="3070250" cy="329184"/>
-          </a:xfrm>
-          <a:prstGeom prst="rect">
-            <a:avLst/>
-          </a:prstGeom>
-          <a:noFill/>
-          <a:ln/>
-        </p:spPr>
-        <p:txBody>
-          <a:bodyPr wrap="square" lIns="0" tIns="0" rIns="0" bIns="0" rtlCol="0" anchor="ctr"/>
+            <a:off x="8503920" y="2560320"/>
+            <a:ext cx="2834640" cy="3017520"/>
+          </a:xfrm>
+          <a:prstGeom prst="rect">
+            <a:avLst/>
+          </a:prstGeom>
+          <a:noFill/>
+          <a:ln/>
+        </p:spPr>
+        <p:txBody>
+          <a:bodyPr wrap="square" lIns="0" tIns="0" rIns="0" bIns="0" rtlCol="0" anchor="t"/>
           <a:lstStyle/>
           <a:p>
             <a:pPr algn="l" indent="0" marL="0">
-              <a:buNone/>
-            </a:pPr>
-            <a:r>
-              <a:rPr lang="en-US" sz="1250" b="1" dirty="0">
-                <a:solidFill>
-                  <a:srgbClr val="A97C12"/>
-                </a:solidFill>
-                <a:latin typeface="Calibri" pitchFamily="34" charset="0"/>
-                <a:ea typeface="Calibri" pitchFamily="34" charset="-122"/>
-                <a:cs typeface="Calibri" pitchFamily="34" charset="-120"/>
-              </a:rPr>
-              <a:t>Agrumes et primeurs</a:t>
-            </a:r>
-            <a:endParaRPr lang="en-US" sz="1250" dirty="0"/>
+              <a:lnSpc>
+                <a:spcPct val="125000"/>
+              </a:lnSpc>
+              <a:buNone/>
+            </a:pPr>
+            <a:r>
+              <a:rPr lang="en-US" sz="1200" dirty="0">
+                <a:solidFill>
+                  <a:srgbClr val="33423A"/>
+                </a:solidFill>
+                <a:latin typeface="Calibri" pitchFamily="34" charset="0"/>
+                <a:ea typeface="Calibri" pitchFamily="34" charset="-122"/>
+                <a:cs typeface="Calibri" pitchFamily="34" charset="-120"/>
+              </a:rPr>
+              <a:t>Ces fourchettes sont indicatives et fondées sur les gains documentés de nos hydro-rétenteurs.</a:t>
+            </a:r>
+            <a:endParaRPr lang="en-US" sz="1200" dirty="0"/>
+          </a:p>
+          <a:p>
+            <a:pPr algn="l" indent="0" marL="0">
+              <a:lnSpc>
+                <a:spcPct val="125000"/>
+              </a:lnSpc>
+              <a:buNone/>
+            </a:pPr>
+            <a:endParaRPr lang="en-US" sz="1200" dirty="0"/>
+          </a:p>
+          <a:p>
+            <a:pPr algn="l" indent="0" marL="0">
+              <a:lnSpc>
+                <a:spcPct val="125000"/>
+              </a:lnSpc>
+              <a:buNone/>
+            </a:pPr>
+            <a:r>
+              <a:rPr lang="en-US" sz="1200" dirty="0">
+                <a:solidFill>
+                  <a:srgbClr val="33423A"/>
+                </a:solidFill>
+                <a:latin typeface="Calibri" pitchFamily="34" charset="0"/>
+                <a:ea typeface="Calibri" pitchFamily="34" charset="-122"/>
+                <a:cs typeface="Calibri" pitchFamily="34" charset="-120"/>
+              </a:rPr>
+              <a:t>Le résultat réel dépend du sol, du climat et de la culture. Ces chiffres donnent un ordre de grandeur : ils ne constituent en aucun cas une valeur garantie, contractuelle ou absolue.</a:t>
+            </a:r>
+            <a:endParaRPr lang="en-US" sz="1200" dirty="0"/>
           </a:p>
         </p:txBody>
       </p:sp>
       <p:sp>
         <p:nvSpPr>
           <p:cNvPr id="8" name="Text 5"/>
-          <p:cNvSpPr txBox="1"/>
-          <p:nvPr/>
-        </p:nvSpPr>
-        <p:spPr>
-          <a:xfrm>
-            <a:off x="795528" y="4407408"/>
-            <a:ext cx="3070250" cy="1280160"/>
-          </a:xfrm>
-          <a:prstGeom prst="rect">
-            <a:avLst/>
-          </a:prstGeom>
-          <a:noFill/>
-          <a:ln/>
-        </p:spPr>
-        <p:txBody>
-          <a:bodyPr wrap="square" lIns="0" tIns="0" rIns="0" bIns="0" rtlCol="0" anchor="t"/>
-          <a:lstStyle/>
-          <a:p>
-            <a:pPr algn="l" marL="342900" indent="-342900">
-              <a:lnSpc>
-                <a:spcPct val="116000"/>
-              </a:lnSpc>
-              <a:spcAft>
-                <a:spcPts val="700"/>
-              </a:spcAft>
-              <a:buSzPct val="100000"/>
-              <a:buChar char="•"/>
-            </a:pPr>
-            <a:r>
-              <a:rPr lang="en-US" sz="1150" dirty="0">
-                <a:solidFill>
-                  <a:srgbClr val="33423A"/>
-                </a:solidFill>
-                <a:latin typeface="Calibri" pitchFamily="34" charset="0"/>
-                <a:ea typeface="Calibri" pitchFamily="34" charset="-122"/>
-                <a:cs typeface="Calibri" pitchFamily="34" charset="-120"/>
-              </a:rPr>
-              <a:t>Cœur de la filière d'exportation, déjà largement converti au goutte-à-goutte.</a:t>
-            </a:r>
-            <a:endParaRPr lang="en-US" sz="1150" dirty="0"/>
-          </a:p>
-          <a:p>
-            <a:pPr algn="l" marL="342900" indent="-342900">
-              <a:lnSpc>
-                <a:spcPct val="116000"/>
-              </a:lnSpc>
-              <a:spcAft>
-                <a:spcPts val="700"/>
-              </a:spcAft>
-              <a:buSzPct val="100000"/>
-              <a:buChar char="•"/>
-            </a:pPr>
-            <a:r>
-              <a:rPr lang="en-US" sz="1150" dirty="0">
-                <a:solidFill>
-                  <a:srgbClr val="33423A"/>
-                </a:solidFill>
-                <a:latin typeface="Calibri" pitchFamily="34" charset="0"/>
-                <a:ea typeface="Calibri" pitchFamily="34" charset="-122"/>
-                <a:cs typeface="Calibri" pitchFamily="34" charset="-120"/>
-              </a:rPr>
-              <a:t>Nappe en rabattement continu : la pression réglementaire sur les prélèvements y est la plus forte.</a:t>
-            </a:r>
-            <a:endParaRPr lang="en-US" sz="1150" dirty="0"/>
-          </a:p>
-          <a:p>
-            <a:pPr algn="l" marL="342900" indent="-342900">
-              <a:lnSpc>
-                <a:spcPct val="116000"/>
-              </a:lnSpc>
-              <a:spcAft>
-                <a:spcPts val="700"/>
-              </a:spcAft>
-              <a:buSzPct val="100000"/>
-              <a:buChar char="•"/>
-            </a:pPr>
-            <a:r>
-              <a:rPr lang="en-US" sz="1150" dirty="0">
-                <a:solidFill>
-                  <a:srgbClr val="33423A"/>
-                </a:solidFill>
-                <a:latin typeface="Calibri" pitchFamily="34" charset="0"/>
-                <a:ea typeface="Calibri" pitchFamily="34" charset="-122"/>
-                <a:cs typeface="Calibri" pitchFamily="34" charset="-120"/>
-              </a:rPr>
-              <a:t>Acheteurs européens demandeurs de certification biologique.</a:t>
-            </a:r>
-            <a:endParaRPr lang="en-US" sz="1150" dirty="0"/>
-          </a:p>
-        </p:txBody>
-      </p:sp>
-      <p:sp>
-        <p:nvSpPr>
-          <p:cNvPr id="9" name="Shape 6"/>
-          <p:cNvSpPr/>
-          <p:nvPr/>
-        </p:nvSpPr>
-        <p:spPr>
-          <a:xfrm>
-            <a:off x="4359554" y="1783080"/>
-            <a:ext cx="3472586" cy="4069080"/>
-          </a:xfrm>
-          <a:prstGeom prst="roundRect">
-            <a:avLst>
-              <a:gd name="adj" fmla="val 2633"/>
-            </a:avLst>
-          </a:prstGeom>
-          <a:solidFill>
-            <a:srgbClr val="F1F4EF"/>
-          </a:solidFill>
-          <a:ln w="9525">
-            <a:solidFill>
-              <a:srgbClr val="DCE4DA"/>
-            </a:solidFill>
-            <a:prstDash val="solid"/>
-          </a:ln>
-        </p:spPr>
-      </p:sp>
-      <p:pic>
-        <p:nvPicPr>
-          <p:cNvPr id="10" name="Image 1" descr="preencoded.png">    </p:cNvPr>
-          <p:cNvPicPr>
-            <a:picLocks noChangeAspect="1"/>
-          </p:cNvPicPr>
-          <p:nvPr/>
-        </p:nvPicPr>
-        <p:blipFill>
-          <a:blip r:embed="rId2"/>
-          <a:stretch>
-            <a:fillRect/>
-          </a:stretch>
-        </p:blipFill>
-        <p:spPr>
-          <a:xfrm>
-            <a:off x="4359554" y="1783080"/>
-            <a:ext cx="3472586" cy="1691640"/>
-          </a:xfrm>
-          <a:prstGeom prst="rect">
-            <a:avLst/>
-          </a:prstGeom>
-        </p:spPr>
-      </p:pic>
-      <p:sp>
-        <p:nvSpPr>
-          <p:cNvPr id="11" name="Text 7"/>
-          <p:cNvSpPr txBox="1"/>
-          <p:nvPr/>
-        </p:nvSpPr>
-        <p:spPr>
-          <a:xfrm>
-            <a:off x="4560722" y="3639312"/>
-            <a:ext cx="3070250" cy="384048"/>
-          </a:xfrm>
-          <a:prstGeom prst="rect">
-            <a:avLst/>
-          </a:prstGeom>
-          <a:noFill/>
-          <a:ln/>
-        </p:spPr>
-        <p:txBody>
-          <a:bodyPr wrap="square" lIns="0" tIns="0" rIns="0" bIns="0" rtlCol="0" anchor="ctr"/>
-          <a:lstStyle/>
-          <a:p>
-            <a:pPr algn="l" indent="0" marL="0">
-              <a:buNone/>
-            </a:pPr>
-            <a:r>
-              <a:rPr lang="en-US" sz="1500" b="1" dirty="0">
-                <a:solidFill>
-                  <a:srgbClr val="1F5C3A"/>
-                </a:solidFill>
-                <a:latin typeface="Cambria" pitchFamily="34" charset="0"/>
-                <a:ea typeface="Cambria" pitchFamily="34" charset="-122"/>
-                <a:cs typeface="Cambria" pitchFamily="34" charset="-120"/>
-              </a:rPr>
-              <a:t>Haouz — Marrakech</a:t>
-            </a:r>
-            <a:endParaRPr lang="en-US" sz="1500" dirty="0"/>
-          </a:p>
-        </p:txBody>
-      </p:sp>
-      <p:sp>
-        <p:nvSpPr>
-          <p:cNvPr id="12" name="Text 8"/>
-          <p:cNvSpPr txBox="1"/>
-          <p:nvPr/>
-        </p:nvSpPr>
-        <p:spPr>
-          <a:xfrm>
-            <a:off x="4560722" y="4041648"/>
-            <a:ext cx="3070250" cy="329184"/>
-          </a:xfrm>
-          <a:prstGeom prst="rect">
-            <a:avLst/>
-          </a:prstGeom>
-          <a:noFill/>
-          <a:ln/>
-        </p:spPr>
-        <p:txBody>
-          <a:bodyPr wrap="square" lIns="0" tIns="0" rIns="0" bIns="0" rtlCol="0" anchor="ctr"/>
-          <a:lstStyle/>
-          <a:p>
-            <a:pPr algn="l" indent="0" marL="0">
-              <a:buNone/>
-            </a:pPr>
-            <a:r>
-              <a:rPr lang="en-US" sz="1250" b="1" dirty="0">
-                <a:solidFill>
-                  <a:srgbClr val="A97C12"/>
-                </a:solidFill>
-                <a:latin typeface="Calibri" pitchFamily="34" charset="0"/>
-                <a:ea typeface="Calibri" pitchFamily="34" charset="-122"/>
-                <a:cs typeface="Calibri" pitchFamily="34" charset="-120"/>
-              </a:rPr>
-              <a:t>Maraîchage et oliviers</a:t>
-            </a:r>
-            <a:endParaRPr lang="en-US" sz="1250" dirty="0"/>
-          </a:p>
-        </p:txBody>
-      </p:sp>
-      <p:sp>
-        <p:nvSpPr>
-          <p:cNvPr id="13" name="Text 9"/>
-          <p:cNvSpPr txBox="1"/>
-          <p:nvPr/>
-        </p:nvSpPr>
-        <p:spPr>
-          <a:xfrm>
-            <a:off x="4560722" y="4407408"/>
-            <a:ext cx="3070250" cy="1280160"/>
-          </a:xfrm>
-          <a:prstGeom prst="rect">
-            <a:avLst/>
-          </a:prstGeom>
-          <a:noFill/>
-          <a:ln/>
-        </p:spPr>
-        <p:txBody>
-          <a:bodyPr wrap="square" lIns="0" tIns="0" rIns="0" bIns="0" rtlCol="0" anchor="t"/>
-          <a:lstStyle/>
-          <a:p>
-            <a:pPr algn="l" marL="342900" indent="-342900">
-              <a:lnSpc>
-                <a:spcPct val="116000"/>
-              </a:lnSpc>
-              <a:spcAft>
-                <a:spcPts val="700"/>
-              </a:spcAft>
-              <a:buSzPct val="100000"/>
-              <a:buChar char="•"/>
-            </a:pPr>
-            <a:r>
-              <a:rPr lang="en-US" sz="1150" dirty="0">
-                <a:solidFill>
-                  <a:srgbClr val="33423A"/>
-                </a:solidFill>
-                <a:latin typeface="Calibri" pitchFamily="34" charset="0"/>
-                <a:ea typeface="Calibri" pitchFamily="34" charset="-122"/>
-                <a:cs typeface="Calibri" pitchFamily="34" charset="-120"/>
-              </a:rPr>
-              <a:t>Périmètres irrigués dépendants des barrages, soumis aux tours d'eau en année sèche.</a:t>
-            </a:r>
-            <a:endParaRPr lang="en-US" sz="1150" dirty="0"/>
-          </a:p>
-          <a:p>
-            <a:pPr algn="l" marL="342900" indent="-342900">
-              <a:lnSpc>
-                <a:spcPct val="116000"/>
-              </a:lnSpc>
-              <a:spcAft>
-                <a:spcPts val="700"/>
-              </a:spcAft>
-              <a:buSzPct val="100000"/>
-              <a:buChar char="•"/>
-            </a:pPr>
-            <a:r>
-              <a:rPr lang="en-US" sz="1150" dirty="0">
-                <a:solidFill>
-                  <a:srgbClr val="33423A"/>
-                </a:solidFill>
-                <a:latin typeface="Calibri" pitchFamily="34" charset="0"/>
-                <a:ea typeface="Calibri" pitchFamily="34" charset="-122"/>
-                <a:cs typeface="Calibri" pitchFamily="34" charset="-120"/>
-              </a:rPr>
-              <a:t>Forte proportion de structures moyennes, capables de décider vite sur un essai.</a:t>
-            </a:r>
-            <a:endParaRPr lang="en-US" sz="1150" dirty="0"/>
-          </a:p>
-          <a:p>
-            <a:pPr algn="l" marL="342900" indent="-342900">
-              <a:lnSpc>
-                <a:spcPct val="116000"/>
-              </a:lnSpc>
-              <a:spcAft>
-                <a:spcPts val="700"/>
-              </a:spcAft>
-              <a:buSzPct val="100000"/>
-              <a:buChar char="•"/>
-            </a:pPr>
-            <a:r>
-              <a:rPr lang="en-US" sz="1150" dirty="0">
-                <a:solidFill>
-                  <a:srgbClr val="33423A"/>
-                </a:solidFill>
-                <a:latin typeface="Calibri" pitchFamily="34" charset="0"/>
-                <a:ea typeface="Calibri" pitchFamily="34" charset="-122"/>
-                <a:cs typeface="Calibri" pitchFamily="34" charset="-120"/>
-              </a:rPr>
-              <a:t>Oléiculture en modernisation, avec des marges de progrès agronomiques nettes.</a:t>
-            </a:r>
-            <a:endParaRPr lang="en-US" sz="1150" dirty="0"/>
-          </a:p>
-        </p:txBody>
-      </p:sp>
-      <p:sp>
-        <p:nvSpPr>
-          <p:cNvPr id="14" name="Shape 10"/>
-          <p:cNvSpPr/>
-          <p:nvPr/>
-        </p:nvSpPr>
-        <p:spPr>
-          <a:xfrm>
-            <a:off x="8124749" y="1783080"/>
-            <a:ext cx="3472586" cy="4069080"/>
-          </a:xfrm>
-          <a:prstGeom prst="roundRect">
-            <a:avLst>
-              <a:gd name="adj" fmla="val 2633"/>
-            </a:avLst>
-          </a:prstGeom>
-          <a:solidFill>
-            <a:srgbClr val="F1F4EF"/>
-          </a:solidFill>
-          <a:ln w="9525">
-            <a:solidFill>
-              <a:srgbClr val="DCE4DA"/>
-            </a:solidFill>
-            <a:prstDash val="solid"/>
-          </a:ln>
-        </p:spPr>
-      </p:sp>
-      <p:pic>
-        <p:nvPicPr>
-          <p:cNvPr id="15" name="Image 2" descr="preencoded.png">    </p:cNvPr>
-          <p:cNvPicPr>
-            <a:picLocks noChangeAspect="1"/>
-          </p:cNvPicPr>
-          <p:nvPr/>
-        </p:nvPicPr>
-        <p:blipFill>
-          <a:blip r:embed="rId3"/>
-          <a:stretch>
-            <a:fillRect/>
-          </a:stretch>
-        </p:blipFill>
-        <p:spPr>
-          <a:xfrm>
-            <a:off x="8124749" y="1783080"/>
-            <a:ext cx="3472586" cy="1691640"/>
-          </a:xfrm>
-          <a:prstGeom prst="rect">
-            <a:avLst/>
-          </a:prstGeom>
-        </p:spPr>
-      </p:pic>
-      <p:sp>
-        <p:nvSpPr>
-          <p:cNvPr id="16" name="Text 11"/>
-          <p:cNvSpPr txBox="1"/>
-          <p:nvPr/>
-        </p:nvSpPr>
-        <p:spPr>
-          <a:xfrm>
-            <a:off x="8325917" y="3639312"/>
-            <a:ext cx="3070250" cy="384048"/>
-          </a:xfrm>
-          <a:prstGeom prst="rect">
-            <a:avLst/>
-          </a:prstGeom>
-          <a:noFill/>
-          <a:ln/>
-        </p:spPr>
-        <p:txBody>
-          <a:bodyPr wrap="square" lIns="0" tIns="0" rIns="0" bIns="0" rtlCol="0" anchor="ctr"/>
-          <a:lstStyle/>
-          <a:p>
-            <a:pPr algn="l" indent="0" marL="0">
-              <a:buNone/>
-            </a:pPr>
-            <a:r>
-              <a:rPr lang="en-US" sz="1500" b="1" dirty="0">
-                <a:solidFill>
-                  <a:srgbClr val="1F5C3A"/>
-                </a:solidFill>
-                <a:latin typeface="Cambria" pitchFamily="34" charset="0"/>
-                <a:ea typeface="Cambria" pitchFamily="34" charset="-122"/>
-                <a:cs typeface="Cambria" pitchFamily="34" charset="-120"/>
-              </a:rPr>
-              <a:t>Drâa-Tafilalet</a:t>
-            </a:r>
-            <a:endParaRPr lang="en-US" sz="1500" dirty="0"/>
-          </a:p>
-        </p:txBody>
-      </p:sp>
-      <p:sp>
-        <p:nvSpPr>
-          <p:cNvPr id="17" name="Text 12"/>
-          <p:cNvSpPr txBox="1"/>
-          <p:nvPr/>
-        </p:nvSpPr>
-        <p:spPr>
-          <a:xfrm>
-            <a:off x="8325917" y="4041648"/>
-            <a:ext cx="3070250" cy="329184"/>
-          </a:xfrm>
-          <a:prstGeom prst="rect">
-            <a:avLst/>
-          </a:prstGeom>
-          <a:noFill/>
-          <a:ln/>
-        </p:spPr>
-        <p:txBody>
-          <a:bodyPr wrap="square" lIns="0" tIns="0" rIns="0" bIns="0" rtlCol="0" anchor="ctr"/>
-          <a:lstStyle/>
-          <a:p>
-            <a:pPr algn="l" indent="0" marL="0">
-              <a:buNone/>
-            </a:pPr>
-            <a:r>
-              <a:rPr lang="en-US" sz="1250" b="1" dirty="0">
-                <a:solidFill>
-                  <a:srgbClr val="A97C12"/>
-                </a:solidFill>
-                <a:latin typeface="Calibri" pitchFamily="34" charset="0"/>
-                <a:ea typeface="Calibri" pitchFamily="34" charset="-122"/>
-                <a:cs typeface="Calibri" pitchFamily="34" charset="-120"/>
-              </a:rPr>
-              <a:t>Palmier dattier et arganier</a:t>
-            </a:r>
-            <a:endParaRPr lang="en-US" sz="1250" dirty="0"/>
-          </a:p>
-        </p:txBody>
-      </p:sp>
-      <p:sp>
-        <p:nvSpPr>
-          <p:cNvPr id="18" name="Text 13"/>
-          <p:cNvSpPr txBox="1"/>
-          <p:nvPr/>
-        </p:nvSpPr>
-        <p:spPr>
-          <a:xfrm>
-            <a:off x="8325917" y="4407408"/>
-            <a:ext cx="3070250" cy="1280160"/>
-          </a:xfrm>
-          <a:prstGeom prst="rect">
-            <a:avLst/>
-          </a:prstGeom>
-          <a:noFill/>
-          <a:ln/>
-        </p:spPr>
-        <p:txBody>
-          <a:bodyPr wrap="square" lIns="0" tIns="0" rIns="0" bIns="0" rtlCol="0" anchor="t"/>
-          <a:lstStyle/>
-          <a:p>
-            <a:pPr algn="l" marL="342900" indent="-342900">
-              <a:lnSpc>
-                <a:spcPct val="116000"/>
-              </a:lnSpc>
-              <a:spcAft>
-                <a:spcPts val="700"/>
-              </a:spcAft>
-              <a:buSzPct val="100000"/>
-              <a:buChar char="•"/>
-            </a:pPr>
-            <a:r>
-              <a:rPr lang="en-US" sz="1150" dirty="0">
-                <a:solidFill>
-                  <a:srgbClr val="33423A"/>
-                </a:solidFill>
-                <a:latin typeface="Calibri" pitchFamily="34" charset="0"/>
-                <a:ea typeface="Calibri" pitchFamily="34" charset="-122"/>
-                <a:cs typeface="Calibri" pitchFamily="34" charset="-120"/>
-              </a:rPr>
-              <a:t>Oasis en situation de stress hydrique structurel, moins de 100 mm de pluie par an.</a:t>
-            </a:r>
-            <a:endParaRPr lang="en-US" sz="1150" dirty="0"/>
-          </a:p>
-          <a:p>
-            <a:pPr algn="l" marL="342900" indent="-342900">
-              <a:lnSpc>
-                <a:spcPct val="116000"/>
-              </a:lnSpc>
-              <a:spcAft>
-                <a:spcPts val="700"/>
-              </a:spcAft>
-              <a:buSzPct val="100000"/>
-              <a:buChar char="•"/>
-            </a:pPr>
-            <a:r>
-              <a:rPr lang="en-US" sz="1150" dirty="0">
-                <a:solidFill>
-                  <a:srgbClr val="33423A"/>
-                </a:solidFill>
-                <a:latin typeface="Calibri" pitchFamily="34" charset="0"/>
-                <a:ea typeface="Calibri" pitchFamily="34" charset="-122"/>
-                <a:cs typeface="Calibri" pitchFamily="34" charset="-120"/>
-              </a:rPr>
-              <a:t>Enjeu de préservation autant que de rendement : lutte contre l'ensablement.</a:t>
-            </a:r>
-            <a:endParaRPr lang="en-US" sz="1150" dirty="0"/>
-          </a:p>
-          <a:p>
-            <a:pPr algn="l" marL="342900" indent="-342900">
-              <a:lnSpc>
-                <a:spcPct val="116000"/>
-              </a:lnSpc>
-              <a:spcAft>
-                <a:spcPts val="700"/>
-              </a:spcAft>
-              <a:buSzPct val="100000"/>
-              <a:buChar char="•"/>
-            </a:pPr>
-            <a:r>
-              <a:rPr lang="en-US" sz="1150" dirty="0">
-                <a:solidFill>
-                  <a:srgbClr val="33423A"/>
-                </a:solidFill>
-                <a:latin typeface="Calibri" pitchFamily="34" charset="0"/>
-                <a:ea typeface="Calibri" pitchFamily="34" charset="-122"/>
-                <a:cs typeface="Calibri" pitchFamily="34" charset="-120"/>
-              </a:rPr>
-              <a:t>Filières à forte valeur unitaire — datte de bouche, huile d'argan.</a:t>
-            </a:r>
-            <a:endParaRPr lang="en-US" sz="1150" dirty="0"/>
-          </a:p>
-        </p:txBody>
-      </p:sp>
-      <p:sp>
-        <p:nvSpPr>
-          <p:cNvPr id="19" name="Text 14"/>
           <p:cNvSpPr txBox="1"/>
           <p:nvPr/>
         </p:nvSpPr>
@@ -6353,7 +6185,7 @@
       </p:sp>
       <p:sp>
         <p:nvSpPr>
-          <p:cNvPr id="20" name="Text 15"/>
+          <p:cNvPr id="9" name="Text 6"/>
           <p:cNvSpPr txBox="1"/>
           <p:nvPr/>
         </p:nvSpPr>
@@ -6457,7 +6289,7 @@
                 <a:ea typeface="Calibri" pitchFamily="34" charset="-122"/>
                 <a:cs typeface="Calibri" pitchFamily="34" charset="-120"/>
               </a:rPr>
-              <a:t>COMMENT NOUS PROCÉDONS</a:t>
+              <a:t>TROIS TERRAINS PRIORITAIRES</a:t>
             </a:r>
             <a:endParaRPr lang="en-US" sz="1150" dirty="0"/>
           </a:p>
@@ -6496,7 +6328,7 @@
                 <a:ea typeface="Cambria" pitchFamily="34" charset="-122"/>
                 <a:cs typeface="Cambria" pitchFamily="34" charset="-120"/>
               </a:rPr>
-              <a:t>Un déploiement par étapes, mesuré à chaque palier</a:t>
+              <a:t>Où engager les premiers essais</a:t>
             </a:r>
             <a:endParaRPr lang="en-US" sz="3000" dirty="0"/>
           </a:p>
@@ -6510,12 +6342,12 @@
         </p:nvSpPr>
         <p:spPr>
           <a:xfrm>
-            <a:off x="594360" y="1874520"/>
-            <a:ext cx="2545004" cy="2834640"/>
+            <a:off x="594360" y="1783080"/>
+            <a:ext cx="3472586" cy="4069080"/>
           </a:xfrm>
           <a:prstGeom prst="roundRect">
             <a:avLst>
-              <a:gd name="adj" fmla="val 3593"/>
+              <a:gd name="adj" fmla="val 2633"/>
             </a:avLst>
           </a:prstGeom>
           <a:solidFill>
@@ -6529,36 +6361,40 @@
           </a:ln>
         </p:spPr>
       </p:sp>
-      <p:sp>
-        <p:nvSpPr>
-          <p:cNvPr id="5" name="Shape 3"/>
-          <p:cNvSpPr/>
-          <p:nvPr/>
-        </p:nvSpPr>
-        <p:spPr>
-          <a:xfrm>
-            <a:off x="822960" y="2103120"/>
-            <a:ext cx="566928" cy="566928"/>
-          </a:xfrm>
-          <a:prstGeom prst="ellipse">
-            <a:avLst/>
-          </a:prstGeom>
-          <a:solidFill>
-            <a:srgbClr val="1F5C3A"/>
-          </a:solidFill>
-          <a:ln/>
-        </p:spPr>
-      </p:sp>
-      <p:sp>
-        <p:nvSpPr>
-          <p:cNvPr id="6" name="Text 4"/>
-          <p:cNvSpPr txBox="1"/>
-          <p:nvPr/>
-        </p:nvSpPr>
-        <p:spPr>
-          <a:xfrm>
-            <a:off x="822960" y="2103120"/>
-            <a:ext cx="566928" cy="566928"/>
+      <p:pic>
+        <p:nvPicPr>
+          <p:cNvPr id="5" name="Image 0" descr="preencoded.png">    </p:cNvPr>
+          <p:cNvPicPr>
+            <a:picLocks noChangeAspect="1"/>
+          </p:cNvPicPr>
+          <p:nvPr/>
+        </p:nvPicPr>
+        <p:blipFill>
+          <a:blip r:embed="rId1"/>
+          <a:stretch>
+            <a:fillRect/>
+          </a:stretch>
+        </p:blipFill>
+        <p:spPr>
+          <a:xfrm>
+            <a:off x="594360" y="1783080"/>
+            <a:ext cx="3472586" cy="1691640"/>
+          </a:xfrm>
+          <a:prstGeom prst="rect">
+            <a:avLst/>
+          </a:prstGeom>
+        </p:spPr>
+      </p:pic>
+      <p:sp>
+        <p:nvSpPr>
+          <p:cNvPr id="6" name="Text 3"/>
+          <p:cNvSpPr txBox="1"/>
+          <p:nvPr/>
+        </p:nvSpPr>
+        <p:spPr>
+          <a:xfrm>
+            <a:off x="795528" y="3639312"/>
+            <a:ext cx="3070250" cy="384048"/>
           </a:xfrm>
           <a:prstGeom prst="rect">
             <a:avLst/>
@@ -6570,34 +6406,34 @@
           <a:bodyPr wrap="square" lIns="0" tIns="0" rIns="0" bIns="0" rtlCol="0" anchor="ctr"/>
           <a:lstStyle/>
           <a:p>
-            <a:pPr algn="ctr" indent="0" marL="0">
-              <a:buNone/>
-            </a:pPr>
-            <a:r>
-              <a:rPr lang="en-US" sz="1600" b="1" dirty="0">
-                <a:solidFill>
-                  <a:srgbClr val="FFFFFF"/>
+            <a:pPr algn="l" indent="0" marL="0">
+              <a:buNone/>
+            </a:pPr>
+            <a:r>
+              <a:rPr lang="en-US" sz="1500" b="1" dirty="0">
+                <a:solidFill>
+                  <a:srgbClr val="1F5C3A"/>
                 </a:solidFill>
                 <a:latin typeface="Cambria" pitchFamily="34" charset="0"/>
                 <a:ea typeface="Cambria" pitchFamily="34" charset="-122"/>
                 <a:cs typeface="Cambria" pitchFamily="34" charset="-120"/>
               </a:rPr>
-              <a:t>1</a:t>
-            </a:r>
-            <a:endParaRPr lang="en-US" sz="1600" dirty="0"/>
-          </a:p>
-        </p:txBody>
-      </p:sp>
-      <p:sp>
-        <p:nvSpPr>
-          <p:cNvPr id="7" name="Text 5"/>
-          <p:cNvSpPr txBox="1"/>
-          <p:nvPr/>
-        </p:nvSpPr>
-        <p:spPr>
-          <a:xfrm>
-            <a:off x="822960" y="2788920"/>
-            <a:ext cx="2087804" cy="457200"/>
+              <a:t>Souss-Massa</a:t>
+            </a:r>
+            <a:endParaRPr lang="en-US" sz="1500" dirty="0"/>
+          </a:p>
+        </p:txBody>
+      </p:sp>
+      <p:sp>
+        <p:nvSpPr>
+          <p:cNvPr id="7" name="Text 4"/>
+          <p:cNvSpPr txBox="1"/>
+          <p:nvPr/>
+        </p:nvSpPr>
+        <p:spPr>
+          <a:xfrm>
+            <a:off x="795528" y="4041648"/>
+            <a:ext cx="3070250" cy="329184"/>
           </a:xfrm>
           <a:prstGeom prst="rect">
             <a:avLst/>
@@ -6613,30 +6449,30 @@
               <a:buNone/>
             </a:pPr>
             <a:r>
-              <a:rPr lang="en-US" sz="1400" b="1" dirty="0">
-                <a:solidFill>
-                  <a:srgbClr val="1F5C3A"/>
-                </a:solidFill>
-                <a:latin typeface="Cambria" pitchFamily="34" charset="0"/>
-                <a:ea typeface="Cambria" pitchFamily="34" charset="-122"/>
-                <a:cs typeface="Cambria" pitchFamily="34" charset="-120"/>
-              </a:rPr>
-              <a:t>Diagnostic</a:t>
-            </a:r>
-            <a:endParaRPr lang="en-US" sz="1400" dirty="0"/>
-          </a:p>
-        </p:txBody>
-      </p:sp>
-      <p:sp>
-        <p:nvSpPr>
-          <p:cNvPr id="8" name="Text 6"/>
-          <p:cNvSpPr txBox="1"/>
-          <p:nvPr/>
-        </p:nvSpPr>
-        <p:spPr>
-          <a:xfrm>
-            <a:off x="822960" y="3291840"/>
-            <a:ext cx="2087804" cy="1234440"/>
+              <a:rPr lang="en-US" sz="1250" b="1" dirty="0">
+                <a:solidFill>
+                  <a:srgbClr val="A97C12"/>
+                </a:solidFill>
+                <a:latin typeface="Calibri" pitchFamily="34" charset="0"/>
+                <a:ea typeface="Calibri" pitchFamily="34" charset="-122"/>
+                <a:cs typeface="Calibri" pitchFamily="34" charset="-120"/>
+              </a:rPr>
+              <a:t>Agrumes et primeurs</a:t>
+            </a:r>
+            <a:endParaRPr lang="en-US" sz="1250" dirty="0"/>
+          </a:p>
+        </p:txBody>
+      </p:sp>
+      <p:sp>
+        <p:nvSpPr>
+          <p:cNvPr id="8" name="Text 5"/>
+          <p:cNvSpPr txBox="1"/>
+          <p:nvPr/>
+        </p:nvSpPr>
+        <p:spPr>
+          <a:xfrm>
+            <a:off x="795528" y="4407408"/>
+            <a:ext cx="3070250" cy="1280160"/>
           </a:xfrm>
           <a:prstGeom prst="rect">
             <a:avLst/>
@@ -6648,14 +6484,18 @@
           <a:bodyPr wrap="square" lIns="0" tIns="0" rIns="0" bIns="0" rtlCol="0" anchor="t"/>
           <a:lstStyle/>
           <a:p>
-            <a:pPr algn="l" indent="0" marL="0">
+            <a:pPr algn="l" marL="342900" indent="-342900">
               <a:lnSpc>
-                <a:spcPct val="120000"/>
+                <a:spcPct val="116000"/>
               </a:lnSpc>
-              <a:buNone/>
-            </a:pPr>
-            <a:r>
-              <a:rPr lang="en-US" sz="1200" dirty="0">
+              <a:spcAft>
+                <a:spcPts val="700"/>
+              </a:spcAft>
+              <a:buSzPct val="100000"/>
+              <a:buChar char="•"/>
+            </a:pPr>
+            <a:r>
+              <a:rPr lang="en-US" sz="1150" dirty="0">
                 <a:solidFill>
                   <a:srgbClr val="33423A"/>
                 </a:solidFill>
@@ -6663,26 +6503,74 @@
                 <a:ea typeface="Calibri" pitchFamily="34" charset="-122"/>
                 <a:cs typeface="Calibri" pitchFamily="34" charset="-120"/>
               </a:rPr>
-              <a:t>Analyse du sol, du mode d'irrigation et de la culture. Aucun engagement à ce stade.</a:t>
-            </a:r>
-            <a:endParaRPr lang="en-US" sz="1200" dirty="0"/>
-          </a:p>
-        </p:txBody>
-      </p:sp>
-      <p:sp>
-        <p:nvSpPr>
-          <p:cNvPr id="9" name="Shape 7"/>
+              <a:t>Cœur de la filière d'exportation, déjà largement converti au goutte-à-goutte.</a:t>
+            </a:r>
+            <a:endParaRPr lang="en-US" sz="1150" dirty="0"/>
+          </a:p>
+          <a:p>
+            <a:pPr algn="l" marL="342900" indent="-342900">
+              <a:lnSpc>
+                <a:spcPct val="116000"/>
+              </a:lnSpc>
+              <a:spcAft>
+                <a:spcPts val="700"/>
+              </a:spcAft>
+              <a:buSzPct val="100000"/>
+              <a:buChar char="•"/>
+            </a:pPr>
+            <a:r>
+              <a:rPr lang="en-US" sz="1150" dirty="0">
+                <a:solidFill>
+                  <a:srgbClr val="33423A"/>
+                </a:solidFill>
+                <a:latin typeface="Calibri" pitchFamily="34" charset="0"/>
+                <a:ea typeface="Calibri" pitchFamily="34" charset="-122"/>
+                <a:cs typeface="Calibri" pitchFamily="34" charset="-120"/>
+              </a:rPr>
+              <a:t>Nappe en rabattement continu : la pression réglementaire sur les prélèvements y est la plus forte.</a:t>
+            </a:r>
+            <a:endParaRPr lang="en-US" sz="1150" dirty="0"/>
+          </a:p>
+          <a:p>
+            <a:pPr algn="l" marL="342900" indent="-342900">
+              <a:lnSpc>
+                <a:spcPct val="116000"/>
+              </a:lnSpc>
+              <a:spcAft>
+                <a:spcPts val="700"/>
+              </a:spcAft>
+              <a:buSzPct val="100000"/>
+              <a:buChar char="•"/>
+            </a:pPr>
+            <a:r>
+              <a:rPr lang="en-US" sz="1150" dirty="0">
+                <a:solidFill>
+                  <a:srgbClr val="33423A"/>
+                </a:solidFill>
+                <a:latin typeface="Calibri" pitchFamily="34" charset="0"/>
+                <a:ea typeface="Calibri" pitchFamily="34" charset="-122"/>
+                <a:cs typeface="Calibri" pitchFamily="34" charset="-120"/>
+              </a:rPr>
+              <a:t>Acheteurs européens demandeurs de certification biologique.</a:t>
+            </a:r>
+            <a:endParaRPr lang="en-US" sz="1150" dirty="0"/>
+          </a:p>
+        </p:txBody>
+      </p:sp>
+      <p:sp>
+        <p:nvSpPr>
+          <p:cNvPr id="9" name="Shape 6"/>
           <p:cNvSpPr/>
           <p:nvPr/>
         </p:nvSpPr>
         <p:spPr>
           <a:xfrm>
-            <a:off x="3413684" y="1874520"/>
-            <a:ext cx="2545004" cy="2834640"/>
+            <a:off x="4359554" y="1783080"/>
+            <a:ext cx="3472586" cy="4069080"/>
           </a:xfrm>
           <a:prstGeom prst="roundRect">
             <a:avLst>
-              <a:gd name="adj" fmla="val 3593"/>
+              <a:gd name="adj" fmla="val 2633"/>
             </a:avLst>
           </a:prstGeom>
           <a:solidFill>
@@ -6696,36 +6584,40 @@
           </a:ln>
         </p:spPr>
       </p:sp>
-      <p:sp>
-        <p:nvSpPr>
-          <p:cNvPr id="10" name="Shape 8"/>
-          <p:cNvSpPr/>
-          <p:nvPr/>
-        </p:nvSpPr>
-        <p:spPr>
-          <a:xfrm>
-            <a:off x="3642284" y="2103120"/>
-            <a:ext cx="566928" cy="566928"/>
-          </a:xfrm>
-          <a:prstGeom prst="ellipse">
-            <a:avLst/>
-          </a:prstGeom>
-          <a:solidFill>
-            <a:srgbClr val="1F5C3A"/>
-          </a:solidFill>
-          <a:ln/>
-        </p:spPr>
-      </p:sp>
-      <p:sp>
-        <p:nvSpPr>
-          <p:cNvPr id="11" name="Text 9"/>
-          <p:cNvSpPr txBox="1"/>
-          <p:nvPr/>
-        </p:nvSpPr>
-        <p:spPr>
-          <a:xfrm>
-            <a:off x="3642284" y="2103120"/>
-            <a:ext cx="566928" cy="566928"/>
+      <p:pic>
+        <p:nvPicPr>
+          <p:cNvPr id="10" name="Image 1" descr="preencoded.png">    </p:cNvPr>
+          <p:cNvPicPr>
+            <a:picLocks noChangeAspect="1"/>
+          </p:cNvPicPr>
+          <p:nvPr/>
+        </p:nvPicPr>
+        <p:blipFill>
+          <a:blip r:embed="rId2"/>
+          <a:stretch>
+            <a:fillRect/>
+          </a:stretch>
+        </p:blipFill>
+        <p:spPr>
+          <a:xfrm>
+            <a:off x="4359554" y="1783080"/>
+            <a:ext cx="3472586" cy="1691640"/>
+          </a:xfrm>
+          <a:prstGeom prst="rect">
+            <a:avLst/>
+          </a:prstGeom>
+        </p:spPr>
+      </p:pic>
+      <p:sp>
+        <p:nvSpPr>
+          <p:cNvPr id="11" name="Text 7"/>
+          <p:cNvSpPr txBox="1"/>
+          <p:nvPr/>
+        </p:nvSpPr>
+        <p:spPr>
+          <a:xfrm>
+            <a:off x="4560722" y="3639312"/>
+            <a:ext cx="3070250" cy="384048"/>
           </a:xfrm>
           <a:prstGeom prst="rect">
             <a:avLst/>
@@ -6737,34 +6629,34 @@
           <a:bodyPr wrap="square" lIns="0" tIns="0" rIns="0" bIns="0" rtlCol="0" anchor="ctr"/>
           <a:lstStyle/>
           <a:p>
-            <a:pPr algn="ctr" indent="0" marL="0">
-              <a:buNone/>
-            </a:pPr>
-            <a:r>
-              <a:rPr lang="en-US" sz="1600" b="1" dirty="0">
-                <a:solidFill>
-                  <a:srgbClr val="FFFFFF"/>
+            <a:pPr algn="l" indent="0" marL="0">
+              <a:buNone/>
+            </a:pPr>
+            <a:r>
+              <a:rPr lang="en-US" sz="1500" b="1" dirty="0">
+                <a:solidFill>
+                  <a:srgbClr val="1F5C3A"/>
                 </a:solidFill>
                 <a:latin typeface="Cambria" pitchFamily="34" charset="0"/>
                 <a:ea typeface="Cambria" pitchFamily="34" charset="-122"/>
                 <a:cs typeface="Cambria" pitchFamily="34" charset="-120"/>
               </a:rPr>
-              <a:t>2</a:t>
-            </a:r>
-            <a:endParaRPr lang="en-US" sz="1600" dirty="0"/>
-          </a:p>
-        </p:txBody>
-      </p:sp>
-      <p:sp>
-        <p:nvSpPr>
-          <p:cNvPr id="12" name="Text 10"/>
-          <p:cNvSpPr txBox="1"/>
-          <p:nvPr/>
-        </p:nvSpPr>
-        <p:spPr>
-          <a:xfrm>
-            <a:off x="3642284" y="2788920"/>
-            <a:ext cx="2087804" cy="457200"/>
+              <a:t>Haouz — Marrakech</a:t>
+            </a:r>
+            <a:endParaRPr lang="en-US" sz="1500" dirty="0"/>
+          </a:p>
+        </p:txBody>
+      </p:sp>
+      <p:sp>
+        <p:nvSpPr>
+          <p:cNvPr id="12" name="Text 8"/>
+          <p:cNvSpPr txBox="1"/>
+          <p:nvPr/>
+        </p:nvSpPr>
+        <p:spPr>
+          <a:xfrm>
+            <a:off x="4560722" y="4041648"/>
+            <a:ext cx="3070250" cy="329184"/>
           </a:xfrm>
           <a:prstGeom prst="rect">
             <a:avLst/>
@@ -6780,30 +6672,30 @@
               <a:buNone/>
             </a:pPr>
             <a:r>
-              <a:rPr lang="en-US" sz="1400" b="1" dirty="0">
-                <a:solidFill>
-                  <a:srgbClr val="1F5C3A"/>
-                </a:solidFill>
-                <a:latin typeface="Cambria" pitchFamily="34" charset="0"/>
-                <a:ea typeface="Cambria" pitchFamily="34" charset="-122"/>
-                <a:cs typeface="Cambria" pitchFamily="34" charset="-120"/>
-              </a:rPr>
-              <a:t>Parcelle témoin</a:t>
-            </a:r>
-            <a:endParaRPr lang="en-US" sz="1400" dirty="0"/>
-          </a:p>
-        </p:txBody>
-      </p:sp>
-      <p:sp>
-        <p:nvSpPr>
-          <p:cNvPr id="13" name="Text 11"/>
-          <p:cNvSpPr txBox="1"/>
-          <p:nvPr/>
-        </p:nvSpPr>
-        <p:spPr>
-          <a:xfrm>
-            <a:off x="3642284" y="3291840"/>
-            <a:ext cx="2087804" cy="1234440"/>
+              <a:rPr lang="en-US" sz="1250" b="1" dirty="0">
+                <a:solidFill>
+                  <a:srgbClr val="A97C12"/>
+                </a:solidFill>
+                <a:latin typeface="Calibri" pitchFamily="34" charset="0"/>
+                <a:ea typeface="Calibri" pitchFamily="34" charset="-122"/>
+                <a:cs typeface="Calibri" pitchFamily="34" charset="-120"/>
+              </a:rPr>
+              <a:t>Maraîchage et oliviers</a:t>
+            </a:r>
+            <a:endParaRPr lang="en-US" sz="1250" dirty="0"/>
+          </a:p>
+        </p:txBody>
+      </p:sp>
+      <p:sp>
+        <p:nvSpPr>
+          <p:cNvPr id="13" name="Text 9"/>
+          <p:cNvSpPr txBox="1"/>
+          <p:nvPr/>
+        </p:nvSpPr>
+        <p:spPr>
+          <a:xfrm>
+            <a:off x="4560722" y="4407408"/>
+            <a:ext cx="3070250" cy="1280160"/>
           </a:xfrm>
           <a:prstGeom prst="rect">
             <a:avLst/>
@@ -6815,14 +6707,18 @@
           <a:bodyPr wrap="square" lIns="0" tIns="0" rIns="0" bIns="0" rtlCol="0" anchor="t"/>
           <a:lstStyle/>
           <a:p>
-            <a:pPr algn="l" indent="0" marL="0">
+            <a:pPr algn="l" marL="342900" indent="-342900">
               <a:lnSpc>
-                <a:spcPct val="120000"/>
+                <a:spcPct val="116000"/>
               </a:lnSpc>
-              <a:buNone/>
-            </a:pPr>
-            <a:r>
-              <a:rPr lang="en-US" sz="1200" dirty="0">
+              <a:spcAft>
+                <a:spcPts val="700"/>
+              </a:spcAft>
+              <a:buSzPct val="100000"/>
+              <a:buChar char="•"/>
+            </a:pPr>
+            <a:r>
+              <a:rPr lang="en-US" sz="1150" dirty="0">
                 <a:solidFill>
                   <a:srgbClr val="33423A"/>
                 </a:solidFill>
@@ -6830,26 +6726,74 @@
                 <a:ea typeface="Calibri" pitchFamily="34" charset="-122"/>
                 <a:cs typeface="Calibri" pitchFamily="34" charset="-120"/>
               </a:rPr>
-              <a:t>Un essai comparatif sur une parcelle, avec parcelle témoin conduite à l'identique.</a:t>
-            </a:r>
-            <a:endParaRPr lang="en-US" sz="1200" dirty="0"/>
-          </a:p>
-        </p:txBody>
-      </p:sp>
-      <p:sp>
-        <p:nvSpPr>
-          <p:cNvPr id="14" name="Shape 12"/>
+              <a:t>Périmètres irrigués dépendants des barrages, soumis aux tours d'eau en année sèche.</a:t>
+            </a:r>
+            <a:endParaRPr lang="en-US" sz="1150" dirty="0"/>
+          </a:p>
+          <a:p>
+            <a:pPr algn="l" marL="342900" indent="-342900">
+              <a:lnSpc>
+                <a:spcPct val="116000"/>
+              </a:lnSpc>
+              <a:spcAft>
+                <a:spcPts val="700"/>
+              </a:spcAft>
+              <a:buSzPct val="100000"/>
+              <a:buChar char="•"/>
+            </a:pPr>
+            <a:r>
+              <a:rPr lang="en-US" sz="1150" dirty="0">
+                <a:solidFill>
+                  <a:srgbClr val="33423A"/>
+                </a:solidFill>
+                <a:latin typeface="Calibri" pitchFamily="34" charset="0"/>
+                <a:ea typeface="Calibri" pitchFamily="34" charset="-122"/>
+                <a:cs typeface="Calibri" pitchFamily="34" charset="-120"/>
+              </a:rPr>
+              <a:t>Forte proportion de structures moyennes, capables de décider vite sur un essai.</a:t>
+            </a:r>
+            <a:endParaRPr lang="en-US" sz="1150" dirty="0"/>
+          </a:p>
+          <a:p>
+            <a:pPr algn="l" marL="342900" indent="-342900">
+              <a:lnSpc>
+                <a:spcPct val="116000"/>
+              </a:lnSpc>
+              <a:spcAft>
+                <a:spcPts val="700"/>
+              </a:spcAft>
+              <a:buSzPct val="100000"/>
+              <a:buChar char="•"/>
+            </a:pPr>
+            <a:r>
+              <a:rPr lang="en-US" sz="1150" dirty="0">
+                <a:solidFill>
+                  <a:srgbClr val="33423A"/>
+                </a:solidFill>
+                <a:latin typeface="Calibri" pitchFamily="34" charset="0"/>
+                <a:ea typeface="Calibri" pitchFamily="34" charset="-122"/>
+                <a:cs typeface="Calibri" pitchFamily="34" charset="-120"/>
+              </a:rPr>
+              <a:t>Oléiculture en modernisation, avec des marges de progrès agronomiques nettes.</a:t>
+            </a:r>
+            <a:endParaRPr lang="en-US" sz="1150" dirty="0"/>
+          </a:p>
+        </p:txBody>
+      </p:sp>
+      <p:sp>
+        <p:nvSpPr>
+          <p:cNvPr id="14" name="Shape 10"/>
           <p:cNvSpPr/>
           <p:nvPr/>
         </p:nvSpPr>
         <p:spPr>
           <a:xfrm>
-            <a:off x="6233008" y="1874520"/>
-            <a:ext cx="2545004" cy="2834640"/>
+            <a:off x="8124749" y="1783080"/>
+            <a:ext cx="3472586" cy="4069080"/>
           </a:xfrm>
           <a:prstGeom prst="roundRect">
             <a:avLst>
-              <a:gd name="adj" fmla="val 3593"/>
+              <a:gd name="adj" fmla="val 2633"/>
             </a:avLst>
           </a:prstGeom>
           <a:solidFill>
@@ -6863,36 +6807,40 @@
           </a:ln>
         </p:spPr>
       </p:sp>
-      <p:sp>
-        <p:nvSpPr>
-          <p:cNvPr id="15" name="Shape 13"/>
-          <p:cNvSpPr/>
-          <p:nvPr/>
-        </p:nvSpPr>
-        <p:spPr>
-          <a:xfrm>
-            <a:off x="6461608" y="2103120"/>
-            <a:ext cx="566928" cy="566928"/>
-          </a:xfrm>
-          <a:prstGeom prst="ellipse">
-            <a:avLst/>
-          </a:prstGeom>
-          <a:solidFill>
-            <a:srgbClr val="1F5C3A"/>
-          </a:solidFill>
-          <a:ln/>
-        </p:spPr>
-      </p:sp>
-      <p:sp>
-        <p:nvSpPr>
-          <p:cNvPr id="16" name="Text 14"/>
-          <p:cNvSpPr txBox="1"/>
-          <p:nvPr/>
-        </p:nvSpPr>
-        <p:spPr>
-          <a:xfrm>
-            <a:off x="6461608" y="2103120"/>
-            <a:ext cx="566928" cy="566928"/>
+      <p:pic>
+        <p:nvPicPr>
+          <p:cNvPr id="15" name="Image 2" descr="preencoded.png">    </p:cNvPr>
+          <p:cNvPicPr>
+            <a:picLocks noChangeAspect="1"/>
+          </p:cNvPicPr>
+          <p:nvPr/>
+        </p:nvPicPr>
+        <p:blipFill>
+          <a:blip r:embed="rId3"/>
+          <a:stretch>
+            <a:fillRect/>
+          </a:stretch>
+        </p:blipFill>
+        <p:spPr>
+          <a:xfrm>
+            <a:off x="8124749" y="1783080"/>
+            <a:ext cx="3472586" cy="1691640"/>
+          </a:xfrm>
+          <a:prstGeom prst="rect">
+            <a:avLst/>
+          </a:prstGeom>
+        </p:spPr>
+      </p:pic>
+      <p:sp>
+        <p:nvSpPr>
+          <p:cNvPr id="16" name="Text 11"/>
+          <p:cNvSpPr txBox="1"/>
+          <p:nvPr/>
+        </p:nvSpPr>
+        <p:spPr>
+          <a:xfrm>
+            <a:off x="8325917" y="3639312"/>
+            <a:ext cx="3070250" cy="384048"/>
           </a:xfrm>
           <a:prstGeom prst="rect">
             <a:avLst/>
@@ -6904,34 +6852,34 @@
           <a:bodyPr wrap="square" lIns="0" tIns="0" rIns="0" bIns="0" rtlCol="0" anchor="ctr"/>
           <a:lstStyle/>
           <a:p>
-            <a:pPr algn="ctr" indent="0" marL="0">
-              <a:buNone/>
-            </a:pPr>
-            <a:r>
-              <a:rPr lang="en-US" sz="1600" b="1" dirty="0">
-                <a:solidFill>
-                  <a:srgbClr val="FFFFFF"/>
+            <a:pPr algn="l" indent="0" marL="0">
+              <a:buNone/>
+            </a:pPr>
+            <a:r>
+              <a:rPr lang="en-US" sz="1500" b="1" dirty="0">
+                <a:solidFill>
+                  <a:srgbClr val="1F5C3A"/>
                 </a:solidFill>
                 <a:latin typeface="Cambria" pitchFamily="34" charset="0"/>
                 <a:ea typeface="Cambria" pitchFamily="34" charset="-122"/>
                 <a:cs typeface="Cambria" pitchFamily="34" charset="-120"/>
               </a:rPr>
-              <a:t>3</a:t>
-            </a:r>
-            <a:endParaRPr lang="en-US" sz="1600" dirty="0"/>
-          </a:p>
-        </p:txBody>
-      </p:sp>
-      <p:sp>
-        <p:nvSpPr>
-          <p:cNvPr id="17" name="Text 15"/>
-          <p:cNvSpPr txBox="1"/>
-          <p:nvPr/>
-        </p:nvSpPr>
-        <p:spPr>
-          <a:xfrm>
-            <a:off x="6461608" y="2788920"/>
-            <a:ext cx="2087804" cy="457200"/>
+              <a:t>Drâa-Tafilalet</a:t>
+            </a:r>
+            <a:endParaRPr lang="en-US" sz="1500" dirty="0"/>
+          </a:p>
+        </p:txBody>
+      </p:sp>
+      <p:sp>
+        <p:nvSpPr>
+          <p:cNvPr id="17" name="Text 12"/>
+          <p:cNvSpPr txBox="1"/>
+          <p:nvPr/>
+        </p:nvSpPr>
+        <p:spPr>
+          <a:xfrm>
+            <a:off x="8325917" y="4041648"/>
+            <a:ext cx="3070250" cy="329184"/>
           </a:xfrm>
           <a:prstGeom prst="rect">
             <a:avLst/>
@@ -6947,30 +6895,30 @@
               <a:buNone/>
             </a:pPr>
             <a:r>
-              <a:rPr lang="en-US" sz="1400" b="1" dirty="0">
-                <a:solidFill>
-                  <a:srgbClr val="1F5C3A"/>
-                </a:solidFill>
-                <a:latin typeface="Cambria" pitchFamily="34" charset="0"/>
-                <a:ea typeface="Cambria" pitchFamily="34" charset="-122"/>
-                <a:cs typeface="Cambria" pitchFamily="34" charset="-120"/>
-              </a:rPr>
-              <a:t>Mesure</a:t>
-            </a:r>
-            <a:endParaRPr lang="en-US" sz="1400" dirty="0"/>
-          </a:p>
-        </p:txBody>
-      </p:sp>
-      <p:sp>
-        <p:nvSpPr>
-          <p:cNvPr id="18" name="Text 16"/>
-          <p:cNvSpPr txBox="1"/>
-          <p:nvPr/>
-        </p:nvSpPr>
-        <p:spPr>
-          <a:xfrm>
-            <a:off x="6461608" y="3291840"/>
-            <a:ext cx="2087804" cy="1234440"/>
+              <a:rPr lang="en-US" sz="1250" b="1" dirty="0">
+                <a:solidFill>
+                  <a:srgbClr val="A97C12"/>
+                </a:solidFill>
+                <a:latin typeface="Calibri" pitchFamily="34" charset="0"/>
+                <a:ea typeface="Calibri" pitchFamily="34" charset="-122"/>
+                <a:cs typeface="Calibri" pitchFamily="34" charset="-120"/>
+              </a:rPr>
+              <a:t>Palmier dattier et arganier</a:t>
+            </a:r>
+            <a:endParaRPr lang="en-US" sz="1250" dirty="0"/>
+          </a:p>
+        </p:txBody>
+      </p:sp>
+      <p:sp>
+        <p:nvSpPr>
+          <p:cNvPr id="18" name="Text 13"/>
+          <p:cNvSpPr txBox="1"/>
+          <p:nvPr/>
+        </p:nvSpPr>
+        <p:spPr>
+          <a:xfrm>
+            <a:off x="8325917" y="4407408"/>
+            <a:ext cx="3070250" cy="1280160"/>
           </a:xfrm>
           <a:prstGeom prst="rect">
             <a:avLst/>
@@ -6982,14 +6930,18 @@
           <a:bodyPr wrap="square" lIns="0" tIns="0" rIns="0" bIns="0" rtlCol="0" anchor="t"/>
           <a:lstStyle/>
           <a:p>
-            <a:pPr algn="l" indent="0" marL="0">
+            <a:pPr algn="l" marL="342900" indent="-342900">
               <a:lnSpc>
-                <a:spcPct val="120000"/>
+                <a:spcPct val="116000"/>
               </a:lnSpc>
-              <a:buNone/>
-            </a:pPr>
-            <a:r>
-              <a:rPr lang="en-US" sz="1200" dirty="0">
+              <a:spcAft>
+                <a:spcPts val="700"/>
+              </a:spcAft>
+              <a:buSzPct val="100000"/>
+              <a:buChar char="•"/>
+            </a:pPr>
+            <a:r>
+              <a:rPr lang="en-US" sz="1150" dirty="0">
                 <a:solidFill>
                   <a:srgbClr val="33423A"/>
                 </a:solidFill>
@@ -6997,166 +6949,23 @@
                 <a:ea typeface="Calibri" pitchFamily="34" charset="-122"/>
                 <a:cs typeface="Calibri" pitchFamily="34" charset="-120"/>
               </a:rPr>
-              <a:t>Relevés de consommation et de rendement sur un cycle cultural complet.</a:t>
-            </a:r>
-            <a:endParaRPr lang="en-US" sz="1200" dirty="0"/>
-          </a:p>
-        </p:txBody>
-      </p:sp>
-      <p:sp>
-        <p:nvSpPr>
-          <p:cNvPr id="19" name="Shape 17"/>
-          <p:cNvSpPr/>
-          <p:nvPr/>
-        </p:nvSpPr>
-        <p:spPr>
-          <a:xfrm>
-            <a:off x="9052331" y="1874520"/>
-            <a:ext cx="2545004" cy="2834640"/>
-          </a:xfrm>
-          <a:prstGeom prst="roundRect">
-            <a:avLst>
-              <a:gd name="adj" fmla="val 3593"/>
-            </a:avLst>
-          </a:prstGeom>
-          <a:solidFill>
-            <a:srgbClr val="F1F4EF"/>
-          </a:solidFill>
-          <a:ln w="9525">
-            <a:solidFill>
-              <a:srgbClr val="DCE4DA"/>
-            </a:solidFill>
-            <a:prstDash val="solid"/>
-          </a:ln>
-        </p:spPr>
-      </p:sp>
-      <p:sp>
-        <p:nvSpPr>
-          <p:cNvPr id="20" name="Shape 18"/>
-          <p:cNvSpPr/>
-          <p:nvPr/>
-        </p:nvSpPr>
-        <p:spPr>
-          <a:xfrm>
-            <a:off x="9280931" y="2103120"/>
-            <a:ext cx="566928" cy="566928"/>
-          </a:xfrm>
-          <a:prstGeom prst="ellipse">
-            <a:avLst/>
-          </a:prstGeom>
-          <a:solidFill>
-            <a:srgbClr val="1F5C3A"/>
-          </a:solidFill>
-          <a:ln/>
-        </p:spPr>
-      </p:sp>
-      <p:sp>
-        <p:nvSpPr>
-          <p:cNvPr id="21" name="Text 19"/>
-          <p:cNvSpPr txBox="1"/>
-          <p:nvPr/>
-        </p:nvSpPr>
-        <p:spPr>
-          <a:xfrm>
-            <a:off x="9280931" y="2103120"/>
-            <a:ext cx="566928" cy="566928"/>
-          </a:xfrm>
-          <a:prstGeom prst="rect">
-            <a:avLst/>
-          </a:prstGeom>
-          <a:noFill/>
-          <a:ln/>
-        </p:spPr>
-        <p:txBody>
-          <a:bodyPr wrap="square" lIns="0" tIns="0" rIns="0" bIns="0" rtlCol="0" anchor="ctr"/>
-          <a:lstStyle/>
-          <a:p>
-            <a:pPr algn="ctr" indent="0" marL="0">
-              <a:buNone/>
-            </a:pPr>
-            <a:r>
-              <a:rPr lang="en-US" sz="1600" b="1" dirty="0">
-                <a:solidFill>
-                  <a:srgbClr val="FFFFFF"/>
-                </a:solidFill>
-                <a:latin typeface="Cambria" pitchFamily="34" charset="0"/>
-                <a:ea typeface="Cambria" pitchFamily="34" charset="-122"/>
-                <a:cs typeface="Cambria" pitchFamily="34" charset="-120"/>
-              </a:rPr>
-              <a:t>4</a:t>
-            </a:r>
-            <a:endParaRPr lang="en-US" sz="1600" dirty="0"/>
-          </a:p>
-        </p:txBody>
-      </p:sp>
-      <p:sp>
-        <p:nvSpPr>
-          <p:cNvPr id="22" name="Text 20"/>
-          <p:cNvSpPr txBox="1"/>
-          <p:nvPr/>
-        </p:nvSpPr>
-        <p:spPr>
-          <a:xfrm>
-            <a:off x="9280931" y="2788920"/>
-            <a:ext cx="2087804" cy="457200"/>
-          </a:xfrm>
-          <a:prstGeom prst="rect">
-            <a:avLst/>
-          </a:prstGeom>
-          <a:noFill/>
-          <a:ln/>
-        </p:spPr>
-        <p:txBody>
-          <a:bodyPr wrap="square" lIns="0" tIns="0" rIns="0" bIns="0" rtlCol="0" anchor="ctr"/>
-          <a:lstStyle/>
-          <a:p>
-            <a:pPr algn="l" indent="0" marL="0">
-              <a:buNone/>
-            </a:pPr>
-            <a:r>
-              <a:rPr lang="en-US" sz="1400" b="1" dirty="0">
-                <a:solidFill>
-                  <a:srgbClr val="1F5C3A"/>
-                </a:solidFill>
-                <a:latin typeface="Cambria" pitchFamily="34" charset="0"/>
-                <a:ea typeface="Cambria" pitchFamily="34" charset="-122"/>
-                <a:cs typeface="Cambria" pitchFamily="34" charset="-120"/>
-              </a:rPr>
-              <a:t>Extension</a:t>
-            </a:r>
-            <a:endParaRPr lang="en-US" sz="1400" dirty="0"/>
-          </a:p>
-        </p:txBody>
-      </p:sp>
-      <p:sp>
-        <p:nvSpPr>
-          <p:cNvPr id="23" name="Text 21"/>
-          <p:cNvSpPr txBox="1"/>
-          <p:nvPr/>
-        </p:nvSpPr>
-        <p:spPr>
-          <a:xfrm>
-            <a:off x="9280931" y="3291840"/>
-            <a:ext cx="2087804" cy="1234440"/>
-          </a:xfrm>
-          <a:prstGeom prst="rect">
-            <a:avLst/>
-          </a:prstGeom>
-          <a:noFill/>
-          <a:ln/>
-        </p:spPr>
-        <p:txBody>
-          <a:bodyPr wrap="square" lIns="0" tIns="0" rIns="0" bIns="0" rtlCol="0" anchor="t"/>
-          <a:lstStyle/>
-          <a:p>
-            <a:pPr algn="l" indent="0" marL="0">
+              <a:t>Oasis en situation de stress hydrique structurel, moins de 100 mm de pluie par an.</a:t>
+            </a:r>
+            <a:endParaRPr lang="en-US" sz="1150" dirty="0"/>
+          </a:p>
+          <a:p>
+            <a:pPr algn="l" marL="342900" indent="-342900">
               <a:lnSpc>
-                <a:spcPct val="120000"/>
+                <a:spcPct val="116000"/>
               </a:lnSpc>
-              <a:buNone/>
-            </a:pPr>
-            <a:r>
-              <a:rPr lang="en-US" sz="1200" dirty="0">
+              <a:spcAft>
+                <a:spcPts val="700"/>
+              </a:spcAft>
+              <a:buSzPct val="100000"/>
+              <a:buChar char="•"/>
+            </a:pPr>
+            <a:r>
+              <a:rPr lang="en-US" sz="1150" dirty="0">
                 <a:solidFill>
                   <a:srgbClr val="33423A"/>
                 </a:solidFill>
@@ -7164,57 +6973,39 @@
                 <a:ea typeface="Calibri" pitchFamily="34" charset="-122"/>
                 <a:cs typeface="Calibri" pitchFamily="34" charset="-120"/>
               </a:rPr>
-              <a:t>Généralisation progressive aux autres parcelles sur la base des résultats constatés.</a:t>
-            </a:r>
-            <a:endParaRPr lang="en-US" sz="1200" dirty="0"/>
-          </a:p>
-        </p:txBody>
-      </p:sp>
-      <p:sp>
-        <p:nvSpPr>
-          <p:cNvPr id="24" name="Text 22"/>
-          <p:cNvSpPr txBox="1"/>
-          <p:nvPr/>
-        </p:nvSpPr>
-        <p:spPr>
-          <a:xfrm>
-            <a:off x="594360" y="4983480"/>
-            <a:ext cx="11002975" cy="822960"/>
-          </a:xfrm>
-          <a:prstGeom prst="rect">
-            <a:avLst/>
-          </a:prstGeom>
-          <a:noFill/>
-          <a:ln/>
-        </p:spPr>
-        <p:txBody>
-          <a:bodyPr wrap="square" lIns="0" tIns="0" rIns="0" bIns="0" rtlCol="0" anchor="t"/>
-          <a:lstStyle/>
-          <a:p>
-            <a:pPr algn="l" indent="0" marL="0">
+              <a:t>Enjeu de préservation autant que de rendement : lutte contre l'ensablement.</a:t>
+            </a:r>
+            <a:endParaRPr lang="en-US" sz="1150" dirty="0"/>
+          </a:p>
+          <a:p>
+            <a:pPr algn="l" marL="342900" indent="-342900">
               <a:lnSpc>
-                <a:spcPct val="125000"/>
+                <a:spcPct val="116000"/>
               </a:lnSpc>
-              <a:buNone/>
-            </a:pPr>
-            <a:r>
-              <a:rPr lang="en-US" sz="1250" i="1" dirty="0">
-                <a:solidFill>
-                  <a:srgbClr val="6B7C72"/>
-                </a:solidFill>
-                <a:latin typeface="Calibri" pitchFamily="34" charset="0"/>
-                <a:ea typeface="Calibri" pitchFamily="34" charset="-122"/>
-                <a:cs typeface="Calibri" pitchFamily="34" charset="-120"/>
-              </a:rPr>
-              <a:t>La règle de dosage est la même partout : 3 grammes par litre de terre utile. Ce qui change d'un terrain à l'autre, c'est le volume de terre effectivement exploré par les racines.</a:t>
-            </a:r>
-            <a:endParaRPr lang="en-US" sz="1250" dirty="0"/>
-          </a:p>
-        </p:txBody>
-      </p:sp>
-      <p:sp>
-        <p:nvSpPr>
-          <p:cNvPr id="25" name="Text 23"/>
+              <a:spcAft>
+                <a:spcPts val="700"/>
+              </a:spcAft>
+              <a:buSzPct val="100000"/>
+              <a:buChar char="•"/>
+            </a:pPr>
+            <a:r>
+              <a:rPr lang="en-US" sz="1150" dirty="0">
+                <a:solidFill>
+                  <a:srgbClr val="33423A"/>
+                </a:solidFill>
+                <a:latin typeface="Calibri" pitchFamily="34" charset="0"/>
+                <a:ea typeface="Calibri" pitchFamily="34" charset="-122"/>
+                <a:cs typeface="Calibri" pitchFamily="34" charset="-120"/>
+              </a:rPr>
+              <a:t>Filières à forte valeur unitaire — datte de bouche, huile d'argan.</a:t>
+            </a:r>
+            <a:endParaRPr lang="en-US" sz="1150" dirty="0"/>
+          </a:p>
+        </p:txBody>
+      </p:sp>
+      <p:sp>
+        <p:nvSpPr>
+          <p:cNvPr id="19" name="Text 14"/>
           <p:cNvSpPr txBox="1"/>
           <p:nvPr/>
         </p:nvSpPr>
@@ -7255,7 +7046,7 @@
       </p:sp>
       <p:sp>
         <p:nvSpPr>
-          <p:cNvPr id="26" name="Text 24"/>
+          <p:cNvPr id="20" name="Text 15"/>
           <p:cNvSpPr txBox="1"/>
           <p:nvPr/>
         </p:nvSpPr>
@@ -7359,7 +7150,7 @@
                 <a:ea typeface="Calibri" pitchFamily="34" charset="-122"/>
                 <a:cs typeface="Calibri" pitchFamily="34" charset="-120"/>
               </a:rPr>
-              <a:t>Travailler ensemble</a:t>
+              <a:t>COMMENT NOUS PROCÉDONS</a:t>
             </a:r>
             <a:endParaRPr lang="en-US" sz="1150" dirty="0"/>
           </a:p>
@@ -7398,7 +7189,7 @@
                 <a:ea typeface="Cambria" pitchFamily="34" charset="-122"/>
                 <a:cs typeface="Cambria" pitchFamily="34" charset="-120"/>
               </a:rPr>
-              <a:t>Un partenaire local pour le Maroc</a:t>
+              <a:t>Un déploiement par étapes, mesuré à chaque palier</a:t>
             </a:r>
             <a:endParaRPr lang="en-US" sz="3000" dirty="0"/>
           </a:p>
@@ -7523,7 +7314,7 @@
                 <a:ea typeface="Cambria" pitchFamily="34" charset="-122"/>
                 <a:cs typeface="Cambria" pitchFamily="34" charset="-120"/>
               </a:rPr>
-              <a:t>Distribution</a:t>
+              <a:t>Diagnostic</a:t>
             </a:r>
             <a:endParaRPr lang="en-US" sz="1400" dirty="0"/>
           </a:p>
@@ -7565,7 +7356,7 @@
                 <a:ea typeface="Calibri" pitchFamily="34" charset="-122"/>
                 <a:cs typeface="Calibri" pitchFamily="34" charset="-120"/>
               </a:rPr>
-              <a:t>Exclusivité territoriale et stock de lancement pour la première saison commerciale.</a:t>
+              <a:t>Analyse du sol, du mode d'irrigation et de la culture. Aucun engagement à ce stade.</a:t>
             </a:r>
             <a:endParaRPr lang="en-US" sz="1200" dirty="0"/>
           </a:p>
@@ -7690,7 +7481,7 @@
                 <a:ea typeface="Cambria" pitchFamily="34" charset="-122"/>
                 <a:cs typeface="Cambria" pitchFamily="34" charset="-120"/>
               </a:rPr>
-              <a:t>Formation</a:t>
+              <a:t>Parcelle témoin</a:t>
             </a:r>
             <a:endParaRPr lang="en-US" sz="1400" dirty="0"/>
           </a:p>
@@ -7732,7 +7523,7 @@
                 <a:ea typeface="Calibri" pitchFamily="34" charset="-122"/>
                 <a:cs typeface="Calibri" pitchFamily="34" charset="-120"/>
               </a:rPr>
-              <a:t>Formation technique des équipes, protocoles de dosage et mises à jour à chaque saison.</a:t>
+              <a:t>Un essai comparatif sur une parcelle, avec parcelle témoin conduite à l'identique.</a:t>
             </a:r>
             <a:endParaRPr lang="en-US" sz="1200" dirty="0"/>
           </a:p>
@@ -7857,7 +7648,7 @@
                 <a:ea typeface="Cambria" pitchFamily="34" charset="-122"/>
                 <a:cs typeface="Cambria" pitchFamily="34" charset="-120"/>
               </a:rPr>
-              <a:t>Essais conjoints</a:t>
+              <a:t>Mesure</a:t>
             </a:r>
             <a:endParaRPr lang="en-US" sz="1400" dirty="0"/>
           </a:p>
@@ -7899,7 +7690,7 @@
                 <a:ea typeface="Calibri" pitchFamily="34" charset="-122"/>
                 <a:cs typeface="Calibri" pitchFamily="34" charset="-120"/>
               </a:rPr>
-              <a:t>Parcelles de démonstration avec témoin, résultats partagés avec les producteurs.</a:t>
+              <a:t>Relevés de consommation et de rendement sur un cycle cultural complet.</a:t>
             </a:r>
             <a:endParaRPr lang="en-US" sz="1200" dirty="0"/>
           </a:p>
@@ -8024,7 +7815,7 @@
                 <a:ea typeface="Cambria" pitchFamily="34" charset="-122"/>
                 <a:cs typeface="Cambria" pitchFamily="34" charset="-120"/>
               </a:rPr>
-              <a:t>Institutions</a:t>
+              <a:t>Extension</a:t>
             </a:r>
             <a:endParaRPr lang="en-US" sz="1400" dirty="0"/>
           </a:p>
@@ -8066,7 +7857,7 @@
                 <a:ea typeface="Calibri" pitchFamily="34" charset="-122"/>
                 <a:cs typeface="Calibri" pitchFamily="34" charset="-120"/>
               </a:rPr>
-              <a:t>Dialogue avec le ministère de l'Agriculture et les programmes de sécurité alimentaire.</a:t>
+              <a:t>Généralisation progressive aux autres parcelles sur la base des résultats constatés.</a:t>
             </a:r>
             <a:endParaRPr lang="en-US" sz="1200" dirty="0"/>
           </a:p>
@@ -8108,7 +7899,7 @@
                 <a:ea typeface="Calibri" pitchFamily="34" charset="-122"/>
                 <a:cs typeface="Calibri" pitchFamily="34" charset="-120"/>
               </a:rPr>
-              <a:t>Le cadre s'adapte au territoire : un importateur, un distributeur d'intrants ou un groupement de producteurs peut porter le partenariat.</a:t>
+              <a:t>La règle de dosage est la même partout : 3 grammes par litre de terre utile. Ce qui change d'un terrain à l'autre, c'est le volume de terre effectivement exploré par les racines.</a:t>
             </a:r>
             <a:endParaRPr lang="en-US" sz="1250" dirty="0"/>
           </a:p>
@@ -8261,7 +8052,7 @@
                 <a:ea typeface="Calibri" pitchFamily="34" charset="-122"/>
                 <a:cs typeface="Calibri" pitchFamily="34" charset="-120"/>
               </a:rPr>
-              <a:t>CE QU'IL FAUT ANTICIPER</a:t>
+              <a:t>Travailler ensemble</a:t>
             </a:r>
             <a:endParaRPr lang="en-US" sz="1150" dirty="0"/>
           </a:p>
@@ -8300,7 +8091,7 @@
                 <a:ea typeface="Cambria" pitchFamily="34" charset="-122"/>
                 <a:cs typeface="Cambria" pitchFamily="34" charset="-120"/>
               </a:rPr>
-              <a:t>Risques identifiés et réponses</a:t>
+              <a:t>Un partenaire local pour le Maroc</a:t>
             </a:r>
             <a:endParaRPr lang="en-US" sz="3000" dirty="0"/>
           </a:p>
@@ -8308,332 +8099,18 @@
       </p:sp>
       <p:sp>
         <p:nvSpPr>
-          <p:cNvPr id="4" name="Text 2"/>
-          <p:cNvSpPr txBox="1"/>
-          <p:nvPr/>
-        </p:nvSpPr>
-        <p:spPr>
-          <a:xfrm>
-            <a:off x="594360" y="1783080"/>
-            <a:ext cx="5227168" cy="411480"/>
-          </a:xfrm>
-          <a:prstGeom prst="rect">
-            <a:avLst/>
-          </a:prstGeom>
-          <a:noFill/>
-          <a:ln/>
-        </p:spPr>
-        <p:txBody>
-          <a:bodyPr wrap="square" lIns="0" tIns="0" rIns="0" bIns="0" rtlCol="0" anchor="ctr"/>
-          <a:lstStyle/>
-          <a:p>
-            <a:pPr algn="l" indent="0" marL="0">
-              <a:buNone/>
-            </a:pPr>
-            <a:r>
-              <a:rPr lang="en-US" sz="1600" b="1" dirty="0">
-                <a:solidFill>
-                  <a:srgbClr val="1F5C3A"/>
-                </a:solidFill>
-                <a:latin typeface="Cambria" pitchFamily="34" charset="0"/>
-                <a:ea typeface="Cambria" pitchFamily="34" charset="-122"/>
-                <a:cs typeface="Cambria" pitchFamily="34" charset="-120"/>
-              </a:rPr>
-              <a:t>Risques</a:t>
-            </a:r>
-            <a:endParaRPr lang="en-US" sz="1600" dirty="0"/>
-          </a:p>
-        </p:txBody>
-      </p:sp>
-      <p:sp>
-        <p:nvSpPr>
-          <p:cNvPr id="5" name="Text 3"/>
-          <p:cNvSpPr txBox="1"/>
-          <p:nvPr/>
-        </p:nvSpPr>
-        <p:spPr>
-          <a:xfrm>
-            <a:off x="594360" y="2286000"/>
-            <a:ext cx="5227168" cy="2468880"/>
-          </a:xfrm>
-          <a:prstGeom prst="rect">
-            <a:avLst/>
-          </a:prstGeom>
-          <a:noFill/>
-          <a:ln/>
-        </p:spPr>
-        <p:txBody>
-          <a:bodyPr wrap="square" lIns="0" tIns="0" rIns="0" bIns="0" rtlCol="0" anchor="t"/>
-          <a:lstStyle/>
-          <a:p>
-            <a:pPr algn="l" marL="342900" indent="-342900">
-              <a:lnSpc>
-                <a:spcPct val="122000"/>
-              </a:lnSpc>
-              <a:spcAft>
-                <a:spcPts val="1000"/>
-              </a:spcAft>
-              <a:buSzPct val="100000"/>
-              <a:buChar char="•"/>
-            </a:pPr>
-            <a:r>
-              <a:rPr lang="en-US" sz="1350" dirty="0">
-                <a:solidFill>
-                  <a:srgbClr val="33423A"/>
-                </a:solidFill>
-                <a:latin typeface="Calibri" pitchFamily="34" charset="0"/>
-                <a:ea typeface="Calibri" pitchFamily="34" charset="-122"/>
-                <a:cs typeface="Calibri" pitchFamily="34" charset="-120"/>
-              </a:rPr>
-              <a:t>Variabilité interannuelle de la pluviométrie : une campagne humide masque l'intérêt du produit.</a:t>
-            </a:r>
-            <a:endParaRPr lang="en-US" sz="1350" dirty="0"/>
-          </a:p>
-          <a:p>
-            <a:pPr algn="l" marL="342900" indent="-342900">
-              <a:lnSpc>
-                <a:spcPct val="122000"/>
-              </a:lnSpc>
-              <a:spcAft>
-                <a:spcPts val="1000"/>
-              </a:spcAft>
-              <a:buSzPct val="100000"/>
-              <a:buChar char="•"/>
-            </a:pPr>
-            <a:r>
-              <a:rPr lang="en-US" sz="1350" dirty="0">
-                <a:solidFill>
-                  <a:srgbClr val="33423A"/>
-                </a:solidFill>
-                <a:latin typeface="Calibri" pitchFamily="34" charset="0"/>
-                <a:ea typeface="Calibri" pitchFamily="34" charset="-122"/>
-                <a:cs typeface="Calibri" pitchFamily="34" charset="-120"/>
-              </a:rPr>
-              <a:t>Fragmentation du foncier : beaucoup de petites exploitations, décision d'achat dispersée.</a:t>
-            </a:r>
-            <a:endParaRPr lang="en-US" sz="1350" dirty="0"/>
-          </a:p>
-          <a:p>
-            <a:pPr algn="l" marL="342900" indent="-342900">
-              <a:lnSpc>
-                <a:spcPct val="122000"/>
-              </a:lnSpc>
-              <a:spcAft>
-                <a:spcPts val="1000"/>
-              </a:spcAft>
-              <a:buSzPct val="100000"/>
-              <a:buChar char="•"/>
-            </a:pPr>
-            <a:r>
-              <a:rPr lang="en-US" sz="1350" dirty="0">
-                <a:solidFill>
-                  <a:srgbClr val="33423A"/>
-                </a:solidFill>
-                <a:latin typeface="Calibri" pitchFamily="34" charset="0"/>
-                <a:ea typeface="Calibri" pitchFamily="34" charset="-122"/>
-                <a:cs typeface="Calibri" pitchFamily="34" charset="-120"/>
-              </a:rPr>
-              <a:t>Concurrence de solutions bas de gamme à base de sodium, qui ont laissé de mauvais souvenirs.</a:t>
-            </a:r>
-            <a:endParaRPr lang="en-US" sz="1350" dirty="0"/>
-          </a:p>
-          <a:p>
-            <a:pPr algn="l" marL="342900" indent="-342900">
-              <a:lnSpc>
-                <a:spcPct val="122000"/>
-              </a:lnSpc>
-              <a:spcAft>
-                <a:spcPts val="1000"/>
-              </a:spcAft>
-              <a:buSzPct val="100000"/>
-              <a:buChar char="•"/>
-            </a:pPr>
-            <a:r>
-              <a:rPr lang="en-US" sz="1350" dirty="0">
-                <a:solidFill>
-                  <a:srgbClr val="33423A"/>
-                </a:solidFill>
-                <a:latin typeface="Calibri" pitchFamily="34" charset="0"/>
-                <a:ea typeface="Calibri" pitchFamily="34" charset="-122"/>
-                <a:cs typeface="Calibri" pitchFamily="34" charset="-120"/>
-              </a:rPr>
-              <a:t>Trésorerie des exploitations après plusieurs campagnes déficitaires.</a:t>
-            </a:r>
-            <a:endParaRPr lang="en-US" sz="1350" dirty="0"/>
-          </a:p>
-        </p:txBody>
-      </p:sp>
-      <p:sp>
-        <p:nvSpPr>
-          <p:cNvPr id="6" name="Text 4"/>
-          <p:cNvSpPr txBox="1"/>
-          <p:nvPr/>
-        </p:nvSpPr>
-        <p:spPr>
-          <a:xfrm>
-            <a:off x="6370168" y="1783080"/>
-            <a:ext cx="5227168" cy="411480"/>
-          </a:xfrm>
-          <a:prstGeom prst="rect">
-            <a:avLst/>
-          </a:prstGeom>
-          <a:noFill/>
-          <a:ln/>
-        </p:spPr>
-        <p:txBody>
-          <a:bodyPr wrap="square" lIns="0" tIns="0" rIns="0" bIns="0" rtlCol="0" anchor="ctr"/>
-          <a:lstStyle/>
-          <a:p>
-            <a:pPr algn="l" indent="0" marL="0">
-              <a:buNone/>
-            </a:pPr>
-            <a:r>
-              <a:rPr lang="en-US" sz="1600" b="1" dirty="0">
-                <a:solidFill>
-                  <a:srgbClr val="1F5C3A"/>
-                </a:solidFill>
-                <a:latin typeface="Cambria" pitchFamily="34" charset="0"/>
-                <a:ea typeface="Cambria" pitchFamily="34" charset="-122"/>
-                <a:cs typeface="Cambria" pitchFamily="34" charset="-120"/>
-              </a:rPr>
-              <a:t>Réponses</a:t>
-            </a:r>
-            <a:endParaRPr lang="en-US" sz="1600" dirty="0"/>
-          </a:p>
-        </p:txBody>
-      </p:sp>
-      <p:sp>
-        <p:nvSpPr>
-          <p:cNvPr id="7" name="Text 5"/>
-          <p:cNvSpPr txBox="1"/>
-          <p:nvPr/>
-        </p:nvSpPr>
-        <p:spPr>
-          <a:xfrm>
-            <a:off x="6370168" y="2286000"/>
-            <a:ext cx="5227168" cy="2468880"/>
-          </a:xfrm>
-          <a:prstGeom prst="rect">
-            <a:avLst/>
-          </a:prstGeom>
-          <a:noFill/>
-          <a:ln/>
-        </p:spPr>
-        <p:txBody>
-          <a:bodyPr wrap="square" lIns="0" tIns="0" rIns="0" bIns="0" rtlCol="0" anchor="t"/>
-          <a:lstStyle/>
-          <a:p>
-            <a:pPr algn="l" marL="342900" indent="-342900">
-              <a:lnSpc>
-                <a:spcPct val="122000"/>
-              </a:lnSpc>
-              <a:spcAft>
-                <a:spcPts val="1000"/>
-              </a:spcAft>
-              <a:buSzPct val="100000"/>
-              <a:buChar char="•"/>
-            </a:pPr>
-            <a:r>
-              <a:rPr lang="en-US" sz="1350" dirty="0">
-                <a:solidFill>
-                  <a:srgbClr val="33423A"/>
-                </a:solidFill>
-                <a:latin typeface="Calibri" pitchFamily="34" charset="0"/>
-                <a:ea typeface="Calibri" pitchFamily="34" charset="-122"/>
-                <a:cs typeface="Calibri" pitchFamily="34" charset="-120"/>
-              </a:rPr>
-              <a:t>Conduire l'essai sur un cycle complet avec parcelle témoin, pour objectiver le gain même en année favorable.</a:t>
-            </a:r>
-            <a:endParaRPr lang="en-US" sz="1350" dirty="0"/>
-          </a:p>
-          <a:p>
-            <a:pPr algn="l" marL="342900" indent="-342900">
-              <a:lnSpc>
-                <a:spcPct val="122000"/>
-              </a:lnSpc>
-              <a:spcAft>
-                <a:spcPts val="1000"/>
-              </a:spcAft>
-              <a:buSzPct val="100000"/>
-              <a:buChar char="•"/>
-            </a:pPr>
-            <a:r>
-              <a:rPr lang="en-US" sz="1350" dirty="0">
-                <a:solidFill>
-                  <a:srgbClr val="33423A"/>
-                </a:solidFill>
-                <a:latin typeface="Calibri" pitchFamily="34" charset="0"/>
-                <a:ea typeface="Calibri" pitchFamily="34" charset="-122"/>
-                <a:cs typeface="Calibri" pitchFamily="34" charset="-120"/>
-              </a:rPr>
-              <a:t>Passer par les coopératives et les groupements, plutôt que par l'exploitation individuelle.</a:t>
-            </a:r>
-            <a:endParaRPr lang="en-US" sz="1350" dirty="0"/>
-          </a:p>
-          <a:p>
-            <a:pPr algn="l" marL="342900" indent="-342900">
-              <a:lnSpc>
-                <a:spcPct val="122000"/>
-              </a:lnSpc>
-              <a:spcAft>
-                <a:spcPts val="1000"/>
-              </a:spcAft>
-              <a:buSzPct val="100000"/>
-              <a:buChar char="•"/>
-            </a:pPr>
-            <a:r>
-              <a:rPr lang="en-US" sz="1350" dirty="0">
-                <a:solidFill>
-                  <a:srgbClr val="33423A"/>
-                </a:solidFill>
-                <a:latin typeface="Calibri" pitchFamily="34" charset="0"/>
-                <a:ea typeface="Calibri" pitchFamily="34" charset="-122"/>
-                <a:cs typeface="Calibri" pitchFamily="34" charset="-120"/>
-              </a:rPr>
-              <a:t>Documenter la différence de formulation : potassium et non sodium, compatible cultures alimentaires.</a:t>
-            </a:r>
-            <a:endParaRPr lang="en-US" sz="1350" dirty="0"/>
-          </a:p>
-          <a:p>
-            <a:pPr algn="l" marL="342900" indent="-342900">
-              <a:lnSpc>
-                <a:spcPct val="122000"/>
-              </a:lnSpc>
-              <a:spcAft>
-                <a:spcPts val="1000"/>
-              </a:spcAft>
-              <a:buSzPct val="100000"/>
-              <a:buChar char="•"/>
-            </a:pPr>
-            <a:r>
-              <a:rPr lang="en-US" sz="1350" dirty="0">
-                <a:solidFill>
-                  <a:srgbClr val="33423A"/>
-                </a:solidFill>
-                <a:latin typeface="Calibri" pitchFamily="34" charset="0"/>
-                <a:ea typeface="Calibri" pitchFamily="34" charset="-122"/>
-                <a:cs typeface="Calibri" pitchFamily="34" charset="-120"/>
-              </a:rPr>
-              <a:t>Étaler l'engagement : la durée d'effet de 3 à 4 ans amortit le coût sur plusieurs campagnes.</a:t>
-            </a:r>
-            <a:endParaRPr lang="en-US" sz="1350" dirty="0"/>
-          </a:p>
-        </p:txBody>
-      </p:sp>
-      <p:sp>
-        <p:nvSpPr>
-          <p:cNvPr id="8" name="Shape 6"/>
+          <p:cNvPr id="4" name="Shape 2"/>
           <p:cNvSpPr/>
           <p:nvPr/>
         </p:nvSpPr>
         <p:spPr>
           <a:xfrm>
-            <a:off x="594360" y="4846320"/>
-            <a:ext cx="11002975" cy="960120"/>
+            <a:off x="594360" y="1874520"/>
+            <a:ext cx="2545004" cy="2834640"/>
           </a:xfrm>
           <a:prstGeom prst="roundRect">
             <a:avLst>
-              <a:gd name="adj" fmla="val 7619"/>
+              <a:gd name="adj" fmla="val 3593"/>
             </a:avLst>
           </a:prstGeom>
           <a:solidFill>
@@ -8649,14 +8126,112 @@
       </p:sp>
       <p:sp>
         <p:nvSpPr>
-          <p:cNvPr id="9" name="Text 7"/>
-          <p:cNvSpPr txBox="1"/>
-          <p:nvPr/>
-        </p:nvSpPr>
-        <p:spPr>
-          <a:xfrm>
-            <a:off x="822960" y="4983480"/>
-            <a:ext cx="10545775" cy="713232"/>
+          <p:cNvPr id="5" name="Shape 3"/>
+          <p:cNvSpPr/>
+          <p:nvPr/>
+        </p:nvSpPr>
+        <p:spPr>
+          <a:xfrm>
+            <a:off x="822960" y="2103120"/>
+            <a:ext cx="566928" cy="566928"/>
+          </a:xfrm>
+          <a:prstGeom prst="ellipse">
+            <a:avLst/>
+          </a:prstGeom>
+          <a:solidFill>
+            <a:srgbClr val="1F5C3A"/>
+          </a:solidFill>
+          <a:ln/>
+        </p:spPr>
+      </p:sp>
+      <p:sp>
+        <p:nvSpPr>
+          <p:cNvPr id="6" name="Text 4"/>
+          <p:cNvSpPr txBox="1"/>
+          <p:nvPr/>
+        </p:nvSpPr>
+        <p:spPr>
+          <a:xfrm>
+            <a:off x="822960" y="2103120"/>
+            <a:ext cx="566928" cy="566928"/>
+          </a:xfrm>
+          <a:prstGeom prst="rect">
+            <a:avLst/>
+          </a:prstGeom>
+          <a:noFill/>
+          <a:ln/>
+        </p:spPr>
+        <p:txBody>
+          <a:bodyPr wrap="square" lIns="0" tIns="0" rIns="0" bIns="0" rtlCol="0" anchor="ctr"/>
+          <a:lstStyle/>
+          <a:p>
+            <a:pPr algn="ctr" indent="0" marL="0">
+              <a:buNone/>
+            </a:pPr>
+            <a:r>
+              <a:rPr lang="en-US" sz="1600" b="1" dirty="0">
+                <a:solidFill>
+                  <a:srgbClr val="FFFFFF"/>
+                </a:solidFill>
+                <a:latin typeface="Cambria" pitchFamily="34" charset="0"/>
+                <a:ea typeface="Cambria" pitchFamily="34" charset="-122"/>
+                <a:cs typeface="Cambria" pitchFamily="34" charset="-120"/>
+              </a:rPr>
+              <a:t>1</a:t>
+            </a:r>
+            <a:endParaRPr lang="en-US" sz="1600" dirty="0"/>
+          </a:p>
+        </p:txBody>
+      </p:sp>
+      <p:sp>
+        <p:nvSpPr>
+          <p:cNvPr id="7" name="Text 5"/>
+          <p:cNvSpPr txBox="1"/>
+          <p:nvPr/>
+        </p:nvSpPr>
+        <p:spPr>
+          <a:xfrm>
+            <a:off x="822960" y="2788920"/>
+            <a:ext cx="2087804" cy="457200"/>
+          </a:xfrm>
+          <a:prstGeom prst="rect">
+            <a:avLst/>
+          </a:prstGeom>
+          <a:noFill/>
+          <a:ln/>
+        </p:spPr>
+        <p:txBody>
+          <a:bodyPr wrap="square" lIns="0" tIns="0" rIns="0" bIns="0" rtlCol="0" anchor="ctr"/>
+          <a:lstStyle/>
+          <a:p>
+            <a:pPr algn="l" indent="0" marL="0">
+              <a:buNone/>
+            </a:pPr>
+            <a:r>
+              <a:rPr lang="en-US" sz="1400" b="1" dirty="0">
+                <a:solidFill>
+                  <a:srgbClr val="1F5C3A"/>
+                </a:solidFill>
+                <a:latin typeface="Cambria" pitchFamily="34" charset="0"/>
+                <a:ea typeface="Cambria" pitchFamily="34" charset="-122"/>
+                <a:cs typeface="Cambria" pitchFamily="34" charset="-120"/>
+              </a:rPr>
+              <a:t>Distribution</a:t>
+            </a:r>
+            <a:endParaRPr lang="en-US" sz="1400" dirty="0"/>
+          </a:p>
+        </p:txBody>
+      </p:sp>
+      <p:sp>
+        <p:nvSpPr>
+          <p:cNvPr id="8" name="Text 6"/>
+          <p:cNvSpPr txBox="1"/>
+          <p:nvPr/>
+        </p:nvSpPr>
+        <p:spPr>
+          <a:xfrm>
+            <a:off x="822960" y="3291840"/>
+            <a:ext cx="2087804" cy="1234440"/>
           </a:xfrm>
           <a:prstGeom prst="rect">
             <a:avLst/>
@@ -8670,12 +8245,555 @@
           <a:p>
             <a:pPr algn="l" indent="0" marL="0">
               <a:lnSpc>
-                <a:spcPct val="118000"/>
+                <a:spcPct val="120000"/>
               </a:lnSpc>
               <a:buNone/>
             </a:pPr>
             <a:r>
-              <a:rPr lang="en-US" sz="1100" dirty="0">
+              <a:rPr lang="en-US" sz="1200" dirty="0">
+                <a:solidFill>
+                  <a:srgbClr val="33423A"/>
+                </a:solidFill>
+                <a:latin typeface="Calibri" pitchFamily="34" charset="0"/>
+                <a:ea typeface="Calibri" pitchFamily="34" charset="-122"/>
+                <a:cs typeface="Calibri" pitchFamily="34" charset="-120"/>
+              </a:rPr>
+              <a:t>Exclusivité territoriale et stock de lancement pour la première saison commerciale.</a:t>
+            </a:r>
+            <a:endParaRPr lang="en-US" sz="1200" dirty="0"/>
+          </a:p>
+        </p:txBody>
+      </p:sp>
+      <p:sp>
+        <p:nvSpPr>
+          <p:cNvPr id="9" name="Shape 7"/>
+          <p:cNvSpPr/>
+          <p:nvPr/>
+        </p:nvSpPr>
+        <p:spPr>
+          <a:xfrm>
+            <a:off x="3413684" y="1874520"/>
+            <a:ext cx="2545004" cy="2834640"/>
+          </a:xfrm>
+          <a:prstGeom prst="roundRect">
+            <a:avLst>
+              <a:gd name="adj" fmla="val 3593"/>
+            </a:avLst>
+          </a:prstGeom>
+          <a:solidFill>
+            <a:srgbClr val="F1F4EF"/>
+          </a:solidFill>
+          <a:ln w="9525">
+            <a:solidFill>
+              <a:srgbClr val="DCE4DA"/>
+            </a:solidFill>
+            <a:prstDash val="solid"/>
+          </a:ln>
+        </p:spPr>
+      </p:sp>
+      <p:sp>
+        <p:nvSpPr>
+          <p:cNvPr id="10" name="Shape 8"/>
+          <p:cNvSpPr/>
+          <p:nvPr/>
+        </p:nvSpPr>
+        <p:spPr>
+          <a:xfrm>
+            <a:off x="3642284" y="2103120"/>
+            <a:ext cx="566928" cy="566928"/>
+          </a:xfrm>
+          <a:prstGeom prst="ellipse">
+            <a:avLst/>
+          </a:prstGeom>
+          <a:solidFill>
+            <a:srgbClr val="1F5C3A"/>
+          </a:solidFill>
+          <a:ln/>
+        </p:spPr>
+      </p:sp>
+      <p:sp>
+        <p:nvSpPr>
+          <p:cNvPr id="11" name="Text 9"/>
+          <p:cNvSpPr txBox="1"/>
+          <p:nvPr/>
+        </p:nvSpPr>
+        <p:spPr>
+          <a:xfrm>
+            <a:off x="3642284" y="2103120"/>
+            <a:ext cx="566928" cy="566928"/>
+          </a:xfrm>
+          <a:prstGeom prst="rect">
+            <a:avLst/>
+          </a:prstGeom>
+          <a:noFill/>
+          <a:ln/>
+        </p:spPr>
+        <p:txBody>
+          <a:bodyPr wrap="square" lIns="0" tIns="0" rIns="0" bIns="0" rtlCol="0" anchor="ctr"/>
+          <a:lstStyle/>
+          <a:p>
+            <a:pPr algn="ctr" indent="0" marL="0">
+              <a:buNone/>
+            </a:pPr>
+            <a:r>
+              <a:rPr lang="en-US" sz="1600" b="1" dirty="0">
+                <a:solidFill>
+                  <a:srgbClr val="FFFFFF"/>
+                </a:solidFill>
+                <a:latin typeface="Cambria" pitchFamily="34" charset="0"/>
+                <a:ea typeface="Cambria" pitchFamily="34" charset="-122"/>
+                <a:cs typeface="Cambria" pitchFamily="34" charset="-120"/>
+              </a:rPr>
+              <a:t>2</a:t>
+            </a:r>
+            <a:endParaRPr lang="en-US" sz="1600" dirty="0"/>
+          </a:p>
+        </p:txBody>
+      </p:sp>
+      <p:sp>
+        <p:nvSpPr>
+          <p:cNvPr id="12" name="Text 10"/>
+          <p:cNvSpPr txBox="1"/>
+          <p:nvPr/>
+        </p:nvSpPr>
+        <p:spPr>
+          <a:xfrm>
+            <a:off x="3642284" y="2788920"/>
+            <a:ext cx="2087804" cy="457200"/>
+          </a:xfrm>
+          <a:prstGeom prst="rect">
+            <a:avLst/>
+          </a:prstGeom>
+          <a:noFill/>
+          <a:ln/>
+        </p:spPr>
+        <p:txBody>
+          <a:bodyPr wrap="square" lIns="0" tIns="0" rIns="0" bIns="0" rtlCol="0" anchor="ctr"/>
+          <a:lstStyle/>
+          <a:p>
+            <a:pPr algn="l" indent="0" marL="0">
+              <a:buNone/>
+            </a:pPr>
+            <a:r>
+              <a:rPr lang="en-US" sz="1400" b="1" dirty="0">
+                <a:solidFill>
+                  <a:srgbClr val="1F5C3A"/>
+                </a:solidFill>
+                <a:latin typeface="Cambria" pitchFamily="34" charset="0"/>
+                <a:ea typeface="Cambria" pitchFamily="34" charset="-122"/>
+                <a:cs typeface="Cambria" pitchFamily="34" charset="-120"/>
+              </a:rPr>
+              <a:t>Formation</a:t>
+            </a:r>
+            <a:endParaRPr lang="en-US" sz="1400" dirty="0"/>
+          </a:p>
+        </p:txBody>
+      </p:sp>
+      <p:sp>
+        <p:nvSpPr>
+          <p:cNvPr id="13" name="Text 11"/>
+          <p:cNvSpPr txBox="1"/>
+          <p:nvPr/>
+        </p:nvSpPr>
+        <p:spPr>
+          <a:xfrm>
+            <a:off x="3642284" y="3291840"/>
+            <a:ext cx="2087804" cy="1234440"/>
+          </a:xfrm>
+          <a:prstGeom prst="rect">
+            <a:avLst/>
+          </a:prstGeom>
+          <a:noFill/>
+          <a:ln/>
+        </p:spPr>
+        <p:txBody>
+          <a:bodyPr wrap="square" lIns="0" tIns="0" rIns="0" bIns="0" rtlCol="0" anchor="t"/>
+          <a:lstStyle/>
+          <a:p>
+            <a:pPr algn="l" indent="0" marL="0">
+              <a:lnSpc>
+                <a:spcPct val="120000"/>
+              </a:lnSpc>
+              <a:buNone/>
+            </a:pPr>
+            <a:r>
+              <a:rPr lang="en-US" sz="1200" dirty="0">
+                <a:solidFill>
+                  <a:srgbClr val="33423A"/>
+                </a:solidFill>
+                <a:latin typeface="Calibri" pitchFamily="34" charset="0"/>
+                <a:ea typeface="Calibri" pitchFamily="34" charset="-122"/>
+                <a:cs typeface="Calibri" pitchFamily="34" charset="-120"/>
+              </a:rPr>
+              <a:t>Formation technique des équipes, protocoles de dosage et mises à jour à chaque saison.</a:t>
+            </a:r>
+            <a:endParaRPr lang="en-US" sz="1200" dirty="0"/>
+          </a:p>
+        </p:txBody>
+      </p:sp>
+      <p:sp>
+        <p:nvSpPr>
+          <p:cNvPr id="14" name="Shape 12"/>
+          <p:cNvSpPr/>
+          <p:nvPr/>
+        </p:nvSpPr>
+        <p:spPr>
+          <a:xfrm>
+            <a:off x="6233008" y="1874520"/>
+            <a:ext cx="2545004" cy="2834640"/>
+          </a:xfrm>
+          <a:prstGeom prst="roundRect">
+            <a:avLst>
+              <a:gd name="adj" fmla="val 3593"/>
+            </a:avLst>
+          </a:prstGeom>
+          <a:solidFill>
+            <a:srgbClr val="F1F4EF"/>
+          </a:solidFill>
+          <a:ln w="9525">
+            <a:solidFill>
+              <a:srgbClr val="DCE4DA"/>
+            </a:solidFill>
+            <a:prstDash val="solid"/>
+          </a:ln>
+        </p:spPr>
+      </p:sp>
+      <p:sp>
+        <p:nvSpPr>
+          <p:cNvPr id="15" name="Shape 13"/>
+          <p:cNvSpPr/>
+          <p:nvPr/>
+        </p:nvSpPr>
+        <p:spPr>
+          <a:xfrm>
+            <a:off x="6461608" y="2103120"/>
+            <a:ext cx="566928" cy="566928"/>
+          </a:xfrm>
+          <a:prstGeom prst="ellipse">
+            <a:avLst/>
+          </a:prstGeom>
+          <a:solidFill>
+            <a:srgbClr val="1F5C3A"/>
+          </a:solidFill>
+          <a:ln/>
+        </p:spPr>
+      </p:sp>
+      <p:sp>
+        <p:nvSpPr>
+          <p:cNvPr id="16" name="Text 14"/>
+          <p:cNvSpPr txBox="1"/>
+          <p:nvPr/>
+        </p:nvSpPr>
+        <p:spPr>
+          <a:xfrm>
+            <a:off x="6461608" y="2103120"/>
+            <a:ext cx="566928" cy="566928"/>
+          </a:xfrm>
+          <a:prstGeom prst="rect">
+            <a:avLst/>
+          </a:prstGeom>
+          <a:noFill/>
+          <a:ln/>
+        </p:spPr>
+        <p:txBody>
+          <a:bodyPr wrap="square" lIns="0" tIns="0" rIns="0" bIns="0" rtlCol="0" anchor="ctr"/>
+          <a:lstStyle/>
+          <a:p>
+            <a:pPr algn="ctr" indent="0" marL="0">
+              <a:buNone/>
+            </a:pPr>
+            <a:r>
+              <a:rPr lang="en-US" sz="1600" b="1" dirty="0">
+                <a:solidFill>
+                  <a:srgbClr val="FFFFFF"/>
+                </a:solidFill>
+                <a:latin typeface="Cambria" pitchFamily="34" charset="0"/>
+                <a:ea typeface="Cambria" pitchFamily="34" charset="-122"/>
+                <a:cs typeface="Cambria" pitchFamily="34" charset="-120"/>
+              </a:rPr>
+              <a:t>3</a:t>
+            </a:r>
+            <a:endParaRPr lang="en-US" sz="1600" dirty="0"/>
+          </a:p>
+        </p:txBody>
+      </p:sp>
+      <p:sp>
+        <p:nvSpPr>
+          <p:cNvPr id="17" name="Text 15"/>
+          <p:cNvSpPr txBox="1"/>
+          <p:nvPr/>
+        </p:nvSpPr>
+        <p:spPr>
+          <a:xfrm>
+            <a:off x="6461608" y="2788920"/>
+            <a:ext cx="2087804" cy="457200"/>
+          </a:xfrm>
+          <a:prstGeom prst="rect">
+            <a:avLst/>
+          </a:prstGeom>
+          <a:noFill/>
+          <a:ln/>
+        </p:spPr>
+        <p:txBody>
+          <a:bodyPr wrap="square" lIns="0" tIns="0" rIns="0" bIns="0" rtlCol="0" anchor="ctr"/>
+          <a:lstStyle/>
+          <a:p>
+            <a:pPr algn="l" indent="0" marL="0">
+              <a:buNone/>
+            </a:pPr>
+            <a:r>
+              <a:rPr lang="en-US" sz="1400" b="1" dirty="0">
+                <a:solidFill>
+                  <a:srgbClr val="1F5C3A"/>
+                </a:solidFill>
+                <a:latin typeface="Cambria" pitchFamily="34" charset="0"/>
+                <a:ea typeface="Cambria" pitchFamily="34" charset="-122"/>
+                <a:cs typeface="Cambria" pitchFamily="34" charset="-120"/>
+              </a:rPr>
+              <a:t>Essais conjoints</a:t>
+            </a:r>
+            <a:endParaRPr lang="en-US" sz="1400" dirty="0"/>
+          </a:p>
+        </p:txBody>
+      </p:sp>
+      <p:sp>
+        <p:nvSpPr>
+          <p:cNvPr id="18" name="Text 16"/>
+          <p:cNvSpPr txBox="1"/>
+          <p:nvPr/>
+        </p:nvSpPr>
+        <p:spPr>
+          <a:xfrm>
+            <a:off x="6461608" y="3291840"/>
+            <a:ext cx="2087804" cy="1234440"/>
+          </a:xfrm>
+          <a:prstGeom prst="rect">
+            <a:avLst/>
+          </a:prstGeom>
+          <a:noFill/>
+          <a:ln/>
+        </p:spPr>
+        <p:txBody>
+          <a:bodyPr wrap="square" lIns="0" tIns="0" rIns="0" bIns="0" rtlCol="0" anchor="t"/>
+          <a:lstStyle/>
+          <a:p>
+            <a:pPr algn="l" indent="0" marL="0">
+              <a:lnSpc>
+                <a:spcPct val="120000"/>
+              </a:lnSpc>
+              <a:buNone/>
+            </a:pPr>
+            <a:r>
+              <a:rPr lang="en-US" sz="1200" dirty="0">
+                <a:solidFill>
+                  <a:srgbClr val="33423A"/>
+                </a:solidFill>
+                <a:latin typeface="Calibri" pitchFamily="34" charset="0"/>
+                <a:ea typeface="Calibri" pitchFamily="34" charset="-122"/>
+                <a:cs typeface="Calibri" pitchFamily="34" charset="-120"/>
+              </a:rPr>
+              <a:t>Parcelles de démonstration avec témoin, résultats partagés avec les producteurs.</a:t>
+            </a:r>
+            <a:endParaRPr lang="en-US" sz="1200" dirty="0"/>
+          </a:p>
+        </p:txBody>
+      </p:sp>
+      <p:sp>
+        <p:nvSpPr>
+          <p:cNvPr id="19" name="Shape 17"/>
+          <p:cNvSpPr/>
+          <p:nvPr/>
+        </p:nvSpPr>
+        <p:spPr>
+          <a:xfrm>
+            <a:off x="9052331" y="1874520"/>
+            <a:ext cx="2545004" cy="2834640"/>
+          </a:xfrm>
+          <a:prstGeom prst="roundRect">
+            <a:avLst>
+              <a:gd name="adj" fmla="val 3593"/>
+            </a:avLst>
+          </a:prstGeom>
+          <a:solidFill>
+            <a:srgbClr val="F1F4EF"/>
+          </a:solidFill>
+          <a:ln w="9525">
+            <a:solidFill>
+              <a:srgbClr val="DCE4DA"/>
+            </a:solidFill>
+            <a:prstDash val="solid"/>
+          </a:ln>
+        </p:spPr>
+      </p:sp>
+      <p:sp>
+        <p:nvSpPr>
+          <p:cNvPr id="20" name="Shape 18"/>
+          <p:cNvSpPr/>
+          <p:nvPr/>
+        </p:nvSpPr>
+        <p:spPr>
+          <a:xfrm>
+            <a:off x="9280931" y="2103120"/>
+            <a:ext cx="566928" cy="566928"/>
+          </a:xfrm>
+          <a:prstGeom prst="ellipse">
+            <a:avLst/>
+          </a:prstGeom>
+          <a:solidFill>
+            <a:srgbClr val="1F5C3A"/>
+          </a:solidFill>
+          <a:ln/>
+        </p:spPr>
+      </p:sp>
+      <p:sp>
+        <p:nvSpPr>
+          <p:cNvPr id="21" name="Text 19"/>
+          <p:cNvSpPr txBox="1"/>
+          <p:nvPr/>
+        </p:nvSpPr>
+        <p:spPr>
+          <a:xfrm>
+            <a:off x="9280931" y="2103120"/>
+            <a:ext cx="566928" cy="566928"/>
+          </a:xfrm>
+          <a:prstGeom prst="rect">
+            <a:avLst/>
+          </a:prstGeom>
+          <a:noFill/>
+          <a:ln/>
+        </p:spPr>
+        <p:txBody>
+          <a:bodyPr wrap="square" lIns="0" tIns="0" rIns="0" bIns="0" rtlCol="0" anchor="ctr"/>
+          <a:lstStyle/>
+          <a:p>
+            <a:pPr algn="ctr" indent="0" marL="0">
+              <a:buNone/>
+            </a:pPr>
+            <a:r>
+              <a:rPr lang="en-US" sz="1600" b="1" dirty="0">
+                <a:solidFill>
+                  <a:srgbClr val="FFFFFF"/>
+                </a:solidFill>
+                <a:latin typeface="Cambria" pitchFamily="34" charset="0"/>
+                <a:ea typeface="Cambria" pitchFamily="34" charset="-122"/>
+                <a:cs typeface="Cambria" pitchFamily="34" charset="-120"/>
+              </a:rPr>
+              <a:t>4</a:t>
+            </a:r>
+            <a:endParaRPr lang="en-US" sz="1600" dirty="0"/>
+          </a:p>
+        </p:txBody>
+      </p:sp>
+      <p:sp>
+        <p:nvSpPr>
+          <p:cNvPr id="22" name="Text 20"/>
+          <p:cNvSpPr txBox="1"/>
+          <p:nvPr/>
+        </p:nvSpPr>
+        <p:spPr>
+          <a:xfrm>
+            <a:off x="9280931" y="2788920"/>
+            <a:ext cx="2087804" cy="457200"/>
+          </a:xfrm>
+          <a:prstGeom prst="rect">
+            <a:avLst/>
+          </a:prstGeom>
+          <a:noFill/>
+          <a:ln/>
+        </p:spPr>
+        <p:txBody>
+          <a:bodyPr wrap="square" lIns="0" tIns="0" rIns="0" bIns="0" rtlCol="0" anchor="ctr"/>
+          <a:lstStyle/>
+          <a:p>
+            <a:pPr algn="l" indent="0" marL="0">
+              <a:buNone/>
+            </a:pPr>
+            <a:r>
+              <a:rPr lang="en-US" sz="1400" b="1" dirty="0">
+                <a:solidFill>
+                  <a:srgbClr val="1F5C3A"/>
+                </a:solidFill>
+                <a:latin typeface="Cambria" pitchFamily="34" charset="0"/>
+                <a:ea typeface="Cambria" pitchFamily="34" charset="-122"/>
+                <a:cs typeface="Cambria" pitchFamily="34" charset="-120"/>
+              </a:rPr>
+              <a:t>Institutions</a:t>
+            </a:r>
+            <a:endParaRPr lang="en-US" sz="1400" dirty="0"/>
+          </a:p>
+        </p:txBody>
+      </p:sp>
+      <p:sp>
+        <p:nvSpPr>
+          <p:cNvPr id="23" name="Text 21"/>
+          <p:cNvSpPr txBox="1"/>
+          <p:nvPr/>
+        </p:nvSpPr>
+        <p:spPr>
+          <a:xfrm>
+            <a:off x="9280931" y="3291840"/>
+            <a:ext cx="2087804" cy="1234440"/>
+          </a:xfrm>
+          <a:prstGeom prst="rect">
+            <a:avLst/>
+          </a:prstGeom>
+          <a:noFill/>
+          <a:ln/>
+        </p:spPr>
+        <p:txBody>
+          <a:bodyPr wrap="square" lIns="0" tIns="0" rIns="0" bIns="0" rtlCol="0" anchor="t"/>
+          <a:lstStyle/>
+          <a:p>
+            <a:pPr algn="l" indent="0" marL="0">
+              <a:lnSpc>
+                <a:spcPct val="120000"/>
+              </a:lnSpc>
+              <a:buNone/>
+            </a:pPr>
+            <a:r>
+              <a:rPr lang="en-US" sz="1200" dirty="0">
+                <a:solidFill>
+                  <a:srgbClr val="33423A"/>
+                </a:solidFill>
+                <a:latin typeface="Calibri" pitchFamily="34" charset="0"/>
+                <a:ea typeface="Calibri" pitchFamily="34" charset="-122"/>
+                <a:cs typeface="Calibri" pitchFamily="34" charset="-120"/>
+              </a:rPr>
+              <a:t>Dialogue avec le ministère de l'Agriculture et les programmes de sécurité alimentaire.</a:t>
+            </a:r>
+            <a:endParaRPr lang="en-US" sz="1200" dirty="0"/>
+          </a:p>
+        </p:txBody>
+      </p:sp>
+      <p:sp>
+        <p:nvSpPr>
+          <p:cNvPr id="24" name="Text 22"/>
+          <p:cNvSpPr txBox="1"/>
+          <p:nvPr/>
+        </p:nvSpPr>
+        <p:spPr>
+          <a:xfrm>
+            <a:off x="594360" y="4983480"/>
+            <a:ext cx="11002975" cy="822960"/>
+          </a:xfrm>
+          <a:prstGeom prst="rect">
+            <a:avLst/>
+          </a:prstGeom>
+          <a:noFill/>
+          <a:ln/>
+        </p:spPr>
+        <p:txBody>
+          <a:bodyPr wrap="square" lIns="0" tIns="0" rIns="0" bIns="0" rtlCol="0" anchor="t"/>
+          <a:lstStyle/>
+          <a:p>
+            <a:pPr algn="l" indent="0" marL="0">
+              <a:lnSpc>
+                <a:spcPct val="125000"/>
+              </a:lnSpc>
+              <a:buNone/>
+            </a:pPr>
+            <a:r>
+              <a:rPr lang="en-US" sz="1250" i="1" dirty="0">
                 <a:solidFill>
                   <a:srgbClr val="6B7C72"/>
                 </a:solidFill>
@@ -8683,15 +8801,15 @@
                 <a:ea typeface="Calibri" pitchFamily="34" charset="-122"/>
                 <a:cs typeface="Calibri" pitchFamily="34" charset="-120"/>
               </a:rPr>
-              <a:t>Analyse acrylamide (laboratoire Polymex, ISO 9001, teneur inférieure à 3,0 µg/g), screening REACH / SVHC (SGS) et certificat SOHISCERT valable jusqu'au 4 septembre 2027 : disponibles sur demande.</a:t>
-            </a:r>
-            <a:endParaRPr lang="en-US" sz="1100" dirty="0"/>
-          </a:p>
-        </p:txBody>
-      </p:sp>
-      <p:sp>
-        <p:nvSpPr>
-          <p:cNvPr id="10" name="Text 8"/>
+              <a:t>Le cadre s'adapte au territoire : un importateur, un distributeur d'intrants ou un groupement de producteurs peut porter le partenariat.</a:t>
+            </a:r>
+            <a:endParaRPr lang="en-US" sz="1250" dirty="0"/>
+          </a:p>
+        </p:txBody>
+      </p:sp>
+      <p:sp>
+        <p:nvSpPr>
+          <p:cNvPr id="25" name="Text 23"/>
           <p:cNvSpPr txBox="1"/>
           <p:nvPr/>
         </p:nvSpPr>
@@ -8732,7 +8850,7 @@
       </p:sp>
       <p:sp>
         <p:nvSpPr>
-          <p:cNvPr id="11" name="Text 9"/>
+          <p:cNvPr id="26" name="Text 24"/>
           <p:cNvSpPr txBox="1"/>
           <p:nvPr/>
         </p:nvSpPr>
@@ -8836,7 +8954,7 @@
                 <a:ea typeface="Calibri" pitchFamily="34" charset="-122"/>
                 <a:cs typeface="Calibri" pitchFamily="34" charset="-120"/>
               </a:rPr>
-              <a:t>Sources</a:t>
+              <a:t>CE QU'IL FAUT ANTICIPER</a:t>
             </a:r>
             <a:endParaRPr lang="en-US" sz="1150" dirty="0"/>
           </a:p>
@@ -8875,7 +8993,7 @@
                 <a:ea typeface="Cambria" pitchFamily="34" charset="-122"/>
                 <a:cs typeface="Cambria" pitchFamily="34" charset="-120"/>
               </a:rPr>
-              <a:t>Sources et hypothèses de travail</a:t>
+              <a:t>Risques identifiés et réponses</a:t>
             </a:r>
             <a:endParaRPr lang="en-US" sz="3000" dirty="0"/>
           </a:p>
@@ -8914,7 +9032,7 @@
                 <a:ea typeface="Cambria" pitchFamily="34" charset="-122"/>
                 <a:cs typeface="Cambria" pitchFamily="34" charset="-120"/>
               </a:rPr>
-              <a:t>Sources principales</a:t>
+              <a:t>Risques</a:t>
             </a:r>
             <a:endParaRPr lang="en-US" sz="1600" dirty="0"/>
           </a:p>
@@ -8960,7 +9078,7 @@
                 <a:ea typeface="Calibri" pitchFamily="34" charset="-122"/>
                 <a:cs typeface="Calibri" pitchFamily="34" charset="-120"/>
               </a:rPr>
-              <a:t>Haut-Commissariat au Plan (HCP) : comptes nationaux et emploi.</a:t>
+              <a:t>Variabilité interannuelle de la pluviométrie : une campagne humide masque l'intérêt du produit.</a:t>
             </a:r>
             <a:endParaRPr lang="en-US" sz="1350" dirty="0"/>
           </a:p>
@@ -8984,7 +9102,7 @@
                 <a:ea typeface="Calibri" pitchFamily="34" charset="-122"/>
                 <a:cs typeface="Calibri" pitchFamily="34" charset="-120"/>
               </a:rPr>
-              <a:t>Ministère de l'Agriculture : stratégie Génération Green, statistiques des filières.</a:t>
+              <a:t>Fragmentation du foncier : beaucoup de petites exploitations, décision d'achat dispersée.</a:t>
             </a:r>
             <a:endParaRPr lang="en-US" sz="1350" dirty="0"/>
           </a:p>
@@ -9008,7 +9126,7 @@
                 <a:ea typeface="Calibri" pitchFamily="34" charset="-122"/>
                 <a:cs typeface="Calibri" pitchFamily="34" charset="-120"/>
               </a:rPr>
-              <a:t>Office des changes : exportations agroalimentaires.</a:t>
+              <a:t>Concurrence de solutions bas de gamme à base de sodium, qui ont laissé de mauvais souvenirs.</a:t>
             </a:r>
             <a:endParaRPr lang="en-US" sz="1350" dirty="0"/>
           </a:p>
@@ -9032,10 +9150,71 @@
                 <a:ea typeface="Calibri" pitchFamily="34" charset="-122"/>
                 <a:cs typeface="Calibri" pitchFamily="34" charset="-120"/>
               </a:rPr>
-              <a:t>FAO (FAOSTAT, AQUASTAT) et Banque mondiale (WDI).</a:t>
+              <a:t>Trésorerie des exploitations après plusieurs campagnes déficitaires.</a:t>
             </a:r>
             <a:endParaRPr lang="en-US" sz="1350" dirty="0"/>
           </a:p>
+        </p:txBody>
+      </p:sp>
+      <p:sp>
+        <p:nvSpPr>
+          <p:cNvPr id="6" name="Text 4"/>
+          <p:cNvSpPr txBox="1"/>
+          <p:nvPr/>
+        </p:nvSpPr>
+        <p:spPr>
+          <a:xfrm>
+            <a:off x="6370168" y="1783080"/>
+            <a:ext cx="5227168" cy="411480"/>
+          </a:xfrm>
+          <a:prstGeom prst="rect">
+            <a:avLst/>
+          </a:prstGeom>
+          <a:noFill/>
+          <a:ln/>
+        </p:spPr>
+        <p:txBody>
+          <a:bodyPr wrap="square" lIns="0" tIns="0" rIns="0" bIns="0" rtlCol="0" anchor="ctr"/>
+          <a:lstStyle/>
+          <a:p>
+            <a:pPr algn="l" indent="0" marL="0">
+              <a:buNone/>
+            </a:pPr>
+            <a:r>
+              <a:rPr lang="en-US" sz="1600" b="1" dirty="0">
+                <a:solidFill>
+                  <a:srgbClr val="1F5C3A"/>
+                </a:solidFill>
+                <a:latin typeface="Cambria" pitchFamily="34" charset="0"/>
+                <a:ea typeface="Cambria" pitchFamily="34" charset="-122"/>
+                <a:cs typeface="Cambria" pitchFamily="34" charset="-120"/>
+              </a:rPr>
+              <a:t>Réponses</a:t>
+            </a:r>
+            <a:endParaRPr lang="en-US" sz="1600" dirty="0"/>
+          </a:p>
+        </p:txBody>
+      </p:sp>
+      <p:sp>
+        <p:nvSpPr>
+          <p:cNvPr id="7" name="Text 5"/>
+          <p:cNvSpPr txBox="1"/>
+          <p:nvPr/>
+        </p:nvSpPr>
+        <p:spPr>
+          <a:xfrm>
+            <a:off x="6370168" y="2286000"/>
+            <a:ext cx="5227168" cy="2468880"/>
+          </a:xfrm>
+          <a:prstGeom prst="rect">
+            <a:avLst/>
+          </a:prstGeom>
+          <a:noFill/>
+          <a:ln/>
+        </p:spPr>
+        <p:txBody>
+          <a:bodyPr wrap="square" lIns="0" tIns="0" rIns="0" bIns="0" rtlCol="0" anchor="t"/>
+          <a:lstStyle/>
           <a:p>
             <a:pPr algn="l" marL="342900" indent="-342900">
               <a:lnSpc>
@@ -9056,71 +9235,10 @@
                 <a:ea typeface="Calibri" pitchFamily="34" charset="-122"/>
                 <a:cs typeface="Calibri" pitchFamily="34" charset="-120"/>
               </a:rPr>
-              <a:t>Photographies : Hamza EL GHAZALI (CC BY-SA 4.0) — via Wikimedia Commons.</a:t>
+              <a:t>Conduire l'essai sur un cycle complet avec parcelle témoin, pour objectiver le gain même en année favorable.</a:t>
             </a:r>
             <a:endParaRPr lang="en-US" sz="1350" dirty="0"/>
           </a:p>
-        </p:txBody>
-      </p:sp>
-      <p:sp>
-        <p:nvSpPr>
-          <p:cNvPr id="6" name="Text 4"/>
-          <p:cNvSpPr txBox="1"/>
-          <p:nvPr/>
-        </p:nvSpPr>
-        <p:spPr>
-          <a:xfrm>
-            <a:off x="6370168" y="1783080"/>
-            <a:ext cx="5227168" cy="411480"/>
-          </a:xfrm>
-          <a:prstGeom prst="rect">
-            <a:avLst/>
-          </a:prstGeom>
-          <a:noFill/>
-          <a:ln/>
-        </p:spPr>
-        <p:txBody>
-          <a:bodyPr wrap="square" lIns="0" tIns="0" rIns="0" bIns="0" rtlCol="0" anchor="ctr"/>
-          <a:lstStyle/>
-          <a:p>
-            <a:pPr algn="l" indent="0" marL="0">
-              <a:buNone/>
-            </a:pPr>
-            <a:r>
-              <a:rPr lang="en-US" sz="1600" b="1" dirty="0">
-                <a:solidFill>
-                  <a:srgbClr val="1F5C3A"/>
-                </a:solidFill>
-                <a:latin typeface="Cambria" pitchFamily="34" charset="0"/>
-                <a:ea typeface="Cambria" pitchFamily="34" charset="-122"/>
-                <a:cs typeface="Cambria" pitchFamily="34" charset="-120"/>
-              </a:rPr>
-              <a:t>Hypothèses de travail</a:t>
-            </a:r>
-            <a:endParaRPr lang="en-US" sz="1600" dirty="0"/>
-          </a:p>
-        </p:txBody>
-      </p:sp>
-      <p:sp>
-        <p:nvSpPr>
-          <p:cNvPr id="7" name="Text 5"/>
-          <p:cNvSpPr txBox="1"/>
-          <p:nvPr/>
-        </p:nvSpPr>
-        <p:spPr>
-          <a:xfrm>
-            <a:off x="6370168" y="2286000"/>
-            <a:ext cx="5227168" cy="2468880"/>
-          </a:xfrm>
-          <a:prstGeom prst="rect">
-            <a:avLst/>
-          </a:prstGeom>
-          <a:noFill/>
-          <a:ln/>
-        </p:spPr>
-        <p:txBody>
-          <a:bodyPr wrap="square" lIns="0" tIns="0" rIns="0" bIns="0" rtlCol="0" anchor="t"/>
-          <a:lstStyle/>
           <a:p>
             <a:pPr algn="l" marL="342900" indent="-342900">
               <a:lnSpc>
@@ -9141,7 +9259,7 @@
                 <a:ea typeface="Calibri" pitchFamily="34" charset="-122"/>
                 <a:cs typeface="Calibri" pitchFamily="34" charset="-120"/>
               </a:rPr>
-              <a:t>Les chiffres sont des ordres de grandeur arrondis, tirés des dernières données publiques disponibles.</a:t>
+              <a:t>Passer par les coopératives et les groupements, plutôt que par l'exploitation individuelle.</a:t>
             </a:r>
             <a:endParaRPr lang="en-US" sz="1350" dirty="0"/>
           </a:p>
@@ -9165,7 +9283,7 @@
                 <a:ea typeface="Calibri" pitchFamily="34" charset="-122"/>
                 <a:cs typeface="Calibri" pitchFamily="34" charset="-120"/>
               </a:rPr>
-              <a:t>Les gains d'eau et de rendement sont indicatifs et varient selon le sol, le climat et la culture.</a:t>
+              <a:t>Documenter la différence de formulation : potassium et non sodium, compatible cultures alimentaires.</a:t>
             </a:r>
             <a:endParaRPr lang="en-US" sz="1350" dirty="0"/>
           </a:p>
@@ -9189,7 +9307,7 @@
                 <a:ea typeface="Calibri" pitchFamily="34" charset="-122"/>
                 <a:cs typeface="Calibri" pitchFamily="34" charset="-120"/>
               </a:rPr>
-              <a:t>Document de travail commercial : chiffres à actualiser avant toute soumission officielle.</a:t>
+              <a:t>Étaler l'engagement : la durée d'effet de 3 à 4 ans amortit le coût sur plusieurs campagnes.</a:t>
             </a:r>
             <a:endParaRPr lang="en-US" sz="1350" dirty="0"/>
           </a:p>
@@ -9258,7 +9376,7 @@
                 <a:ea typeface="Calibri" pitchFamily="34" charset="-122"/>
                 <a:cs typeface="Calibri" pitchFamily="34" charset="-120"/>
               </a:rPr>
-              <a:t>Rapports d'essais, certificats (SOHISCERT, analyses Polymex et SGS) et fiches techniques : disponibles sur demande.</a:t>
+              <a:t>Analyse acrylamide (laboratoire Polymex, ISO 9001, teneur inférieure à 3,0 µg/g), screening REACH / SVHC (SGS) et certificat SOHISCERT valable jusqu'au 4 septembre 2027 : disponibles sur demande.</a:t>
             </a:r>
             <a:endParaRPr lang="en-US" sz="1100" dirty="0"/>
           </a:p>
@@ -9357,6 +9475,605 @@
 <file path=ppt/slides/slide18.xml><?xml version="1.0" encoding="utf-8"?>
 <p:sld xmlns:a="http://schemas.openxmlformats.org/drawingml/2006/main" xmlns:r="http://schemas.openxmlformats.org/officeDocument/2006/relationships" xmlns:p="http://schemas.openxmlformats.org/presentationml/2006/main">
   <p:cSld name="Slide 18">
+    <p:bg>
+      <p:bgPr>
+        <a:solidFill>
+          <a:srgbClr val="FBFAF6"/>
+        </a:solidFill>
+      </p:bgPr>
+    </p:bg>
+    <p:spTree>
+      <p:nvGrpSpPr>
+        <p:cNvPr id="1" name=""/>
+        <p:cNvGrpSpPr/>
+        <p:nvPr/>
+      </p:nvGrpSpPr>
+      <p:grpSpPr>
+        <a:xfrm>
+          <a:off x="0" y="0"/>
+          <a:ext cx="0" cy="0"/>
+          <a:chOff x="0" y="0"/>
+          <a:chExt cx="0" cy="0"/>
+        </a:xfrm>
+      </p:grpSpPr>
+      <p:sp>
+        <p:nvSpPr>
+          <p:cNvPr id="2" name="Text 0"/>
+          <p:cNvSpPr txBox="1"/>
+          <p:nvPr/>
+        </p:nvSpPr>
+        <p:spPr>
+          <a:xfrm>
+            <a:off x="594360" y="411480"/>
+            <a:ext cx="10515600" cy="274320"/>
+          </a:xfrm>
+          <a:prstGeom prst="rect">
+            <a:avLst/>
+          </a:prstGeom>
+          <a:noFill/>
+          <a:ln/>
+        </p:spPr>
+        <p:txBody>
+          <a:bodyPr wrap="square" lIns="0" tIns="0" rIns="0" bIns="0" rtlCol="0" anchor="ctr"/>
+          <a:lstStyle/>
+          <a:p>
+            <a:pPr algn="l" indent="0" marL="0">
+              <a:buNone/>
+            </a:pPr>
+            <a:r>
+              <a:rPr lang="en-US" sz="1150" b="1" spc="200" kern="0" dirty="0">
+                <a:solidFill>
+                  <a:srgbClr val="E3B23C"/>
+                </a:solidFill>
+                <a:latin typeface="Calibri" pitchFamily="34" charset="0"/>
+                <a:ea typeface="Calibri" pitchFamily="34" charset="-122"/>
+                <a:cs typeface="Calibri" pitchFamily="34" charset="-120"/>
+              </a:rPr>
+              <a:t>Sources</a:t>
+            </a:r>
+            <a:endParaRPr lang="en-US" sz="1150" dirty="0"/>
+          </a:p>
+        </p:txBody>
+      </p:sp>
+      <p:sp>
+        <p:nvSpPr>
+          <p:cNvPr id="3" name="Text 1"/>
+          <p:cNvSpPr txBox="1"/>
+          <p:nvPr/>
+        </p:nvSpPr>
+        <p:spPr>
+          <a:xfrm>
+            <a:off x="594360" y="731520"/>
+            <a:ext cx="10881360" cy="731520"/>
+          </a:xfrm>
+          <a:prstGeom prst="rect">
+            <a:avLst/>
+          </a:prstGeom>
+          <a:noFill/>
+          <a:ln/>
+        </p:spPr>
+        <p:txBody>
+          <a:bodyPr wrap="square" lIns="0" tIns="0" rIns="0" bIns="0" rtlCol="0" anchor="ctr"/>
+          <a:lstStyle/>
+          <a:p>
+            <a:pPr algn="l" indent="0" marL="0">
+              <a:buNone/>
+            </a:pPr>
+            <a:r>
+              <a:rPr lang="en-US" sz="3000" b="1" dirty="0">
+                <a:solidFill>
+                  <a:srgbClr val="123324"/>
+                </a:solidFill>
+                <a:latin typeface="Cambria" pitchFamily="34" charset="0"/>
+                <a:ea typeface="Cambria" pitchFamily="34" charset="-122"/>
+                <a:cs typeface="Cambria" pitchFamily="34" charset="-120"/>
+              </a:rPr>
+              <a:t>Sources et hypothèses de travail</a:t>
+            </a:r>
+            <a:endParaRPr lang="en-US" sz="3000" dirty="0"/>
+          </a:p>
+        </p:txBody>
+      </p:sp>
+      <p:sp>
+        <p:nvSpPr>
+          <p:cNvPr id="4" name="Text 2"/>
+          <p:cNvSpPr txBox="1"/>
+          <p:nvPr/>
+        </p:nvSpPr>
+        <p:spPr>
+          <a:xfrm>
+            <a:off x="594360" y="1783080"/>
+            <a:ext cx="5227168" cy="411480"/>
+          </a:xfrm>
+          <a:prstGeom prst="rect">
+            <a:avLst/>
+          </a:prstGeom>
+          <a:noFill/>
+          <a:ln/>
+        </p:spPr>
+        <p:txBody>
+          <a:bodyPr wrap="square" lIns="0" tIns="0" rIns="0" bIns="0" rtlCol="0" anchor="ctr"/>
+          <a:lstStyle/>
+          <a:p>
+            <a:pPr algn="l" indent="0" marL="0">
+              <a:buNone/>
+            </a:pPr>
+            <a:r>
+              <a:rPr lang="en-US" sz="1600" b="1" dirty="0">
+                <a:solidFill>
+                  <a:srgbClr val="1F5C3A"/>
+                </a:solidFill>
+                <a:latin typeface="Cambria" pitchFamily="34" charset="0"/>
+                <a:ea typeface="Cambria" pitchFamily="34" charset="-122"/>
+                <a:cs typeface="Cambria" pitchFamily="34" charset="-120"/>
+              </a:rPr>
+              <a:t>Sources principales</a:t>
+            </a:r>
+            <a:endParaRPr lang="en-US" sz="1600" dirty="0"/>
+          </a:p>
+        </p:txBody>
+      </p:sp>
+      <p:sp>
+        <p:nvSpPr>
+          <p:cNvPr id="5" name="Text 3"/>
+          <p:cNvSpPr txBox="1"/>
+          <p:nvPr/>
+        </p:nvSpPr>
+        <p:spPr>
+          <a:xfrm>
+            <a:off x="594360" y="2286000"/>
+            <a:ext cx="5227168" cy="2468880"/>
+          </a:xfrm>
+          <a:prstGeom prst="rect">
+            <a:avLst/>
+          </a:prstGeom>
+          <a:noFill/>
+          <a:ln/>
+        </p:spPr>
+        <p:txBody>
+          <a:bodyPr wrap="square" lIns="0" tIns="0" rIns="0" bIns="0" rtlCol="0" anchor="t"/>
+          <a:lstStyle/>
+          <a:p>
+            <a:pPr algn="l" marL="342900" indent="-342900">
+              <a:lnSpc>
+                <a:spcPct val="122000"/>
+              </a:lnSpc>
+              <a:spcAft>
+                <a:spcPts val="1000"/>
+              </a:spcAft>
+              <a:buSzPct val="100000"/>
+              <a:buChar char="•"/>
+            </a:pPr>
+            <a:r>
+              <a:rPr lang="en-US" sz="1350" dirty="0">
+                <a:solidFill>
+                  <a:srgbClr val="33423A"/>
+                </a:solidFill>
+                <a:latin typeface="Calibri" pitchFamily="34" charset="0"/>
+                <a:ea typeface="Calibri" pitchFamily="34" charset="-122"/>
+                <a:cs typeface="Calibri" pitchFamily="34" charset="-120"/>
+              </a:rPr>
+              <a:t>Haut-Commissariat au Plan (HCP) : comptes nationaux et emploi.</a:t>
+            </a:r>
+            <a:endParaRPr lang="en-US" sz="1350" dirty="0"/>
+          </a:p>
+          <a:p>
+            <a:pPr algn="l" marL="342900" indent="-342900">
+              <a:lnSpc>
+                <a:spcPct val="122000"/>
+              </a:lnSpc>
+              <a:spcAft>
+                <a:spcPts val="1000"/>
+              </a:spcAft>
+              <a:buSzPct val="100000"/>
+              <a:buChar char="•"/>
+            </a:pPr>
+            <a:r>
+              <a:rPr lang="en-US" sz="1350" dirty="0">
+                <a:solidFill>
+                  <a:srgbClr val="33423A"/>
+                </a:solidFill>
+                <a:latin typeface="Calibri" pitchFamily="34" charset="0"/>
+                <a:ea typeface="Calibri" pitchFamily="34" charset="-122"/>
+                <a:cs typeface="Calibri" pitchFamily="34" charset="-120"/>
+              </a:rPr>
+              <a:t>Ministère de l'Agriculture : stratégie Génération Green, statistiques des filières.</a:t>
+            </a:r>
+            <a:endParaRPr lang="en-US" sz="1350" dirty="0"/>
+          </a:p>
+          <a:p>
+            <a:pPr algn="l" marL="342900" indent="-342900">
+              <a:lnSpc>
+                <a:spcPct val="122000"/>
+              </a:lnSpc>
+              <a:spcAft>
+                <a:spcPts val="1000"/>
+              </a:spcAft>
+              <a:buSzPct val="100000"/>
+              <a:buChar char="•"/>
+            </a:pPr>
+            <a:r>
+              <a:rPr lang="en-US" sz="1350" dirty="0">
+                <a:solidFill>
+                  <a:srgbClr val="33423A"/>
+                </a:solidFill>
+                <a:latin typeface="Calibri" pitchFamily="34" charset="0"/>
+                <a:ea typeface="Calibri" pitchFamily="34" charset="-122"/>
+                <a:cs typeface="Calibri" pitchFamily="34" charset="-120"/>
+              </a:rPr>
+              <a:t>Office des changes : exportations agroalimentaires.</a:t>
+            </a:r>
+            <a:endParaRPr lang="en-US" sz="1350" dirty="0"/>
+          </a:p>
+          <a:p>
+            <a:pPr algn="l" marL="342900" indent="-342900">
+              <a:lnSpc>
+                <a:spcPct val="122000"/>
+              </a:lnSpc>
+              <a:spcAft>
+                <a:spcPts val="1000"/>
+              </a:spcAft>
+              <a:buSzPct val="100000"/>
+              <a:buChar char="•"/>
+            </a:pPr>
+            <a:r>
+              <a:rPr lang="en-US" sz="1350" dirty="0">
+                <a:solidFill>
+                  <a:srgbClr val="33423A"/>
+                </a:solidFill>
+                <a:latin typeface="Calibri" pitchFamily="34" charset="0"/>
+                <a:ea typeface="Calibri" pitchFamily="34" charset="-122"/>
+                <a:cs typeface="Calibri" pitchFamily="34" charset="-120"/>
+              </a:rPr>
+              <a:t>FAO (FAOSTAT, AQUASTAT) et Banque mondiale (WDI).</a:t>
+            </a:r>
+            <a:endParaRPr lang="en-US" sz="1350" dirty="0"/>
+          </a:p>
+          <a:p>
+            <a:pPr algn="l" marL="342900" indent="-342900">
+              <a:lnSpc>
+                <a:spcPct val="122000"/>
+              </a:lnSpc>
+              <a:spcAft>
+                <a:spcPts val="1000"/>
+              </a:spcAft>
+              <a:buSzPct val="100000"/>
+              <a:buChar char="•"/>
+            </a:pPr>
+            <a:r>
+              <a:rPr lang="en-US" sz="1350" dirty="0">
+                <a:solidFill>
+                  <a:srgbClr val="33423A"/>
+                </a:solidFill>
+                <a:latin typeface="Calibri" pitchFamily="34" charset="0"/>
+                <a:ea typeface="Calibri" pitchFamily="34" charset="-122"/>
+                <a:cs typeface="Calibri" pitchFamily="34" charset="-120"/>
+              </a:rPr>
+              <a:t>UNCCD, Drought in Numbers 2022 : nombre et durée des sécheresses, +29 % depuis 2000 par rapport à 1980–1999.</a:t>
+            </a:r>
+            <a:endParaRPr lang="en-US" sz="1350" dirty="0"/>
+          </a:p>
+          <a:p>
+            <a:pPr algn="l" marL="342900" indent="-342900">
+              <a:lnSpc>
+                <a:spcPct val="122000"/>
+              </a:lnSpc>
+              <a:spcAft>
+                <a:spcPts val="1000"/>
+              </a:spcAft>
+              <a:buSzPct val="100000"/>
+              <a:buChar char="•"/>
+            </a:pPr>
+            <a:r>
+              <a:rPr lang="en-US" sz="1350" dirty="0">
+                <a:solidFill>
+                  <a:srgbClr val="33423A"/>
+                </a:solidFill>
+                <a:latin typeface="Calibri" pitchFamily="34" charset="0"/>
+                <a:ea typeface="Calibri" pitchFamily="34" charset="-122"/>
+                <a:cs typeface="Calibri" pitchFamily="34" charset="-120"/>
+              </a:rPr>
+              <a:t>ONU-Eau / FAO AQUASTAT, indicateur ODD 6.4.2 : définition et seuils du stress hydrique.</a:t>
+            </a:r>
+            <a:endParaRPr lang="en-US" sz="1350" dirty="0"/>
+          </a:p>
+        </p:txBody>
+      </p:sp>
+      <p:sp>
+        <p:nvSpPr>
+          <p:cNvPr id="6" name="Text 4"/>
+          <p:cNvSpPr txBox="1"/>
+          <p:nvPr/>
+        </p:nvSpPr>
+        <p:spPr>
+          <a:xfrm>
+            <a:off x="6370168" y="1783080"/>
+            <a:ext cx="5227168" cy="411480"/>
+          </a:xfrm>
+          <a:prstGeom prst="rect">
+            <a:avLst/>
+          </a:prstGeom>
+          <a:noFill/>
+          <a:ln/>
+        </p:spPr>
+        <p:txBody>
+          <a:bodyPr wrap="square" lIns="0" tIns="0" rIns="0" bIns="0" rtlCol="0" anchor="ctr"/>
+          <a:lstStyle/>
+          <a:p>
+            <a:pPr algn="l" indent="0" marL="0">
+              <a:buNone/>
+            </a:pPr>
+            <a:r>
+              <a:rPr lang="en-US" sz="1600" b="1" dirty="0">
+                <a:solidFill>
+                  <a:srgbClr val="1F5C3A"/>
+                </a:solidFill>
+                <a:latin typeface="Cambria" pitchFamily="34" charset="0"/>
+                <a:ea typeface="Cambria" pitchFamily="34" charset="-122"/>
+                <a:cs typeface="Cambria" pitchFamily="34" charset="-120"/>
+              </a:rPr>
+              <a:t>Hypothèses de travail</a:t>
+            </a:r>
+            <a:endParaRPr lang="en-US" sz="1600" dirty="0"/>
+          </a:p>
+        </p:txBody>
+      </p:sp>
+      <p:sp>
+        <p:nvSpPr>
+          <p:cNvPr id="7" name="Text 5"/>
+          <p:cNvSpPr txBox="1"/>
+          <p:nvPr/>
+        </p:nvSpPr>
+        <p:spPr>
+          <a:xfrm>
+            <a:off x="6370168" y="2286000"/>
+            <a:ext cx="5227168" cy="2468880"/>
+          </a:xfrm>
+          <a:prstGeom prst="rect">
+            <a:avLst/>
+          </a:prstGeom>
+          <a:noFill/>
+          <a:ln/>
+        </p:spPr>
+        <p:txBody>
+          <a:bodyPr wrap="square" lIns="0" tIns="0" rIns="0" bIns="0" rtlCol="0" anchor="t"/>
+          <a:lstStyle/>
+          <a:p>
+            <a:pPr algn="l" marL="342900" indent="-342900">
+              <a:lnSpc>
+                <a:spcPct val="122000"/>
+              </a:lnSpc>
+              <a:spcAft>
+                <a:spcPts val="1000"/>
+              </a:spcAft>
+              <a:buSzPct val="100000"/>
+              <a:buChar char="•"/>
+            </a:pPr>
+            <a:r>
+              <a:rPr lang="en-US" sz="1350" dirty="0">
+                <a:solidFill>
+                  <a:srgbClr val="33423A"/>
+                </a:solidFill>
+                <a:latin typeface="Calibri" pitchFamily="34" charset="0"/>
+                <a:ea typeface="Calibri" pitchFamily="34" charset="-122"/>
+                <a:cs typeface="Calibri" pitchFamily="34" charset="-120"/>
+              </a:rPr>
+              <a:t>Les chiffres sont des ordres de grandeur arrondis, tirés des dernières données publiques disponibles.</a:t>
+            </a:r>
+            <a:endParaRPr lang="en-US" sz="1350" dirty="0"/>
+          </a:p>
+          <a:p>
+            <a:pPr algn="l" marL="342900" indent="-342900">
+              <a:lnSpc>
+                <a:spcPct val="122000"/>
+              </a:lnSpc>
+              <a:spcAft>
+                <a:spcPts val="1000"/>
+              </a:spcAft>
+              <a:buSzPct val="100000"/>
+              <a:buChar char="•"/>
+            </a:pPr>
+            <a:r>
+              <a:rPr lang="en-US" sz="1350" dirty="0">
+                <a:solidFill>
+                  <a:srgbClr val="33423A"/>
+                </a:solidFill>
+                <a:latin typeface="Calibri" pitchFamily="34" charset="0"/>
+                <a:ea typeface="Calibri" pitchFamily="34" charset="-122"/>
+                <a:cs typeface="Calibri" pitchFamily="34" charset="-120"/>
+              </a:rPr>
+              <a:t>Les gains d'eau et de rendement sont indicatifs et varient selon le sol, le climat et la culture.</a:t>
+            </a:r>
+            <a:endParaRPr lang="en-US" sz="1350" dirty="0"/>
+          </a:p>
+          <a:p>
+            <a:pPr algn="l" marL="342900" indent="-342900">
+              <a:lnSpc>
+                <a:spcPct val="122000"/>
+              </a:lnSpc>
+              <a:spcAft>
+                <a:spcPts val="1000"/>
+              </a:spcAft>
+              <a:buSzPct val="100000"/>
+              <a:buChar char="•"/>
+            </a:pPr>
+            <a:r>
+              <a:rPr lang="en-US" sz="1350" dirty="0">
+                <a:solidFill>
+                  <a:srgbClr val="33423A"/>
+                </a:solidFill>
+                <a:latin typeface="Calibri" pitchFamily="34" charset="0"/>
+                <a:ea typeface="Calibri" pitchFamily="34" charset="-122"/>
+                <a:cs typeface="Calibri" pitchFamily="34" charset="-120"/>
+              </a:rPr>
+              <a:t>Document de travail commercial : chiffres à actualiser avant toute soumission officielle.</a:t>
+            </a:r>
+            <a:endParaRPr lang="en-US" sz="1350" dirty="0"/>
+          </a:p>
+        </p:txBody>
+      </p:sp>
+      <p:sp>
+        <p:nvSpPr>
+          <p:cNvPr id="8" name="Shape 6"/>
+          <p:cNvSpPr/>
+          <p:nvPr/>
+        </p:nvSpPr>
+        <p:spPr>
+          <a:xfrm>
+            <a:off x="594360" y="4846320"/>
+            <a:ext cx="11002975" cy="960120"/>
+          </a:xfrm>
+          <a:prstGeom prst="roundRect">
+            <a:avLst>
+              <a:gd name="adj" fmla="val 7619"/>
+            </a:avLst>
+          </a:prstGeom>
+          <a:solidFill>
+            <a:srgbClr val="F1F4EF"/>
+          </a:solidFill>
+          <a:ln w="9525">
+            <a:solidFill>
+              <a:srgbClr val="DCE4DA"/>
+            </a:solidFill>
+            <a:prstDash val="solid"/>
+          </a:ln>
+        </p:spPr>
+      </p:sp>
+      <p:sp>
+        <p:nvSpPr>
+          <p:cNvPr id="9" name="Text 7"/>
+          <p:cNvSpPr txBox="1"/>
+          <p:nvPr/>
+        </p:nvSpPr>
+        <p:spPr>
+          <a:xfrm>
+            <a:off x="822960" y="4983480"/>
+            <a:ext cx="10545775" cy="713232"/>
+          </a:xfrm>
+          <a:prstGeom prst="rect">
+            <a:avLst/>
+          </a:prstGeom>
+          <a:noFill/>
+          <a:ln/>
+        </p:spPr>
+        <p:txBody>
+          <a:bodyPr wrap="square" lIns="0" tIns="0" rIns="0" bIns="0" rtlCol="0" anchor="t"/>
+          <a:lstStyle/>
+          <a:p>
+            <a:pPr algn="l" indent="0" marL="0">
+              <a:lnSpc>
+                <a:spcPct val="118000"/>
+              </a:lnSpc>
+              <a:buNone/>
+            </a:pPr>
+            <a:r>
+              <a:rPr lang="en-US" sz="1100" dirty="0">
+                <a:solidFill>
+                  <a:srgbClr val="6B7C72"/>
+                </a:solidFill>
+                <a:latin typeface="Calibri" pitchFamily="34" charset="0"/>
+                <a:ea typeface="Calibri" pitchFamily="34" charset="-122"/>
+                <a:cs typeface="Calibri" pitchFamily="34" charset="-120"/>
+              </a:rPr>
+              <a:t>Rapports d'essais, certificats (SOHISCERT, analyses Polymex et SGS) et fiches techniques : disponibles sur demande.</a:t>
+            </a:r>
+            <a:endParaRPr lang="en-US" sz="1100" dirty="0"/>
+          </a:p>
+        </p:txBody>
+      </p:sp>
+      <p:sp>
+        <p:nvSpPr>
+          <p:cNvPr id="10" name="Text 8"/>
+          <p:cNvSpPr txBox="1"/>
+          <p:nvPr/>
+        </p:nvSpPr>
+        <p:spPr>
+          <a:xfrm>
+            <a:off x="502920" y="6382512"/>
+            <a:ext cx="8229600" cy="274320"/>
+          </a:xfrm>
+          <a:prstGeom prst="rect">
+            <a:avLst/>
+          </a:prstGeom>
+          <a:noFill/>
+          <a:ln/>
+        </p:spPr>
+        <p:txBody>
+          <a:bodyPr wrap="square" lIns="0" tIns="0" rIns="0" bIns="0" rtlCol="0" anchor="ctr"/>
+          <a:lstStyle/>
+          <a:p>
+            <a:pPr algn="l" indent="0" marL="0">
+              <a:buNone/>
+            </a:pPr>
+            <a:r>
+              <a:rPr lang="en-US" sz="950" dirty="0">
+                <a:solidFill>
+                  <a:srgbClr val="6B7C72">
+                    <a:alpha val="80000"/>
+                  </a:srgbClr>
+                </a:solidFill>
+                <a:latin typeface="Calibri" pitchFamily="34" charset="0"/>
+                <a:ea typeface="Calibri" pitchFamily="34" charset="-122"/>
+                <a:cs typeface="Calibri" pitchFamily="34" charset="-120"/>
+              </a:rPr>
+              <a:t>Green Solutions · Dossier marché Maroc</a:t>
+            </a:r>
+            <a:endParaRPr lang="en-US" sz="950" dirty="0"/>
+          </a:p>
+        </p:txBody>
+      </p:sp>
+      <p:sp>
+        <p:nvSpPr>
+          <p:cNvPr id="11" name="Text 9"/>
+          <p:cNvSpPr txBox="1"/>
+          <p:nvPr/>
+        </p:nvSpPr>
+        <p:spPr>
+          <a:xfrm>
+            <a:off x="11140135" y="6382512"/>
+            <a:ext cx="548640" cy="274320"/>
+          </a:xfrm>
+          <a:prstGeom prst="rect">
+            <a:avLst/>
+          </a:prstGeom>
+          <a:noFill/>
+          <a:ln/>
+        </p:spPr>
+        <p:txBody>
+          <a:bodyPr wrap="square" lIns="0" tIns="0" rIns="0" bIns="0" rtlCol="0" anchor="ctr"/>
+          <a:lstStyle/>
+          <a:p>
+            <a:pPr algn="r" indent="0" marL="0">
+              <a:buNone/>
+            </a:pPr>
+            <a:r>
+              <a:rPr lang="en-US" sz="950" dirty="0">
+                <a:solidFill>
+                  <a:srgbClr val="6B7C72">
+                    <a:alpha val="80000"/>
+                  </a:srgbClr>
+                </a:solidFill>
+                <a:latin typeface="Calibri" pitchFamily="34" charset="0"/>
+                <a:ea typeface="Calibri" pitchFamily="34" charset="-122"/>
+                <a:cs typeface="Calibri" pitchFamily="34" charset="-120"/>
+              </a:rPr>
+              <a:t>17</a:t>
+            </a:r>
+            <a:endParaRPr lang="en-US" sz="950" dirty="0"/>
+          </a:p>
+        </p:txBody>
+      </p:sp>
+    </p:spTree>
+  </p:cSld>
+  <p:clrMapOvr>
+    <a:masterClrMapping/>
+  </p:clrMapOvr>
+</p:sld>
+</file>
+
+<file path=ppt/slides/slide19.xml><?xml version="1.0" encoding="utf-8"?>
+<p:sld xmlns:a="http://schemas.openxmlformats.org/drawingml/2006/main" xmlns:r="http://schemas.openxmlformats.org/officeDocument/2006/relationships" xmlns:p="http://schemas.openxmlformats.org/presentationml/2006/main">
+  <p:cSld name="Slide 19">
     <p:spTree>
       <p:nvGrpSpPr>
         <p:cNvPr id="1" name=""/>
@@ -9550,7 +10267,7 @@
       </p:sp>
       <p:pic>
         <p:nvPicPr>
-          <p:cNvPr id="6" name="Image 1" descr="C:\Users\Utilisateur\dev\green-solutions-web\scripts\dossiers\sceau-aim-clair.png">    </p:cNvPr>
+          <p:cNvPr id="6" name="Image 1" descr="/workspace/scratch/50eb4f7d8e13/green-solutions-web/scripts/dossiers/sceau-aim-clair.png">    </p:cNvPr>
           <p:cNvPicPr>
             <a:picLocks noChangeAspect="1"/>
           </p:cNvPicPr>
@@ -9650,7 +10367,7 @@
                 <a:ea typeface="Calibri" pitchFamily="34" charset="-122"/>
                 <a:cs typeface="Calibri" pitchFamily="34" charset="-120"/>
               </a:rPr>
-              <a:t>17</a:t>
+              <a:t>18</a:t>
             </a:r>
             <a:endParaRPr lang="en-US" sz="950" dirty="0"/>
           </a:p>
@@ -10784,7 +11501,7 @@
                 <a:ea typeface="Calibri" pitchFamily="34" charset="-122"/>
                 <a:cs typeface="Calibri" pitchFamily="34" charset="-120"/>
               </a:rPr>
-              <a:t>OÙ PART L'EAU</a:t>
+              <a:t>SÉCHERESSE ET STRESS HYDRIQUE</a:t>
             </a:r>
             <a:endParaRPr lang="en-US" sz="1150" dirty="0"/>
           </a:p>
@@ -10823,7 +11540,7 @@
                 <a:ea typeface="Cambria" pitchFamily="34" charset="-122"/>
                 <a:cs typeface="Cambria" pitchFamily="34" charset="-120"/>
               </a:rPr>
-              <a:t>L'irrigation concentre l'essentiel du prélèvement</a:t>
+              <a:t>La pression augmente, mais le risque se lit localement</a:t>
             </a:r>
             <a:endParaRPr lang="en-US" sz="3000" dirty="0"/>
           </a:p>
@@ -10905,7 +11622,7 @@
                 <a:ea typeface="Cambria" pitchFamily="34" charset="-122"/>
                 <a:cs typeface="Cambria" pitchFamily="34" charset="-120"/>
               </a:rPr>
-              <a:t>Ce que cela implique</a:t>
+              <a:t>Deux indicateurs, pas un raccourci</a:t>
             </a:r>
             <a:endParaRPr lang="en-US" sz="1300" dirty="0"/>
           </a:p>
@@ -10947,7 +11664,7 @@
                 <a:ea typeface="Calibri" pitchFamily="34" charset="-122"/>
                 <a:cs typeface="Calibri" pitchFamily="34" charset="-120"/>
               </a:rPr>
-              <a:t>Réduire de 10 % la consommation agricole libère davantage de volume que de supprimer la totalité de l'usage industriel.</a:t>
+              <a:t>À l’échelle mondiale, le nombre et la durée des sécheresses ont augmenté de 29 % depuis 2000 par rapport aux deux décennies précédentes.</a:t>
             </a:r>
             <a:endParaRPr lang="en-US" sz="1200" dirty="0"/>
           </a:p>
@@ -10976,7 +11693,7 @@
                 <a:ea typeface="Calibri" pitchFamily="34" charset="-122"/>
                 <a:cs typeface="Calibri" pitchFamily="34" charset="-120"/>
               </a:rPr>
-              <a:t>C'est pourquoi l'effort porte en priorité sur la parcelle, et non sur les autres usages.</a:t>
+              <a:t>Le stress hydrique mesure autre chose : les prélèvements rapportés aux ressources renouvelables disponibles après les besoins environnementaux. Ce signal mondial n’est donc pas une prévision nationale ; il doit être confronté aux pluies, aux nappes, aux saisons et aux usages locaux.</a:t>
             </a:r>
             <a:endParaRPr lang="en-US" sz="1200" dirty="0"/>
           </a:p>
@@ -11129,7 +11846,7 @@
                 <a:ea typeface="Calibri" pitchFamily="34" charset="-122"/>
                 <a:cs typeface="Calibri" pitchFamily="34" charset="-120"/>
               </a:rPr>
-              <a:t>ÉCONOMIE ET SÉCURITÉ ALIMENTAIRE</a:t>
+              <a:t>OÙ PART L'EAU</a:t>
             </a:r>
             <a:endParaRPr lang="en-US" sz="1150" dirty="0"/>
           </a:p>
@@ -11168,26 +11885,42 @@
                 <a:ea typeface="Cambria" pitchFamily="34" charset="-122"/>
                 <a:cs typeface="Cambria" pitchFamily="34" charset="-120"/>
               </a:rPr>
-              <a:t>Exporter des primeurs, importer du blé</a:t>
+              <a:t>L'irrigation concentre l'essentiel du prélèvement</a:t>
             </a:r>
             <a:endParaRPr lang="en-US" sz="3000" dirty="0"/>
           </a:p>
         </p:txBody>
       </p:sp>
-      <p:sp>
-        <p:nvSpPr>
-          <p:cNvPr id="4" name="Shape 2"/>
+      <p:graphicFrame>
+        <p:nvGraphicFramePr>
+          <p:cNvPr id="4" name="Chart 0" descr=""/>
+          <p:cNvGraphicFramePr/>
+          <p:nvPr/>
+        </p:nvGraphicFramePr>
+        <p:xfrm>
+          <a:off x="594360" y="1783080"/>
+          <a:ext cx="7360920" cy="3977640"/>
+        </p:xfrm>
+        <a:graphic xmlns:a="http://schemas.openxmlformats.org/drawingml/2006/main">
+          <a:graphicData uri="http://schemas.openxmlformats.org/drawingml/2006/chart">
+            <c:chart xmlns:c="http://schemas.openxmlformats.org/drawingml/2006/chart" r:id="rId1"/>
+          </a:graphicData>
+        </a:graphic>
+      </p:graphicFrame>
+      <p:sp>
+        <p:nvSpPr>
+          <p:cNvPr id="5" name="Shape 2"/>
           <p:cNvSpPr/>
           <p:nvPr/>
         </p:nvSpPr>
         <p:spPr>
           <a:xfrm>
-            <a:off x="594360" y="1874520"/>
-            <a:ext cx="2545004" cy="2514600"/>
+            <a:off x="8275320" y="1783080"/>
+            <a:ext cx="3291840" cy="3977640"/>
           </a:xfrm>
           <a:prstGeom prst="roundRect">
             <a:avLst>
-              <a:gd name="adj" fmla="val 3636"/>
+              <a:gd name="adj" fmla="val 2778"/>
             </a:avLst>
           </a:prstGeom>
           <a:solidFill>
@@ -11203,14 +11936,14 @@
       </p:sp>
       <p:sp>
         <p:nvSpPr>
-          <p:cNvPr id="5" name="Text 3"/>
-          <p:cNvSpPr txBox="1"/>
-          <p:nvPr/>
-        </p:nvSpPr>
-        <p:spPr>
-          <a:xfrm>
-            <a:off x="777240" y="2148840"/>
-            <a:ext cx="2179244" cy="960120"/>
+          <p:cNvPr id="6" name="Text 3"/>
+          <p:cNvSpPr txBox="1"/>
+          <p:nvPr/>
+        </p:nvSpPr>
+        <p:spPr>
+          <a:xfrm>
+            <a:off x="8503920" y="2011680"/>
+            <a:ext cx="2834640" cy="457200"/>
           </a:xfrm>
           <a:prstGeom prst="rect">
             <a:avLst/>
@@ -11222,11 +11955,11 @@
           <a:bodyPr wrap="square" lIns="0" tIns="0" rIns="0" bIns="0" rtlCol="0" anchor="ctr"/>
           <a:lstStyle/>
           <a:p>
-            <a:pPr algn="ctr" indent="0" marL="0">
-              <a:buNone/>
-            </a:pPr>
-            <a:r>
-              <a:rPr lang="en-US" sz="3800" b="1" dirty="0">
+            <a:pPr algn="l" indent="0" marL="0">
+              <a:buNone/>
+            </a:pPr>
+            <a:r>
+              <a:rPr lang="en-US" sz="1300" b="1" dirty="0">
                 <a:solidFill>
                   <a:srgbClr val="1F5C3A"/>
                 </a:solidFill>
@@ -11234,388 +11967,22 @@
                 <a:ea typeface="Cambria" pitchFamily="34" charset="-122"/>
                 <a:cs typeface="Cambria" pitchFamily="34" charset="-120"/>
               </a:rPr>
-              <a:t>Top 5</a:t>
-            </a:r>
-            <a:endParaRPr lang="en-US" sz="3800" dirty="0"/>
-          </a:p>
-        </p:txBody>
-      </p:sp>
-      <p:sp>
-        <p:nvSpPr>
-          <p:cNvPr id="6" name="Text 4"/>
-          <p:cNvSpPr txBox="1"/>
-          <p:nvPr/>
-        </p:nvSpPr>
-        <p:spPr>
-          <a:xfrm>
-            <a:off x="795528" y="3154680"/>
-            <a:ext cx="2142668" cy="1051560"/>
-          </a:xfrm>
-          <a:prstGeom prst="rect">
-            <a:avLst/>
-          </a:prstGeom>
-          <a:noFill/>
-          <a:ln/>
-        </p:spPr>
-        <p:txBody>
-          <a:bodyPr wrap="square" lIns="0" tIns="0" rIns="0" bIns="0" rtlCol="0" anchor="t"/>
-          <a:lstStyle/>
-          <a:p>
-            <a:pPr algn="ctr" indent="0" marL="0">
-              <a:lnSpc>
-                <a:spcPct val="118000"/>
-              </a:lnSpc>
-              <a:buNone/>
-            </a:pPr>
-            <a:r>
-              <a:rPr lang="en-US" sz="1250" dirty="0">
-                <a:solidFill>
-                  <a:srgbClr val="33423A"/>
-                </a:solidFill>
-                <a:latin typeface="Calibri" pitchFamily="34" charset="0"/>
-                <a:ea typeface="Calibri" pitchFamily="34" charset="-122"/>
-                <a:cs typeface="Calibri" pitchFamily="34" charset="-120"/>
-              </a:rPr>
-              <a:t>des exportateurs mondiaux de tomates fraîches</a:t>
-            </a:r>
-            <a:endParaRPr lang="en-US" sz="1250" dirty="0"/>
-          </a:p>
-        </p:txBody>
-      </p:sp>
-      <p:sp>
-        <p:nvSpPr>
-          <p:cNvPr id="7" name="Shape 5"/>
-          <p:cNvSpPr/>
-          <p:nvPr/>
-        </p:nvSpPr>
-        <p:spPr>
-          <a:xfrm>
-            <a:off x="3413684" y="1874520"/>
-            <a:ext cx="2545004" cy="2514600"/>
-          </a:xfrm>
-          <a:prstGeom prst="roundRect">
-            <a:avLst>
-              <a:gd name="adj" fmla="val 3636"/>
-            </a:avLst>
-          </a:prstGeom>
-          <a:solidFill>
-            <a:srgbClr val="F1F4EF"/>
-          </a:solidFill>
-          <a:ln w="9525">
-            <a:solidFill>
-              <a:srgbClr val="DCE4DA"/>
-            </a:solidFill>
-            <a:prstDash val="solid"/>
-          </a:ln>
-        </p:spPr>
-      </p:sp>
-      <p:sp>
-        <p:nvSpPr>
-          <p:cNvPr id="8" name="Text 6"/>
-          <p:cNvSpPr txBox="1"/>
-          <p:nvPr/>
-        </p:nvSpPr>
-        <p:spPr>
-          <a:xfrm>
-            <a:off x="3596564" y="2148840"/>
-            <a:ext cx="2179244" cy="960120"/>
-          </a:xfrm>
-          <a:prstGeom prst="rect">
-            <a:avLst/>
-          </a:prstGeom>
-          <a:noFill/>
-          <a:ln/>
-        </p:spPr>
-        <p:txBody>
-          <a:bodyPr wrap="square" lIns="0" tIns="0" rIns="0" bIns="0" rtlCol="0" anchor="ctr"/>
-          <a:lstStyle/>
-          <a:p>
-            <a:pPr algn="ctr" indent="0" marL="0">
-              <a:buNone/>
-            </a:pPr>
-            <a:r>
-              <a:rPr lang="en-US" sz="3000" b="1" dirty="0">
-                <a:solidFill>
-                  <a:srgbClr val="1F5C3A"/>
-                </a:solidFill>
-                <a:latin typeface="Cambria" pitchFamily="34" charset="0"/>
-                <a:ea typeface="Cambria" pitchFamily="34" charset="-122"/>
-                <a:cs typeface="Cambria" pitchFamily="34" charset="-120"/>
-              </a:rPr>
-              <a:t>≈ 80 Md DH</a:t>
-            </a:r>
-            <a:endParaRPr lang="en-US" sz="3000" dirty="0"/>
-          </a:p>
-        </p:txBody>
-      </p:sp>
-      <p:sp>
-        <p:nvSpPr>
-          <p:cNvPr id="9" name="Text 7"/>
-          <p:cNvSpPr txBox="1"/>
-          <p:nvPr/>
-        </p:nvSpPr>
-        <p:spPr>
-          <a:xfrm>
-            <a:off x="3614852" y="3154680"/>
-            <a:ext cx="2142668" cy="1051560"/>
-          </a:xfrm>
-          <a:prstGeom prst="rect">
-            <a:avLst/>
-          </a:prstGeom>
-          <a:noFill/>
-          <a:ln/>
-        </p:spPr>
-        <p:txBody>
-          <a:bodyPr wrap="square" lIns="0" tIns="0" rIns="0" bIns="0" rtlCol="0" anchor="t"/>
-          <a:lstStyle/>
-          <a:p>
-            <a:pPr algn="ctr" indent="0" marL="0">
-              <a:lnSpc>
-                <a:spcPct val="118000"/>
-              </a:lnSpc>
-              <a:buNone/>
-            </a:pPr>
-            <a:r>
-              <a:rPr lang="en-US" sz="1250" dirty="0">
-                <a:solidFill>
-                  <a:srgbClr val="33423A"/>
-                </a:solidFill>
-                <a:latin typeface="Calibri" pitchFamily="34" charset="0"/>
-                <a:ea typeface="Calibri" pitchFamily="34" charset="-122"/>
-                <a:cs typeface="Calibri" pitchFamily="34" charset="-120"/>
-              </a:rPr>
-              <a:t>d'exportations agroalimentaires par an</a:t>
-            </a:r>
-            <a:endParaRPr lang="en-US" sz="1250" dirty="0"/>
-          </a:p>
-        </p:txBody>
-      </p:sp>
-      <p:sp>
-        <p:nvSpPr>
-          <p:cNvPr id="10" name="Shape 8"/>
-          <p:cNvSpPr/>
-          <p:nvPr/>
-        </p:nvSpPr>
-        <p:spPr>
-          <a:xfrm>
-            <a:off x="6233008" y="1874520"/>
-            <a:ext cx="2545004" cy="2514600"/>
-          </a:xfrm>
-          <a:prstGeom prst="roundRect">
-            <a:avLst>
-              <a:gd name="adj" fmla="val 3636"/>
-            </a:avLst>
-          </a:prstGeom>
-          <a:solidFill>
-            <a:srgbClr val="F1F4EF"/>
-          </a:solidFill>
-          <a:ln w="9525">
-            <a:solidFill>
-              <a:srgbClr val="DCE4DA"/>
-            </a:solidFill>
-            <a:prstDash val="solid"/>
-          </a:ln>
-        </p:spPr>
-      </p:sp>
-      <p:sp>
-        <p:nvSpPr>
-          <p:cNvPr id="11" name="Text 9"/>
-          <p:cNvSpPr txBox="1"/>
-          <p:nvPr/>
-        </p:nvSpPr>
-        <p:spPr>
-          <a:xfrm>
-            <a:off x="6415888" y="2148840"/>
-            <a:ext cx="2179244" cy="960120"/>
-          </a:xfrm>
-          <a:prstGeom prst="rect">
-            <a:avLst/>
-          </a:prstGeom>
-          <a:noFill/>
-          <a:ln/>
-        </p:spPr>
-        <p:txBody>
-          <a:bodyPr wrap="square" lIns="0" tIns="0" rIns="0" bIns="0" rtlCol="0" anchor="ctr"/>
-          <a:lstStyle/>
-          <a:p>
-            <a:pPr algn="ctr" indent="0" marL="0">
-              <a:buNone/>
-            </a:pPr>
-            <a:r>
-              <a:rPr lang="en-US" sz="3800" b="1" dirty="0">
-                <a:solidFill>
-                  <a:srgbClr val="1F5C3A"/>
-                </a:solidFill>
-                <a:latin typeface="Cambria" pitchFamily="34" charset="0"/>
-                <a:ea typeface="Cambria" pitchFamily="34" charset="-122"/>
-                <a:cs typeface="Cambria" pitchFamily="34" charset="-120"/>
-              </a:rPr>
-              <a:t>&gt; 50 %</a:t>
-            </a:r>
-            <a:endParaRPr lang="en-US" sz="3800" dirty="0"/>
-          </a:p>
-        </p:txBody>
-      </p:sp>
-      <p:sp>
-        <p:nvSpPr>
-          <p:cNvPr id="12" name="Text 10"/>
-          <p:cNvSpPr txBox="1"/>
-          <p:nvPr/>
-        </p:nvSpPr>
-        <p:spPr>
-          <a:xfrm>
-            <a:off x="6434176" y="3154680"/>
-            <a:ext cx="2142668" cy="1051560"/>
-          </a:xfrm>
-          <a:prstGeom prst="rect">
-            <a:avLst/>
-          </a:prstGeom>
-          <a:noFill/>
-          <a:ln/>
-        </p:spPr>
-        <p:txBody>
-          <a:bodyPr wrap="square" lIns="0" tIns="0" rIns="0" bIns="0" rtlCol="0" anchor="t"/>
-          <a:lstStyle/>
-          <a:p>
-            <a:pPr algn="ctr" indent="0" marL="0">
-              <a:lnSpc>
-                <a:spcPct val="118000"/>
-              </a:lnSpc>
-              <a:buNone/>
-            </a:pPr>
-            <a:r>
-              <a:rPr lang="en-US" sz="1250" dirty="0">
-                <a:solidFill>
-                  <a:srgbClr val="33423A"/>
-                </a:solidFill>
-                <a:latin typeface="Calibri" pitchFamily="34" charset="0"/>
-                <a:ea typeface="Calibri" pitchFamily="34" charset="-122"/>
-                <a:cs typeface="Calibri" pitchFamily="34" charset="-120"/>
-              </a:rPr>
-              <a:t>du blé consommé importé les années de sécheresse</a:t>
-            </a:r>
-            <a:endParaRPr lang="en-US" sz="1250" dirty="0"/>
-          </a:p>
-        </p:txBody>
-      </p:sp>
-      <p:sp>
-        <p:nvSpPr>
-          <p:cNvPr id="13" name="Shape 11"/>
-          <p:cNvSpPr/>
-          <p:nvPr/>
-        </p:nvSpPr>
-        <p:spPr>
-          <a:xfrm>
-            <a:off x="9052331" y="1874520"/>
-            <a:ext cx="2545004" cy="2514600"/>
-          </a:xfrm>
-          <a:prstGeom prst="roundRect">
-            <a:avLst>
-              <a:gd name="adj" fmla="val 3636"/>
-            </a:avLst>
-          </a:prstGeom>
-          <a:solidFill>
-            <a:srgbClr val="F1F4EF"/>
-          </a:solidFill>
-          <a:ln w="9525">
-            <a:solidFill>
-              <a:srgbClr val="DCE4DA"/>
-            </a:solidFill>
-            <a:prstDash val="solid"/>
-          </a:ln>
-        </p:spPr>
-      </p:sp>
-      <p:sp>
-        <p:nvSpPr>
-          <p:cNvPr id="14" name="Text 12"/>
-          <p:cNvSpPr txBox="1"/>
-          <p:nvPr/>
-        </p:nvSpPr>
-        <p:spPr>
-          <a:xfrm>
-            <a:off x="9235211" y="2148840"/>
-            <a:ext cx="2179244" cy="960120"/>
-          </a:xfrm>
-          <a:prstGeom prst="rect">
-            <a:avLst/>
-          </a:prstGeom>
-          <a:noFill/>
-          <a:ln/>
-        </p:spPr>
-        <p:txBody>
-          <a:bodyPr wrap="square" lIns="0" tIns="0" rIns="0" bIns="0" rtlCol="0" anchor="ctr"/>
-          <a:lstStyle/>
-          <a:p>
-            <a:pPr algn="ctr" indent="0" marL="0">
-              <a:buNone/>
-            </a:pPr>
-            <a:r>
-              <a:rPr lang="en-US" sz="3800" b="1" dirty="0">
-                <a:solidFill>
-                  <a:srgbClr val="1F5C3A"/>
-                </a:solidFill>
-                <a:latin typeface="Cambria" pitchFamily="34" charset="0"/>
-                <a:ea typeface="Cambria" pitchFamily="34" charset="-122"/>
-                <a:cs typeface="Cambria" pitchFamily="34" charset="-120"/>
-              </a:rPr>
-              <a:t>2030</a:t>
-            </a:r>
-            <a:endParaRPr lang="en-US" sz="3800" dirty="0"/>
-          </a:p>
-        </p:txBody>
-      </p:sp>
-      <p:sp>
-        <p:nvSpPr>
-          <p:cNvPr id="15" name="Text 13"/>
-          <p:cNvSpPr txBox="1"/>
-          <p:nvPr/>
-        </p:nvSpPr>
-        <p:spPr>
-          <a:xfrm>
-            <a:off x="9253499" y="3154680"/>
-            <a:ext cx="2142668" cy="1051560"/>
-          </a:xfrm>
-          <a:prstGeom prst="rect">
-            <a:avLst/>
-          </a:prstGeom>
-          <a:noFill/>
-          <a:ln/>
-        </p:spPr>
-        <p:txBody>
-          <a:bodyPr wrap="square" lIns="0" tIns="0" rIns="0" bIns="0" rtlCol="0" anchor="t"/>
-          <a:lstStyle/>
-          <a:p>
-            <a:pPr algn="ctr" indent="0" marL="0">
-              <a:lnSpc>
-                <a:spcPct val="118000"/>
-              </a:lnSpc>
-              <a:buNone/>
-            </a:pPr>
-            <a:r>
-              <a:rPr lang="en-US" sz="1250" dirty="0">
-                <a:solidFill>
-                  <a:srgbClr val="33423A"/>
-                </a:solidFill>
-                <a:latin typeface="Calibri" pitchFamily="34" charset="0"/>
-                <a:ea typeface="Calibri" pitchFamily="34" charset="-122"/>
-                <a:cs typeface="Calibri" pitchFamily="34" charset="-120"/>
-              </a:rPr>
-              <a:t>horizon de la stratégie Génération Green, après le Plan Maroc Vert</a:t>
-            </a:r>
-            <a:endParaRPr lang="en-US" sz="1250" dirty="0"/>
-          </a:p>
-        </p:txBody>
-      </p:sp>
-      <p:sp>
-        <p:nvSpPr>
-          <p:cNvPr id="16" name="Text 14"/>
-          <p:cNvSpPr txBox="1"/>
-          <p:nvPr/>
-        </p:nvSpPr>
-        <p:spPr>
-          <a:xfrm>
-            <a:off x="594360" y="4709160"/>
-            <a:ext cx="11002975" cy="1097280"/>
+              <a:t>Ce que cela implique</a:t>
+            </a:r>
+            <a:endParaRPr lang="en-US" sz="1300" dirty="0"/>
+          </a:p>
+        </p:txBody>
+      </p:sp>
+      <p:sp>
+        <p:nvSpPr>
+          <p:cNvPr id="7" name="Text 4"/>
+          <p:cNvSpPr txBox="1"/>
+          <p:nvPr/>
+        </p:nvSpPr>
+        <p:spPr>
+          <a:xfrm>
+            <a:off x="8503920" y="2560320"/>
+            <a:ext cx="2834640" cy="3017520"/>
           </a:xfrm>
           <a:prstGeom prst="rect">
             <a:avLst/>
@@ -11629,12 +11996,12 @@
           <a:p>
             <a:pPr algn="l" indent="0" marL="0">
               <a:lnSpc>
-                <a:spcPct val="130000"/>
+                <a:spcPct val="125000"/>
               </a:lnSpc>
               <a:buNone/>
             </a:pPr>
             <a:r>
-              <a:rPr lang="en-US" sz="1350" dirty="0">
+              <a:rPr lang="en-US" sz="1200" dirty="0">
                 <a:solidFill>
                   <a:srgbClr val="33423A"/>
                 </a:solidFill>
@@ -11642,15 +12009,44 @@
                 <a:ea typeface="Calibri" pitchFamily="34" charset="-122"/>
                 <a:cs typeface="Calibri" pitchFamily="34" charset="-120"/>
               </a:rPr>
-              <a:t>Le Maroc exporte tomates, agrumes, fruits rouges et olives vers l'Europe et l'Afrique, mais dépend de l'étranger pour une large part de son blé. Avec des barrages au plus bas, les dotations d'irrigation ont été réduites et le dessalement s'est ouvert à l'agriculture, notamment à Chtouka.</a:t>
-            </a:r>
-            <a:endParaRPr lang="en-US" sz="1350" dirty="0"/>
-          </a:p>
-        </p:txBody>
-      </p:sp>
-      <p:sp>
-        <p:nvSpPr>
-          <p:cNvPr id="17" name="Text 15"/>
+              <a:t>Réduire de 10 % la consommation agricole libère davantage de volume que de supprimer la totalité de l'usage industriel.</a:t>
+            </a:r>
+            <a:endParaRPr lang="en-US" sz="1200" dirty="0"/>
+          </a:p>
+          <a:p>
+            <a:pPr algn="l" indent="0" marL="0">
+              <a:lnSpc>
+                <a:spcPct val="125000"/>
+              </a:lnSpc>
+              <a:buNone/>
+            </a:pPr>
+            <a:endParaRPr lang="en-US" sz="1200" dirty="0"/>
+          </a:p>
+          <a:p>
+            <a:pPr algn="l" indent="0" marL="0">
+              <a:lnSpc>
+                <a:spcPct val="125000"/>
+              </a:lnSpc>
+              <a:buNone/>
+            </a:pPr>
+            <a:r>
+              <a:rPr lang="en-US" sz="1200" dirty="0">
+                <a:solidFill>
+                  <a:srgbClr val="33423A"/>
+                </a:solidFill>
+                <a:latin typeface="Calibri" pitchFamily="34" charset="0"/>
+                <a:ea typeface="Calibri" pitchFamily="34" charset="-122"/>
+                <a:cs typeface="Calibri" pitchFamily="34" charset="-120"/>
+              </a:rPr>
+              <a:t>C'est pourquoi l'effort porte en priorité sur la parcelle, et non sur les autres usages.</a:t>
+            </a:r>
+            <a:endParaRPr lang="en-US" sz="1200" dirty="0"/>
+          </a:p>
+        </p:txBody>
+      </p:sp>
+      <p:sp>
+        <p:nvSpPr>
+          <p:cNvPr id="8" name="Text 5"/>
           <p:cNvSpPr txBox="1"/>
           <p:nvPr/>
         </p:nvSpPr>
@@ -11691,7 +12087,7 @@
       </p:sp>
       <p:sp>
         <p:nvSpPr>
-          <p:cNvPr id="18" name="Text 16"/>
+          <p:cNvPr id="9" name="Text 6"/>
           <p:cNvSpPr txBox="1"/>
           <p:nvPr/>
         </p:nvSpPr>
@@ -11795,7 +12191,7 @@
                 <a:ea typeface="Calibri" pitchFamily="34" charset="-122"/>
                 <a:cs typeface="Calibri" pitchFamily="34" charset="-120"/>
               </a:rPr>
-              <a:t>LES FILIÈRES</a:t>
+              <a:t>ÉCONOMIE ET SÉCURITÉ ALIMENTAIRE</a:t>
             </a:r>
             <a:endParaRPr lang="en-US" sz="1150" dirty="0"/>
           </a:p>
@@ -11834,42 +12230,26 @@
                 <a:ea typeface="Cambria" pitchFamily="34" charset="-122"/>
                 <a:cs typeface="Cambria" pitchFamily="34" charset="-120"/>
               </a:rPr>
-              <a:t>Quatre productions portent la valeur à l'export</a:t>
+              <a:t>Exporter des primeurs, importer du blé</a:t>
             </a:r>
             <a:endParaRPr lang="en-US" sz="3000" dirty="0"/>
           </a:p>
         </p:txBody>
       </p:sp>
-      <p:graphicFrame>
-        <p:nvGraphicFramePr>
-          <p:cNvPr id="4" name="Chart 0" descr=""/>
-          <p:cNvGraphicFramePr/>
-          <p:nvPr/>
-        </p:nvGraphicFramePr>
-        <p:xfrm>
-          <a:off x="594360" y="1783080"/>
-          <a:ext cx="7360920" cy="3977640"/>
-        </p:xfrm>
-        <a:graphic xmlns:a="http://schemas.openxmlformats.org/drawingml/2006/main">
-          <a:graphicData uri="http://schemas.openxmlformats.org/drawingml/2006/chart">
-            <c:chart xmlns:c="http://schemas.openxmlformats.org/drawingml/2006/chart" r:id="rId1"/>
-          </a:graphicData>
-        </a:graphic>
-      </p:graphicFrame>
-      <p:sp>
-        <p:nvSpPr>
-          <p:cNvPr id="5" name="Shape 2"/>
+      <p:sp>
+        <p:nvSpPr>
+          <p:cNvPr id="4" name="Shape 2"/>
           <p:cNvSpPr/>
           <p:nvPr/>
         </p:nvSpPr>
         <p:spPr>
           <a:xfrm>
-            <a:off x="8275320" y="1783080"/>
-            <a:ext cx="3291840" cy="3977640"/>
+            <a:off x="594360" y="1874520"/>
+            <a:ext cx="2545004" cy="2514600"/>
           </a:xfrm>
           <a:prstGeom prst="roundRect">
             <a:avLst>
-              <a:gd name="adj" fmla="val 2778"/>
+              <a:gd name="adj" fmla="val 3636"/>
             </a:avLst>
           </a:prstGeom>
           <a:solidFill>
@@ -11885,14 +12265,14 @@
       </p:sp>
       <p:sp>
         <p:nvSpPr>
-          <p:cNvPr id="6" name="Text 3"/>
-          <p:cNvSpPr txBox="1"/>
-          <p:nvPr/>
-        </p:nvSpPr>
-        <p:spPr>
-          <a:xfrm>
-            <a:off x="8503920" y="2011680"/>
-            <a:ext cx="2834640" cy="457200"/>
+          <p:cNvPr id="5" name="Text 3"/>
+          <p:cNvSpPr txBox="1"/>
+          <p:nvPr/>
+        </p:nvSpPr>
+        <p:spPr>
+          <a:xfrm>
+            <a:off x="777240" y="2148840"/>
+            <a:ext cx="2179244" cy="960120"/>
           </a:xfrm>
           <a:prstGeom prst="rect">
             <a:avLst/>
@@ -11904,11 +12284,11 @@
           <a:bodyPr wrap="square" lIns="0" tIns="0" rIns="0" bIns="0" rtlCol="0" anchor="ctr"/>
           <a:lstStyle/>
           <a:p>
-            <a:pPr algn="l" indent="0" marL="0">
-              <a:buNone/>
-            </a:pPr>
-            <a:r>
-              <a:rPr lang="en-US" sz="1300" b="1" dirty="0">
+            <a:pPr algn="ctr" indent="0" marL="0">
+              <a:buNone/>
+            </a:pPr>
+            <a:r>
+              <a:rPr lang="en-US" sz="3800" b="1" dirty="0">
                 <a:solidFill>
                   <a:srgbClr val="1F5C3A"/>
                 </a:solidFill>
@@ -11916,22 +12296,388 @@
                 <a:ea typeface="Cambria" pitchFamily="34" charset="-122"/>
                 <a:cs typeface="Cambria" pitchFamily="34" charset="-120"/>
               </a:rPr>
-              <a:t>Lecture</a:t>
-            </a:r>
-            <a:endParaRPr lang="en-US" sz="1300" dirty="0"/>
-          </a:p>
-        </p:txBody>
-      </p:sp>
-      <p:sp>
-        <p:nvSpPr>
-          <p:cNvPr id="7" name="Text 4"/>
-          <p:cNvSpPr txBox="1"/>
-          <p:nvPr/>
-        </p:nvSpPr>
-        <p:spPr>
-          <a:xfrm>
-            <a:off x="8503920" y="2560320"/>
-            <a:ext cx="2834640" cy="3017520"/>
+              <a:t>Top 5</a:t>
+            </a:r>
+            <a:endParaRPr lang="en-US" sz="3800" dirty="0"/>
+          </a:p>
+        </p:txBody>
+      </p:sp>
+      <p:sp>
+        <p:nvSpPr>
+          <p:cNvPr id="6" name="Text 4"/>
+          <p:cNvSpPr txBox="1"/>
+          <p:nvPr/>
+        </p:nvSpPr>
+        <p:spPr>
+          <a:xfrm>
+            <a:off x="795528" y="3154680"/>
+            <a:ext cx="2142668" cy="1051560"/>
+          </a:xfrm>
+          <a:prstGeom prst="rect">
+            <a:avLst/>
+          </a:prstGeom>
+          <a:noFill/>
+          <a:ln/>
+        </p:spPr>
+        <p:txBody>
+          <a:bodyPr wrap="square" lIns="0" tIns="0" rIns="0" bIns="0" rtlCol="0" anchor="t"/>
+          <a:lstStyle/>
+          <a:p>
+            <a:pPr algn="ctr" indent="0" marL="0">
+              <a:lnSpc>
+                <a:spcPct val="118000"/>
+              </a:lnSpc>
+              <a:buNone/>
+            </a:pPr>
+            <a:r>
+              <a:rPr lang="en-US" sz="1250" dirty="0">
+                <a:solidFill>
+                  <a:srgbClr val="33423A"/>
+                </a:solidFill>
+                <a:latin typeface="Calibri" pitchFamily="34" charset="0"/>
+                <a:ea typeface="Calibri" pitchFamily="34" charset="-122"/>
+                <a:cs typeface="Calibri" pitchFamily="34" charset="-120"/>
+              </a:rPr>
+              <a:t>des exportateurs mondiaux de tomates fraîches</a:t>
+            </a:r>
+            <a:endParaRPr lang="en-US" sz="1250" dirty="0"/>
+          </a:p>
+        </p:txBody>
+      </p:sp>
+      <p:sp>
+        <p:nvSpPr>
+          <p:cNvPr id="7" name="Shape 5"/>
+          <p:cNvSpPr/>
+          <p:nvPr/>
+        </p:nvSpPr>
+        <p:spPr>
+          <a:xfrm>
+            <a:off x="3413684" y="1874520"/>
+            <a:ext cx="2545004" cy="2514600"/>
+          </a:xfrm>
+          <a:prstGeom prst="roundRect">
+            <a:avLst>
+              <a:gd name="adj" fmla="val 3636"/>
+            </a:avLst>
+          </a:prstGeom>
+          <a:solidFill>
+            <a:srgbClr val="F1F4EF"/>
+          </a:solidFill>
+          <a:ln w="9525">
+            <a:solidFill>
+              <a:srgbClr val="DCE4DA"/>
+            </a:solidFill>
+            <a:prstDash val="solid"/>
+          </a:ln>
+        </p:spPr>
+      </p:sp>
+      <p:sp>
+        <p:nvSpPr>
+          <p:cNvPr id="8" name="Text 6"/>
+          <p:cNvSpPr txBox="1"/>
+          <p:nvPr/>
+        </p:nvSpPr>
+        <p:spPr>
+          <a:xfrm>
+            <a:off x="3596564" y="2148840"/>
+            <a:ext cx="2179244" cy="960120"/>
+          </a:xfrm>
+          <a:prstGeom prst="rect">
+            <a:avLst/>
+          </a:prstGeom>
+          <a:noFill/>
+          <a:ln/>
+        </p:spPr>
+        <p:txBody>
+          <a:bodyPr wrap="square" lIns="0" tIns="0" rIns="0" bIns="0" rtlCol="0" anchor="ctr"/>
+          <a:lstStyle/>
+          <a:p>
+            <a:pPr algn="ctr" indent="0" marL="0">
+              <a:buNone/>
+            </a:pPr>
+            <a:r>
+              <a:rPr lang="en-US" sz="3000" b="1" dirty="0">
+                <a:solidFill>
+                  <a:srgbClr val="1F5C3A"/>
+                </a:solidFill>
+                <a:latin typeface="Cambria" pitchFamily="34" charset="0"/>
+                <a:ea typeface="Cambria" pitchFamily="34" charset="-122"/>
+                <a:cs typeface="Cambria" pitchFamily="34" charset="-120"/>
+              </a:rPr>
+              <a:t>≈ 80 Md DH</a:t>
+            </a:r>
+            <a:endParaRPr lang="en-US" sz="3000" dirty="0"/>
+          </a:p>
+        </p:txBody>
+      </p:sp>
+      <p:sp>
+        <p:nvSpPr>
+          <p:cNvPr id="9" name="Text 7"/>
+          <p:cNvSpPr txBox="1"/>
+          <p:nvPr/>
+        </p:nvSpPr>
+        <p:spPr>
+          <a:xfrm>
+            <a:off x="3614852" y="3154680"/>
+            <a:ext cx="2142668" cy="1051560"/>
+          </a:xfrm>
+          <a:prstGeom prst="rect">
+            <a:avLst/>
+          </a:prstGeom>
+          <a:noFill/>
+          <a:ln/>
+        </p:spPr>
+        <p:txBody>
+          <a:bodyPr wrap="square" lIns="0" tIns="0" rIns="0" bIns="0" rtlCol="0" anchor="t"/>
+          <a:lstStyle/>
+          <a:p>
+            <a:pPr algn="ctr" indent="0" marL="0">
+              <a:lnSpc>
+                <a:spcPct val="118000"/>
+              </a:lnSpc>
+              <a:buNone/>
+            </a:pPr>
+            <a:r>
+              <a:rPr lang="en-US" sz="1250" dirty="0">
+                <a:solidFill>
+                  <a:srgbClr val="33423A"/>
+                </a:solidFill>
+                <a:latin typeface="Calibri" pitchFamily="34" charset="0"/>
+                <a:ea typeface="Calibri" pitchFamily="34" charset="-122"/>
+                <a:cs typeface="Calibri" pitchFamily="34" charset="-120"/>
+              </a:rPr>
+              <a:t>d'exportations agroalimentaires par an</a:t>
+            </a:r>
+            <a:endParaRPr lang="en-US" sz="1250" dirty="0"/>
+          </a:p>
+        </p:txBody>
+      </p:sp>
+      <p:sp>
+        <p:nvSpPr>
+          <p:cNvPr id="10" name="Shape 8"/>
+          <p:cNvSpPr/>
+          <p:nvPr/>
+        </p:nvSpPr>
+        <p:spPr>
+          <a:xfrm>
+            <a:off x="6233008" y="1874520"/>
+            <a:ext cx="2545004" cy="2514600"/>
+          </a:xfrm>
+          <a:prstGeom prst="roundRect">
+            <a:avLst>
+              <a:gd name="adj" fmla="val 3636"/>
+            </a:avLst>
+          </a:prstGeom>
+          <a:solidFill>
+            <a:srgbClr val="F1F4EF"/>
+          </a:solidFill>
+          <a:ln w="9525">
+            <a:solidFill>
+              <a:srgbClr val="DCE4DA"/>
+            </a:solidFill>
+            <a:prstDash val="solid"/>
+          </a:ln>
+        </p:spPr>
+      </p:sp>
+      <p:sp>
+        <p:nvSpPr>
+          <p:cNvPr id="11" name="Text 9"/>
+          <p:cNvSpPr txBox="1"/>
+          <p:nvPr/>
+        </p:nvSpPr>
+        <p:spPr>
+          <a:xfrm>
+            <a:off x="6415888" y="2148840"/>
+            <a:ext cx="2179244" cy="960120"/>
+          </a:xfrm>
+          <a:prstGeom prst="rect">
+            <a:avLst/>
+          </a:prstGeom>
+          <a:noFill/>
+          <a:ln/>
+        </p:spPr>
+        <p:txBody>
+          <a:bodyPr wrap="square" lIns="0" tIns="0" rIns="0" bIns="0" rtlCol="0" anchor="ctr"/>
+          <a:lstStyle/>
+          <a:p>
+            <a:pPr algn="ctr" indent="0" marL="0">
+              <a:buNone/>
+            </a:pPr>
+            <a:r>
+              <a:rPr lang="en-US" sz="3800" b="1" dirty="0">
+                <a:solidFill>
+                  <a:srgbClr val="1F5C3A"/>
+                </a:solidFill>
+                <a:latin typeface="Cambria" pitchFamily="34" charset="0"/>
+                <a:ea typeface="Cambria" pitchFamily="34" charset="-122"/>
+                <a:cs typeface="Cambria" pitchFamily="34" charset="-120"/>
+              </a:rPr>
+              <a:t>&gt; 50 %</a:t>
+            </a:r>
+            <a:endParaRPr lang="en-US" sz="3800" dirty="0"/>
+          </a:p>
+        </p:txBody>
+      </p:sp>
+      <p:sp>
+        <p:nvSpPr>
+          <p:cNvPr id="12" name="Text 10"/>
+          <p:cNvSpPr txBox="1"/>
+          <p:nvPr/>
+        </p:nvSpPr>
+        <p:spPr>
+          <a:xfrm>
+            <a:off x="6434176" y="3154680"/>
+            <a:ext cx="2142668" cy="1051560"/>
+          </a:xfrm>
+          <a:prstGeom prst="rect">
+            <a:avLst/>
+          </a:prstGeom>
+          <a:noFill/>
+          <a:ln/>
+        </p:spPr>
+        <p:txBody>
+          <a:bodyPr wrap="square" lIns="0" tIns="0" rIns="0" bIns="0" rtlCol="0" anchor="t"/>
+          <a:lstStyle/>
+          <a:p>
+            <a:pPr algn="ctr" indent="0" marL="0">
+              <a:lnSpc>
+                <a:spcPct val="118000"/>
+              </a:lnSpc>
+              <a:buNone/>
+            </a:pPr>
+            <a:r>
+              <a:rPr lang="en-US" sz="1250" dirty="0">
+                <a:solidFill>
+                  <a:srgbClr val="33423A"/>
+                </a:solidFill>
+                <a:latin typeface="Calibri" pitchFamily="34" charset="0"/>
+                <a:ea typeface="Calibri" pitchFamily="34" charset="-122"/>
+                <a:cs typeface="Calibri" pitchFamily="34" charset="-120"/>
+              </a:rPr>
+              <a:t>du blé consommé importé les années de sécheresse</a:t>
+            </a:r>
+            <a:endParaRPr lang="en-US" sz="1250" dirty="0"/>
+          </a:p>
+        </p:txBody>
+      </p:sp>
+      <p:sp>
+        <p:nvSpPr>
+          <p:cNvPr id="13" name="Shape 11"/>
+          <p:cNvSpPr/>
+          <p:nvPr/>
+        </p:nvSpPr>
+        <p:spPr>
+          <a:xfrm>
+            <a:off x="9052331" y="1874520"/>
+            <a:ext cx="2545004" cy="2514600"/>
+          </a:xfrm>
+          <a:prstGeom prst="roundRect">
+            <a:avLst>
+              <a:gd name="adj" fmla="val 3636"/>
+            </a:avLst>
+          </a:prstGeom>
+          <a:solidFill>
+            <a:srgbClr val="F1F4EF"/>
+          </a:solidFill>
+          <a:ln w="9525">
+            <a:solidFill>
+              <a:srgbClr val="DCE4DA"/>
+            </a:solidFill>
+            <a:prstDash val="solid"/>
+          </a:ln>
+        </p:spPr>
+      </p:sp>
+      <p:sp>
+        <p:nvSpPr>
+          <p:cNvPr id="14" name="Text 12"/>
+          <p:cNvSpPr txBox="1"/>
+          <p:nvPr/>
+        </p:nvSpPr>
+        <p:spPr>
+          <a:xfrm>
+            <a:off x="9235211" y="2148840"/>
+            <a:ext cx="2179244" cy="960120"/>
+          </a:xfrm>
+          <a:prstGeom prst="rect">
+            <a:avLst/>
+          </a:prstGeom>
+          <a:noFill/>
+          <a:ln/>
+        </p:spPr>
+        <p:txBody>
+          <a:bodyPr wrap="square" lIns="0" tIns="0" rIns="0" bIns="0" rtlCol="0" anchor="ctr"/>
+          <a:lstStyle/>
+          <a:p>
+            <a:pPr algn="ctr" indent="0" marL="0">
+              <a:buNone/>
+            </a:pPr>
+            <a:r>
+              <a:rPr lang="en-US" sz="3800" b="1" dirty="0">
+                <a:solidFill>
+                  <a:srgbClr val="1F5C3A"/>
+                </a:solidFill>
+                <a:latin typeface="Cambria" pitchFamily="34" charset="0"/>
+                <a:ea typeface="Cambria" pitchFamily="34" charset="-122"/>
+                <a:cs typeface="Cambria" pitchFamily="34" charset="-120"/>
+              </a:rPr>
+              <a:t>2030</a:t>
+            </a:r>
+            <a:endParaRPr lang="en-US" sz="3800" dirty="0"/>
+          </a:p>
+        </p:txBody>
+      </p:sp>
+      <p:sp>
+        <p:nvSpPr>
+          <p:cNvPr id="15" name="Text 13"/>
+          <p:cNvSpPr txBox="1"/>
+          <p:nvPr/>
+        </p:nvSpPr>
+        <p:spPr>
+          <a:xfrm>
+            <a:off x="9253499" y="3154680"/>
+            <a:ext cx="2142668" cy="1051560"/>
+          </a:xfrm>
+          <a:prstGeom prst="rect">
+            <a:avLst/>
+          </a:prstGeom>
+          <a:noFill/>
+          <a:ln/>
+        </p:spPr>
+        <p:txBody>
+          <a:bodyPr wrap="square" lIns="0" tIns="0" rIns="0" bIns="0" rtlCol="0" anchor="t"/>
+          <a:lstStyle/>
+          <a:p>
+            <a:pPr algn="ctr" indent="0" marL="0">
+              <a:lnSpc>
+                <a:spcPct val="118000"/>
+              </a:lnSpc>
+              <a:buNone/>
+            </a:pPr>
+            <a:r>
+              <a:rPr lang="en-US" sz="1250" dirty="0">
+                <a:solidFill>
+                  <a:srgbClr val="33423A"/>
+                </a:solidFill>
+                <a:latin typeface="Calibri" pitchFamily="34" charset="0"/>
+                <a:ea typeface="Calibri" pitchFamily="34" charset="-122"/>
+                <a:cs typeface="Calibri" pitchFamily="34" charset="-120"/>
+              </a:rPr>
+              <a:t>horizon de la stratégie Génération Green, après le Plan Maroc Vert</a:t>
+            </a:r>
+            <a:endParaRPr lang="en-US" sz="1250" dirty="0"/>
+          </a:p>
+        </p:txBody>
+      </p:sp>
+      <p:sp>
+        <p:nvSpPr>
+          <p:cNvPr id="16" name="Text 14"/>
+          <p:cNvSpPr txBox="1"/>
+          <p:nvPr/>
+        </p:nvSpPr>
+        <p:spPr>
+          <a:xfrm>
+            <a:off x="594360" y="4709160"/>
+            <a:ext cx="11002975" cy="1097280"/>
           </a:xfrm>
           <a:prstGeom prst="rect">
             <a:avLst/>
@@ -11945,12 +12691,12 @@
           <a:p>
             <a:pPr algn="l" indent="0" marL="0">
               <a:lnSpc>
-                <a:spcPct val="125000"/>
+                <a:spcPct val="130000"/>
               </a:lnSpc>
               <a:buNone/>
             </a:pPr>
             <a:r>
-              <a:rPr lang="en-US" sz="1200" dirty="0">
+              <a:rPr lang="en-US" sz="1350" dirty="0">
                 <a:solidFill>
                   <a:srgbClr val="33423A"/>
                 </a:solidFill>
@@ -11958,44 +12704,15 @@
                 <a:ea typeface="Calibri" pitchFamily="34" charset="-122"/>
                 <a:cs typeface="Calibri" pitchFamily="34" charset="-120"/>
               </a:rPr>
-              <a:t>Agrumes et tomate sont irrigués et destinés à l'export : ce sont les cultures où l'économie d'eau se convertit directement en marge.</a:t>
-            </a:r>
-            <a:endParaRPr lang="en-US" sz="1200" dirty="0"/>
-          </a:p>
-          <a:p>
-            <a:pPr algn="l" indent="0" marL="0">
-              <a:lnSpc>
-                <a:spcPct val="125000"/>
-              </a:lnSpc>
-              <a:buNone/>
-            </a:pPr>
-            <a:endParaRPr lang="en-US" sz="1200" dirty="0"/>
-          </a:p>
-          <a:p>
-            <a:pPr algn="l" indent="0" marL="0">
-              <a:lnSpc>
-                <a:spcPct val="125000"/>
-              </a:lnSpc>
-              <a:buNone/>
-            </a:pPr>
-            <a:r>
-              <a:rPr lang="en-US" sz="1200" dirty="0">
-                <a:solidFill>
-                  <a:srgbClr val="33423A"/>
-                </a:solidFill>
-                <a:latin typeface="Calibri" pitchFamily="34" charset="0"/>
-                <a:ea typeface="Calibri" pitchFamily="34" charset="-122"/>
-                <a:cs typeface="Calibri" pitchFamily="34" charset="-120"/>
-              </a:rPr>
-              <a:t>* Les céréales sont majoritairement pluviales ; le volume varie fortement d'une campagne à l'autre selon la pluviométrie.</a:t>
-            </a:r>
-            <a:endParaRPr lang="en-US" sz="1200" dirty="0"/>
-          </a:p>
-        </p:txBody>
-      </p:sp>
-      <p:sp>
-        <p:nvSpPr>
-          <p:cNvPr id="8" name="Text 5"/>
+              <a:t>Le Maroc exporte tomates, agrumes, fruits rouges et olives vers l'Europe et l'Afrique, mais dépend de l'étranger pour une large part de son blé. Avec des barrages au plus bas, les dotations d'irrigation ont été réduites et le dessalement s'est ouvert à l'agriculture, notamment à Chtouka.</a:t>
+            </a:r>
+            <a:endParaRPr lang="en-US" sz="1350" dirty="0"/>
+          </a:p>
+        </p:txBody>
+      </p:sp>
+      <p:sp>
+        <p:nvSpPr>
+          <p:cNvPr id="17" name="Text 15"/>
           <p:cNvSpPr txBox="1"/>
           <p:nvPr/>
         </p:nvSpPr>
@@ -12036,7 +12753,7 @@
       </p:sp>
       <p:sp>
         <p:nvSpPr>
-          <p:cNvPr id="9" name="Text 6"/>
+          <p:cNvPr id="18" name="Text 16"/>
           <p:cNvSpPr txBox="1"/>
           <p:nvPr/>
         </p:nvSpPr>
@@ -12140,7 +12857,7 @@
                 <a:ea typeface="Calibri" pitchFamily="34" charset="-122"/>
                 <a:cs typeface="Calibri" pitchFamily="34" charset="-120"/>
               </a:rPr>
-              <a:t>PREMIÈRE FILIÈRE</a:t>
+              <a:t>LES FILIÈRES</a:t>
             </a:r>
             <a:endParaRPr lang="en-US" sz="1150" dirty="0"/>
           </a:p>
@@ -12179,46 +12896,104 @@
                 <a:ea typeface="Cambria" pitchFamily="34" charset="-122"/>
                 <a:cs typeface="Cambria" pitchFamily="34" charset="-120"/>
               </a:rPr>
-              <a:t>Tomate sous serre du Souss : l'export au litre près</a:t>
+              <a:t>Quatre productions portent la valeur à l'export</a:t>
             </a:r>
             <a:endParaRPr lang="en-US" sz="3000" dirty="0"/>
           </a:p>
         </p:txBody>
       </p:sp>
-      <p:pic>
-        <p:nvPicPr>
-          <p:cNvPr id="4" name="Image 0" descr="preencoded.png">    </p:cNvPr>
-          <p:cNvPicPr>
-            <a:picLocks noChangeAspect="1"/>
-          </p:cNvPicPr>
-          <p:nvPr/>
-        </p:nvPicPr>
-        <p:blipFill>
-          <a:blip r:embed="rId1"/>
-          <a:stretch>
-            <a:fillRect/>
-          </a:stretch>
-        </p:blipFill>
-        <p:spPr>
-          <a:xfrm>
-            <a:off x="6522415" y="1783080"/>
-            <a:ext cx="5074920" cy="3794760"/>
-          </a:xfrm>
-          <a:prstGeom prst="rect">
-            <a:avLst/>
-          </a:prstGeom>
-        </p:spPr>
-      </p:pic>
-      <p:sp>
-        <p:nvSpPr>
-          <p:cNvPr id="5" name="Text 2"/>
-          <p:cNvSpPr txBox="1"/>
-          <p:nvPr/>
-        </p:nvSpPr>
-        <p:spPr>
-          <a:xfrm>
-            <a:off x="594360" y="1783080"/>
-            <a:ext cx="5379415" cy="4251960"/>
+      <p:graphicFrame>
+        <p:nvGraphicFramePr>
+          <p:cNvPr id="4" name="Chart 0" descr=""/>
+          <p:cNvGraphicFramePr/>
+          <p:nvPr/>
+        </p:nvGraphicFramePr>
+        <p:xfrm>
+          <a:off x="594360" y="1783080"/>
+          <a:ext cx="7360920" cy="3977640"/>
+        </p:xfrm>
+        <a:graphic xmlns:a="http://schemas.openxmlformats.org/drawingml/2006/main">
+          <a:graphicData uri="http://schemas.openxmlformats.org/drawingml/2006/chart">
+            <c:chart xmlns:c="http://schemas.openxmlformats.org/drawingml/2006/chart" r:id="rId1"/>
+          </a:graphicData>
+        </a:graphic>
+      </p:graphicFrame>
+      <p:sp>
+        <p:nvSpPr>
+          <p:cNvPr id="5" name="Shape 2"/>
+          <p:cNvSpPr/>
+          <p:nvPr/>
+        </p:nvSpPr>
+        <p:spPr>
+          <a:xfrm>
+            <a:off x="8275320" y="1783080"/>
+            <a:ext cx="3291840" cy="3977640"/>
+          </a:xfrm>
+          <a:prstGeom prst="roundRect">
+            <a:avLst>
+              <a:gd name="adj" fmla="val 2778"/>
+            </a:avLst>
+          </a:prstGeom>
+          <a:solidFill>
+            <a:srgbClr val="F1F4EF"/>
+          </a:solidFill>
+          <a:ln w="9525">
+            <a:solidFill>
+              <a:srgbClr val="DCE4DA"/>
+            </a:solidFill>
+            <a:prstDash val="solid"/>
+          </a:ln>
+        </p:spPr>
+      </p:sp>
+      <p:sp>
+        <p:nvSpPr>
+          <p:cNvPr id="6" name="Text 3"/>
+          <p:cNvSpPr txBox="1"/>
+          <p:nvPr/>
+        </p:nvSpPr>
+        <p:spPr>
+          <a:xfrm>
+            <a:off x="8503920" y="2011680"/>
+            <a:ext cx="2834640" cy="457200"/>
+          </a:xfrm>
+          <a:prstGeom prst="rect">
+            <a:avLst/>
+          </a:prstGeom>
+          <a:noFill/>
+          <a:ln/>
+        </p:spPr>
+        <p:txBody>
+          <a:bodyPr wrap="square" lIns="0" tIns="0" rIns="0" bIns="0" rtlCol="0" anchor="ctr"/>
+          <a:lstStyle/>
+          <a:p>
+            <a:pPr algn="l" indent="0" marL="0">
+              <a:buNone/>
+            </a:pPr>
+            <a:r>
+              <a:rPr lang="en-US" sz="1300" b="1" dirty="0">
+                <a:solidFill>
+                  <a:srgbClr val="1F5C3A"/>
+                </a:solidFill>
+                <a:latin typeface="Cambria" pitchFamily="34" charset="0"/>
+                <a:ea typeface="Cambria" pitchFamily="34" charset="-122"/>
+                <a:cs typeface="Cambria" pitchFamily="34" charset="-120"/>
+              </a:rPr>
+              <a:t>Lecture</a:t>
+            </a:r>
+            <a:endParaRPr lang="en-US" sz="1300" dirty="0"/>
+          </a:p>
+        </p:txBody>
+      </p:sp>
+      <p:sp>
+        <p:nvSpPr>
+          <p:cNvPr id="7" name="Text 4"/>
+          <p:cNvSpPr txBox="1"/>
+          <p:nvPr/>
+        </p:nvSpPr>
+        <p:spPr>
+          <a:xfrm>
+            <a:off x="8503920" y="2560320"/>
+            <a:ext cx="2834640" cy="3017520"/>
           </a:xfrm>
           <a:prstGeom prst="rect">
             <a:avLst/>
@@ -12230,18 +13005,14 @@
           <a:bodyPr wrap="square" lIns="0" tIns="0" rIns="0" bIns="0" rtlCol="0" anchor="t"/>
           <a:lstStyle/>
           <a:p>
-            <a:pPr algn="l" marL="342900" indent="-342900">
+            <a:pPr algn="l" indent="0" marL="0">
               <a:lnSpc>
-                <a:spcPct val="122000"/>
+                <a:spcPct val="125000"/>
               </a:lnSpc>
-              <a:spcAft>
-                <a:spcPts val="1100"/>
-              </a:spcAft>
-              <a:buSzPct val="100000"/>
-              <a:buChar char="•"/>
-            </a:pPr>
-            <a:r>
-              <a:rPr lang="en-US" sz="1400" dirty="0">
+              <a:buNone/>
+            </a:pPr>
+            <a:r>
+              <a:rPr lang="en-US" sz="1200" dirty="0">
                 <a:solidFill>
                   <a:srgbClr val="33423A"/>
                 </a:solidFill>
@@ -12249,23 +13020,28 @@
                 <a:ea typeface="Calibri" pitchFamily="34" charset="-122"/>
                 <a:cs typeface="Calibri" pitchFamily="34" charset="-120"/>
               </a:rPr>
-              <a:t>Le Souss-Massa concentre l'essentiel des serres de tomates destinées à l'Europe, de l'automne au printemps.</a:t>
-            </a:r>
-            <a:endParaRPr lang="en-US" sz="1400" dirty="0"/>
-          </a:p>
-          <a:p>
-            <a:pPr algn="l" marL="342900" indent="-342900">
+              <a:t>Agrumes et tomate sont irrigués et destinés à l'export : ce sont les cultures où l'économie d'eau se convertit directement en marge.</a:t>
+            </a:r>
+            <a:endParaRPr lang="en-US" sz="1200" dirty="0"/>
+          </a:p>
+          <a:p>
+            <a:pPr algn="l" indent="0" marL="0">
               <a:lnSpc>
-                <a:spcPct val="122000"/>
+                <a:spcPct val="125000"/>
               </a:lnSpc>
-              <a:spcAft>
-                <a:spcPts val="1100"/>
-              </a:spcAft>
-              <a:buSzPct val="100000"/>
-              <a:buChar char="•"/>
-            </a:pPr>
-            <a:r>
-              <a:rPr lang="en-US" sz="1400" dirty="0">
+              <a:buNone/>
+            </a:pPr>
+            <a:endParaRPr lang="en-US" sz="1200" dirty="0"/>
+          </a:p>
+          <a:p>
+            <a:pPr algn="l" indent="0" marL="0">
+              <a:lnSpc>
+                <a:spcPct val="125000"/>
+              </a:lnSpc>
+              <a:buNone/>
+            </a:pPr>
+            <a:r>
+              <a:rPr lang="en-US" sz="1200" dirty="0">
                 <a:solidFill>
                   <a:srgbClr val="33423A"/>
                 </a:solidFill>
@@ -12273,87 +13049,15 @@
                 <a:ea typeface="Calibri" pitchFamily="34" charset="-122"/>
                 <a:cs typeface="Calibri" pitchFamily="34" charset="-120"/>
               </a:rPr>
-              <a:t>La nappe du Souss baisse depuis des décennies ; une partie des exploitations est irriguée à l'eau dessalée de Chtouka.</a:t>
-            </a:r>
-            <a:endParaRPr lang="en-US" sz="1400" dirty="0"/>
-          </a:p>
-          <a:p>
-            <a:pPr algn="l" marL="342900" indent="-342900">
-              <a:lnSpc>
-                <a:spcPct val="122000"/>
-              </a:lnSpc>
-              <a:spcAft>
-                <a:spcPts val="1100"/>
-              </a:spcAft>
-              <a:buSzPct val="100000"/>
-              <a:buChar char="•"/>
-            </a:pPr>
-            <a:r>
-              <a:rPr lang="en-US" sz="1400" dirty="0">
-                <a:solidFill>
-                  <a:srgbClr val="33423A"/>
-                </a:solidFill>
-                <a:latin typeface="Calibri" pitchFamily="34" charset="0"/>
-                <a:ea typeface="Calibri" pitchFamily="34" charset="-122"/>
-                <a:cs typeface="Calibri" pitchFamily="34" charset="-120"/>
-              </a:rPr>
-              <a:t>L'eau dessalée coûte nettement plus cher que l'eau de forage : chaque litre économisé améliore directement la marge.</a:t>
-            </a:r>
-            <a:endParaRPr lang="en-US" sz="1400" dirty="0"/>
-          </a:p>
-          <a:p>
-            <a:pPr algn="l" marL="342900" indent="-342900">
-              <a:lnSpc>
-                <a:spcPct val="122000"/>
-              </a:lnSpc>
-              <a:spcAft>
-                <a:spcPts val="1100"/>
-              </a:spcAft>
-              <a:buSzPct val="100000"/>
-              <a:buChar char="•"/>
-            </a:pPr>
-            <a:r>
-              <a:rPr lang="en-US" sz="1400" dirty="0">
-                <a:solidFill>
-                  <a:srgbClr val="33423A"/>
-                </a:solidFill>
-                <a:latin typeface="Calibri" pitchFamily="34" charset="0"/>
-                <a:ea typeface="Calibri" pitchFamily="34" charset="-122"/>
-                <a:cs typeface="Calibri" pitchFamily="34" charset="-120"/>
-              </a:rPr>
-              <a:t>Les exportateurs doivent respecter des limites de résidus strictes : NAPEMA® traite les ravageurs sans résidu.</a:t>
-            </a:r>
-            <a:endParaRPr lang="en-US" sz="1400" dirty="0"/>
-          </a:p>
-          <a:p>
-            <a:pPr algn="l" marL="342900" indent="-342900">
-              <a:lnSpc>
-                <a:spcPct val="122000"/>
-              </a:lnSpc>
-              <a:spcAft>
-                <a:spcPts val="1100"/>
-              </a:spcAft>
-              <a:buSzPct val="100000"/>
-              <a:buChar char="•"/>
-            </a:pPr>
-            <a:r>
-              <a:rPr lang="en-US" sz="1400" dirty="0">
-                <a:solidFill>
-                  <a:srgbClr val="33423A"/>
-                </a:solidFill>
-                <a:latin typeface="Calibri" pitchFamily="34" charset="0"/>
-                <a:ea typeface="Calibri" pitchFamily="34" charset="-122"/>
-                <a:cs typeface="Calibri" pitchFamily="34" charset="-120"/>
-              </a:rPr>
-              <a:t>Retenir l'eau dans le sol espace les apports et réduit le drainage perdu sous la serre.</a:t>
-            </a:r>
-            <a:endParaRPr lang="en-US" sz="1400" dirty="0"/>
-          </a:p>
-        </p:txBody>
-      </p:sp>
-      <p:sp>
-        <p:nvSpPr>
-          <p:cNvPr id="6" name="Text 3"/>
+              <a:t>* Les céréales sont majoritairement pluviales ; le volume varie fortement d'une campagne à l'autre selon la pluviométrie.</a:t>
+            </a:r>
+            <a:endParaRPr lang="en-US" sz="1200" dirty="0"/>
+          </a:p>
+        </p:txBody>
+      </p:sp>
+      <p:sp>
+        <p:nvSpPr>
+          <p:cNvPr id="8" name="Text 5"/>
           <p:cNvSpPr txBox="1"/>
           <p:nvPr/>
         </p:nvSpPr>
@@ -12394,7 +13098,7 @@
       </p:sp>
       <p:sp>
         <p:nvSpPr>
-          <p:cNvPr id="7" name="Text 4"/>
+          <p:cNvPr id="9" name="Text 6"/>
           <p:cNvSpPr txBox="1"/>
           <p:nvPr/>
         </p:nvSpPr>
@@ -12498,7 +13202,7 @@
                 <a:ea typeface="Calibri" pitchFamily="34" charset="-122"/>
                 <a:cs typeface="Calibri" pitchFamily="34" charset="-120"/>
               </a:rPr>
-              <a:t>DEUXIÈME FILIÈRE</a:t>
+              <a:t>PREMIÈRE FILIÈRE</a:t>
             </a:r>
             <a:endParaRPr lang="en-US" sz="1150" dirty="0"/>
           </a:p>
@@ -12537,7 +13241,7 @@
                 <a:ea typeface="Cambria" pitchFamily="34" charset="-122"/>
                 <a:cs typeface="Cambria" pitchFamily="34" charset="-120"/>
               </a:rPr>
-              <a:t>Agrumes et olivier : des vergers à protéger de la sécheresse</a:t>
+              <a:t>Tomate sous serre du Souss : l'export au litre près</a:t>
             </a:r>
             <a:endParaRPr lang="en-US" sz="3000" dirty="0"/>
           </a:p>
@@ -12559,23 +13263,23 @@
         </p:blipFill>
         <p:spPr>
           <a:xfrm>
+            <a:off x="6522415" y="1783080"/>
+            <a:ext cx="5074920" cy="3794760"/>
+          </a:xfrm>
+          <a:prstGeom prst="rect">
+            <a:avLst/>
+          </a:prstGeom>
+        </p:spPr>
+      </p:pic>
+      <p:sp>
+        <p:nvSpPr>
+          <p:cNvPr id="5" name="Text 2"/>
+          <p:cNvSpPr txBox="1"/>
+          <p:nvPr/>
+        </p:nvSpPr>
+        <p:spPr>
+          <a:xfrm>
             <a:off x="594360" y="1783080"/>
-            <a:ext cx="5074920" cy="3794760"/>
-          </a:xfrm>
-          <a:prstGeom prst="rect">
-            <a:avLst/>
-          </a:prstGeom>
-        </p:spPr>
-      </p:pic>
-      <p:sp>
-        <p:nvSpPr>
-          <p:cNvPr id="5" name="Text 2"/>
-          <p:cNvSpPr txBox="1"/>
-          <p:nvPr/>
-        </p:nvSpPr>
-        <p:spPr>
-          <a:xfrm>
-            <a:off x="6217920" y="1783080"/>
             <a:ext cx="5379415" cy="4251960"/>
           </a:xfrm>
           <a:prstGeom prst="rect">
@@ -12607,7 +13311,7 @@
                 <a:ea typeface="Calibri" pitchFamily="34" charset="-122"/>
                 <a:cs typeface="Calibri" pitchFamily="34" charset="-120"/>
               </a:rPr>
-              <a:t>Agrumes du Souss, du Gharb et de Berkane, olivier du Haouz et du Saïss : des cultures pérennes à fort investissement.</a:t>
+              <a:t>Le Souss-Massa concentre l'essentiel des serres de tomates destinées à l'Europe, de l'automne au printemps.</a:t>
             </a:r>
             <a:endParaRPr lang="en-US" sz="1400" dirty="0"/>
           </a:p>
@@ -12631,7 +13335,7 @@
                 <a:ea typeface="Calibri" pitchFamily="34" charset="-122"/>
                 <a:cs typeface="Calibri" pitchFamily="34" charset="-120"/>
               </a:rPr>
-              <a:t>Les restrictions d'eau des dernières campagnes ont conduit des producteurs à arracher une partie de leurs vergers d'agrumes.</a:t>
+              <a:t>La nappe du Souss baisse depuis des décennies ; une partie des exploitations est irriguée à l'eau dessalée de Chtouka.</a:t>
             </a:r>
             <a:endParaRPr lang="en-US" sz="1400" dirty="0"/>
           </a:p>
@@ -12655,7 +13359,7 @@
                 <a:ea typeface="Calibri" pitchFamily="34" charset="-122"/>
                 <a:cs typeface="Calibri" pitchFamily="34" charset="-120"/>
               </a:rPr>
-              <a:t>L'olivier, souvent conduit en pluvial, voit sa récolte chuter fortement les années sans pluie de printemps.</a:t>
+              <a:t>L'eau dessalée coûte nettement plus cher que l'eau de forage : chaque litre économisé améliore directement la marge.</a:t>
             </a:r>
             <a:endParaRPr lang="en-US" sz="1400" dirty="0"/>
           </a:p>
@@ -12679,7 +13383,7 @@
                 <a:ea typeface="Calibri" pitchFamily="34" charset="-122"/>
                 <a:cs typeface="Calibri" pitchFamily="34" charset="-120"/>
               </a:rPr>
-              <a:t>Un verger perdu coûte plusieurs années de production : protéger les racines du stress hydrique protège le capital.</a:t>
+              <a:t>Les exportateurs doivent respecter des limites de résidus strictes : NAPEMA® traite les ravageurs sans résidu.</a:t>
             </a:r>
             <a:endParaRPr lang="en-US" sz="1400" dirty="0"/>
           </a:p>
@@ -12703,7 +13407,7 @@
                 <a:ea typeface="Calibri" pitchFamily="34" charset="-122"/>
                 <a:cs typeface="Calibri" pitchFamily="34" charset="-120"/>
               </a:rPr>
-              <a:t>EVERGREEN® posé à la plantation ou au rajeunissement du verger prolonge la réserve d'eau entre deux irrigations.</a:t>
+              <a:t>Retenir l'eau dans le sol espace les apports et réduit le drainage perdu sous la serre.</a:t>
             </a:r>
             <a:endParaRPr lang="en-US" sz="1400" dirty="0"/>
           </a:p>
@@ -12856,7 +13560,7 @@
                 <a:ea typeface="Calibri" pitchFamily="34" charset="-122"/>
                 <a:cs typeface="Calibri" pitchFamily="34" charset="-120"/>
               </a:rPr>
-              <a:t>Potentiel de rendement</a:t>
+              <a:t>DEUXIÈME FILIÈRE</a:t>
             </a:r>
             <a:endParaRPr lang="en-US" sz="1150" dirty="0"/>
           </a:p>
@@ -12895,168 +13599,181 @@
                 <a:ea typeface="Cambria" pitchFamily="34" charset="-122"/>
                 <a:cs typeface="Cambria" pitchFamily="34" charset="-120"/>
               </a:rPr>
-              <a:t>Gain de rendement attendu par culture</a:t>
+              <a:t>Agrumes et olivier : des vergers à protéger de la sécheresse</a:t>
             </a:r>
             <a:endParaRPr lang="en-US" sz="3000" dirty="0"/>
           </a:p>
         </p:txBody>
       </p:sp>
-      <p:graphicFrame>
-        <p:nvGraphicFramePr>
-          <p:cNvPr id="4" name="Chart 0" descr=""/>
-          <p:cNvGraphicFramePr/>
-          <p:nvPr/>
-        </p:nvGraphicFramePr>
-        <p:xfrm>
-          <a:off x="594360" y="1783080"/>
-          <a:ext cx="7360920" cy="3977640"/>
-        </p:xfrm>
-        <a:graphic xmlns:a="http://schemas.openxmlformats.org/drawingml/2006/main">
-          <a:graphicData uri="http://schemas.openxmlformats.org/drawingml/2006/chart">
-            <c:chart xmlns:c="http://schemas.openxmlformats.org/drawingml/2006/chart" r:id="rId1"/>
-          </a:graphicData>
-        </a:graphic>
-      </p:graphicFrame>
-      <p:sp>
-        <p:nvSpPr>
-          <p:cNvPr id="5" name="Shape 2"/>
-          <p:cNvSpPr/>
-          <p:nvPr/>
-        </p:nvSpPr>
-        <p:spPr>
-          <a:xfrm>
-            <a:off x="8275320" y="1783080"/>
-            <a:ext cx="3291840" cy="3977640"/>
-          </a:xfrm>
-          <a:prstGeom prst="roundRect">
-            <a:avLst>
-              <a:gd name="adj" fmla="val 2778"/>
-            </a:avLst>
-          </a:prstGeom>
-          <a:solidFill>
-            <a:srgbClr val="F1F4EF"/>
-          </a:solidFill>
-          <a:ln w="9525">
-            <a:solidFill>
-              <a:srgbClr val="DCE4DA"/>
-            </a:solidFill>
-            <a:prstDash val="solid"/>
-          </a:ln>
-        </p:spPr>
+      <p:pic>
+        <p:nvPicPr>
+          <p:cNvPr id="4" name="Image 0" descr="preencoded.png">    </p:cNvPr>
+          <p:cNvPicPr>
+            <a:picLocks noChangeAspect="1"/>
+          </p:cNvPicPr>
+          <p:nvPr/>
+        </p:nvPicPr>
+        <p:blipFill>
+          <a:blip r:embed="rId1"/>
+          <a:stretch>
+            <a:fillRect/>
+          </a:stretch>
+        </p:blipFill>
+        <p:spPr>
+          <a:xfrm>
+            <a:off x="594360" y="1783080"/>
+            <a:ext cx="5074920" cy="3794760"/>
+          </a:xfrm>
+          <a:prstGeom prst="rect">
+            <a:avLst/>
+          </a:prstGeom>
+        </p:spPr>
+      </p:pic>
+      <p:sp>
+        <p:nvSpPr>
+          <p:cNvPr id="5" name="Text 2"/>
+          <p:cNvSpPr txBox="1"/>
+          <p:nvPr/>
+        </p:nvSpPr>
+        <p:spPr>
+          <a:xfrm>
+            <a:off x="6217920" y="1783080"/>
+            <a:ext cx="5379415" cy="4251960"/>
+          </a:xfrm>
+          <a:prstGeom prst="rect">
+            <a:avLst/>
+          </a:prstGeom>
+          <a:noFill/>
+          <a:ln/>
+        </p:spPr>
+        <p:txBody>
+          <a:bodyPr wrap="square" lIns="0" tIns="0" rIns="0" bIns="0" rtlCol="0" anchor="t"/>
+          <a:lstStyle/>
+          <a:p>
+            <a:pPr algn="l" marL="342900" indent="-342900">
+              <a:lnSpc>
+                <a:spcPct val="122000"/>
+              </a:lnSpc>
+              <a:spcAft>
+                <a:spcPts val="1100"/>
+              </a:spcAft>
+              <a:buSzPct val="100000"/>
+              <a:buChar char="•"/>
+            </a:pPr>
+            <a:r>
+              <a:rPr lang="en-US" sz="1400" dirty="0">
+                <a:solidFill>
+                  <a:srgbClr val="33423A"/>
+                </a:solidFill>
+                <a:latin typeface="Calibri" pitchFamily="34" charset="0"/>
+                <a:ea typeface="Calibri" pitchFamily="34" charset="-122"/>
+                <a:cs typeface="Calibri" pitchFamily="34" charset="-120"/>
+              </a:rPr>
+              <a:t>Agrumes du Souss, du Gharb et de Berkane, olivier du Haouz et du Saïss : des cultures pérennes à fort investissement.</a:t>
+            </a:r>
+            <a:endParaRPr lang="en-US" sz="1400" dirty="0"/>
+          </a:p>
+          <a:p>
+            <a:pPr algn="l" marL="342900" indent="-342900">
+              <a:lnSpc>
+                <a:spcPct val="122000"/>
+              </a:lnSpc>
+              <a:spcAft>
+                <a:spcPts val="1100"/>
+              </a:spcAft>
+              <a:buSzPct val="100000"/>
+              <a:buChar char="•"/>
+            </a:pPr>
+            <a:r>
+              <a:rPr lang="en-US" sz="1400" dirty="0">
+                <a:solidFill>
+                  <a:srgbClr val="33423A"/>
+                </a:solidFill>
+                <a:latin typeface="Calibri" pitchFamily="34" charset="0"/>
+                <a:ea typeface="Calibri" pitchFamily="34" charset="-122"/>
+                <a:cs typeface="Calibri" pitchFamily="34" charset="-120"/>
+              </a:rPr>
+              <a:t>Les restrictions d'eau des dernières campagnes ont conduit des producteurs à arracher une partie de leurs vergers d'agrumes.</a:t>
+            </a:r>
+            <a:endParaRPr lang="en-US" sz="1400" dirty="0"/>
+          </a:p>
+          <a:p>
+            <a:pPr algn="l" marL="342900" indent="-342900">
+              <a:lnSpc>
+                <a:spcPct val="122000"/>
+              </a:lnSpc>
+              <a:spcAft>
+                <a:spcPts val="1100"/>
+              </a:spcAft>
+              <a:buSzPct val="100000"/>
+              <a:buChar char="•"/>
+            </a:pPr>
+            <a:r>
+              <a:rPr lang="en-US" sz="1400" dirty="0">
+                <a:solidFill>
+                  <a:srgbClr val="33423A"/>
+                </a:solidFill>
+                <a:latin typeface="Calibri" pitchFamily="34" charset="0"/>
+                <a:ea typeface="Calibri" pitchFamily="34" charset="-122"/>
+                <a:cs typeface="Calibri" pitchFamily="34" charset="-120"/>
+              </a:rPr>
+              <a:t>L'olivier, souvent conduit en pluvial, voit sa récolte chuter fortement les années sans pluie de printemps.</a:t>
+            </a:r>
+            <a:endParaRPr lang="en-US" sz="1400" dirty="0"/>
+          </a:p>
+          <a:p>
+            <a:pPr algn="l" marL="342900" indent="-342900">
+              <a:lnSpc>
+                <a:spcPct val="122000"/>
+              </a:lnSpc>
+              <a:spcAft>
+                <a:spcPts val="1100"/>
+              </a:spcAft>
+              <a:buSzPct val="100000"/>
+              <a:buChar char="•"/>
+            </a:pPr>
+            <a:r>
+              <a:rPr lang="en-US" sz="1400" dirty="0">
+                <a:solidFill>
+                  <a:srgbClr val="33423A"/>
+                </a:solidFill>
+                <a:latin typeface="Calibri" pitchFamily="34" charset="0"/>
+                <a:ea typeface="Calibri" pitchFamily="34" charset="-122"/>
+                <a:cs typeface="Calibri" pitchFamily="34" charset="-120"/>
+              </a:rPr>
+              <a:t>Un verger perdu coûte plusieurs années de production : protéger les racines du stress hydrique protège le capital.</a:t>
+            </a:r>
+            <a:endParaRPr lang="en-US" sz="1400" dirty="0"/>
+          </a:p>
+          <a:p>
+            <a:pPr algn="l" marL="342900" indent="-342900">
+              <a:lnSpc>
+                <a:spcPct val="122000"/>
+              </a:lnSpc>
+              <a:spcAft>
+                <a:spcPts val="1100"/>
+              </a:spcAft>
+              <a:buSzPct val="100000"/>
+              <a:buChar char="•"/>
+            </a:pPr>
+            <a:r>
+              <a:rPr lang="en-US" sz="1400" dirty="0">
+                <a:solidFill>
+                  <a:srgbClr val="33423A"/>
+                </a:solidFill>
+                <a:latin typeface="Calibri" pitchFamily="34" charset="0"/>
+                <a:ea typeface="Calibri" pitchFamily="34" charset="-122"/>
+                <a:cs typeface="Calibri" pitchFamily="34" charset="-120"/>
+              </a:rPr>
+              <a:t>EVERGREEN® posé à la plantation ou au rajeunissement du verger prolonge la réserve d'eau entre deux irrigations.</a:t>
+            </a:r>
+            <a:endParaRPr lang="en-US" sz="1400" dirty="0"/>
+          </a:p>
+        </p:txBody>
       </p:sp>
       <p:sp>
         <p:nvSpPr>
           <p:cNvPr id="6" name="Text 3"/>
-          <p:cNvSpPr txBox="1"/>
-          <p:nvPr/>
-        </p:nvSpPr>
-        <p:spPr>
-          <a:xfrm>
-            <a:off x="8503920" y="2011680"/>
-            <a:ext cx="2834640" cy="457200"/>
-          </a:xfrm>
-          <a:prstGeom prst="rect">
-            <a:avLst/>
-          </a:prstGeom>
-          <a:noFill/>
-          <a:ln/>
-        </p:spPr>
-        <p:txBody>
-          <a:bodyPr wrap="square" lIns="0" tIns="0" rIns="0" bIns="0" rtlCol="0" anchor="ctr"/>
-          <a:lstStyle/>
-          <a:p>
-            <a:pPr algn="l" indent="0" marL="0">
-              <a:buNone/>
-            </a:pPr>
-            <a:r>
-              <a:rPr lang="en-US" sz="1300" b="1" dirty="0">
-                <a:solidFill>
-                  <a:srgbClr val="1F5C3A"/>
-                </a:solidFill>
-                <a:latin typeface="Cambria" pitchFamily="34" charset="0"/>
-                <a:ea typeface="Cambria" pitchFamily="34" charset="-122"/>
-                <a:cs typeface="Cambria" pitchFamily="34" charset="-120"/>
-              </a:rPr>
-              <a:t>À lire avec prudence</a:t>
-            </a:r>
-            <a:endParaRPr lang="en-US" sz="1300" dirty="0"/>
-          </a:p>
-        </p:txBody>
-      </p:sp>
-      <p:sp>
-        <p:nvSpPr>
-          <p:cNvPr id="7" name="Text 4"/>
-          <p:cNvSpPr txBox="1"/>
-          <p:nvPr/>
-        </p:nvSpPr>
-        <p:spPr>
-          <a:xfrm>
-            <a:off x="8503920" y="2560320"/>
-            <a:ext cx="2834640" cy="3017520"/>
-          </a:xfrm>
-          <a:prstGeom prst="rect">
-            <a:avLst/>
-          </a:prstGeom>
-          <a:noFill/>
-          <a:ln/>
-        </p:spPr>
-        <p:txBody>
-          <a:bodyPr wrap="square" lIns="0" tIns="0" rIns="0" bIns="0" rtlCol="0" anchor="t"/>
-          <a:lstStyle/>
-          <a:p>
-            <a:pPr algn="l" indent="0" marL="0">
-              <a:lnSpc>
-                <a:spcPct val="125000"/>
-              </a:lnSpc>
-              <a:buNone/>
-            </a:pPr>
-            <a:r>
-              <a:rPr lang="en-US" sz="1200" dirty="0">
-                <a:solidFill>
-                  <a:srgbClr val="33423A"/>
-                </a:solidFill>
-                <a:latin typeface="Calibri" pitchFamily="34" charset="0"/>
-                <a:ea typeface="Calibri" pitchFamily="34" charset="-122"/>
-                <a:cs typeface="Calibri" pitchFamily="34" charset="-120"/>
-              </a:rPr>
-              <a:t>Fourchettes retenues par notre calculateur de dose, pour une culture conduite normalement avec EVERGREEN® à la plantation.</a:t>
-            </a:r>
-            <a:endParaRPr lang="en-US" sz="1200" dirty="0"/>
-          </a:p>
-          <a:p>
-            <a:pPr algn="l" indent="0" marL="0">
-              <a:lnSpc>
-                <a:spcPct val="125000"/>
-              </a:lnSpc>
-              <a:buNone/>
-            </a:pPr>
-            <a:endParaRPr lang="en-US" sz="1200" dirty="0"/>
-          </a:p>
-          <a:p>
-            <a:pPr algn="l" indent="0" marL="0">
-              <a:lnSpc>
-                <a:spcPct val="125000"/>
-              </a:lnSpc>
-              <a:buNone/>
-            </a:pPr>
-            <a:r>
-              <a:rPr lang="en-US" sz="1200" dirty="0">
-                <a:solidFill>
-                  <a:srgbClr val="33423A"/>
-                </a:solidFill>
-                <a:latin typeface="Calibri" pitchFamily="34" charset="0"/>
-                <a:ea typeface="Calibri" pitchFamily="34" charset="-122"/>
-                <a:cs typeface="Calibri" pitchFamily="34" charset="-120"/>
-              </a:rPr>
-              <a:t>Le résultat réel dépend du sol, du climat et de la conduite. Pour les céréales, aucun gain n'est avancé sans essai de terrain.</a:t>
-            </a:r>
-            <a:endParaRPr lang="en-US" sz="1200" dirty="0"/>
-          </a:p>
-        </p:txBody>
-      </p:sp>
-      <p:sp>
-        <p:nvSpPr>
-          <p:cNvPr id="8" name="Text 5"/>
           <p:cNvSpPr txBox="1"/>
           <p:nvPr/>
         </p:nvSpPr>
@@ -13097,7 +13814,7 @@
       </p:sp>
       <p:sp>
         <p:nvSpPr>
-          <p:cNvPr id="9" name="Text 6"/>
+          <p:cNvPr id="7" name="Text 4"/>
           <p:cNvSpPr txBox="1"/>
           <p:nvPr/>
         </p:nvSpPr>

--- a/public/documents/countries/maroc.pptx
+++ b/public/documents/countries/maroc.pptx
@@ -125,7 +125,7 @@
 </p:presentation>
 </file>
 
-<file path=ppt/charts/chart71.xml><?xml version="1.0" encoding="utf-8"?>
+<file path=ppt/charts/chart73.xml><?xml version="1.0" encoding="utf-8"?>
 <c:chartSpace xmlns:c="http://schemas.openxmlformats.org/drawingml/2006/chart" xmlns:a="http://schemas.openxmlformats.org/drawingml/2006/main" xmlns:r="http://schemas.openxmlformats.org/officeDocument/2006/relationships">
   <c:date1904 val="0"/>
   <c:roundedCorners val="1"/>
@@ -384,7 +384,7 @@
 </c:chartSpace>
 </file>
 
-<file path=ppt/charts/chart72.xml><?xml version="1.0" encoding="utf-8"?>
+<file path=ppt/charts/chart74.xml><?xml version="1.0" encoding="utf-8"?>
 <c:chartSpace xmlns:c="http://schemas.openxmlformats.org/drawingml/2006/chart" xmlns:a="http://schemas.openxmlformats.org/drawingml/2006/main" xmlns:r="http://schemas.openxmlformats.org/officeDocument/2006/relationships">
   <c:date1904 val="0"/>
   <c:roundedCorners val="1"/>
@@ -629,7 +629,7 @@
 </c:chartSpace>
 </file>
 
-<file path=ppt/charts/chart73.xml><?xml version="1.0" encoding="utf-8"?>
+<file path=ppt/charts/chart75.xml><?xml version="1.0" encoding="utf-8"?>
 <c:chartSpace xmlns:c="http://schemas.openxmlformats.org/drawingml/2006/chart" xmlns:a="http://schemas.openxmlformats.org/drawingml/2006/main" xmlns:r="http://schemas.openxmlformats.org/officeDocument/2006/relationships">
   <c:date1904 val="0"/>
   <c:roundedCorners val="1"/>
@@ -920,7 +920,7 @@
 </c:chartSpace>
 </file>
 
-<file path=ppt/charts/chart74.xml><?xml version="1.0" encoding="utf-8"?>
+<file path=ppt/charts/chart76.xml><?xml version="1.0" encoding="utf-8"?>
 <c:chartSpace xmlns:c="http://schemas.openxmlformats.org/drawingml/2006/chart" xmlns:a="http://schemas.openxmlformats.org/drawingml/2006/main" xmlns:r="http://schemas.openxmlformats.org/officeDocument/2006/relationships">
   <c:date1904 val="0"/>
   <c:roundedCorners val="1"/>
@@ -1285,7 +1285,7 @@
 </c:chartSpace>
 </file>
 
-<file path=ppt/charts/chart75.xml><?xml version="1.0" encoding="utf-8"?>
+<file path=ppt/charts/chart77.xml><?xml version="1.0" encoding="utf-8"?>
 <c:chartSpace xmlns:c="http://schemas.openxmlformats.org/drawingml/2006/chart" xmlns:a="http://schemas.openxmlformats.org/drawingml/2006/main" xmlns:r="http://schemas.openxmlformats.org/officeDocument/2006/relationships">
   <c:date1904 val="0"/>
   <c:roundedCorners val="1"/>
@@ -4075,7 +4075,7 @@
       </p:sp>
       <p:pic>
         <p:nvPicPr>
-          <p:cNvPr id="5" name="Image 1" descr="/workspace/scratch/50eb4f7d8e13/green-solutions-web/public/images/logo-icon.png">    </p:cNvPr>
+          <p:cNvPr id="5" name="Image 1" descr="/home/claude/green-solutions-web/public/images/logo-icon.png">    </p:cNvPr>
           <p:cNvPicPr>
             <a:picLocks noChangeAspect="1"/>
           </p:cNvPicPr>
@@ -4099,7 +4099,7 @@
       </p:pic>
       <p:pic>
         <p:nvPicPr>
-          <p:cNvPr id="6" name="Image 2" descr="/workspace/scratch/50eb4f7d8e13/green-solutions-web/scripts/dossiers/drapeaux/maroc.png">    </p:cNvPr>
+          <p:cNvPr id="6" name="Image 2" descr="/home/claude/green-solutions-web/scripts/dossiers/drapeaux/maroc.png">    </p:cNvPr>
           <p:cNvPicPr>
             <a:picLocks noChangeAspect="1"/>
           </p:cNvPicPr>
@@ -10259,7 +10259,7 @@
                 <a:ea typeface="Calibri" pitchFamily="34" charset="-122"/>
                 <a:cs typeface="Calibri" pitchFamily="34" charset="-120"/>
               </a:rPr>
-              <a:t>contact@evergreen-ecosorb.com · Green Solutions Groupe AIM SA, 46, route de la Condémine, 1475 Forel, Suisse</a:t>
+              <a:t>contact@green-solutions-group.com · Green Solutions Groupe AIM SA, 46, route de la Condémine, 1475 Forel, Suisse</a:t>
             </a:r>
             <a:endParaRPr lang="en-US" sz="1400" dirty="0"/>
           </a:p>
@@ -10267,7 +10267,7 @@
       </p:sp>
       <p:pic>
         <p:nvPicPr>
-          <p:cNvPr id="6" name="Image 1" descr="/workspace/scratch/50eb4f7d8e13/green-solutions-web/scripts/dossiers/sceau-aim-clair.png">    </p:cNvPr>
+          <p:cNvPr id="6" name="Image 1" descr="/home/claude/green-solutions-web/scripts/dossiers/sceau-aim-clair.png">    </p:cNvPr>
           <p:cNvPicPr>
             <a:picLocks noChangeAspect="1"/>
           </p:cNvPicPr>
